--- a/examples/Presentation.pptx
+++ b/examples/Presentation.pptx
@@ -3125,7 +3125,7 @@
             <a:avLst/>
           </a:prstGeom>
           <a:solidFill>
-            <a:srgbClr val="1B3A6B"/>
+            <a:srgbClr val="1F3D33"/>
           </a:solidFill>
           <a:ln>
             <a:noFill/>
@@ -3168,7 +3168,7 @@
             <a:avLst/>
           </a:prstGeom>
           <a:solidFill>
-            <a:srgbClr val="F39C12"/>
+            <a:srgbClr val="C9D8C5"/>
           </a:solidFill>
           <a:ln>
             <a:noFill/>
@@ -3211,7 +3211,7 @@
             <a:avLst/>
           </a:prstGeom>
           <a:solidFill>
-            <a:srgbClr val="1B3A6B"/>
+            <a:srgbClr val="1F3D33"/>
           </a:solidFill>
           <a:ln>
             <a:noFill/>
@@ -3265,9 +3265,9 @@
             <a:r>
               <a:rPr sz="1500" b="1" i="0">
                 <a:solidFill>
-                  <a:srgbClr val="F39C12"/>
-                </a:solidFill>
-                <a:latin typeface="Calibri"/>
+                  <a:srgbClr val="C9D8C5"/>
+                </a:solidFill>
+                <a:latin typeface="Segoe UI"/>
               </a:rPr>
               <a:t>RAPPORT ESG — SYNTHÈSE EXÉCUTIVE</a:t>
             </a:r>
@@ -3300,9 +3300,9 @@
             <a:r>
               <a:rPr sz="5200" b="1" i="0">
                 <a:solidFill>
-                  <a:srgbClr val="FFFFFF"/>
-                </a:solidFill>
-                <a:latin typeface="Calibri"/>
+                  <a:srgbClr val="F3F0E8"/>
+                </a:solidFill>
+                <a:latin typeface="Georgia"/>
               </a:rPr>
               <a:t>ACME INDUSTRIES</a:t>
             </a:r>
@@ -3324,7 +3324,7 @@
             <a:avLst/>
           </a:prstGeom>
           <a:solidFill>
-            <a:srgbClr val="F39C12"/>
+            <a:srgbClr val="C9D8C5"/>
           </a:solidFill>
           <a:ln>
             <a:noFill/>
@@ -3378,9 +3378,9 @@
             <a:r>
               <a:rPr sz="2100" b="0" i="1">
                 <a:solidFill>
-                  <a:srgbClr val="AEC6E8"/>
-                </a:solidFill>
-                <a:latin typeface="Calibri"/>
+                  <a:srgbClr val="C9D8C5"/>
+                </a:solidFill>
+                <a:latin typeface="Segoe UI"/>
               </a:rPr>
               <a:t>Une performance ESG solide et engagée</a:t>
             </a:r>
@@ -3413,9 +3413,9 @@
             <a:r>
               <a:rPr sz="1300" b="0" i="0">
                 <a:solidFill>
-                  <a:srgbClr val="AEC6E8"/>
-                </a:solidFill>
-                <a:latin typeface="Calibri"/>
+                  <a:srgbClr val="C9D8C5"/>
+                </a:solidFill>
+                <a:latin typeface="Segoe UI"/>
               </a:rPr>
               <a:t>Exercice 2025   |   Industrie manufacturière   |   France</a:t>
             </a:r>
@@ -3448,9 +3448,9 @@
             <a:r>
               <a:rPr sz="8200" b="1" i="0">
                 <a:solidFill>
-                  <a:srgbClr val="F39C12"/>
-                </a:solidFill>
-                <a:latin typeface="Calibri"/>
+                  <a:srgbClr val="C9D8C5"/>
+                </a:solidFill>
+                <a:latin typeface="Georgia"/>
               </a:rPr>
               <a:t>66</a:t>
             </a:r>
@@ -3483,9 +3483,9 @@
             <a:r>
               <a:rPr sz="1400" b="0" i="0">
                 <a:solidFill>
-                  <a:srgbClr val="AEC6E8"/>
-                </a:solidFill>
-                <a:latin typeface="Calibri"/>
+                  <a:srgbClr val="C9D8C5"/>
+                </a:solidFill>
+                <a:latin typeface="Segoe UI"/>
               </a:rPr>
               <a:t>/100</a:t>
             </a:r>
@@ -3507,7 +3507,7 @@
             <a:avLst/>
           </a:prstGeom>
           <a:solidFill>
-            <a:srgbClr val="F39C12"/>
+            <a:srgbClr val="C9D8C5"/>
           </a:solidFill>
           <a:ln>
             <a:noFill/>
@@ -3561,9 +3561,9 @@
             <a:r>
               <a:rPr sz="3200" b="1" i="0">
                 <a:solidFill>
-                  <a:srgbClr val="1B3A6B"/>
-                </a:solidFill>
-                <a:latin typeface="Calibri"/>
+                  <a:srgbClr val="1F3D33"/>
+                </a:solidFill>
+                <a:latin typeface="Georgia"/>
               </a:rPr>
               <a:t>A</a:t>
             </a:r>
@@ -3596,9 +3596,9 @@
             <a:r>
               <a:rPr sz="1200" b="0" i="1">
                 <a:solidFill>
-                  <a:srgbClr val="AEC6E8"/>
-                </a:solidFill>
-                <a:latin typeface="Calibri"/>
+                  <a:srgbClr val="C9D8C5"/>
+                </a:solidFill>
+                <a:latin typeface="Segoe UI"/>
               </a:rPr>
               <a:t>Présenté par J. Martin — Directrice Générale</a:t>
             </a:r>
@@ -3638,7 +3638,7 @@
             <a:avLst/>
           </a:prstGeom>
           <a:solidFill>
-            <a:srgbClr val="F4F7FD"/>
+            <a:srgbClr val="F3F0E8"/>
           </a:solidFill>
           <a:ln>
             <a:noFill/>
@@ -3674,14 +3674,14 @@
         </p:nvSpPr>
         <p:spPr>
           <a:xfrm>
-            <a:off x="0" y="0"/>
-            <a:ext cx="12188952" cy="1143000"/>
-          </a:xfrm>
-          <a:prstGeom prst="rect">
-            <a:avLst/>
-          </a:prstGeom>
-          <a:solidFill>
-            <a:srgbClr val="1B3A6B"/>
+            <a:off x="457200" y="384048"/>
+            <a:ext cx="201168" cy="201168"/>
+          </a:xfrm>
+          <a:prstGeom prst="rect">
+            <a:avLst/>
+          </a:prstGeom>
+          <a:solidFill>
+            <a:srgbClr val="1F3D33"/>
           </a:solidFill>
           <a:ln>
             <a:noFill/>
@@ -3711,20 +3711,55 @@
       </p:sp>
       <p:sp>
         <p:nvSpPr>
-          <p:cNvPr id="4" name="Rectangle 3"/>
+          <p:cNvPr id="4" name="TextBox 3"/>
+          <p:cNvSpPr txBox="1"/>
+          <p:nvPr/>
+        </p:nvSpPr>
+        <p:spPr>
+          <a:xfrm>
+            <a:off x="822960" y="237744"/>
+            <a:ext cx="10789920" cy="685800"/>
+          </a:xfrm>
+          <a:prstGeom prst="rect">
+            <a:avLst/>
+          </a:prstGeom>
+          <a:noFill/>
+        </p:spPr>
+        <p:txBody>
+          <a:bodyPr wrap="square">
+            <a:spAutoFit/>
+          </a:bodyPr>
+          <a:lstStyle/>
+          <a:p>
+            <a:pPr algn="l"/>
+            <a:r>
+              <a:rPr sz="1800" b="1" i="0">
+                <a:solidFill>
+                  <a:srgbClr val="1E2B26"/>
+                </a:solidFill>
+                <a:latin typeface="Georgia"/>
+              </a:rPr>
+              <a:t>Couverture des exigences de reporting</a:t>
+            </a:r>
+          </a:p>
+        </p:txBody>
+      </p:sp>
+      <p:sp>
+        <p:nvSpPr>
+          <p:cNvPr id="5" name="Rectangle 4"/>
           <p:cNvSpPr/>
           <p:nvPr/>
         </p:nvSpPr>
         <p:spPr>
           <a:xfrm>
-            <a:off x="0" y="1143000"/>
-            <a:ext cx="64008" cy="5715000"/>
-          </a:xfrm>
-          <a:prstGeom prst="rect">
-            <a:avLst/>
-          </a:prstGeom>
-          <a:solidFill>
-            <a:srgbClr val="F39C12"/>
+            <a:off x="457200" y="1024128"/>
+            <a:ext cx="2011680" cy="18288"/>
+          </a:xfrm>
+          <a:prstGeom prst="rect">
+            <a:avLst/>
+          </a:prstGeom>
+          <a:solidFill>
+            <a:srgbClr val="1E2B26"/>
           </a:solidFill>
           <a:ln>
             <a:noFill/>
@@ -3754,77 +3789,7 @@
       </p:sp>
       <p:sp>
         <p:nvSpPr>
-          <p:cNvPr id="5" name="TextBox 4"/>
-          <p:cNvSpPr txBox="1"/>
-          <p:nvPr/>
-        </p:nvSpPr>
-        <p:spPr>
-          <a:xfrm>
-            <a:off x="292608" y="128016"/>
-            <a:ext cx="10972800" cy="292608"/>
-          </a:xfrm>
-          <a:prstGeom prst="rect">
-            <a:avLst/>
-          </a:prstGeom>
-          <a:noFill/>
-        </p:spPr>
-        <p:txBody>
-          <a:bodyPr wrap="square">
-            <a:spAutoFit/>
-          </a:bodyPr>
-          <a:lstStyle/>
-          <a:p>
-            <a:pPr algn="l"/>
-            <a:r>
-              <a:rPr sz="1100" b="1" i="0">
-                <a:solidFill>
-                  <a:srgbClr val="F39C12"/>
-                </a:solidFill>
-                <a:latin typeface="Calibri"/>
-              </a:rPr>
-              <a:t>POSITIONNEMENT</a:t>
-            </a:r>
-          </a:p>
-        </p:txBody>
-      </p:sp>
-      <p:sp>
-        <p:nvSpPr>
-          <p:cNvPr id="6" name="TextBox 5"/>
-          <p:cNvSpPr txBox="1"/>
-          <p:nvPr/>
-        </p:nvSpPr>
-        <p:spPr>
-          <a:xfrm>
-            <a:off x="274320" y="384048"/>
-            <a:ext cx="11612880" cy="713232"/>
-          </a:xfrm>
-          <a:prstGeom prst="rect">
-            <a:avLst/>
-          </a:prstGeom>
-          <a:noFill/>
-        </p:spPr>
-        <p:txBody>
-          <a:bodyPr wrap="square">
-            <a:spAutoFit/>
-          </a:bodyPr>
-          <a:lstStyle/>
-          <a:p>
-            <a:pPr algn="l"/>
-            <a:r>
-              <a:rPr sz="2340" b="1" i="0">
-                <a:solidFill>
-                  <a:srgbClr val="FFFFFF"/>
-                </a:solidFill>
-                <a:latin typeface="Calibri"/>
-              </a:rPr>
-              <a:t>Couverture des exigences de reporting</a:t>
-            </a:r>
-          </a:p>
-        </p:txBody>
-      </p:sp>
-      <p:sp>
-        <p:nvSpPr>
-          <p:cNvPr id="7" name="Rectangle 6"/>
+          <p:cNvPr id="6" name="Rectangle 5"/>
           <p:cNvSpPr/>
           <p:nvPr/>
         </p:nvSpPr>
@@ -3837,7 +3802,7 @@
             <a:avLst/>
           </a:prstGeom>
           <a:solidFill>
-            <a:srgbClr val="EBF2FB"/>
+            <a:srgbClr val="E6E6DC"/>
           </a:solidFill>
           <a:ln>
             <a:noFill/>
@@ -3867,7 +3832,7 @@
       </p:sp>
       <p:sp>
         <p:nvSpPr>
-          <p:cNvPr id="8" name="TextBox 7"/>
+          <p:cNvPr id="7" name="TextBox 6"/>
           <p:cNvSpPr txBox="1"/>
           <p:nvPr/>
         </p:nvSpPr>
@@ -3891,9 +3856,9 @@
             <a:r>
               <a:rPr sz="1250" b="1" i="0">
                 <a:solidFill>
-                  <a:srgbClr val="2C3E50"/>
-                </a:solidFill>
-                <a:latin typeface="Calibri"/>
+                  <a:srgbClr val="1E2B26"/>
+                </a:solidFill>
+                <a:latin typeface="Segoe UI"/>
               </a:rPr>
               <a:t>Bilan GES Scopes 1 &amp; 2</a:t>
             </a:r>
@@ -3902,7 +3867,7 @@
       </p:sp>
       <p:sp>
         <p:nvSpPr>
-          <p:cNvPr id="9" name="TextBox 8"/>
+          <p:cNvPr id="8" name="TextBox 7"/>
           <p:cNvSpPr txBox="1"/>
           <p:nvPr/>
         </p:nvSpPr>
@@ -3926,9 +3891,9 @@
             <a:r>
               <a:rPr sz="1000" b="0" i="0">
                 <a:solidFill>
-                  <a:srgbClr val="6B7C93"/>
-                </a:solidFill>
-                <a:latin typeface="Calibri"/>
+                  <a:srgbClr val="5F6B64"/>
+                </a:solidFill>
+                <a:latin typeface="Segoe UI"/>
               </a:rPr>
               <a:t>ESRS E1-6</a:t>
             </a:r>
@@ -3937,7 +3902,7 @@
       </p:sp>
       <p:sp>
         <p:nvSpPr>
-          <p:cNvPr id="10" name="Rounded Rectangle 9"/>
+          <p:cNvPr id="9" name="Rounded Rectangle 8"/>
           <p:cNvSpPr/>
           <p:nvPr/>
         </p:nvSpPr>
@@ -3980,7 +3945,7 @@
       </p:sp>
       <p:sp>
         <p:nvSpPr>
-          <p:cNvPr id="11" name="TextBox 10"/>
+          <p:cNvPr id="10" name="TextBox 9"/>
           <p:cNvSpPr txBox="1"/>
           <p:nvPr/>
         </p:nvSpPr>
@@ -4006,7 +3971,7 @@
                 <a:solidFill>
                   <a:srgbClr val="FFFFFF"/>
                 </a:solidFill>
-                <a:latin typeface="Calibri"/>
+                <a:latin typeface="Segoe UI"/>
               </a:rPr>
               <a:t>Publié</a:t>
             </a:r>
@@ -4015,7 +3980,7 @@
       </p:sp>
       <p:sp>
         <p:nvSpPr>
-          <p:cNvPr id="12" name="TextBox 11"/>
+          <p:cNvPr id="11" name="TextBox 10"/>
           <p:cNvSpPr txBox="1"/>
           <p:nvPr/>
         </p:nvSpPr>
@@ -4039,9 +4004,9 @@
             <a:r>
               <a:rPr sz="1000" b="0" i="0">
                 <a:solidFill>
-                  <a:srgbClr val="2C3E50"/>
-                </a:solidFill>
-                <a:latin typeface="Calibri"/>
+                  <a:srgbClr val="1E2B26"/>
+                </a:solidFill>
+                <a:latin typeface="Segoe UI"/>
               </a:rPr>
               <a:t>Émissions mesurées et publiées</a:t>
             </a:r>
@@ -4050,7 +4015,7 @@
       </p:sp>
       <p:sp>
         <p:nvSpPr>
-          <p:cNvPr id="13" name="TextBox 12"/>
+          <p:cNvPr id="12" name="TextBox 11"/>
           <p:cNvSpPr txBox="1"/>
           <p:nvPr/>
         </p:nvSpPr>
@@ -4074,9 +4039,9 @@
             <a:r>
               <a:rPr sz="1250" b="1" i="0">
                 <a:solidFill>
-                  <a:srgbClr val="2C3E50"/>
-                </a:solidFill>
-                <a:latin typeface="Calibri"/>
+                  <a:srgbClr val="1E2B26"/>
+                </a:solidFill>
+                <a:latin typeface="Segoe UI"/>
               </a:rPr>
               <a:t>Émissions de la chaîne de valeur (Scope 3)</a:t>
             </a:r>
@@ -4085,7 +4050,7 @@
       </p:sp>
       <p:sp>
         <p:nvSpPr>
-          <p:cNvPr id="14" name="TextBox 13"/>
+          <p:cNvPr id="13" name="TextBox 12"/>
           <p:cNvSpPr txBox="1"/>
           <p:nvPr/>
         </p:nvSpPr>
@@ -4109,9 +4074,9 @@
             <a:r>
               <a:rPr sz="1000" b="0" i="0">
                 <a:solidFill>
-                  <a:srgbClr val="6B7C93"/>
-                </a:solidFill>
-                <a:latin typeface="Calibri"/>
+                  <a:srgbClr val="5F6B64"/>
+                </a:solidFill>
+                <a:latin typeface="Segoe UI"/>
               </a:rPr>
               <a:t>ESRS E1-6</a:t>
             </a:r>
@@ -4120,7 +4085,7 @@
       </p:sp>
       <p:sp>
         <p:nvSpPr>
-          <p:cNvPr id="15" name="Rounded Rectangle 14"/>
+          <p:cNvPr id="14" name="Rounded Rectangle 13"/>
           <p:cNvSpPr/>
           <p:nvPr/>
         </p:nvSpPr>
@@ -4163,7 +4128,7 @@
       </p:sp>
       <p:sp>
         <p:nvSpPr>
-          <p:cNvPr id="16" name="TextBox 15"/>
+          <p:cNvPr id="15" name="TextBox 14"/>
           <p:cNvSpPr txBox="1"/>
           <p:nvPr/>
         </p:nvSpPr>
@@ -4189,7 +4154,7 @@
                 <a:solidFill>
                   <a:srgbClr val="FFFFFF"/>
                 </a:solidFill>
-                <a:latin typeface="Calibri"/>
+                <a:latin typeface="Segoe UI"/>
               </a:rPr>
               <a:t>Publié</a:t>
             </a:r>
@@ -4198,7 +4163,7 @@
       </p:sp>
       <p:sp>
         <p:nvSpPr>
-          <p:cNvPr id="17" name="TextBox 16"/>
+          <p:cNvPr id="16" name="TextBox 15"/>
           <p:cNvSpPr txBox="1"/>
           <p:nvPr/>
         </p:nvSpPr>
@@ -4222,9 +4187,9 @@
             <a:r>
               <a:rPr sz="1000" b="0" i="0">
                 <a:solidFill>
-                  <a:srgbClr val="2C3E50"/>
-                </a:solidFill>
-                <a:latin typeface="Calibri"/>
+                  <a:srgbClr val="1E2B26"/>
+                </a:solidFill>
+                <a:latin typeface="Segoe UI"/>
               </a:rPr>
               <a:t>Scope 3 mesuré et publié</a:t>
             </a:r>
@@ -4233,7 +4198,7 @@
       </p:sp>
       <p:sp>
         <p:nvSpPr>
-          <p:cNvPr id="18" name="Rectangle 17"/>
+          <p:cNvPr id="17" name="Rectangle 16"/>
           <p:cNvSpPr/>
           <p:nvPr/>
         </p:nvSpPr>
@@ -4246,7 +4211,7 @@
             <a:avLst/>
           </a:prstGeom>
           <a:solidFill>
-            <a:srgbClr val="EBF2FB"/>
+            <a:srgbClr val="E6E6DC"/>
           </a:solidFill>
           <a:ln>
             <a:noFill/>
@@ -4276,7 +4241,7 @@
       </p:sp>
       <p:sp>
         <p:nvSpPr>
-          <p:cNvPr id="19" name="TextBox 18"/>
+          <p:cNvPr id="18" name="TextBox 17"/>
           <p:cNvSpPr txBox="1"/>
           <p:nvPr/>
         </p:nvSpPr>
@@ -4300,9 +4265,9 @@
             <a:r>
               <a:rPr sz="1250" b="1" i="0">
                 <a:solidFill>
-                  <a:srgbClr val="2C3E50"/>
-                </a:solidFill>
-                <a:latin typeface="Calibri"/>
+                  <a:srgbClr val="1E2B26"/>
+                </a:solidFill>
+                <a:latin typeface="Segoe UI"/>
               </a:rPr>
               <a:t>Vérification du reporting par un tiers</a:t>
             </a:r>
@@ -4311,7 +4276,7 @@
       </p:sp>
       <p:sp>
         <p:nvSpPr>
-          <p:cNvPr id="20" name="TextBox 19"/>
+          <p:cNvPr id="19" name="TextBox 18"/>
           <p:cNvSpPr txBox="1"/>
           <p:nvPr/>
         </p:nvSpPr>
@@ -4335,9 +4300,9 @@
             <a:r>
               <a:rPr sz="1000" b="0" i="0">
                 <a:solidFill>
-                  <a:srgbClr val="6B7C93"/>
-                </a:solidFill>
-                <a:latin typeface="Calibri"/>
+                  <a:srgbClr val="5F6B64"/>
+                </a:solidFill>
+                <a:latin typeface="Segoe UI"/>
               </a:rPr>
               <a:t>CSRD (assurance limitée)</a:t>
             </a:r>
@@ -4346,7 +4311,7 @@
       </p:sp>
       <p:sp>
         <p:nvSpPr>
-          <p:cNvPr id="21" name="Rounded Rectangle 20"/>
+          <p:cNvPr id="20" name="Rounded Rectangle 19"/>
           <p:cNvSpPr/>
           <p:nvPr/>
         </p:nvSpPr>
@@ -4389,7 +4354,7 @@
       </p:sp>
       <p:sp>
         <p:nvSpPr>
-          <p:cNvPr id="22" name="TextBox 21"/>
+          <p:cNvPr id="21" name="TextBox 20"/>
           <p:cNvSpPr txBox="1"/>
           <p:nvPr/>
         </p:nvSpPr>
@@ -4415,7 +4380,7 @@
                 <a:solidFill>
                   <a:srgbClr val="FFFFFF"/>
                 </a:solidFill>
-                <a:latin typeface="Calibri"/>
+                <a:latin typeface="Segoe UI"/>
               </a:rPr>
               <a:t>Non publié</a:t>
             </a:r>
@@ -4424,7 +4389,7 @@
       </p:sp>
       <p:sp>
         <p:nvSpPr>
-          <p:cNvPr id="23" name="TextBox 22"/>
+          <p:cNvPr id="22" name="TextBox 21"/>
           <p:cNvSpPr txBox="1"/>
           <p:nvPr/>
         </p:nvSpPr>
@@ -4448,9 +4413,9 @@
             <a:r>
               <a:rPr sz="1000" b="0" i="0">
                 <a:solidFill>
-                  <a:srgbClr val="2C3E50"/>
-                </a:solidFill>
-                <a:latin typeface="Calibri"/>
+                  <a:srgbClr val="1E2B26"/>
+                </a:solidFill>
+                <a:latin typeface="Segoe UI"/>
               </a:rPr>
               <a:t>Aucune assurance externe à date</a:t>
             </a:r>
@@ -4459,7 +4424,7 @@
       </p:sp>
       <p:sp>
         <p:nvSpPr>
-          <p:cNvPr id="24" name="TextBox 23"/>
+          <p:cNvPr id="23" name="TextBox 22"/>
           <p:cNvSpPr txBox="1"/>
           <p:nvPr/>
         </p:nvSpPr>
@@ -4483,9 +4448,9 @@
             <a:r>
               <a:rPr sz="1250" b="1" i="0">
                 <a:solidFill>
-                  <a:srgbClr val="2C3E50"/>
-                </a:solidFill>
-                <a:latin typeface="Calibri"/>
+                  <a:srgbClr val="1E2B26"/>
+                </a:solidFill>
+                <a:latin typeface="Segoe UI"/>
               </a:rPr>
               <a:t>Supervision de la durabilité par la gouvernance</a:t>
             </a:r>
@@ -4494,7 +4459,7 @@
       </p:sp>
       <p:sp>
         <p:nvSpPr>
-          <p:cNvPr id="25" name="TextBox 24"/>
+          <p:cNvPr id="24" name="TextBox 23"/>
           <p:cNvSpPr txBox="1"/>
           <p:nvPr/>
         </p:nvSpPr>
@@ -4518,9 +4483,9 @@
             <a:r>
               <a:rPr sz="1000" b="0" i="0">
                 <a:solidFill>
-                  <a:srgbClr val="6B7C93"/>
-                </a:solidFill>
-                <a:latin typeface="Calibri"/>
+                  <a:srgbClr val="5F6B64"/>
+                </a:solidFill>
+                <a:latin typeface="Segoe UI"/>
               </a:rPr>
               <a:t>ESRS 2 GOV-1</a:t>
             </a:r>
@@ -4529,7 +4494,7 @@
       </p:sp>
       <p:sp>
         <p:nvSpPr>
-          <p:cNvPr id="26" name="Rounded Rectangle 25"/>
+          <p:cNvPr id="25" name="Rounded Rectangle 24"/>
           <p:cNvSpPr/>
           <p:nvPr/>
         </p:nvSpPr>
@@ -4572,7 +4537,7 @@
       </p:sp>
       <p:sp>
         <p:nvSpPr>
-          <p:cNvPr id="27" name="TextBox 26"/>
+          <p:cNvPr id="26" name="TextBox 25"/>
           <p:cNvSpPr txBox="1"/>
           <p:nvPr/>
         </p:nvSpPr>
@@ -4598,7 +4563,7 @@
                 <a:solidFill>
                   <a:srgbClr val="FFFFFF"/>
                 </a:solidFill>
-                <a:latin typeface="Calibri"/>
+                <a:latin typeface="Segoe UI"/>
               </a:rPr>
               <a:t>Publié</a:t>
             </a:r>
@@ -4607,7 +4572,7 @@
       </p:sp>
       <p:sp>
         <p:nvSpPr>
-          <p:cNvPr id="28" name="TextBox 27"/>
+          <p:cNvPr id="27" name="TextBox 26"/>
           <p:cNvSpPr txBox="1"/>
           <p:nvPr/>
         </p:nvSpPr>
@@ -4631,9 +4596,9 @@
             <a:r>
               <a:rPr sz="1000" b="0" i="0">
                 <a:solidFill>
-                  <a:srgbClr val="2C3E50"/>
-                </a:solidFill>
-                <a:latin typeface="Calibri"/>
+                  <a:srgbClr val="1E2B26"/>
+                </a:solidFill>
+                <a:latin typeface="Segoe UI"/>
               </a:rPr>
               <a:t>Comité de durabilité en place</a:t>
             </a:r>
@@ -4642,7 +4607,7 @@
       </p:sp>
       <p:sp>
         <p:nvSpPr>
-          <p:cNvPr id="29" name="Rectangle 28"/>
+          <p:cNvPr id="28" name="Rectangle 27"/>
           <p:cNvSpPr/>
           <p:nvPr/>
         </p:nvSpPr>
@@ -4655,7 +4620,7 @@
             <a:avLst/>
           </a:prstGeom>
           <a:solidFill>
-            <a:srgbClr val="EBF2FB"/>
+            <a:srgbClr val="E6E6DC"/>
           </a:solidFill>
           <a:ln>
             <a:noFill/>
@@ -4685,7 +4650,7 @@
       </p:sp>
       <p:sp>
         <p:nvSpPr>
-          <p:cNvPr id="30" name="TextBox 29"/>
+          <p:cNvPr id="29" name="TextBox 28"/>
           <p:cNvSpPr txBox="1"/>
           <p:nvPr/>
         </p:nvSpPr>
@@ -4709,9 +4674,9 @@
             <a:r>
               <a:rPr sz="1250" b="1" i="0">
                 <a:solidFill>
-                  <a:srgbClr val="2C3E50"/>
-                </a:solidFill>
-                <a:latin typeface="Calibri"/>
+                  <a:srgbClr val="1E2B26"/>
+                </a:solidFill>
+                <a:latin typeface="Segoe UI"/>
               </a:rPr>
               <a:t>Indépendance du conseil (AFEP-MEDEF, appliquer ou expliquer)</a:t>
             </a:r>
@@ -4720,7 +4685,7 @@
       </p:sp>
       <p:sp>
         <p:nvSpPr>
-          <p:cNvPr id="31" name="TextBox 30"/>
+          <p:cNvPr id="30" name="TextBox 29"/>
           <p:cNvSpPr txBox="1"/>
           <p:nvPr/>
         </p:nvSpPr>
@@ -4744,9 +4709,9 @@
             <a:r>
               <a:rPr sz="1000" b="0" i="0">
                 <a:solidFill>
-                  <a:srgbClr val="6B7C93"/>
-                </a:solidFill>
-                <a:latin typeface="Calibri"/>
+                  <a:srgbClr val="5F6B64"/>
+                </a:solidFill>
+                <a:latin typeface="Segoe UI"/>
               </a:rPr>
               <a:t>AFEP-MEDEF</a:t>
             </a:r>
@@ -4755,7 +4720,7 @@
       </p:sp>
       <p:sp>
         <p:nvSpPr>
-          <p:cNvPr id="32" name="Rounded Rectangle 31"/>
+          <p:cNvPr id="31" name="Rounded Rectangle 30"/>
           <p:cNvSpPr/>
           <p:nvPr/>
         </p:nvSpPr>
@@ -4798,7 +4763,7 @@
       </p:sp>
       <p:sp>
         <p:nvSpPr>
-          <p:cNvPr id="33" name="TextBox 32"/>
+          <p:cNvPr id="32" name="TextBox 31"/>
           <p:cNvSpPr txBox="1"/>
           <p:nvPr/>
         </p:nvSpPr>
@@ -4824,7 +4789,7 @@
                 <a:solidFill>
                   <a:srgbClr val="FFFFFF"/>
                 </a:solidFill>
-                <a:latin typeface="Calibri"/>
+                <a:latin typeface="Segoe UI"/>
               </a:rPr>
               <a:t>Sous le seuil</a:t>
             </a:r>
@@ -4833,7 +4798,7 @@
       </p:sp>
       <p:sp>
         <p:nvSpPr>
-          <p:cNvPr id="34" name="TextBox 33"/>
+          <p:cNvPr id="33" name="TextBox 32"/>
           <p:cNvSpPr txBox="1"/>
           <p:nvPr/>
         </p:nvSpPr>
@@ -4857,9 +4822,9 @@
             <a:r>
               <a:rPr sz="1000" b="0" i="0">
                 <a:solidFill>
-                  <a:srgbClr val="2C3E50"/>
-                </a:solidFill>
-                <a:latin typeface="Calibri"/>
+                  <a:srgbClr val="1E2B26"/>
+                </a:solidFill>
+                <a:latin typeface="Segoe UI"/>
               </a:rPr>
               <a:t>45 % d'administrateurs indépendants</a:t>
             </a:r>
@@ -4868,7 +4833,7 @@
       </p:sp>
       <p:sp>
         <p:nvSpPr>
-          <p:cNvPr id="35" name="TextBox 34"/>
+          <p:cNvPr id="34" name="TextBox 33"/>
           <p:cNvSpPr txBox="1"/>
           <p:nvPr/>
         </p:nvSpPr>
@@ -4892,9 +4857,9 @@
             <a:r>
               <a:rPr sz="1250" b="1" i="0">
                 <a:solidFill>
-                  <a:srgbClr val="2C3E50"/>
-                </a:solidFill>
-                <a:latin typeface="Calibri"/>
+                  <a:srgbClr val="1E2B26"/>
+                </a:solidFill>
+                <a:latin typeface="Segoe UI"/>
               </a:rPr>
               <a:t>Publication des indicateurs Taxonomie UE</a:t>
             </a:r>
@@ -4903,7 +4868,7 @@
       </p:sp>
       <p:sp>
         <p:nvSpPr>
-          <p:cNvPr id="36" name="TextBox 35"/>
+          <p:cNvPr id="35" name="TextBox 34"/>
           <p:cNvSpPr txBox="1"/>
           <p:nvPr/>
         </p:nvSpPr>
@@ -4927,9 +4892,9 @@
             <a:r>
               <a:rPr sz="1000" b="0" i="0">
                 <a:solidFill>
-                  <a:srgbClr val="6B7C93"/>
-                </a:solidFill>
-                <a:latin typeface="Calibri"/>
+                  <a:srgbClr val="5F6B64"/>
+                </a:solidFill>
+                <a:latin typeface="Segoe UI"/>
               </a:rPr>
               <a:t>Règlement (UE) 2020/852</a:t>
             </a:r>
@@ -4938,7 +4903,7 @@
       </p:sp>
       <p:sp>
         <p:nvSpPr>
-          <p:cNvPr id="37" name="Rounded Rectangle 36"/>
+          <p:cNvPr id="36" name="Rounded Rectangle 35"/>
           <p:cNvSpPr/>
           <p:nvPr/>
         </p:nvSpPr>
@@ -4981,7 +4946,7 @@
       </p:sp>
       <p:sp>
         <p:nvSpPr>
-          <p:cNvPr id="38" name="TextBox 37"/>
+          <p:cNvPr id="37" name="TextBox 36"/>
           <p:cNvSpPr txBox="1"/>
           <p:nvPr/>
         </p:nvSpPr>
@@ -5007,7 +4972,7 @@
                 <a:solidFill>
                   <a:srgbClr val="FFFFFF"/>
                 </a:solidFill>
-                <a:latin typeface="Calibri"/>
+                <a:latin typeface="Segoe UI"/>
               </a:rPr>
               <a:t>Publié</a:t>
             </a:r>
@@ -5016,7 +4981,7 @@
       </p:sp>
       <p:sp>
         <p:nvSpPr>
-          <p:cNvPr id="39" name="TextBox 38"/>
+          <p:cNvPr id="38" name="TextBox 37"/>
           <p:cNvSpPr txBox="1"/>
           <p:nvPr/>
         </p:nvSpPr>
@@ -5040,9 +5005,9 @@
             <a:r>
               <a:rPr sz="1000" b="0" i="0">
                 <a:solidFill>
-                  <a:srgbClr val="2C3E50"/>
-                </a:solidFill>
-                <a:latin typeface="Calibri"/>
+                  <a:srgbClr val="1E2B26"/>
+                </a:solidFill>
+                <a:latin typeface="Segoe UI"/>
               </a:rPr>
               <a:t>Parts alignées publiées (CA/CapEx/OpEx)</a:t>
             </a:r>
@@ -5051,7 +5016,7 @@
       </p:sp>
       <p:sp>
         <p:nvSpPr>
-          <p:cNvPr id="40" name="Rectangle 39"/>
+          <p:cNvPr id="39" name="Rectangle 38"/>
           <p:cNvSpPr/>
           <p:nvPr/>
         </p:nvSpPr>
@@ -5064,7 +5029,7 @@
             <a:avLst/>
           </a:prstGeom>
           <a:solidFill>
-            <a:srgbClr val="EBF2FB"/>
+            <a:srgbClr val="E6E6DC"/>
           </a:solidFill>
           <a:ln>
             <a:noFill/>
@@ -5094,7 +5059,7 @@
       </p:sp>
       <p:sp>
         <p:nvSpPr>
-          <p:cNvPr id="41" name="TextBox 40"/>
+          <p:cNvPr id="40" name="TextBox 39"/>
           <p:cNvSpPr txBox="1"/>
           <p:nvPr/>
         </p:nvSpPr>
@@ -5118,9 +5083,9 @@
             <a:r>
               <a:rPr sz="1250" b="1" i="0">
                 <a:solidFill>
-                  <a:srgbClr val="2C3E50"/>
-                </a:solidFill>
-                <a:latin typeface="Calibri"/>
+                  <a:srgbClr val="1E2B26"/>
+                </a:solidFill>
+                <a:latin typeface="Segoe UI"/>
               </a:rPr>
               <a:t>Objectifs climatiques chiffrés</a:t>
             </a:r>
@@ -5129,7 +5094,7 @@
       </p:sp>
       <p:sp>
         <p:nvSpPr>
-          <p:cNvPr id="42" name="TextBox 41"/>
+          <p:cNvPr id="41" name="TextBox 40"/>
           <p:cNvSpPr txBox="1"/>
           <p:nvPr/>
         </p:nvSpPr>
@@ -5153,9 +5118,9 @@
             <a:r>
               <a:rPr sz="1000" b="0" i="0">
                 <a:solidFill>
-                  <a:srgbClr val="6B7C93"/>
-                </a:solidFill>
-                <a:latin typeface="Calibri"/>
+                  <a:srgbClr val="5F6B64"/>
+                </a:solidFill>
+                <a:latin typeface="Segoe UI"/>
               </a:rPr>
               <a:t>ESRS E1-4</a:t>
             </a:r>
@@ -5164,7 +5129,7 @@
       </p:sp>
       <p:sp>
         <p:nvSpPr>
-          <p:cNvPr id="43" name="Rounded Rectangle 42"/>
+          <p:cNvPr id="42" name="Rounded Rectangle 41"/>
           <p:cNvSpPr/>
           <p:nvPr/>
         </p:nvSpPr>
@@ -5207,7 +5172,7 @@
       </p:sp>
       <p:sp>
         <p:nvSpPr>
-          <p:cNvPr id="44" name="TextBox 43"/>
+          <p:cNvPr id="43" name="TextBox 42"/>
           <p:cNvSpPr txBox="1"/>
           <p:nvPr/>
         </p:nvSpPr>
@@ -5233,7 +5198,7 @@
                 <a:solidFill>
                   <a:srgbClr val="FFFFFF"/>
                 </a:solidFill>
-                <a:latin typeface="Calibri"/>
+                <a:latin typeface="Segoe UI"/>
               </a:rPr>
               <a:t>Non couvert par ce reporting</a:t>
             </a:r>
@@ -5242,7 +5207,7 @@
       </p:sp>
       <p:sp>
         <p:nvSpPr>
-          <p:cNvPr id="45" name="TextBox 44"/>
+          <p:cNvPr id="44" name="TextBox 43"/>
           <p:cNvSpPr txBox="1"/>
           <p:nvPr/>
         </p:nvSpPr>
@@ -5266,9 +5231,9 @@
             <a:r>
               <a:rPr sz="1000" b="0" i="0">
                 <a:solidFill>
-                  <a:srgbClr val="2C3E50"/>
-                </a:solidFill>
-                <a:latin typeface="Calibri"/>
+                  <a:srgbClr val="1E2B26"/>
+                </a:solidFill>
+                <a:latin typeface="Segoe UI"/>
               </a:rPr>
               <a:t>Cibles climatiques non documentées dans ce reporting</a:t>
             </a:r>
@@ -5277,7 +5242,7 @@
       </p:sp>
       <p:sp>
         <p:nvSpPr>
-          <p:cNvPr id="46" name="TextBox 45"/>
+          <p:cNvPr id="45" name="TextBox 44"/>
           <p:cNvSpPr txBox="1"/>
           <p:nvPr/>
         </p:nvSpPr>
@@ -5301,9 +5266,9 @@
             <a:r>
               <a:rPr sz="800" b="0" i="0">
                 <a:solidFill>
-                  <a:srgbClr val="6B7C93"/>
-                </a:solidFill>
-                <a:latin typeface="Calibri"/>
+                  <a:srgbClr val="5F6B64"/>
+                </a:solidFill>
+                <a:latin typeface="Segoe UI"/>
               </a:rPr>
               <a:t>Acme Industries   |   10 / 23</a:t>
             </a:r>
@@ -5343,7 +5308,7 @@
             <a:avLst/>
           </a:prstGeom>
           <a:solidFill>
-            <a:srgbClr val="1B3A6B"/>
+            <a:srgbClr val="1F3D33"/>
           </a:solidFill>
           <a:ln>
             <a:noFill/>
@@ -5386,7 +5351,7 @@
             <a:avLst/>
           </a:prstGeom>
           <a:solidFill>
-            <a:srgbClr val="F39C12"/>
+            <a:srgbClr val="2E5A4B"/>
           </a:solidFill>
           <a:ln>
             <a:noFill/>
@@ -5440,9 +5405,9 @@
             <a:r>
               <a:rPr sz="23000" b="1" i="0">
                 <a:solidFill>
-                  <a:srgbClr val="F39C12"/>
-                </a:solidFill>
-                <a:latin typeface="Calibri"/>
+                  <a:srgbClr val="2E5A4B"/>
+                </a:solidFill>
+                <a:latin typeface="Georgia"/>
               </a:rPr>
               <a:t>60</a:t>
             </a:r>
@@ -5475,9 +5440,9 @@
             <a:r>
               <a:rPr sz="3400" b="1" i="0">
                 <a:solidFill>
-                  <a:srgbClr val="FFFFFF"/>
-                </a:solidFill>
-                <a:latin typeface="Calibri"/>
+                  <a:srgbClr val="F3F0E8"/>
+                </a:solidFill>
+                <a:latin typeface="Segoe UI"/>
               </a:rPr>
               <a:t>%</a:t>
             </a:r>
@@ -5510,9 +5475,9 @@
             <a:r>
               <a:rPr sz="2000" b="0" i="0">
                 <a:solidFill>
-                  <a:srgbClr val="AEC6E8"/>
-                </a:solidFill>
-                <a:latin typeface="Calibri"/>
+                  <a:srgbClr val="C9D8C5"/>
+                </a:solidFill>
+                <a:latin typeface="Segoe UI"/>
               </a:rPr>
               <a:t>des émissions relèvent du Scope 3</a:t>
             </a:r>
@@ -5534,7 +5499,7 @@
             <a:avLst/>
           </a:prstGeom>
           <a:solidFill>
-            <a:srgbClr val="F39C12"/>
+            <a:srgbClr val="2E5A4B"/>
           </a:solidFill>
           <a:ln>
             <a:noFill/>
@@ -5588,9 +5553,9 @@
             <a:r>
               <a:rPr sz="1600" b="0" i="1">
                 <a:solidFill>
-                  <a:srgbClr val="FFFFFF"/>
-                </a:solidFill>
-                <a:latin typeface="Calibri"/>
+                  <a:srgbClr val="F3F0E8"/>
+                </a:solidFill>
+                <a:latin typeface="Segoe UI"/>
               </a:rPr>
               <a:t>La chaîne de valeur, principal terrain d'action climat.</a:t>
             </a:r>
@@ -5623,9 +5588,9 @@
             <a:r>
               <a:rPr sz="800" b="0" i="0">
                 <a:solidFill>
-                  <a:srgbClr val="6B7C93"/>
-                </a:solidFill>
-                <a:latin typeface="Calibri"/>
+                  <a:srgbClr val="5F6B64"/>
+                </a:solidFill>
+                <a:latin typeface="Segoe UI"/>
               </a:rPr>
               <a:t>Acme Industries   |   11 / 23</a:t>
             </a:r>
@@ -5665,7 +5630,7 @@
             <a:avLst/>
           </a:prstGeom>
           <a:solidFill>
-            <a:srgbClr val="F4F7FD"/>
+            <a:srgbClr val="F3F0E8"/>
           </a:solidFill>
           <a:ln>
             <a:noFill/>
@@ -5743,9 +5708,9 @@
             <a:r>
               <a:rPr sz="1300" b="1" i="0">
                 <a:solidFill>
-                  <a:srgbClr val="F39C12"/>
-                </a:solidFill>
-                <a:latin typeface="Calibri"/>
+                  <a:srgbClr val="2E5A4B"/>
+                </a:solidFill>
+                <a:latin typeface="Segoe UI"/>
               </a:rPr>
               <a:t>PILIER ENVIRONNEMENTAL</a:t>
             </a:r>
@@ -5780,7 +5745,7 @@
                 <a:solidFill>
                   <a:srgbClr val="FFFFFF"/>
                 </a:solidFill>
-                <a:latin typeface="Calibri"/>
+                <a:latin typeface="Georgia"/>
               </a:rPr>
               <a:t>Un bilan carbone complet, socle de la trajectoire climat</a:t>
             </a:r>
@@ -5839,7 +5804,7 @@
                 <a:solidFill>
                   <a:srgbClr val="FFFFFF"/>
                 </a:solidFill>
-                <a:latin typeface="Calibri"/>
+                <a:latin typeface="Georgia"/>
               </a:rPr>
               <a:t>70</a:t>
             </a:r>
@@ -5874,7 +5839,7 @@
                 <a:solidFill>
                   <a:srgbClr val="FFFFFF"/>
                 </a:solidFill>
-                <a:latin typeface="Calibri"/>
+                <a:latin typeface="Segoe UI"/>
               </a:rPr>
               <a:t>SCORE / 100</a:t>
             </a:r>
@@ -5907,9 +5872,9 @@
             <a:r>
               <a:rPr sz="1500" b="1" i="0">
                 <a:solidFill>
-                  <a:srgbClr val="6B7C93"/>
-                </a:solidFill>
-                <a:latin typeface="Calibri"/>
+                  <a:srgbClr val="5F6B64"/>
+                </a:solidFill>
+                <a:latin typeface="Segoe UI"/>
               </a:rPr>
               <a:t>INDICATEURS CLÉS</a:t>
             </a:r>
@@ -5931,7 +5896,7 @@
             <a:avLst/>
           </a:prstGeom>
           <a:solidFill>
-            <a:srgbClr val="27AE60"/>
+            <a:srgbClr val="2F6B4F"/>
           </a:solidFill>
           <a:ln>
             <a:noFill/>
@@ -5974,7 +5939,7 @@
             <a:avLst/>
           </a:prstGeom>
           <a:solidFill>
-            <a:srgbClr val="EBF2FB"/>
+            <a:srgbClr val="E6E6DC"/>
           </a:solidFill>
           <a:ln w="9525">
             <a:solidFill>
@@ -6019,7 +5984,7 @@
             <a:avLst/>
           </a:prstGeom>
           <a:solidFill>
-            <a:srgbClr val="27AE60"/>
+            <a:srgbClr val="2F6B4F"/>
           </a:solidFill>
           <a:ln>
             <a:noFill/>
@@ -6062,7 +6027,7 @@
             <a:avLst/>
           </a:prstGeom>
           <a:solidFill>
-            <a:srgbClr val="27AE60"/>
+            <a:srgbClr val="2F6B4F"/>
           </a:solidFill>
           <a:ln>
             <a:noFill/>
@@ -6140,9 +6105,9 @@
             <a:r>
               <a:rPr sz="2300" b="1" i="0">
                 <a:solidFill>
-                  <a:srgbClr val="27AE60"/>
-                </a:solidFill>
-                <a:latin typeface="Calibri"/>
+                  <a:srgbClr val="2F6B4F"/>
+                </a:solidFill>
+                <a:latin typeface="Georgia"/>
               </a:rPr>
               <a:t>8,200 t</a:t>
             </a:r>
@@ -6175,9 +6140,9 @@
             <a:r>
               <a:rPr sz="1050" b="0" i="0">
                 <a:solidFill>
-                  <a:srgbClr val="6B7C93"/>
-                </a:solidFill>
-                <a:latin typeface="Calibri"/>
+                  <a:srgbClr val="5F6B64"/>
+                </a:solidFill>
+                <a:latin typeface="Segoe UI"/>
               </a:rPr>
               <a:t>Émissions CO2 totales</a:t>
             </a:r>
@@ -6199,7 +6164,7 @@
             <a:avLst/>
           </a:prstGeom>
           <a:solidFill>
-            <a:srgbClr val="EBF2FB"/>
+            <a:srgbClr val="E6E6DC"/>
           </a:solidFill>
           <a:ln w="9525">
             <a:solidFill>
@@ -6244,7 +6209,7 @@
             <a:avLst/>
           </a:prstGeom>
           <a:solidFill>
-            <a:srgbClr val="27AE60"/>
+            <a:srgbClr val="2F6B4F"/>
           </a:solidFill>
           <a:ln>
             <a:noFill/>
@@ -6287,7 +6252,7 @@
             <a:avLst/>
           </a:prstGeom>
           <a:solidFill>
-            <a:srgbClr val="27AE60"/>
+            <a:srgbClr val="2F6B4F"/>
           </a:solidFill>
           <a:ln>
             <a:noFill/>
@@ -6365,9 +6330,9 @@
             <a:r>
               <a:rPr sz="2300" b="1" i="0">
                 <a:solidFill>
-                  <a:srgbClr val="27AE60"/>
-                </a:solidFill>
-                <a:latin typeface="Calibri"/>
+                  <a:srgbClr val="2F6B4F"/>
+                </a:solidFill>
+                <a:latin typeface="Georgia"/>
               </a:rPr>
               <a:t>42%</a:t>
             </a:r>
@@ -6400,9 +6365,9 @@
             <a:r>
               <a:rPr sz="1050" b="0" i="0">
                 <a:solidFill>
-                  <a:srgbClr val="6B7C93"/>
-                </a:solidFill>
-                <a:latin typeface="Calibri"/>
+                  <a:srgbClr val="5F6B64"/>
+                </a:solidFill>
+                <a:latin typeface="Segoe UI"/>
               </a:rPr>
               <a:t>Énergie renouvelable</a:t>
             </a:r>
@@ -6424,7 +6389,7 @@
             <a:avLst/>
           </a:prstGeom>
           <a:solidFill>
-            <a:srgbClr val="EBF2FB"/>
+            <a:srgbClr val="E6E6DC"/>
           </a:solidFill>
           <a:ln w="9525">
             <a:solidFill>
@@ -6469,7 +6434,7 @@
             <a:avLst/>
           </a:prstGeom>
           <a:solidFill>
-            <a:srgbClr val="27AE60"/>
+            <a:srgbClr val="2F6B4F"/>
           </a:solidFill>
           <a:ln>
             <a:noFill/>
@@ -6512,7 +6477,7 @@
             <a:avLst/>
           </a:prstGeom>
           <a:solidFill>
-            <a:srgbClr val="27AE60"/>
+            <a:srgbClr val="2F6B4F"/>
           </a:solidFill>
           <a:ln>
             <a:noFill/>
@@ -6590,9 +6555,9 @@
             <a:r>
               <a:rPr sz="2300" b="1" i="0">
                 <a:solidFill>
-                  <a:srgbClr val="27AE60"/>
-                </a:solidFill>
-                <a:latin typeface="Calibri"/>
+                  <a:srgbClr val="2F6B4F"/>
+                </a:solidFill>
+                <a:latin typeface="Georgia"/>
               </a:rPr>
               <a:t>21,500</a:t>
             </a:r>
@@ -6625,9 +6590,9 @@
             <a:r>
               <a:rPr sz="1050" b="0" i="0">
                 <a:solidFill>
-                  <a:srgbClr val="6B7C93"/>
-                </a:solidFill>
-                <a:latin typeface="Calibri"/>
+                  <a:srgbClr val="5F6B64"/>
+                </a:solidFill>
+                <a:latin typeface="Segoe UI"/>
               </a:rPr>
               <a:t>Consommation (MWh)</a:t>
             </a:r>
@@ -6649,7 +6614,7 @@
             <a:avLst/>
           </a:prstGeom>
           <a:solidFill>
-            <a:srgbClr val="EBF2FB"/>
+            <a:srgbClr val="E6E6DC"/>
           </a:solidFill>
           <a:ln w="9525">
             <a:solidFill>
@@ -6694,7 +6659,7 @@
             <a:avLst/>
           </a:prstGeom>
           <a:solidFill>
-            <a:srgbClr val="27AE60"/>
+            <a:srgbClr val="2F6B4F"/>
           </a:solidFill>
           <a:ln>
             <a:noFill/>
@@ -6737,7 +6702,7 @@
             <a:avLst/>
           </a:prstGeom>
           <a:solidFill>
-            <a:srgbClr val="27AE60"/>
+            <a:srgbClr val="2F6B4F"/>
           </a:solidFill>
           <a:ln>
             <a:noFill/>
@@ -6815,9 +6780,9 @@
             <a:r>
               <a:rPr sz="2300" b="1" i="0">
                 <a:solidFill>
-                  <a:srgbClr val="27AE60"/>
-                </a:solidFill>
-                <a:latin typeface="Calibri"/>
+                  <a:srgbClr val="2F6B4F"/>
+                </a:solidFill>
+                <a:latin typeface="Georgia"/>
               </a:rPr>
               <a:t>120,000</a:t>
             </a:r>
@@ -6850,9 +6815,9 @@
             <a:r>
               <a:rPr sz="1050" b="0" i="0">
                 <a:solidFill>
-                  <a:srgbClr val="6B7C93"/>
-                </a:solidFill>
-                <a:latin typeface="Calibri"/>
+                  <a:srgbClr val="5F6B64"/>
+                </a:solidFill>
+                <a:latin typeface="Segoe UI"/>
               </a:rPr>
               <a:t>Eau prélevée (m3)</a:t>
             </a:r>
@@ -6874,11 +6839,11 @@
             <a:avLst/>
           </a:prstGeom>
           <a:solidFill>
-            <a:srgbClr val="EBF2FB"/>
+            <a:srgbClr val="E6E6DC"/>
           </a:solidFill>
           <a:ln w="19050">
             <a:solidFill>
-              <a:srgbClr val="27AE60"/>
+              <a:srgbClr val="2F6B4F"/>
             </a:solidFill>
           </a:ln>
         </p:spPr>
@@ -6919,7 +6884,7 @@
             <a:avLst/>
           </a:prstGeom>
           <a:solidFill>
-            <a:srgbClr val="27AE60"/>
+            <a:srgbClr val="2F6B4F"/>
           </a:solidFill>
           <a:ln>
             <a:noFill/>
@@ -6973,9 +6938,9 @@
             <a:r>
               <a:rPr sz="1250" b="1" i="0">
                 <a:solidFill>
-                  <a:srgbClr val="27AE60"/>
-                </a:solidFill>
-                <a:latin typeface="Calibri"/>
+                  <a:srgbClr val="2F6B4F"/>
+                </a:solidFill>
+                <a:latin typeface="Segoe UI"/>
               </a:rPr>
               <a:t>LECTURE MÉTIER</a:t>
             </a:r>
@@ -7008,9 +6973,9 @@
             <a:r>
               <a:rPr sz="1600" b="0" i="0">
                 <a:solidFill>
-                  <a:srgbClr val="2C3E50"/>
-                </a:solidFill>
-                <a:latin typeface="Calibri"/>
+                  <a:srgbClr val="1E2B26"/>
+                </a:solidFill>
+                <a:latin typeface="Segoe UI"/>
               </a:rPr>
               <a:t>Performance environnementale solide ; l'intensité carbone reste le principal levier de création de valeur durable.</a:t>
             </a:r>
@@ -7043,9 +7008,9 @@
             <a:r>
               <a:rPr sz="800" b="0" i="0">
                 <a:solidFill>
-                  <a:srgbClr val="6B7C93"/>
-                </a:solidFill>
-                <a:latin typeface="Calibri"/>
+                  <a:srgbClr val="5F6B64"/>
+                </a:solidFill>
+                <a:latin typeface="Segoe UI"/>
               </a:rPr>
               <a:t>Acme Industries   |   12 / 23</a:t>
             </a:r>
@@ -7085,7 +7050,7 @@
             <a:avLst/>
           </a:prstGeom>
           <a:solidFill>
-            <a:srgbClr val="F4F7FD"/>
+            <a:srgbClr val="F3F0E8"/>
           </a:solidFill>
           <a:ln>
             <a:noFill/>
@@ -7163,9 +7128,9 @@
             <a:r>
               <a:rPr sz="1300" b="1" i="0">
                 <a:solidFill>
-                  <a:srgbClr val="F39C12"/>
-                </a:solidFill>
-                <a:latin typeface="Calibri"/>
+                  <a:srgbClr val="2E5A4B"/>
+                </a:solidFill>
+                <a:latin typeface="Segoe UI"/>
               </a:rPr>
               <a:t>PILIER SOCIAL</a:t>
             </a:r>
@@ -7200,7 +7165,7 @@
                 <a:solidFill>
                   <a:srgbClr val="FFFFFF"/>
                 </a:solidFill>
-                <a:latin typeface="Calibri"/>
+                <a:latin typeface="Georgia"/>
               </a:rPr>
               <a:t>La sécurité au travail (TF 6.2), priorité à traiter</a:t>
             </a:r>
@@ -7259,7 +7224,7 @@
                 <a:solidFill>
                   <a:srgbClr val="FFFFFF"/>
                 </a:solidFill>
-                <a:latin typeface="Calibri"/>
+                <a:latin typeface="Georgia"/>
               </a:rPr>
               <a:t>55</a:t>
             </a:r>
@@ -7294,7 +7259,7 @@
                 <a:solidFill>
                   <a:srgbClr val="FFFFFF"/>
                 </a:solidFill>
-                <a:latin typeface="Calibri"/>
+                <a:latin typeface="Segoe UI"/>
               </a:rPr>
               <a:t>SCORE / 100</a:t>
             </a:r>
@@ -7327,9 +7292,9 @@
             <a:r>
               <a:rPr sz="1500" b="1" i="0">
                 <a:solidFill>
-                  <a:srgbClr val="6B7C93"/>
-                </a:solidFill>
-                <a:latin typeface="Calibri"/>
+                  <a:srgbClr val="5F6B64"/>
+                </a:solidFill>
+                <a:latin typeface="Segoe UI"/>
               </a:rPr>
               <a:t>INDICATEURS CLÉS</a:t>
             </a:r>
@@ -7351,7 +7316,7 @@
             <a:avLst/>
           </a:prstGeom>
           <a:solidFill>
-            <a:srgbClr val="2E86C1"/>
+            <a:srgbClr val="3D6A8A"/>
           </a:solidFill>
           <a:ln>
             <a:noFill/>
@@ -7394,7 +7359,7 @@
             <a:avLst/>
           </a:prstGeom>
           <a:solidFill>
-            <a:srgbClr val="EBF2FB"/>
+            <a:srgbClr val="E6E6DC"/>
           </a:solidFill>
           <a:ln w="9525">
             <a:solidFill>
@@ -7439,7 +7404,7 @@
             <a:avLst/>
           </a:prstGeom>
           <a:solidFill>
-            <a:srgbClr val="2E86C1"/>
+            <a:srgbClr val="3D6A8A"/>
           </a:solidFill>
           <a:ln>
             <a:noFill/>
@@ -7482,7 +7447,7 @@
             <a:avLst/>
           </a:prstGeom>
           <a:solidFill>
-            <a:srgbClr val="2E86C1"/>
+            <a:srgbClr val="3D6A8A"/>
           </a:solidFill>
           <a:ln>
             <a:noFill/>
@@ -7560,9 +7525,9 @@
             <a:r>
               <a:rPr sz="2300" b="1" i="0">
                 <a:solidFill>
-                  <a:srgbClr val="2E86C1"/>
-                </a:solidFill>
-                <a:latin typeface="Calibri"/>
+                  <a:srgbClr val="3D6A8A"/>
+                </a:solidFill>
+                <a:latin typeface="Georgia"/>
               </a:rPr>
               <a:t>320</a:t>
             </a:r>
@@ -7595,9 +7560,9 @@
             <a:r>
               <a:rPr sz="1050" b="0" i="0">
                 <a:solidFill>
-                  <a:srgbClr val="6B7C93"/>
-                </a:solidFill>
-                <a:latin typeface="Calibri"/>
+                  <a:srgbClr val="5F6B64"/>
+                </a:solidFill>
+                <a:latin typeface="Segoe UI"/>
               </a:rPr>
               <a:t>Effectif total</a:t>
             </a:r>
@@ -7619,7 +7584,7 @@
             <a:avLst/>
           </a:prstGeom>
           <a:solidFill>
-            <a:srgbClr val="EBF2FB"/>
+            <a:srgbClr val="E6E6DC"/>
           </a:solidFill>
           <a:ln w="9525">
             <a:solidFill>
@@ -7664,7 +7629,7 @@
             <a:avLst/>
           </a:prstGeom>
           <a:solidFill>
-            <a:srgbClr val="2E86C1"/>
+            <a:srgbClr val="3D6A8A"/>
           </a:solidFill>
           <a:ln>
             <a:noFill/>
@@ -7707,7 +7672,7 @@
             <a:avLst/>
           </a:prstGeom>
           <a:solidFill>
-            <a:srgbClr val="2E86C1"/>
+            <a:srgbClr val="3D6A8A"/>
           </a:solidFill>
           <a:ln>
             <a:noFill/>
@@ -7785,9 +7750,9 @@
             <a:r>
               <a:rPr sz="2300" b="1" i="0">
                 <a:solidFill>
-                  <a:srgbClr val="2E86C1"/>
-                </a:solidFill>
-                <a:latin typeface="Calibri"/>
+                  <a:srgbClr val="3D6A8A"/>
+                </a:solidFill>
+                <a:latin typeface="Georgia"/>
               </a:rPr>
               <a:t>34%</a:t>
             </a:r>
@@ -7820,9 +7785,9 @@
             <a:r>
               <a:rPr sz="1050" b="0" i="0">
                 <a:solidFill>
-                  <a:srgbClr val="6B7C93"/>
-                </a:solidFill>
-                <a:latin typeface="Calibri"/>
+                  <a:srgbClr val="5F6B64"/>
+                </a:solidFill>
+                <a:latin typeface="Segoe UI"/>
               </a:rPr>
               <a:t>Femmes dans l'effectif</a:t>
             </a:r>
@@ -7844,7 +7809,7 @@
             <a:avLst/>
           </a:prstGeom>
           <a:solidFill>
-            <a:srgbClr val="EBF2FB"/>
+            <a:srgbClr val="E6E6DC"/>
           </a:solidFill>
           <a:ln w="9525">
             <a:solidFill>
@@ -7889,7 +7854,7 @@
             <a:avLst/>
           </a:prstGeom>
           <a:solidFill>
-            <a:srgbClr val="2E86C1"/>
+            <a:srgbClr val="3D6A8A"/>
           </a:solidFill>
           <a:ln>
             <a:noFill/>
@@ -7932,7 +7897,7 @@
             <a:avLst/>
           </a:prstGeom>
           <a:solidFill>
-            <a:srgbClr val="2E86C1"/>
+            <a:srgbClr val="3D6A8A"/>
           </a:solidFill>
           <a:ln>
             <a:noFill/>
@@ -8010,9 +7975,9 @@
             <a:r>
               <a:rPr sz="2300" b="1" i="0">
                 <a:solidFill>
-                  <a:srgbClr val="2E86C1"/>
-                </a:solidFill>
-                <a:latin typeface="Calibri"/>
+                  <a:srgbClr val="3D6A8A"/>
+                </a:solidFill>
+                <a:latin typeface="Georgia"/>
               </a:rPr>
               <a:t>22 h</a:t>
             </a:r>
@@ -8045,9 +8010,9 @@
             <a:r>
               <a:rPr sz="1050" b="0" i="0">
                 <a:solidFill>
-                  <a:srgbClr val="6B7C93"/>
-                </a:solidFill>
-                <a:latin typeface="Calibri"/>
+                  <a:srgbClr val="5F6B64"/>
+                </a:solidFill>
+                <a:latin typeface="Segoe UI"/>
               </a:rPr>
               <a:t>Formation / an</a:t>
             </a:r>
@@ -8069,7 +8034,7 @@
             <a:avLst/>
           </a:prstGeom>
           <a:solidFill>
-            <a:srgbClr val="EBF2FB"/>
+            <a:srgbClr val="E6E6DC"/>
           </a:solidFill>
           <a:ln w="9525">
             <a:solidFill>
@@ -8114,7 +8079,7 @@
             <a:avLst/>
           </a:prstGeom>
           <a:solidFill>
-            <a:srgbClr val="2E86C1"/>
+            <a:srgbClr val="3D6A8A"/>
           </a:solidFill>
           <a:ln>
             <a:noFill/>
@@ -8157,7 +8122,7 @@
             <a:avLst/>
           </a:prstGeom>
           <a:solidFill>
-            <a:srgbClr val="2E86C1"/>
+            <a:srgbClr val="3D6A8A"/>
           </a:solidFill>
           <a:ln>
             <a:noFill/>
@@ -8235,9 +8200,9 @@
             <a:r>
               <a:rPr sz="2300" b="1" i="0">
                 <a:solidFill>
-                  <a:srgbClr val="2E86C1"/>
-                </a:solidFill>
-                <a:latin typeface="Calibri"/>
+                  <a:srgbClr val="3D6A8A"/>
+                </a:solidFill>
+                <a:latin typeface="Georgia"/>
               </a:rPr>
               <a:t>6.2</a:t>
             </a:r>
@@ -8270,9 +8235,9 @@
             <a:r>
               <a:rPr sz="1050" b="0" i="0">
                 <a:solidFill>
-                  <a:srgbClr val="6B7C93"/>
-                </a:solidFill>
-                <a:latin typeface="Calibri"/>
+                  <a:srgbClr val="5F6B64"/>
+                </a:solidFill>
+                <a:latin typeface="Segoe UI"/>
               </a:rPr>
               <a:t>Taux fréquence accidents</a:t>
             </a:r>
@@ -8294,11 +8259,11 @@
             <a:avLst/>
           </a:prstGeom>
           <a:solidFill>
-            <a:srgbClr val="EBF2FB"/>
+            <a:srgbClr val="E6E6DC"/>
           </a:solidFill>
           <a:ln w="19050">
             <a:solidFill>
-              <a:srgbClr val="2E86C1"/>
+              <a:srgbClr val="3D6A8A"/>
             </a:solidFill>
           </a:ln>
         </p:spPr>
@@ -8339,7 +8304,7 @@
             <a:avLst/>
           </a:prstGeom>
           <a:solidFill>
-            <a:srgbClr val="2E86C1"/>
+            <a:srgbClr val="3D6A8A"/>
           </a:solidFill>
           <a:ln>
             <a:noFill/>
@@ -8393,9 +8358,9 @@
             <a:r>
               <a:rPr sz="1250" b="1" i="0">
                 <a:solidFill>
-                  <a:srgbClr val="2E86C1"/>
-                </a:solidFill>
-                <a:latin typeface="Calibri"/>
+                  <a:srgbClr val="3D6A8A"/>
+                </a:solidFill>
+                <a:latin typeface="Segoe UI"/>
               </a:rPr>
               <a:t>LECTURE MÉTIER</a:t>
             </a:r>
@@ -8428,9 +8393,9 @@
             <a:r>
               <a:rPr sz="1600" b="0" i="0">
                 <a:solidFill>
-                  <a:srgbClr val="2C3E50"/>
-                </a:solidFill>
-                <a:latin typeface="Calibri"/>
+                  <a:srgbClr val="1E2B26"/>
+                </a:solidFill>
+                <a:latin typeface="Segoe UI"/>
               </a:rPr>
               <a:t>Performance sociale en construction : parité et sécurité au travail appellent des objectifs chiffrés pour fidéliser les talents.</a:t>
             </a:r>
@@ -8463,9 +8428,9 @@
             <a:r>
               <a:rPr sz="800" b="0" i="0">
                 <a:solidFill>
-                  <a:srgbClr val="6B7C93"/>
-                </a:solidFill>
-                <a:latin typeface="Calibri"/>
+                  <a:srgbClr val="5F6B64"/>
+                </a:solidFill>
+                <a:latin typeface="Segoe UI"/>
               </a:rPr>
               <a:t>Acme Industries   |   13 / 23</a:t>
             </a:r>
@@ -8505,7 +8470,7 @@
             <a:avLst/>
           </a:prstGeom>
           <a:solidFill>
-            <a:srgbClr val="F4F7FD"/>
+            <a:srgbClr val="F3F0E8"/>
           </a:solidFill>
           <a:ln>
             <a:noFill/>
@@ -8583,9 +8548,9 @@
             <a:r>
               <a:rPr sz="1300" b="1" i="0">
                 <a:solidFill>
-                  <a:srgbClr val="F39C12"/>
-                </a:solidFill>
-                <a:latin typeface="Calibri"/>
+                  <a:srgbClr val="2E5A4B"/>
+                </a:solidFill>
+                <a:latin typeface="Segoe UI"/>
               </a:rPr>
               <a:t>PILIER GOUVERNANCE</a:t>
             </a:r>
@@ -8620,7 +8585,7 @@
                 <a:solidFill>
                   <a:srgbClr val="FFFFFF"/>
                 </a:solidFill>
-                <a:latin typeface="Calibri"/>
+                <a:latin typeface="Georgia"/>
               </a:rPr>
               <a:t>L'assurance ESG indépendante, priorité de la gouvernance</a:t>
             </a:r>
@@ -8679,7 +8644,7 @@
                 <a:solidFill>
                   <a:srgbClr val="FFFFFF"/>
                 </a:solidFill>
-                <a:latin typeface="Calibri"/>
+                <a:latin typeface="Georgia"/>
               </a:rPr>
               <a:t>75</a:t>
             </a:r>
@@ -8714,7 +8679,7 @@
                 <a:solidFill>
                   <a:srgbClr val="FFFFFF"/>
                 </a:solidFill>
-                <a:latin typeface="Calibri"/>
+                <a:latin typeface="Segoe UI"/>
               </a:rPr>
               <a:t>SCORE / 100</a:t>
             </a:r>
@@ -8747,9 +8712,9 @@
             <a:r>
               <a:rPr sz="1500" b="1" i="0">
                 <a:solidFill>
-                  <a:srgbClr val="6B7C93"/>
-                </a:solidFill>
-                <a:latin typeface="Calibri"/>
+                  <a:srgbClr val="5F6B64"/>
+                </a:solidFill>
+                <a:latin typeface="Segoe UI"/>
               </a:rPr>
               <a:t>INDICATEURS CLÉS</a:t>
             </a:r>
@@ -8771,7 +8736,7 @@
             <a:avLst/>
           </a:prstGeom>
           <a:solidFill>
-            <a:srgbClr val="8E44AD"/>
+            <a:srgbClr val="6B5B86"/>
           </a:solidFill>
           <a:ln>
             <a:noFill/>
@@ -8814,7 +8779,7 @@
             <a:avLst/>
           </a:prstGeom>
           <a:solidFill>
-            <a:srgbClr val="EBF2FB"/>
+            <a:srgbClr val="E6E6DC"/>
           </a:solidFill>
           <a:ln w="9525">
             <a:solidFill>
@@ -8859,7 +8824,7 @@
             <a:avLst/>
           </a:prstGeom>
           <a:solidFill>
-            <a:srgbClr val="8E44AD"/>
+            <a:srgbClr val="6B5B86"/>
           </a:solidFill>
           <a:ln>
             <a:noFill/>
@@ -8902,7 +8867,7 @@
             <a:avLst/>
           </a:prstGeom>
           <a:solidFill>
-            <a:srgbClr val="8E44AD"/>
+            <a:srgbClr val="6B5B86"/>
           </a:solidFill>
           <a:ln>
             <a:noFill/>
@@ -8980,9 +8945,9 @@
             <a:r>
               <a:rPr sz="2300" b="1" i="0">
                 <a:solidFill>
-                  <a:srgbClr val="8E44AD"/>
-                </a:solidFill>
-                <a:latin typeface="Calibri"/>
+                  <a:srgbClr val="6B5B86"/>
+                </a:solidFill>
+                <a:latin typeface="Georgia"/>
               </a:rPr>
               <a:t>9</a:t>
             </a:r>
@@ -9015,9 +8980,9 @@
             <a:r>
               <a:rPr sz="1050" b="0" i="0">
                 <a:solidFill>
-                  <a:srgbClr val="6B7C93"/>
-                </a:solidFill>
-                <a:latin typeface="Calibri"/>
+                  <a:srgbClr val="5F6B64"/>
+                </a:solidFill>
+                <a:latin typeface="Segoe UI"/>
               </a:rPr>
               <a:t>Membres du Conseil</a:t>
             </a:r>
@@ -9039,7 +9004,7 @@
             <a:avLst/>
           </a:prstGeom>
           <a:solidFill>
-            <a:srgbClr val="EBF2FB"/>
+            <a:srgbClr val="E6E6DC"/>
           </a:solidFill>
           <a:ln w="9525">
             <a:solidFill>
@@ -9084,7 +9049,7 @@
             <a:avLst/>
           </a:prstGeom>
           <a:solidFill>
-            <a:srgbClr val="8E44AD"/>
+            <a:srgbClr val="6B5B86"/>
           </a:solidFill>
           <a:ln>
             <a:noFill/>
@@ -9127,7 +9092,7 @@
             <a:avLst/>
           </a:prstGeom>
           <a:solidFill>
-            <a:srgbClr val="8E44AD"/>
+            <a:srgbClr val="6B5B86"/>
           </a:solidFill>
           <a:ln>
             <a:noFill/>
@@ -9205,9 +9170,9 @@
             <a:r>
               <a:rPr sz="2300" b="1" i="0">
                 <a:solidFill>
-                  <a:srgbClr val="8E44AD"/>
-                </a:solidFill>
-                <a:latin typeface="Calibri"/>
+                  <a:srgbClr val="6B5B86"/>
+                </a:solidFill>
+                <a:latin typeface="Georgia"/>
               </a:rPr>
               <a:t>44%</a:t>
             </a:r>
@@ -9240,9 +9205,9 @@
             <a:r>
               <a:rPr sz="1050" b="0" i="0">
                 <a:solidFill>
-                  <a:srgbClr val="6B7C93"/>
-                </a:solidFill>
-                <a:latin typeface="Calibri"/>
+                  <a:srgbClr val="5F6B64"/>
+                </a:solidFill>
+                <a:latin typeface="Segoe UI"/>
               </a:rPr>
               <a:t>Femmes au CA</a:t>
             </a:r>
@@ -9264,7 +9229,7 @@
             <a:avLst/>
           </a:prstGeom>
           <a:solidFill>
-            <a:srgbClr val="EBF2FB"/>
+            <a:srgbClr val="E6E6DC"/>
           </a:solidFill>
           <a:ln w="9525">
             <a:solidFill>
@@ -9309,7 +9274,7 @@
             <a:avLst/>
           </a:prstGeom>
           <a:solidFill>
-            <a:srgbClr val="8E44AD"/>
+            <a:srgbClr val="6B5B86"/>
           </a:solidFill>
           <a:ln>
             <a:noFill/>
@@ -9352,7 +9317,7 @@
             <a:avLst/>
           </a:prstGeom>
           <a:solidFill>
-            <a:srgbClr val="8E44AD"/>
+            <a:srgbClr val="6B5B86"/>
           </a:solidFill>
           <a:ln>
             <a:noFill/>
@@ -9430,9 +9395,9 @@
             <a:r>
               <a:rPr sz="2300" b="1" i="0">
                 <a:solidFill>
-                  <a:srgbClr val="8E44AD"/>
-                </a:solidFill>
-                <a:latin typeface="Calibri"/>
+                  <a:srgbClr val="6B5B86"/>
+                </a:solidFill>
+                <a:latin typeface="Georgia"/>
               </a:rPr>
               <a:t>45%</a:t>
             </a:r>
@@ -9465,9 +9430,9 @@
             <a:r>
               <a:rPr sz="1050" b="0" i="0">
                 <a:solidFill>
-                  <a:srgbClr val="6B7C93"/>
-                </a:solidFill>
-                <a:latin typeface="Calibri"/>
+                  <a:srgbClr val="5F6B64"/>
+                </a:solidFill>
+                <a:latin typeface="Segoe UI"/>
               </a:rPr>
               <a:t>Administrateurs indépendants</a:t>
             </a:r>
@@ -9489,7 +9454,7 @@
             <a:avLst/>
           </a:prstGeom>
           <a:solidFill>
-            <a:srgbClr val="EBF2FB"/>
+            <a:srgbClr val="E6E6DC"/>
           </a:solidFill>
           <a:ln w="9525">
             <a:solidFill>
@@ -9534,7 +9499,7 @@
             <a:avLst/>
           </a:prstGeom>
           <a:solidFill>
-            <a:srgbClr val="8E44AD"/>
+            <a:srgbClr val="6B5B86"/>
           </a:solidFill>
           <a:ln>
             <a:noFill/>
@@ -9577,7 +9542,7 @@
             <a:avLst/>
           </a:prstGeom>
           <a:solidFill>
-            <a:srgbClr val="8E44AD"/>
+            <a:srgbClr val="6B5B86"/>
           </a:solidFill>
           <a:ln>
             <a:noFill/>
@@ -9655,9 +9620,9 @@
             <a:r>
               <a:rPr sz="2300" b="1" i="0">
                 <a:solidFill>
-                  <a:srgbClr val="8E44AD"/>
-                </a:solidFill>
-                <a:latin typeface="Calibri"/>
+                  <a:srgbClr val="6B5B86"/>
+                </a:solidFill>
+                <a:latin typeface="Georgia"/>
               </a:rPr>
               <a:t>Non</a:t>
             </a:r>
@@ -9690,9 +9655,9 @@
             <a:r>
               <a:rPr sz="1050" b="0" i="0">
                 <a:solidFill>
-                  <a:srgbClr val="6B7C93"/>
-                </a:solidFill>
-                <a:latin typeface="Calibri"/>
+                  <a:srgbClr val="5F6B64"/>
+                </a:solidFill>
+                <a:latin typeface="Segoe UI"/>
               </a:rPr>
               <a:t>Audit ESG indépendant</a:t>
             </a:r>
@@ -9714,11 +9679,11 @@
             <a:avLst/>
           </a:prstGeom>
           <a:solidFill>
-            <a:srgbClr val="EBF2FB"/>
+            <a:srgbClr val="E6E6DC"/>
           </a:solidFill>
           <a:ln w="19050">
             <a:solidFill>
-              <a:srgbClr val="8E44AD"/>
+              <a:srgbClr val="6B5B86"/>
             </a:solidFill>
           </a:ln>
         </p:spPr>
@@ -9759,7 +9724,7 @@
             <a:avLst/>
           </a:prstGeom>
           <a:solidFill>
-            <a:srgbClr val="8E44AD"/>
+            <a:srgbClr val="6B5B86"/>
           </a:solidFill>
           <a:ln>
             <a:noFill/>
@@ -9813,9 +9778,9 @@
             <a:r>
               <a:rPr sz="1250" b="1" i="0">
                 <a:solidFill>
-                  <a:srgbClr val="8E44AD"/>
-                </a:solidFill>
-                <a:latin typeface="Calibri"/>
+                  <a:srgbClr val="6B5B86"/>
+                </a:solidFill>
+                <a:latin typeface="Segoe UI"/>
               </a:rPr>
               <a:t>LECTURE MÉTIER</a:t>
             </a:r>
@@ -9848,9 +9813,9 @@
             <a:r>
               <a:rPr sz="1600" b="0" i="0">
                 <a:solidFill>
-                  <a:srgbClr val="2C3E50"/>
-                </a:solidFill>
-                <a:latin typeface="Calibri"/>
+                  <a:srgbClr val="1E2B26"/>
+                </a:solidFill>
+                <a:latin typeface="Segoe UI"/>
               </a:rPr>
               <a:t>Gouvernance exemplaire : indépendance, audit et supervision ESG inspirent confiance aux investisseurs.</a:t>
             </a:r>
@@ -9883,9 +9848,9 @@
             <a:r>
               <a:rPr sz="800" b="0" i="0">
                 <a:solidFill>
-                  <a:srgbClr val="6B7C93"/>
-                </a:solidFill>
-                <a:latin typeface="Calibri"/>
+                  <a:srgbClr val="5F6B64"/>
+                </a:solidFill>
+                <a:latin typeface="Segoe UI"/>
               </a:rPr>
               <a:t>Acme Industries   |   14 / 23</a:t>
             </a:r>
@@ -9925,7 +9890,7 @@
             <a:avLst/>
           </a:prstGeom>
           <a:solidFill>
-            <a:srgbClr val="F4F7FD"/>
+            <a:srgbClr val="F3F0E8"/>
           </a:solidFill>
           <a:ln>
             <a:noFill/>
@@ -9961,14 +9926,14 @@
         </p:nvSpPr>
         <p:spPr>
           <a:xfrm>
-            <a:off x="0" y="0"/>
-            <a:ext cx="12188952" cy="1143000"/>
-          </a:xfrm>
-          <a:prstGeom prst="rect">
-            <a:avLst/>
-          </a:prstGeom>
-          <a:solidFill>
-            <a:srgbClr val="1B3A6B"/>
+            <a:off x="457200" y="384048"/>
+            <a:ext cx="201168" cy="201168"/>
+          </a:xfrm>
+          <a:prstGeom prst="rect">
+            <a:avLst/>
+          </a:prstGeom>
+          <a:solidFill>
+            <a:srgbClr val="1F3D33"/>
           </a:solidFill>
           <a:ln>
             <a:noFill/>
@@ -9998,20 +9963,55 @@
       </p:sp>
       <p:sp>
         <p:nvSpPr>
-          <p:cNvPr id="4" name="Rectangle 3"/>
+          <p:cNvPr id="4" name="TextBox 3"/>
+          <p:cNvSpPr txBox="1"/>
+          <p:nvPr/>
+        </p:nvSpPr>
+        <p:spPr>
+          <a:xfrm>
+            <a:off x="822960" y="237744"/>
+            <a:ext cx="10789920" cy="685800"/>
+          </a:xfrm>
+          <a:prstGeom prst="rect">
+            <a:avLst/>
+          </a:prstGeom>
+          <a:noFill/>
+        </p:spPr>
+        <p:txBody>
+          <a:bodyPr wrap="square">
+            <a:spAutoFit/>
+          </a:bodyPr>
+          <a:lstStyle/>
+          <a:p>
+            <a:pPr algn="l"/>
+            <a:r>
+              <a:rPr sz="1320" b="1" i="0">
+                <a:solidFill>
+                  <a:srgbClr val="1E2B26"/>
+                </a:solidFill>
+                <a:latin typeface="Georgia"/>
+              </a:rPr>
+              <a:t>Le changement climatique concentre les enjeux ESG prioritaires</a:t>
+            </a:r>
+          </a:p>
+        </p:txBody>
+      </p:sp>
+      <p:sp>
+        <p:nvSpPr>
+          <p:cNvPr id="5" name="Rectangle 4"/>
           <p:cNvSpPr/>
           <p:nvPr/>
         </p:nvSpPr>
         <p:spPr>
           <a:xfrm>
-            <a:off x="0" y="1143000"/>
-            <a:ext cx="64008" cy="5715000"/>
-          </a:xfrm>
-          <a:prstGeom prst="rect">
-            <a:avLst/>
-          </a:prstGeom>
-          <a:solidFill>
-            <a:srgbClr val="F39C12"/>
+            <a:off x="457200" y="1024128"/>
+            <a:ext cx="2011680" cy="18288"/>
+          </a:xfrm>
+          <a:prstGeom prst="rect">
+            <a:avLst/>
+          </a:prstGeom>
+          <a:solidFill>
+            <a:srgbClr val="1E2B26"/>
           </a:solidFill>
           <a:ln>
             <a:noFill/>
@@ -10039,79 +10039,9 @@
           </a:p>
         </p:txBody>
       </p:sp>
-      <p:sp>
-        <p:nvSpPr>
-          <p:cNvPr id="5" name="TextBox 4"/>
-          <p:cNvSpPr txBox="1"/>
-          <p:nvPr/>
-        </p:nvSpPr>
-        <p:spPr>
-          <a:xfrm>
-            <a:off x="292608" y="128016"/>
-            <a:ext cx="10972800" cy="292608"/>
-          </a:xfrm>
-          <a:prstGeom prst="rect">
-            <a:avLst/>
-          </a:prstGeom>
-          <a:noFill/>
-        </p:spPr>
-        <p:txBody>
-          <a:bodyPr wrap="square">
-            <a:spAutoFit/>
-          </a:bodyPr>
-          <a:lstStyle/>
-          <a:p>
-            <a:pPr algn="l"/>
-            <a:r>
-              <a:rPr sz="1100" b="1" i="0">
-                <a:solidFill>
-                  <a:srgbClr val="F39C12"/>
-                </a:solidFill>
-                <a:latin typeface="Calibri"/>
-              </a:rPr>
-              <a:t>PRIORISATION DES ENJEUX ESG</a:t>
-            </a:r>
-          </a:p>
-        </p:txBody>
-      </p:sp>
-      <p:sp>
-        <p:nvSpPr>
-          <p:cNvPr id="6" name="TextBox 5"/>
-          <p:cNvSpPr txBox="1"/>
-          <p:nvPr/>
-        </p:nvSpPr>
-        <p:spPr>
-          <a:xfrm>
-            <a:off x="274320" y="384048"/>
-            <a:ext cx="11612880" cy="713232"/>
-          </a:xfrm>
-          <a:prstGeom prst="rect">
-            <a:avLst/>
-          </a:prstGeom>
-          <a:noFill/>
-        </p:spPr>
-        <p:txBody>
-          <a:bodyPr wrap="square">
-            <a:spAutoFit/>
-          </a:bodyPr>
-          <a:lstStyle/>
-          <a:p>
-            <a:pPr algn="l"/>
-            <a:r>
-              <a:rPr sz="1716" b="1" i="0">
-                <a:solidFill>
-                  <a:srgbClr val="FFFFFF"/>
-                </a:solidFill>
-                <a:latin typeface="Calibri"/>
-              </a:rPr>
-              <a:t>Le changement climatique concentre les enjeux ESG prioritaires</a:t>
-            </a:r>
-          </a:p>
-        </p:txBody>
-      </p:sp>
       <p:pic>
         <p:nvPicPr>
-          <p:cNvPr id="7" name="Picture 6" descr="image.png"/>
+          <p:cNvPr id="6" name="Picture 5" descr="image.png"/>
           <p:cNvPicPr>
             <a:picLocks noChangeAspect="1"/>
           </p:cNvPicPr>
@@ -10126,7 +10056,7 @@
         <p:spPr>
           <a:xfrm>
             <a:off x="320040" y="1600200"/>
-            <a:ext cx="7394055" cy="4480560"/>
+            <a:ext cx="7299789" cy="4480560"/>
           </a:xfrm>
           <a:prstGeom prst="rect">
             <a:avLst/>
@@ -10135,7 +10065,7 @@
       </p:pic>
       <p:sp>
         <p:nvSpPr>
-          <p:cNvPr id="8" name="Rounded Rectangle 7"/>
+          <p:cNvPr id="7" name="Rounded Rectangle 6"/>
           <p:cNvSpPr/>
           <p:nvPr/>
         </p:nvSpPr>
@@ -10148,11 +10078,11 @@
             <a:avLst/>
           </a:prstGeom>
           <a:solidFill>
-            <a:srgbClr val="EBF2FB"/>
+            <a:srgbClr val="E6E6DC"/>
           </a:solidFill>
           <a:ln w="15875">
             <a:solidFill>
-              <a:srgbClr val="F39C12"/>
+              <a:srgbClr val="2E5A4B"/>
             </a:solidFill>
           </a:ln>
         </p:spPr>
@@ -10180,7 +10110,7 @@
       </p:sp>
       <p:sp>
         <p:nvSpPr>
-          <p:cNvPr id="9" name="Rectangle 8"/>
+          <p:cNvPr id="8" name="Rectangle 7"/>
           <p:cNvSpPr/>
           <p:nvPr/>
         </p:nvSpPr>
@@ -10193,7 +10123,7 @@
             <a:avLst/>
           </a:prstGeom>
           <a:solidFill>
-            <a:srgbClr val="F39C12"/>
+            <a:srgbClr val="2E5A4B"/>
           </a:solidFill>
           <a:ln>
             <a:noFill/>
@@ -10223,7 +10153,7 @@
       </p:sp>
       <p:sp>
         <p:nvSpPr>
-          <p:cNvPr id="10" name="TextBox 9"/>
+          <p:cNvPr id="9" name="TextBox 8"/>
           <p:cNvSpPr txBox="1"/>
           <p:nvPr/>
         </p:nvSpPr>
@@ -10247,9 +10177,9 @@
             <a:r>
               <a:rPr sz="1200" b="1" i="0">
                 <a:solidFill>
-                  <a:srgbClr val="F39C12"/>
-                </a:solidFill>
-                <a:latin typeface="Calibri"/>
+                  <a:srgbClr val="2E5A4B"/>
+                </a:solidFill>
+                <a:latin typeface="Segoe UI"/>
               </a:rPr>
               <a:t>LECTURE MÉTIER</a:t>
             </a:r>
@@ -10258,7 +10188,7 @@
       </p:sp>
       <p:sp>
         <p:nvSpPr>
-          <p:cNvPr id="11" name="TextBox 10"/>
+          <p:cNvPr id="10" name="TextBox 9"/>
           <p:cNvSpPr txBox="1"/>
           <p:nvPr/>
         </p:nvSpPr>
@@ -10282,9 +10212,9 @@
             <a:r>
               <a:rPr sz="1350" b="0" i="0">
                 <a:solidFill>
-                  <a:srgbClr val="2C3E50"/>
-                </a:solidFill>
-                <a:latin typeface="Calibri"/>
+                  <a:srgbClr val="1E2B26"/>
+                </a:solidFill>
+                <a:latin typeface="Segoe UI"/>
               </a:rPr>
               <a:t>Enjeux positionnés selon leur exposition estimée et leur sensibilité économique, à partir des données déclarées.</a:t>
             </a:r>
@@ -10293,7 +10223,7 @@
       </p:sp>
       <p:sp>
         <p:nvSpPr>
-          <p:cNvPr id="12" name="TextBox 11"/>
+          <p:cNvPr id="11" name="TextBox 10"/>
           <p:cNvSpPr txBox="1"/>
           <p:nvPr/>
         </p:nvSpPr>
@@ -10317,9 +10247,9 @@
             <a:r>
               <a:rPr sz="800" b="0" i="0">
                 <a:solidFill>
-                  <a:srgbClr val="6B7C93"/>
-                </a:solidFill>
-                <a:latin typeface="Calibri"/>
+                  <a:srgbClr val="5F6B64"/>
+                </a:solidFill>
+                <a:latin typeface="Segoe UI"/>
               </a:rPr>
               <a:t>Acme Industries   |   15 / 23</a:t>
             </a:r>
@@ -10359,7 +10289,7 @@
             <a:avLst/>
           </a:prstGeom>
           <a:solidFill>
-            <a:srgbClr val="F4F7FD"/>
+            <a:srgbClr val="F3F0E8"/>
           </a:solidFill>
           <a:ln>
             <a:noFill/>
@@ -10395,14 +10325,14 @@
         </p:nvSpPr>
         <p:spPr>
           <a:xfrm>
-            <a:off x="0" y="0"/>
-            <a:ext cx="12188952" cy="1143000"/>
-          </a:xfrm>
-          <a:prstGeom prst="rect">
-            <a:avLst/>
-          </a:prstGeom>
-          <a:solidFill>
-            <a:srgbClr val="1B3A6B"/>
+            <a:off x="457200" y="384048"/>
+            <a:ext cx="201168" cy="201168"/>
+          </a:xfrm>
+          <a:prstGeom prst="rect">
+            <a:avLst/>
+          </a:prstGeom>
+          <a:solidFill>
+            <a:srgbClr val="1F3D33"/>
           </a:solidFill>
           <a:ln>
             <a:noFill/>
@@ -10432,20 +10362,55 @@
       </p:sp>
       <p:sp>
         <p:nvSpPr>
-          <p:cNvPr id="4" name="Rectangle 3"/>
+          <p:cNvPr id="4" name="TextBox 3"/>
+          <p:cNvSpPr txBox="1"/>
+          <p:nvPr/>
+        </p:nvSpPr>
+        <p:spPr>
+          <a:xfrm>
+            <a:off x="822960" y="237744"/>
+            <a:ext cx="10789920" cy="685800"/>
+          </a:xfrm>
+          <a:prstGeom prst="rect">
+            <a:avLst/>
+          </a:prstGeom>
+          <a:noFill/>
+        </p:spPr>
+        <p:txBody>
+          <a:bodyPr wrap="square">
+            <a:spAutoFit/>
+          </a:bodyPr>
+          <a:lstStyle/>
+          <a:p>
+            <a:pPr algn="l"/>
+            <a:r>
+              <a:rPr sz="1320" b="1" i="0">
+                <a:solidFill>
+                  <a:srgbClr val="1E2B26"/>
+                </a:solidFill>
+                <a:latin typeface="Georgia"/>
+              </a:rPr>
+              <a:t>52 % des investissements (CapEx) déjà alignés à la Taxonomie UE</a:t>
+            </a:r>
+          </a:p>
+        </p:txBody>
+      </p:sp>
+      <p:sp>
+        <p:nvSpPr>
+          <p:cNvPr id="5" name="Rectangle 4"/>
           <p:cNvSpPr/>
           <p:nvPr/>
         </p:nvSpPr>
         <p:spPr>
           <a:xfrm>
-            <a:off x="0" y="1143000"/>
-            <a:ext cx="64008" cy="5715000"/>
-          </a:xfrm>
-          <a:prstGeom prst="rect">
-            <a:avLst/>
-          </a:prstGeom>
-          <a:solidFill>
-            <a:srgbClr val="F39C12"/>
+            <a:off x="457200" y="1024128"/>
+            <a:ext cx="2011680" cy="18288"/>
+          </a:xfrm>
+          <a:prstGeom prst="rect">
+            <a:avLst/>
+          </a:prstGeom>
+          <a:solidFill>
+            <a:srgbClr val="1E2B26"/>
           </a:solidFill>
           <a:ln>
             <a:noFill/>
@@ -10475,77 +10440,7 @@
       </p:sp>
       <p:sp>
         <p:nvSpPr>
-          <p:cNvPr id="5" name="TextBox 4"/>
-          <p:cNvSpPr txBox="1"/>
-          <p:nvPr/>
-        </p:nvSpPr>
-        <p:spPr>
-          <a:xfrm>
-            <a:off x="292608" y="128016"/>
-            <a:ext cx="10972800" cy="292608"/>
-          </a:xfrm>
-          <a:prstGeom prst="rect">
-            <a:avLst/>
-          </a:prstGeom>
-          <a:noFill/>
-        </p:spPr>
-        <p:txBody>
-          <a:bodyPr wrap="square">
-            <a:spAutoFit/>
-          </a:bodyPr>
-          <a:lstStyle/>
-          <a:p>
-            <a:pPr algn="l"/>
-            <a:r>
-              <a:rPr sz="1100" b="1" i="0">
-                <a:solidFill>
-                  <a:srgbClr val="F39C12"/>
-                </a:solidFill>
-                <a:latin typeface="Calibri"/>
-              </a:rPr>
-              <a:t>ALIGNEMENT TAXONOMIE EUROPÉENNE</a:t>
-            </a:r>
-          </a:p>
-        </p:txBody>
-      </p:sp>
-      <p:sp>
-        <p:nvSpPr>
           <p:cNvPr id="6" name="TextBox 5"/>
-          <p:cNvSpPr txBox="1"/>
-          <p:nvPr/>
-        </p:nvSpPr>
-        <p:spPr>
-          <a:xfrm>
-            <a:off x="274320" y="384048"/>
-            <a:ext cx="11612880" cy="713232"/>
-          </a:xfrm>
-          <a:prstGeom prst="rect">
-            <a:avLst/>
-          </a:prstGeom>
-          <a:noFill/>
-        </p:spPr>
-        <p:txBody>
-          <a:bodyPr wrap="square">
-            <a:spAutoFit/>
-          </a:bodyPr>
-          <a:lstStyle/>
-          <a:p>
-            <a:pPr algn="l"/>
-            <a:r>
-              <a:rPr sz="1716" b="1" i="0">
-                <a:solidFill>
-                  <a:srgbClr val="FFFFFF"/>
-                </a:solidFill>
-                <a:latin typeface="Calibri"/>
-              </a:rPr>
-              <a:t>52 % des investissements (CapEx) déjà alignés à la Taxonomie UE</a:t>
-            </a:r>
-          </a:p>
-        </p:txBody>
-      </p:sp>
-      <p:sp>
-        <p:nvSpPr>
-          <p:cNvPr id="7" name="TextBox 6"/>
           <p:cNvSpPr txBox="1"/>
           <p:nvPr/>
         </p:nvSpPr>
@@ -10569,9 +10464,9 @@
             <a:r>
               <a:rPr sz="9600" b="1" i="0">
                 <a:solidFill>
-                  <a:srgbClr val="27AE60"/>
-                </a:solidFill>
-                <a:latin typeface="Calibri"/>
+                  <a:srgbClr val="2F6B4F"/>
+                </a:solidFill>
+                <a:latin typeface="Georgia"/>
               </a:rPr>
               <a:t>52%</a:t>
             </a:r>
@@ -10580,7 +10475,7 @@
       </p:sp>
       <p:sp>
         <p:nvSpPr>
-          <p:cNvPr id="8" name="TextBox 7"/>
+          <p:cNvPr id="7" name="TextBox 6"/>
           <p:cNvSpPr txBox="1"/>
           <p:nvPr/>
         </p:nvSpPr>
@@ -10604,9 +10499,9 @@
             <a:r>
               <a:rPr sz="1500" b="1" i="0">
                 <a:solidFill>
-                  <a:srgbClr val="2C3E50"/>
-                </a:solidFill>
-                <a:latin typeface="Calibri"/>
+                  <a:srgbClr val="1E2B26"/>
+                </a:solidFill>
+                <a:latin typeface="Segoe UI"/>
               </a:rPr>
               <a:t>Part maximale d'activités alignées à la Taxonomie UE</a:t>
             </a:r>
@@ -10615,7 +10510,7 @@
       </p:sp>
       <p:sp>
         <p:nvSpPr>
-          <p:cNvPr id="9" name="Rounded Rectangle 8"/>
+          <p:cNvPr id="8" name="Rounded Rectangle 7"/>
           <p:cNvSpPr/>
           <p:nvPr/>
         </p:nvSpPr>
@@ -10628,11 +10523,11 @@
             <a:avLst/>
           </a:prstGeom>
           <a:solidFill>
-            <a:srgbClr val="EBF2FB"/>
+            <a:srgbClr val="E6E6DC"/>
           </a:solidFill>
           <a:ln w="15875">
             <a:solidFill>
-              <a:srgbClr val="27AE60"/>
+              <a:srgbClr val="2F6B4F"/>
             </a:solidFill>
           </a:ln>
         </p:spPr>
@@ -10660,7 +10555,7 @@
       </p:sp>
       <p:sp>
         <p:nvSpPr>
-          <p:cNvPr id="10" name="Rectangle 9"/>
+          <p:cNvPr id="9" name="Rectangle 8"/>
           <p:cNvSpPr/>
           <p:nvPr/>
         </p:nvSpPr>
@@ -10673,7 +10568,7 @@
             <a:avLst/>
           </a:prstGeom>
           <a:solidFill>
-            <a:srgbClr val="27AE60"/>
+            <a:srgbClr val="2F6B4F"/>
           </a:solidFill>
           <a:ln>
             <a:noFill/>
@@ -10703,7 +10598,7 @@
       </p:sp>
       <p:sp>
         <p:nvSpPr>
-          <p:cNvPr id="11" name="TextBox 10"/>
+          <p:cNvPr id="10" name="TextBox 9"/>
           <p:cNvSpPr txBox="1"/>
           <p:nvPr/>
         </p:nvSpPr>
@@ -10727,9 +10622,9 @@
             <a:r>
               <a:rPr sz="1150" b="1" i="0">
                 <a:solidFill>
-                  <a:srgbClr val="27AE60"/>
-                </a:solidFill>
-                <a:latin typeface="Calibri"/>
+                  <a:srgbClr val="2F6B4F"/>
+                </a:solidFill>
+                <a:latin typeface="Segoe UI"/>
               </a:rPr>
               <a:t>LECTURE MÉTIER</a:t>
             </a:r>
@@ -10738,7 +10633,7 @@
       </p:sp>
       <p:sp>
         <p:nvSpPr>
-          <p:cNvPr id="12" name="TextBox 11"/>
+          <p:cNvPr id="11" name="TextBox 10"/>
           <p:cNvSpPr txBox="1"/>
           <p:nvPr/>
         </p:nvSpPr>
@@ -10762,9 +10657,9 @@
             <a:r>
               <a:rPr sz="1300" b="0" i="0">
                 <a:solidFill>
-                  <a:srgbClr val="2C3E50"/>
-                </a:solidFill>
-                <a:latin typeface="Calibri"/>
+                  <a:srgbClr val="1E2B26"/>
+                </a:solidFill>
+                <a:latin typeface="Segoe UI"/>
               </a:rPr>
               <a:t>Parts d'activités déclarées comme alignées à la Taxonomie UE par l'entreprise. Le respect du principe DNSH et des garanties minimales sociales (diligence raisonnable au sens des Principes directeurs de l'OCDE et des Nations unies) n'est pas évalué dans ce rapport.</a:t>
             </a:r>
@@ -10773,7 +10668,7 @@
       </p:sp>
       <p:pic>
         <p:nvPicPr>
-          <p:cNvPr id="13" name="Picture 12" descr="image.png"/>
+          <p:cNvPr id="12" name="Picture 11" descr="image.png"/>
           <p:cNvPicPr>
             <a:picLocks noChangeAspect="1"/>
           </p:cNvPicPr>
@@ -10788,7 +10683,7 @@
         <p:spPr>
           <a:xfrm>
             <a:off x="5760720" y="2286000"/>
-            <a:ext cx="6126480" cy="2728414"/>
+            <a:ext cx="6126480" cy="2782209"/>
           </a:xfrm>
           <a:prstGeom prst="rect">
             <a:avLst/>
@@ -10797,7 +10692,7 @@
       </p:pic>
       <p:sp>
         <p:nvSpPr>
-          <p:cNvPr id="14" name="TextBox 13"/>
+          <p:cNvPr id="13" name="TextBox 12"/>
           <p:cNvSpPr txBox="1"/>
           <p:nvPr/>
         </p:nvSpPr>
@@ -10821,9 +10716,9 @@
             <a:r>
               <a:rPr sz="800" b="0" i="0">
                 <a:solidFill>
-                  <a:srgbClr val="6B7C93"/>
-                </a:solidFill>
-                <a:latin typeface="Calibri"/>
+                  <a:srgbClr val="5F6B64"/>
+                </a:solidFill>
+                <a:latin typeface="Segoe UI"/>
               </a:rPr>
               <a:t>Acme Industries   |   16 / 23</a:t>
             </a:r>
@@ -10863,7 +10758,7 @@
             <a:avLst/>
           </a:prstGeom>
           <a:solidFill>
-            <a:srgbClr val="F4F7FD"/>
+            <a:srgbClr val="F3F0E8"/>
           </a:solidFill>
           <a:ln>
             <a:noFill/>
@@ -10899,14 +10794,14 @@
         </p:nvSpPr>
         <p:spPr>
           <a:xfrm>
-            <a:off x="0" y="0"/>
-            <a:ext cx="12188952" cy="1143000"/>
-          </a:xfrm>
-          <a:prstGeom prst="rect">
-            <a:avLst/>
-          </a:prstGeom>
-          <a:solidFill>
-            <a:srgbClr val="1B3A6B"/>
+            <a:off x="457200" y="384048"/>
+            <a:ext cx="201168" cy="201168"/>
+          </a:xfrm>
+          <a:prstGeom prst="rect">
+            <a:avLst/>
+          </a:prstGeom>
+          <a:solidFill>
+            <a:srgbClr val="1F3D33"/>
           </a:solidFill>
           <a:ln>
             <a:noFill/>
@@ -10936,20 +10831,55 @@
       </p:sp>
       <p:sp>
         <p:nvSpPr>
-          <p:cNvPr id="4" name="Rectangle 3"/>
+          <p:cNvPr id="4" name="TextBox 3"/>
+          <p:cNvSpPr txBox="1"/>
+          <p:nvPr/>
+        </p:nvSpPr>
+        <p:spPr>
+          <a:xfrm>
+            <a:off x="822960" y="237744"/>
+            <a:ext cx="10789920" cy="685800"/>
+          </a:xfrm>
+          <a:prstGeom prst="rect">
+            <a:avLst/>
+          </a:prstGeom>
+          <a:noFill/>
+        </p:spPr>
+        <p:txBody>
+          <a:bodyPr wrap="square">
+            <a:spAutoFit/>
+          </a:bodyPr>
+          <a:lstStyle/>
+          <a:p>
+            <a:pPr algn="l"/>
+            <a:r>
+              <a:rPr sz="1560" b="1" i="0">
+                <a:solidFill>
+                  <a:srgbClr val="1E2B26"/>
+                </a:solidFill>
+                <a:latin typeface="Georgia"/>
+              </a:rPr>
+              <a:t>5 forces établies, 5 leviers de progression</a:t>
+            </a:r>
+          </a:p>
+        </p:txBody>
+      </p:sp>
+      <p:sp>
+        <p:nvSpPr>
+          <p:cNvPr id="5" name="Rectangle 4"/>
           <p:cNvSpPr/>
           <p:nvPr/>
         </p:nvSpPr>
         <p:spPr>
           <a:xfrm>
-            <a:off x="0" y="1143000"/>
-            <a:ext cx="64008" cy="5715000"/>
-          </a:xfrm>
-          <a:prstGeom prst="rect">
-            <a:avLst/>
-          </a:prstGeom>
-          <a:solidFill>
-            <a:srgbClr val="F39C12"/>
+            <a:off x="457200" y="1024128"/>
+            <a:ext cx="2011680" cy="18288"/>
+          </a:xfrm>
+          <a:prstGeom prst="rect">
+            <a:avLst/>
+          </a:prstGeom>
+          <a:solidFill>
+            <a:srgbClr val="1E2B26"/>
           </a:solidFill>
           <a:ln>
             <a:noFill/>
@@ -10979,77 +10909,7 @@
       </p:sp>
       <p:sp>
         <p:nvSpPr>
-          <p:cNvPr id="5" name="TextBox 4"/>
-          <p:cNvSpPr txBox="1"/>
-          <p:nvPr/>
-        </p:nvSpPr>
-        <p:spPr>
-          <a:xfrm>
-            <a:off x="292608" y="128016"/>
-            <a:ext cx="10972800" cy="292608"/>
-          </a:xfrm>
-          <a:prstGeom prst="rect">
-            <a:avLst/>
-          </a:prstGeom>
-          <a:noFill/>
-        </p:spPr>
-        <p:txBody>
-          <a:bodyPr wrap="square">
-            <a:spAutoFit/>
-          </a:bodyPr>
-          <a:lstStyle/>
-          <a:p>
-            <a:pPr algn="l"/>
-            <a:r>
-              <a:rPr sz="1100" b="1" i="0">
-                <a:solidFill>
-                  <a:srgbClr val="F39C12"/>
-                </a:solidFill>
-                <a:latin typeface="Calibri"/>
-              </a:rPr>
-              <a:t>ANALYSE STRATÉGIQUE ESG</a:t>
-            </a:r>
-          </a:p>
-        </p:txBody>
-      </p:sp>
-      <p:sp>
-        <p:nvSpPr>
-          <p:cNvPr id="6" name="TextBox 5"/>
-          <p:cNvSpPr txBox="1"/>
-          <p:nvPr/>
-        </p:nvSpPr>
-        <p:spPr>
-          <a:xfrm>
-            <a:off x="274320" y="384048"/>
-            <a:ext cx="11612880" cy="713232"/>
-          </a:xfrm>
-          <a:prstGeom prst="rect">
-            <a:avLst/>
-          </a:prstGeom>
-          <a:noFill/>
-        </p:spPr>
-        <p:txBody>
-          <a:bodyPr wrap="square">
-            <a:spAutoFit/>
-          </a:bodyPr>
-          <a:lstStyle/>
-          <a:p>
-            <a:pPr algn="l"/>
-            <a:r>
-              <a:rPr sz="2028" b="1" i="0">
-                <a:solidFill>
-                  <a:srgbClr val="FFFFFF"/>
-                </a:solidFill>
-                <a:latin typeface="Calibri"/>
-              </a:rPr>
-              <a:t>5 forces établies, 5 leviers de progression</a:t>
-            </a:r>
-          </a:p>
-        </p:txBody>
-      </p:sp>
-      <p:sp>
-        <p:nvSpPr>
-          <p:cNvPr id="7" name="Rectangle 6"/>
+          <p:cNvPr id="6" name="Rectangle 5"/>
           <p:cNvSpPr/>
           <p:nvPr/>
         </p:nvSpPr>
@@ -11062,11 +10922,11 @@
             <a:avLst/>
           </a:prstGeom>
           <a:solidFill>
-            <a:srgbClr val="EBF2FB"/>
+            <a:srgbClr val="E6E6DC"/>
           </a:solidFill>
           <a:ln w="12700">
             <a:solidFill>
-              <a:srgbClr val="27AE60"/>
+              <a:srgbClr val="2F6B4F"/>
             </a:solidFill>
           </a:ln>
         </p:spPr>
@@ -11094,7 +10954,7 @@
       </p:sp>
       <p:sp>
         <p:nvSpPr>
-          <p:cNvPr id="8" name="TextBox 7"/>
+          <p:cNvPr id="7" name="TextBox 6"/>
           <p:cNvSpPr txBox="1"/>
           <p:nvPr/>
         </p:nvSpPr>
@@ -11118,9 +10978,9 @@
             <a:r>
               <a:rPr sz="4600" b="1" i="0">
                 <a:solidFill>
-                  <a:srgbClr val="27AE60"/>
-                </a:solidFill>
-                <a:latin typeface="Calibri"/>
+                  <a:srgbClr val="2F6B4F"/>
+                </a:solidFill>
+                <a:latin typeface="Georgia"/>
               </a:rPr>
               <a:t>5</a:t>
             </a:r>
@@ -11129,7 +10989,7 @@
       </p:sp>
       <p:sp>
         <p:nvSpPr>
-          <p:cNvPr id="9" name="TextBox 8"/>
+          <p:cNvPr id="8" name="TextBox 7"/>
           <p:cNvSpPr txBox="1"/>
           <p:nvPr/>
         </p:nvSpPr>
@@ -11153,9 +11013,9 @@
             <a:r>
               <a:rPr sz="1500" b="1" i="0">
                 <a:solidFill>
-                  <a:srgbClr val="2C3E50"/>
-                </a:solidFill>
-                <a:latin typeface="Calibri"/>
+                  <a:srgbClr val="1E2B26"/>
+                </a:solidFill>
+                <a:latin typeface="Segoe UI"/>
               </a:rPr>
               <a:t>POINTS FORTS</a:t>
             </a:r>
@@ -11164,7 +11024,7 @@
       </p:sp>
       <p:sp>
         <p:nvSpPr>
-          <p:cNvPr id="10" name="Rectangle 9"/>
+          <p:cNvPr id="9" name="Rectangle 8"/>
           <p:cNvSpPr/>
           <p:nvPr/>
         </p:nvSpPr>
@@ -11177,7 +11037,7 @@
             <a:avLst/>
           </a:prstGeom>
           <a:solidFill>
-            <a:srgbClr val="27AE60"/>
+            <a:srgbClr val="2F6B4F"/>
           </a:solidFill>
           <a:ln>
             <a:noFill/>
@@ -11207,7 +11067,7 @@
       </p:sp>
       <p:sp>
         <p:nvSpPr>
-          <p:cNvPr id="11" name="Oval 10"/>
+          <p:cNvPr id="10" name="Oval 9"/>
           <p:cNvSpPr/>
           <p:nvPr/>
         </p:nvSpPr>
@@ -11220,7 +11080,7 @@
             <a:avLst/>
           </a:prstGeom>
           <a:solidFill>
-            <a:srgbClr val="27AE60"/>
+            <a:srgbClr val="2F6B4F"/>
           </a:solidFill>
           <a:ln>
             <a:noFill/>
@@ -11250,7 +11110,7 @@
       </p:sp>
       <p:sp>
         <p:nvSpPr>
-          <p:cNvPr id="12" name="TextBox 11"/>
+          <p:cNvPr id="11" name="TextBox 10"/>
           <p:cNvSpPr txBox="1"/>
           <p:nvPr/>
         </p:nvSpPr>
@@ -11274,9 +11134,9 @@
             <a:r>
               <a:rPr sz="1250" b="0" i="0">
                 <a:solidFill>
-                  <a:srgbClr val="2C3E50"/>
-                </a:solidFill>
-                <a:latin typeface="Calibri"/>
+                  <a:srgbClr val="1E2B26"/>
+                </a:solidFill>
+                <a:latin typeface="Segoe UI"/>
               </a:rPr>
               <a:t>Excellente performance environnementale globale</a:t>
             </a:r>
@@ -11285,7 +11145,7 @@
       </p:sp>
       <p:sp>
         <p:nvSpPr>
-          <p:cNvPr id="13" name="Oval 12"/>
+          <p:cNvPr id="12" name="Oval 11"/>
           <p:cNvSpPr/>
           <p:nvPr/>
         </p:nvSpPr>
@@ -11298,7 +11158,7 @@
             <a:avLst/>
           </a:prstGeom>
           <a:solidFill>
-            <a:srgbClr val="27AE60"/>
+            <a:srgbClr val="2F6B4F"/>
           </a:solidFill>
           <a:ln>
             <a:noFill/>
@@ -11328,7 +11188,7 @@
       </p:sp>
       <p:sp>
         <p:nvSpPr>
-          <p:cNvPr id="14" name="TextBox 13"/>
+          <p:cNvPr id="13" name="TextBox 12"/>
           <p:cNvSpPr txBox="1"/>
           <p:nvPr/>
         </p:nvSpPr>
@@ -11352,9 +11212,9 @@
             <a:r>
               <a:rPr sz="1250" b="0" i="0">
                 <a:solidFill>
-                  <a:srgbClr val="2C3E50"/>
-                </a:solidFill>
-                <a:latin typeface="Calibri"/>
+                  <a:srgbClr val="1E2B26"/>
+                </a:solidFill>
+                <a:latin typeface="Segoe UI"/>
               </a:rPr>
               <a:t>Comité de durabilité opérationnel au niveau du CA</a:t>
             </a:r>
@@ -11363,7 +11223,7 @@
       </p:sp>
       <p:sp>
         <p:nvSpPr>
-          <p:cNvPr id="15" name="Oval 14"/>
+          <p:cNvPr id="14" name="Oval 13"/>
           <p:cNvSpPr/>
           <p:nvPr/>
         </p:nvSpPr>
@@ -11376,7 +11236,7 @@
             <a:avLst/>
           </a:prstGeom>
           <a:solidFill>
-            <a:srgbClr val="27AE60"/>
+            <a:srgbClr val="2F6B4F"/>
           </a:solidFill>
           <a:ln>
             <a:noFill/>
@@ -11406,7 +11266,7 @@
       </p:sp>
       <p:sp>
         <p:nvSpPr>
-          <p:cNvPr id="16" name="TextBox 15"/>
+          <p:cNvPr id="15" name="TextBox 14"/>
           <p:cNvSpPr txBox="1"/>
           <p:nvPr/>
         </p:nvSpPr>
@@ -11430,9 +11290,9 @@
             <a:r>
               <a:rPr sz="1250" b="0" i="0">
                 <a:solidFill>
-                  <a:srgbClr val="2C3E50"/>
-                </a:solidFill>
-                <a:latin typeface="Calibri"/>
+                  <a:srgbClr val="1E2B26"/>
+                </a:solidFill>
+                <a:latin typeface="Segoe UI"/>
               </a:rPr>
               <a:t>Parité exemplaire au Conseil d'Administration (44%)</a:t>
             </a:r>
@@ -11441,7 +11301,7 @@
       </p:sp>
       <p:sp>
         <p:nvSpPr>
-          <p:cNvPr id="17" name="Oval 16"/>
+          <p:cNvPr id="16" name="Oval 15"/>
           <p:cNvSpPr/>
           <p:nvPr/>
         </p:nvSpPr>
@@ -11454,7 +11314,7 @@
             <a:avLst/>
           </a:prstGeom>
           <a:solidFill>
-            <a:srgbClr val="27AE60"/>
+            <a:srgbClr val="2F6B4F"/>
           </a:solidFill>
           <a:ln>
             <a:noFill/>
@@ -11484,7 +11344,7 @@
       </p:sp>
       <p:sp>
         <p:nvSpPr>
-          <p:cNvPr id="18" name="TextBox 17"/>
+          <p:cNvPr id="17" name="TextBox 16"/>
           <p:cNvSpPr txBox="1"/>
           <p:nvPr/>
         </p:nvSpPr>
@@ -11508,9 +11368,9 @@
             <a:r>
               <a:rPr sz="1250" b="0" i="0">
                 <a:solidFill>
-                  <a:srgbClr val="2C3E50"/>
-                </a:solidFill>
-                <a:latin typeface="Calibri"/>
+                  <a:srgbClr val="1E2B26"/>
+                </a:solidFill>
+                <a:latin typeface="Segoe UI"/>
               </a:rPr>
               <a:t>Gouvernance de haute qualité et transparente</a:t>
             </a:r>
@@ -11519,7 +11379,7 @@
       </p:sp>
       <p:sp>
         <p:nvSpPr>
-          <p:cNvPr id="19" name="Oval 18"/>
+          <p:cNvPr id="18" name="Oval 17"/>
           <p:cNvSpPr/>
           <p:nvPr/>
         </p:nvSpPr>
@@ -11532,7 +11392,7 @@
             <a:avLst/>
           </a:prstGeom>
           <a:solidFill>
-            <a:srgbClr val="27AE60"/>
+            <a:srgbClr val="2F6B4F"/>
           </a:solidFill>
           <a:ln>
             <a:noFill/>
@@ -11562,7 +11422,7 @@
       </p:sp>
       <p:sp>
         <p:nvSpPr>
-          <p:cNvPr id="20" name="TextBox 19"/>
+          <p:cNvPr id="19" name="TextBox 18"/>
           <p:cNvSpPr txBox="1"/>
           <p:nvPr/>
         </p:nvSpPr>
@@ -11586,9 +11446,9 @@
             <a:r>
               <a:rPr sz="1250" b="0" i="0">
                 <a:solidFill>
-                  <a:srgbClr val="2C3E50"/>
-                </a:solidFill>
-                <a:latin typeface="Calibri"/>
+                  <a:srgbClr val="1E2B26"/>
+                </a:solidFill>
+                <a:latin typeface="Segoe UI"/>
               </a:rPr>
               <a:t>Reporting complet des émissions Scope 1, 2 et 3</a:t>
             </a:r>
@@ -11597,7 +11457,7 @@
       </p:sp>
       <p:sp>
         <p:nvSpPr>
-          <p:cNvPr id="21" name="Rectangle 20"/>
+          <p:cNvPr id="20" name="Rectangle 19"/>
           <p:cNvSpPr/>
           <p:nvPr/>
         </p:nvSpPr>
@@ -11610,7 +11470,7 @@
             <a:avLst/>
           </a:prstGeom>
           <a:solidFill>
-            <a:srgbClr val="EBF2FB"/>
+            <a:srgbClr val="E6E6DC"/>
           </a:solidFill>
           <a:ln w="12700">
             <a:solidFill>
@@ -11642,7 +11502,7 @@
       </p:sp>
       <p:sp>
         <p:nvSpPr>
-          <p:cNvPr id="22" name="TextBox 21"/>
+          <p:cNvPr id="21" name="TextBox 20"/>
           <p:cNvSpPr txBox="1"/>
           <p:nvPr/>
         </p:nvSpPr>
@@ -11668,7 +11528,7 @@
                 <a:solidFill>
                   <a:srgbClr val="E74C3C"/>
                 </a:solidFill>
-                <a:latin typeface="Calibri"/>
+                <a:latin typeface="Georgia"/>
               </a:rPr>
               <a:t>5</a:t>
             </a:r>
@@ -11677,7 +11537,7 @@
       </p:sp>
       <p:sp>
         <p:nvSpPr>
-          <p:cNvPr id="23" name="TextBox 22"/>
+          <p:cNvPr id="22" name="TextBox 21"/>
           <p:cNvSpPr txBox="1"/>
           <p:nvPr/>
         </p:nvSpPr>
@@ -11701,9 +11561,9 @@
             <a:r>
               <a:rPr sz="1500" b="1" i="0">
                 <a:solidFill>
-                  <a:srgbClr val="2C3E50"/>
-                </a:solidFill>
-                <a:latin typeface="Calibri"/>
+                  <a:srgbClr val="1E2B26"/>
+                </a:solidFill>
+                <a:latin typeface="Segoe UI"/>
               </a:rPr>
               <a:t>AXES D'AMÉLIORATION</a:t>
             </a:r>
@@ -11712,7 +11572,7 @@
       </p:sp>
       <p:sp>
         <p:nvSpPr>
-          <p:cNvPr id="24" name="Rectangle 23"/>
+          <p:cNvPr id="23" name="Rectangle 22"/>
           <p:cNvSpPr/>
           <p:nvPr/>
         </p:nvSpPr>
@@ -11755,7 +11615,7 @@
       </p:sp>
       <p:sp>
         <p:nvSpPr>
-          <p:cNvPr id="25" name="Oval 24"/>
+          <p:cNvPr id="24" name="Oval 23"/>
           <p:cNvSpPr/>
           <p:nvPr/>
         </p:nvSpPr>
@@ -11798,7 +11658,7 @@
       </p:sp>
       <p:sp>
         <p:nvSpPr>
-          <p:cNvPr id="26" name="TextBox 25"/>
+          <p:cNvPr id="25" name="TextBox 24"/>
           <p:cNvSpPr txBox="1"/>
           <p:nvPr/>
         </p:nvSpPr>
@@ -11822,9 +11682,9 @@
             <a:r>
               <a:rPr sz="1250" b="0" i="0">
                 <a:solidFill>
-                  <a:srgbClr val="2C3E50"/>
-                </a:solidFill>
-                <a:latin typeface="Calibri"/>
+                  <a:srgbClr val="1E2B26"/>
+                </a:solidFill>
+                <a:latin typeface="Segoe UI"/>
               </a:rPr>
               <a:t>Énergie renouvelable à renforcer (actuellement 42%, objectif 50%)</a:t>
             </a:r>
@@ -11833,7 +11693,7 @@
       </p:sp>
       <p:sp>
         <p:nvSpPr>
-          <p:cNvPr id="27" name="Oval 26"/>
+          <p:cNvPr id="26" name="Oval 25"/>
           <p:cNvSpPr/>
           <p:nvPr/>
         </p:nvSpPr>
@@ -11876,7 +11736,7 @@
       </p:sp>
       <p:sp>
         <p:nvSpPr>
-          <p:cNvPr id="28" name="TextBox 27"/>
+          <p:cNvPr id="27" name="TextBox 26"/>
           <p:cNvSpPr txBox="1"/>
           <p:nvPr/>
         </p:nvSpPr>
@@ -11900,9 +11760,9 @@
             <a:r>
               <a:rPr sz="1250" b="0" i="0">
                 <a:solidFill>
-                  <a:srgbClr val="2C3E50"/>
-                </a:solidFill>
-                <a:latin typeface="Calibri"/>
+                  <a:srgbClr val="1E2B26"/>
+                </a:solidFill>
+                <a:latin typeface="Segoe UI"/>
               </a:rPr>
               <a:t>Déséquilibre de genre dans les effectifs (34% de femmes)</a:t>
             </a:r>
@@ -11911,7 +11771,7 @@
       </p:sp>
       <p:sp>
         <p:nvSpPr>
-          <p:cNvPr id="29" name="Oval 28"/>
+          <p:cNvPr id="28" name="Oval 27"/>
           <p:cNvSpPr/>
           <p:nvPr/>
         </p:nvSpPr>
@@ -11954,7 +11814,7 @@
       </p:sp>
       <p:sp>
         <p:nvSpPr>
-          <p:cNvPr id="30" name="TextBox 29"/>
+          <p:cNvPr id="29" name="TextBox 28"/>
           <p:cNvSpPr txBox="1"/>
           <p:nvPr/>
         </p:nvSpPr>
@@ -11978,9 +11838,9 @@
             <a:r>
               <a:rPr sz="1250" b="0" i="0">
                 <a:solidFill>
-                  <a:srgbClr val="2C3E50"/>
-                </a:solidFill>
-                <a:latin typeface="Calibri"/>
+                  <a:srgbClr val="1E2B26"/>
+                </a:solidFill>
+                <a:latin typeface="Segoe UI"/>
               </a:rPr>
               <a:t>Taux de fréquence des accidents élevé (TF 6.2)</a:t>
             </a:r>
@@ -11989,7 +11849,7 @@
       </p:sp>
       <p:sp>
         <p:nvSpPr>
-          <p:cNvPr id="31" name="Oval 30"/>
+          <p:cNvPr id="30" name="Oval 29"/>
           <p:cNvSpPr/>
           <p:nvPr/>
         </p:nvSpPr>
@@ -12032,7 +11892,7 @@
       </p:sp>
       <p:sp>
         <p:nvSpPr>
-          <p:cNvPr id="32" name="TextBox 31"/>
+          <p:cNvPr id="31" name="TextBox 30"/>
           <p:cNvSpPr txBox="1"/>
           <p:nvPr/>
         </p:nvSpPr>
@@ -12056,9 +11916,9 @@
             <a:r>
               <a:rPr sz="1250" b="0" i="0">
                 <a:solidFill>
-                  <a:srgbClr val="2C3E50"/>
-                </a:solidFill>
-                <a:latin typeface="Calibri"/>
+                  <a:srgbClr val="1E2B26"/>
+                </a:solidFill>
+                <a:latin typeface="Segoe UI"/>
               </a:rPr>
               <a:t>Une violation de données — cybersécurité à renforcer</a:t>
             </a:r>
@@ -12067,7 +11927,7 @@
       </p:sp>
       <p:sp>
         <p:nvSpPr>
-          <p:cNvPr id="33" name="Oval 32"/>
+          <p:cNvPr id="32" name="Oval 31"/>
           <p:cNvSpPr/>
           <p:nvPr/>
         </p:nvSpPr>
@@ -12110,7 +11970,7 @@
       </p:sp>
       <p:sp>
         <p:nvSpPr>
-          <p:cNvPr id="34" name="TextBox 33"/>
+          <p:cNvPr id="33" name="TextBox 32"/>
           <p:cNvSpPr txBox="1"/>
           <p:nvPr/>
         </p:nvSpPr>
@@ -12134,9 +11994,9 @@
             <a:r>
               <a:rPr sz="1250" b="0" i="0">
                 <a:solidFill>
-                  <a:srgbClr val="2C3E50"/>
-                </a:solidFill>
-                <a:latin typeface="Calibri"/>
+                  <a:srgbClr val="1E2B26"/>
+                </a:solidFill>
+                <a:latin typeface="Segoe UI"/>
               </a:rPr>
               <a:t>Absence d'audit ESG indépendant</a:t>
             </a:r>
@@ -12145,7 +12005,7 @@
       </p:sp>
       <p:sp>
         <p:nvSpPr>
-          <p:cNvPr id="35" name="TextBox 34"/>
+          <p:cNvPr id="34" name="TextBox 33"/>
           <p:cNvSpPr txBox="1"/>
           <p:nvPr/>
         </p:nvSpPr>
@@ -12169,9 +12029,9 @@
             <a:r>
               <a:rPr sz="800" b="0" i="0">
                 <a:solidFill>
-                  <a:srgbClr val="6B7C93"/>
-                </a:solidFill>
-                <a:latin typeface="Calibri"/>
+                  <a:srgbClr val="5F6B64"/>
+                </a:solidFill>
+                <a:latin typeface="Segoe UI"/>
               </a:rPr>
               <a:t>Acme Industries   |   17 / 23</a:t>
             </a:r>
@@ -12211,7 +12071,7 @@
             <a:avLst/>
           </a:prstGeom>
           <a:solidFill>
-            <a:srgbClr val="F4F7FD"/>
+            <a:srgbClr val="F3F0E8"/>
           </a:solidFill>
           <a:ln>
             <a:noFill/>
@@ -12247,14 +12107,14 @@
         </p:nvSpPr>
         <p:spPr>
           <a:xfrm>
-            <a:off x="0" y="0"/>
-            <a:ext cx="12188952" cy="1143000"/>
-          </a:xfrm>
-          <a:prstGeom prst="rect">
-            <a:avLst/>
-          </a:prstGeom>
-          <a:solidFill>
-            <a:srgbClr val="1B3A6B"/>
+            <a:off x="457200" y="384048"/>
+            <a:ext cx="201168" cy="201168"/>
+          </a:xfrm>
+          <a:prstGeom prst="rect">
+            <a:avLst/>
+          </a:prstGeom>
+          <a:solidFill>
+            <a:srgbClr val="1F3D33"/>
           </a:solidFill>
           <a:ln>
             <a:noFill/>
@@ -12284,20 +12144,55 @@
       </p:sp>
       <p:sp>
         <p:nvSpPr>
-          <p:cNvPr id="4" name="Rectangle 3"/>
+          <p:cNvPr id="4" name="TextBox 3"/>
+          <p:cNvSpPr txBox="1"/>
+          <p:nvPr/>
+        </p:nvSpPr>
+        <p:spPr>
+          <a:xfrm>
+            <a:off x="822960" y="237744"/>
+            <a:ext cx="10789920" cy="685800"/>
+          </a:xfrm>
+          <a:prstGeom prst="rect">
+            <a:avLst/>
+          </a:prstGeom>
+          <a:noFill/>
+        </p:spPr>
+        <p:txBody>
+          <a:bodyPr wrap="square">
+            <a:spAutoFit/>
+          </a:bodyPr>
+          <a:lstStyle/>
+          <a:p>
+            <a:pPr algn="l"/>
+            <a:r>
+              <a:rPr sz="1320" b="1" i="0">
+                <a:solidFill>
+                  <a:srgbClr val="1E2B26"/>
+                </a:solidFill>
+                <a:latin typeface="Georgia"/>
+              </a:rPr>
+              <a:t>Où se concentrent vos risques et vos leviers de valeur</a:t>
+            </a:r>
+          </a:p>
+        </p:txBody>
+      </p:sp>
+      <p:sp>
+        <p:nvSpPr>
+          <p:cNvPr id="5" name="Rectangle 4"/>
           <p:cNvSpPr/>
           <p:nvPr/>
         </p:nvSpPr>
         <p:spPr>
           <a:xfrm>
-            <a:off x="0" y="1143000"/>
-            <a:ext cx="64008" cy="5715000"/>
-          </a:xfrm>
-          <a:prstGeom prst="rect">
-            <a:avLst/>
-          </a:prstGeom>
-          <a:solidFill>
-            <a:srgbClr val="F39C12"/>
+            <a:off x="457200" y="1024128"/>
+            <a:ext cx="2011680" cy="18288"/>
+          </a:xfrm>
+          <a:prstGeom prst="rect">
+            <a:avLst/>
+          </a:prstGeom>
+          <a:solidFill>
+            <a:srgbClr val="1E2B26"/>
           </a:solidFill>
           <a:ln>
             <a:noFill/>
@@ -12327,77 +12222,7 @@
       </p:sp>
       <p:sp>
         <p:nvSpPr>
-          <p:cNvPr id="5" name="TextBox 4"/>
-          <p:cNvSpPr txBox="1"/>
-          <p:nvPr/>
-        </p:nvSpPr>
-        <p:spPr>
-          <a:xfrm>
-            <a:off x="292608" y="128016"/>
-            <a:ext cx="10972800" cy="292608"/>
-          </a:xfrm>
-          <a:prstGeom prst="rect">
-            <a:avLst/>
-          </a:prstGeom>
-          <a:noFill/>
-        </p:spPr>
-        <p:txBody>
-          <a:bodyPr wrap="square">
-            <a:spAutoFit/>
-          </a:bodyPr>
-          <a:lstStyle/>
-          <a:p>
-            <a:pPr algn="l"/>
-            <a:r>
-              <a:rPr sz="1100" b="1" i="0">
-                <a:solidFill>
-                  <a:srgbClr val="F39C12"/>
-                </a:solidFill>
-                <a:latin typeface="Calibri"/>
-              </a:rPr>
-              <a:t>RISQUES &amp; OPPORTUNITÉS</a:t>
-            </a:r>
-          </a:p>
-        </p:txBody>
-      </p:sp>
-      <p:sp>
-        <p:nvSpPr>
-          <p:cNvPr id="6" name="TextBox 5"/>
-          <p:cNvSpPr txBox="1"/>
-          <p:nvPr/>
-        </p:nvSpPr>
-        <p:spPr>
-          <a:xfrm>
-            <a:off x="274320" y="384048"/>
-            <a:ext cx="11612880" cy="713232"/>
-          </a:xfrm>
-          <a:prstGeom prst="rect">
-            <a:avLst/>
-          </a:prstGeom>
-          <a:noFill/>
-        </p:spPr>
-        <p:txBody>
-          <a:bodyPr wrap="square">
-            <a:spAutoFit/>
-          </a:bodyPr>
-          <a:lstStyle/>
-          <a:p>
-            <a:pPr algn="l"/>
-            <a:r>
-              <a:rPr sz="1716" b="1" i="0">
-                <a:solidFill>
-                  <a:srgbClr val="FFFFFF"/>
-                </a:solidFill>
-                <a:latin typeface="Calibri"/>
-              </a:rPr>
-              <a:t>Où se concentrent vos risques et vos leviers de valeur</a:t>
-            </a:r>
-          </a:p>
-        </p:txBody>
-      </p:sp>
-      <p:sp>
-        <p:nvSpPr>
-          <p:cNvPr id="7" name="Rectangle 6"/>
+          <p:cNvPr id="6" name="Rectangle 5"/>
           <p:cNvSpPr/>
           <p:nvPr/>
         </p:nvSpPr>
@@ -12410,7 +12235,7 @@
             <a:avLst/>
           </a:prstGeom>
           <a:solidFill>
-            <a:srgbClr val="EBF2FB"/>
+            <a:srgbClr val="E6E6DC"/>
           </a:solidFill>
           <a:ln w="12700">
             <a:solidFill>
@@ -12442,7 +12267,7 @@
       </p:sp>
       <p:sp>
         <p:nvSpPr>
-          <p:cNvPr id="8" name="Oval 7"/>
+          <p:cNvPr id="7" name="Oval 6"/>
           <p:cNvSpPr/>
           <p:nvPr/>
         </p:nvSpPr>
@@ -12485,7 +12310,7 @@
       </p:sp>
       <p:sp>
         <p:nvSpPr>
-          <p:cNvPr id="9" name="TextBox 8"/>
+          <p:cNvPr id="8" name="TextBox 7"/>
           <p:cNvSpPr txBox="1"/>
           <p:nvPr/>
         </p:nvSpPr>
@@ -12511,7 +12336,7 @@
                 <a:solidFill>
                   <a:srgbClr val="FFFFFF"/>
                 </a:solidFill>
-                <a:latin typeface="Calibri"/>
+                <a:latin typeface="Georgia"/>
               </a:rPr>
               <a:t>!</a:t>
             </a:r>
@@ -12520,7 +12345,7 @@
       </p:sp>
       <p:sp>
         <p:nvSpPr>
-          <p:cNvPr id="10" name="TextBox 9"/>
+          <p:cNvPr id="9" name="TextBox 8"/>
           <p:cNvSpPr txBox="1"/>
           <p:nvPr/>
         </p:nvSpPr>
@@ -12544,9 +12369,9 @@
             <a:r>
               <a:rPr sz="1600" b="1" i="0">
                 <a:solidFill>
-                  <a:srgbClr val="2C3E50"/>
-                </a:solidFill>
-                <a:latin typeface="Calibri"/>
+                  <a:srgbClr val="1E2B26"/>
+                </a:solidFill>
+                <a:latin typeface="Segoe UI"/>
               </a:rPr>
               <a:t>RISQUES MAJEURS</a:t>
             </a:r>
@@ -12555,7 +12380,7 @@
       </p:sp>
       <p:sp>
         <p:nvSpPr>
-          <p:cNvPr id="11" name="Rectangle 10"/>
+          <p:cNvPr id="10" name="Rectangle 9"/>
           <p:cNvSpPr/>
           <p:nvPr/>
         </p:nvSpPr>
@@ -12598,7 +12423,7 @@
       </p:sp>
       <p:sp>
         <p:nvSpPr>
-          <p:cNvPr id="12" name="Rounded Rectangle 11"/>
+          <p:cNvPr id="11" name="Rounded Rectangle 10"/>
           <p:cNvSpPr/>
           <p:nvPr/>
         </p:nvSpPr>
@@ -12641,7 +12466,7 @@
       </p:sp>
       <p:sp>
         <p:nvSpPr>
-          <p:cNvPr id="13" name="TextBox 12"/>
+          <p:cNvPr id="12" name="TextBox 11"/>
           <p:cNvSpPr txBox="1"/>
           <p:nvPr/>
         </p:nvSpPr>
@@ -12667,7 +12492,7 @@
                 <a:solidFill>
                   <a:srgbClr val="FFFFFF"/>
                 </a:solidFill>
-                <a:latin typeface="Calibri"/>
+                <a:latin typeface="Segoe UI"/>
               </a:rPr>
               <a:t>Fiabilité</a:t>
             </a:r>
@@ -12676,7 +12501,7 @@
       </p:sp>
       <p:sp>
         <p:nvSpPr>
-          <p:cNvPr id="14" name="Oval 13"/>
+          <p:cNvPr id="13" name="Oval 12"/>
           <p:cNvSpPr/>
           <p:nvPr/>
         </p:nvSpPr>
@@ -12719,7 +12544,7 @@
       </p:sp>
       <p:sp>
         <p:nvSpPr>
-          <p:cNvPr id="15" name="TextBox 14"/>
+          <p:cNvPr id="14" name="TextBox 13"/>
           <p:cNvSpPr txBox="1"/>
           <p:nvPr/>
         </p:nvSpPr>
@@ -12745,7 +12570,7 @@
                 <a:solidFill>
                   <a:srgbClr val="FFFFFF"/>
                 </a:solidFill>
-                <a:latin typeface="Calibri"/>
+                <a:latin typeface="Segoe UI"/>
               </a:rPr>
               <a:t>P1</a:t>
             </a:r>
@@ -12754,7 +12579,7 @@
       </p:sp>
       <p:sp>
         <p:nvSpPr>
-          <p:cNvPr id="16" name="TextBox 15"/>
+          <p:cNvPr id="15" name="TextBox 14"/>
           <p:cNvSpPr txBox="1"/>
           <p:nvPr/>
         </p:nvSpPr>
@@ -12778,9 +12603,9 @@
             <a:r>
               <a:rPr sz="1250" b="0" i="0">
                 <a:solidFill>
-                  <a:srgbClr val="2C3E50"/>
-                </a:solidFill>
-                <a:latin typeface="Calibri"/>
+                  <a:srgbClr val="1E2B26"/>
+                </a:solidFill>
+                <a:latin typeface="Segoe UI"/>
               </a:rPr>
               <a:t>Reporting non audité : crédibilité limitée auprès des investisseurs</a:t>
             </a:r>
@@ -12789,7 +12614,7 @@
       </p:sp>
       <p:sp>
         <p:nvSpPr>
-          <p:cNvPr id="17" name="Rounded Rectangle 16"/>
+          <p:cNvPr id="16" name="Rounded Rectangle 15"/>
           <p:cNvSpPr/>
           <p:nvPr/>
         </p:nvSpPr>
@@ -12832,7 +12657,7 @@
       </p:sp>
       <p:sp>
         <p:nvSpPr>
-          <p:cNvPr id="18" name="TextBox 17"/>
+          <p:cNvPr id="17" name="TextBox 16"/>
           <p:cNvSpPr txBox="1"/>
           <p:nvPr/>
         </p:nvSpPr>
@@ -12858,7 +12683,7 @@
                 <a:solidFill>
                   <a:srgbClr val="FFFFFF"/>
                 </a:solidFill>
-                <a:latin typeface="Calibri"/>
+                <a:latin typeface="Segoe UI"/>
               </a:rPr>
               <a:t>Opérationnel</a:t>
             </a:r>
@@ -12867,7 +12692,7 @@
       </p:sp>
       <p:sp>
         <p:nvSpPr>
-          <p:cNvPr id="19" name="Oval 18"/>
+          <p:cNvPr id="18" name="Oval 17"/>
           <p:cNvSpPr/>
           <p:nvPr/>
         </p:nvSpPr>
@@ -12910,7 +12735,7 @@
       </p:sp>
       <p:sp>
         <p:nvSpPr>
-          <p:cNvPr id="20" name="TextBox 19"/>
+          <p:cNvPr id="19" name="TextBox 18"/>
           <p:cNvSpPr txBox="1"/>
           <p:nvPr/>
         </p:nvSpPr>
@@ -12936,7 +12761,7 @@
                 <a:solidFill>
                   <a:srgbClr val="FFFFFF"/>
                 </a:solidFill>
-                <a:latin typeface="Calibri"/>
+                <a:latin typeface="Segoe UI"/>
               </a:rPr>
               <a:t>P1</a:t>
             </a:r>
@@ -12945,7 +12770,7 @@
       </p:sp>
       <p:sp>
         <p:nvSpPr>
-          <p:cNvPr id="21" name="TextBox 20"/>
+          <p:cNvPr id="20" name="TextBox 19"/>
           <p:cNvSpPr txBox="1"/>
           <p:nvPr/>
         </p:nvSpPr>
@@ -12969,9 +12794,9 @@
             <a:r>
               <a:rPr sz="1250" b="0" i="0">
                 <a:solidFill>
-                  <a:srgbClr val="2C3E50"/>
-                </a:solidFill>
-                <a:latin typeface="Calibri"/>
+                  <a:srgbClr val="1E2B26"/>
+                </a:solidFill>
+                <a:latin typeface="Segoe UI"/>
               </a:rPr>
               <a:t>Sinistralité élevée : risque humain et social</a:t>
             </a:r>
@@ -12980,7 +12805,7 @@
       </p:sp>
       <p:sp>
         <p:nvSpPr>
-          <p:cNvPr id="22" name="Rounded Rectangle 21"/>
+          <p:cNvPr id="21" name="Rounded Rectangle 20"/>
           <p:cNvSpPr/>
           <p:nvPr/>
         </p:nvSpPr>
@@ -13023,7 +12848,7 @@
       </p:sp>
       <p:sp>
         <p:nvSpPr>
-          <p:cNvPr id="23" name="TextBox 22"/>
+          <p:cNvPr id="22" name="TextBox 21"/>
           <p:cNvSpPr txBox="1"/>
           <p:nvPr/>
         </p:nvSpPr>
@@ -13049,7 +12874,7 @@
                 <a:solidFill>
                   <a:srgbClr val="FFFFFF"/>
                 </a:solidFill>
-                <a:latin typeface="Calibri"/>
+                <a:latin typeface="Segoe UI"/>
               </a:rPr>
               <a:t>Transition</a:t>
             </a:r>
@@ -13058,7 +12883,7 @@
       </p:sp>
       <p:sp>
         <p:nvSpPr>
-          <p:cNvPr id="24" name="Oval 23"/>
+          <p:cNvPr id="23" name="Oval 22"/>
           <p:cNvSpPr/>
           <p:nvPr/>
         </p:nvSpPr>
@@ -13101,7 +12926,7 @@
       </p:sp>
       <p:sp>
         <p:nvSpPr>
-          <p:cNvPr id="25" name="TextBox 24"/>
+          <p:cNvPr id="24" name="TextBox 23"/>
           <p:cNvSpPr txBox="1"/>
           <p:nvPr/>
         </p:nvSpPr>
@@ -13127,7 +12952,7 @@
                 <a:solidFill>
                   <a:srgbClr val="FFFFFF"/>
                 </a:solidFill>
-                <a:latin typeface="Calibri"/>
+                <a:latin typeface="Segoe UI"/>
               </a:rPr>
               <a:t>P2</a:t>
             </a:r>
@@ -13136,7 +12961,7 @@
       </p:sp>
       <p:sp>
         <p:nvSpPr>
-          <p:cNvPr id="26" name="TextBox 25"/>
+          <p:cNvPr id="25" name="TextBox 24"/>
           <p:cNvSpPr txBox="1"/>
           <p:nvPr/>
         </p:nvSpPr>
@@ -13160,9 +12985,9 @@
             <a:r>
               <a:rPr sz="1250" b="0" i="0">
                 <a:solidFill>
-                  <a:srgbClr val="2C3E50"/>
-                </a:solidFill>
-                <a:latin typeface="Calibri"/>
+                  <a:srgbClr val="1E2B26"/>
+                </a:solidFill>
+                <a:latin typeface="Segoe UI"/>
               </a:rPr>
               <a:t>Intensité carbone élevée : marge exposée à la tarification du carbone</a:t>
             </a:r>
@@ -13171,7 +12996,7 @@
       </p:sp>
       <p:sp>
         <p:nvSpPr>
-          <p:cNvPr id="27" name="Rounded Rectangle 26"/>
+          <p:cNvPr id="26" name="Rounded Rectangle 25"/>
           <p:cNvSpPr/>
           <p:nvPr/>
         </p:nvSpPr>
@@ -13214,7 +13039,7 @@
       </p:sp>
       <p:sp>
         <p:nvSpPr>
-          <p:cNvPr id="28" name="TextBox 27"/>
+          <p:cNvPr id="27" name="TextBox 26"/>
           <p:cNvSpPr txBox="1"/>
           <p:nvPr/>
         </p:nvSpPr>
@@ -13240,7 +13065,7 @@
                 <a:solidFill>
                   <a:srgbClr val="FFFFFF"/>
                 </a:solidFill>
-                <a:latin typeface="Calibri"/>
+                <a:latin typeface="Segoe UI"/>
               </a:rPr>
               <a:t>Réglementaire</a:t>
             </a:r>
@@ -13249,7 +13074,7 @@
       </p:sp>
       <p:sp>
         <p:nvSpPr>
-          <p:cNvPr id="29" name="Oval 28"/>
+          <p:cNvPr id="28" name="Oval 27"/>
           <p:cNvSpPr/>
           <p:nvPr/>
         </p:nvSpPr>
@@ -13292,7 +13117,7 @@
       </p:sp>
       <p:sp>
         <p:nvSpPr>
-          <p:cNvPr id="30" name="TextBox 29"/>
+          <p:cNvPr id="29" name="TextBox 28"/>
           <p:cNvSpPr txBox="1"/>
           <p:nvPr/>
         </p:nvSpPr>
@@ -13318,7 +13143,7 @@
                 <a:solidFill>
                   <a:srgbClr val="FFFFFF"/>
                 </a:solidFill>
-                <a:latin typeface="Calibri"/>
+                <a:latin typeface="Segoe UI"/>
               </a:rPr>
               <a:t>P2</a:t>
             </a:r>
@@ -13327,7 +13152,7 @@
       </p:sp>
       <p:sp>
         <p:nvSpPr>
-          <p:cNvPr id="31" name="TextBox 30"/>
+          <p:cNvPr id="30" name="TextBox 29"/>
           <p:cNvSpPr txBox="1"/>
           <p:nvPr/>
         </p:nvSpPr>
@@ -13351,9 +13176,9 @@
             <a:r>
               <a:rPr sz="1250" b="0" i="0">
                 <a:solidFill>
-                  <a:srgbClr val="2C3E50"/>
-                </a:solidFill>
-                <a:latin typeface="Calibri"/>
+                  <a:srgbClr val="1E2B26"/>
+                </a:solidFill>
+                <a:latin typeface="Segoe UI"/>
               </a:rPr>
               <a:t>Parité sous la cible : risque réglementaire et d'attractivité</a:t>
             </a:r>
@@ -13362,7 +13187,7 @@
       </p:sp>
       <p:sp>
         <p:nvSpPr>
-          <p:cNvPr id="32" name="Rectangle 31"/>
+          <p:cNvPr id="31" name="Rectangle 30"/>
           <p:cNvSpPr/>
           <p:nvPr/>
         </p:nvSpPr>
@@ -13375,11 +13200,11 @@
             <a:avLst/>
           </a:prstGeom>
           <a:solidFill>
-            <a:srgbClr val="EBF2FB"/>
+            <a:srgbClr val="E6E6DC"/>
           </a:solidFill>
           <a:ln w="12700">
             <a:solidFill>
-              <a:srgbClr val="27AE60"/>
+              <a:srgbClr val="2F6B4F"/>
             </a:solidFill>
           </a:ln>
         </p:spPr>
@@ -13407,7 +13232,7 @@
       </p:sp>
       <p:sp>
         <p:nvSpPr>
-          <p:cNvPr id="33" name="Oval 32"/>
+          <p:cNvPr id="32" name="Oval 31"/>
           <p:cNvSpPr/>
           <p:nvPr/>
         </p:nvSpPr>
@@ -13420,7 +13245,7 @@
             <a:avLst/>
           </a:prstGeom>
           <a:solidFill>
-            <a:srgbClr val="27AE60"/>
+            <a:srgbClr val="2F6B4F"/>
           </a:solidFill>
           <a:ln>
             <a:noFill/>
@@ -13450,7 +13275,7 @@
       </p:sp>
       <p:sp>
         <p:nvSpPr>
-          <p:cNvPr id="34" name="TextBox 33"/>
+          <p:cNvPr id="33" name="TextBox 32"/>
           <p:cNvSpPr txBox="1"/>
           <p:nvPr/>
         </p:nvSpPr>
@@ -13476,7 +13301,7 @@
                 <a:solidFill>
                   <a:srgbClr val="FFFFFF"/>
                 </a:solidFill>
-                <a:latin typeface="Calibri"/>
+                <a:latin typeface="Georgia"/>
               </a:rPr>
               <a:t>+</a:t>
             </a:r>
@@ -13485,7 +13310,7 @@
       </p:sp>
       <p:sp>
         <p:nvSpPr>
-          <p:cNvPr id="35" name="TextBox 34"/>
+          <p:cNvPr id="34" name="TextBox 33"/>
           <p:cNvSpPr txBox="1"/>
           <p:nvPr/>
         </p:nvSpPr>
@@ -13509,9 +13334,9 @@
             <a:r>
               <a:rPr sz="1600" b="1" i="0">
                 <a:solidFill>
-                  <a:srgbClr val="2C3E50"/>
-                </a:solidFill>
-                <a:latin typeface="Calibri"/>
+                  <a:srgbClr val="1E2B26"/>
+                </a:solidFill>
+                <a:latin typeface="Segoe UI"/>
               </a:rPr>
               <a:t>OPPORTUNITÉS MAJEURES</a:t>
             </a:r>
@@ -13520,7 +13345,7 @@
       </p:sp>
       <p:sp>
         <p:nvSpPr>
-          <p:cNvPr id="36" name="Rectangle 35"/>
+          <p:cNvPr id="35" name="Rectangle 34"/>
           <p:cNvSpPr/>
           <p:nvPr/>
         </p:nvSpPr>
@@ -13533,7 +13358,7 @@
             <a:avLst/>
           </a:prstGeom>
           <a:solidFill>
-            <a:srgbClr val="27AE60"/>
+            <a:srgbClr val="2F6B4F"/>
           </a:solidFill>
           <a:ln>
             <a:noFill/>
@@ -13563,7 +13388,7 @@
       </p:sp>
       <p:sp>
         <p:nvSpPr>
-          <p:cNvPr id="37" name="Rounded Rectangle 36"/>
+          <p:cNvPr id="36" name="Rounded Rectangle 35"/>
           <p:cNvSpPr/>
           <p:nvPr/>
         </p:nvSpPr>
@@ -13576,7 +13401,7 @@
             <a:avLst/>
           </a:prstGeom>
           <a:solidFill>
-            <a:srgbClr val="27AE60"/>
+            <a:srgbClr val="2F6B4F"/>
           </a:solidFill>
           <a:ln>
             <a:noFill/>
@@ -13606,7 +13431,7 @@
       </p:sp>
       <p:sp>
         <p:nvSpPr>
-          <p:cNvPr id="38" name="TextBox 37"/>
+          <p:cNvPr id="37" name="TextBox 36"/>
           <p:cNvSpPr txBox="1"/>
           <p:nvPr/>
         </p:nvSpPr>
@@ -13632,7 +13457,7 @@
                 <a:solidFill>
                   <a:srgbClr val="FFFFFF"/>
                 </a:solidFill>
-                <a:latin typeface="Calibri"/>
+                <a:latin typeface="Segoe UI"/>
               </a:rPr>
               <a:t>Financement</a:t>
             </a:r>
@@ -13641,7 +13466,7 @@
       </p:sp>
       <p:sp>
         <p:nvSpPr>
-          <p:cNvPr id="39" name="TextBox 38"/>
+          <p:cNvPr id="38" name="TextBox 37"/>
           <p:cNvSpPr txBox="1"/>
           <p:nvPr/>
         </p:nvSpPr>
@@ -13665,9 +13490,9 @@
             <a:r>
               <a:rPr sz="1250" b="0" i="0">
                 <a:solidFill>
-                  <a:srgbClr val="2C3E50"/>
-                </a:solidFill>
-                <a:latin typeface="Calibri"/>
+                  <a:srgbClr val="1E2B26"/>
+                </a:solidFill>
+                <a:latin typeface="Segoe UI"/>
               </a:rPr>
               <a:t>Gouvernance solide : accès facilité aux financements ESG (green bonds, prêts indexés)</a:t>
             </a:r>
@@ -13676,7 +13501,7 @@
       </p:sp>
       <p:sp>
         <p:nvSpPr>
-          <p:cNvPr id="40" name="Rounded Rectangle 39"/>
+          <p:cNvPr id="39" name="Rounded Rectangle 38"/>
           <p:cNvSpPr/>
           <p:nvPr/>
         </p:nvSpPr>
@@ -13689,7 +13514,7 @@
             <a:avLst/>
           </a:prstGeom>
           <a:solidFill>
-            <a:srgbClr val="27AE60"/>
+            <a:srgbClr val="2F6B4F"/>
           </a:solidFill>
           <a:ln>
             <a:noFill/>
@@ -13719,7 +13544,7 @@
       </p:sp>
       <p:sp>
         <p:nvSpPr>
-          <p:cNvPr id="41" name="TextBox 40"/>
+          <p:cNvPr id="40" name="TextBox 39"/>
           <p:cNvSpPr txBox="1"/>
           <p:nvPr/>
         </p:nvSpPr>
@@ -13745,7 +13570,7 @@
                 <a:solidFill>
                   <a:srgbClr val="FFFFFF"/>
                 </a:solidFill>
-                <a:latin typeface="Calibri"/>
+                <a:latin typeface="Segoe UI"/>
               </a:rPr>
               <a:t>Financement</a:t>
             </a:r>
@@ -13754,7 +13579,7 @@
       </p:sp>
       <p:sp>
         <p:nvSpPr>
-          <p:cNvPr id="42" name="TextBox 41"/>
+          <p:cNvPr id="41" name="TextBox 40"/>
           <p:cNvSpPr txBox="1"/>
           <p:nvPr/>
         </p:nvSpPr>
@@ -13778,9 +13603,9 @@
             <a:r>
               <a:rPr sz="1250" b="0" i="0">
                 <a:solidFill>
-                  <a:srgbClr val="2C3E50"/>
-                </a:solidFill>
-                <a:latin typeface="Calibri"/>
+                  <a:srgbClr val="1E2B26"/>
+                </a:solidFill>
+                <a:latin typeface="Segoe UI"/>
               </a:rPr>
               <a:t>Activités alignées Taxonomie : éligibilité aux financements verts</a:t>
             </a:r>
@@ -13789,7 +13614,7 @@
       </p:sp>
       <p:sp>
         <p:nvSpPr>
-          <p:cNvPr id="43" name="Rounded Rectangle 42"/>
+          <p:cNvPr id="42" name="Rounded Rectangle 41"/>
           <p:cNvSpPr/>
           <p:nvPr/>
         </p:nvSpPr>
@@ -13802,7 +13627,7 @@
             <a:avLst/>
           </a:prstGeom>
           <a:solidFill>
-            <a:srgbClr val="27AE60"/>
+            <a:srgbClr val="2F6B4F"/>
           </a:solidFill>
           <a:ln>
             <a:noFill/>
@@ -13832,7 +13657,7 @@
       </p:sp>
       <p:sp>
         <p:nvSpPr>
-          <p:cNvPr id="44" name="TextBox 43"/>
+          <p:cNvPr id="43" name="TextBox 42"/>
           <p:cNvSpPr txBox="1"/>
           <p:nvPr/>
         </p:nvSpPr>
@@ -13858,7 +13683,7 @@
                 <a:solidFill>
                   <a:srgbClr val="FFFFFF"/>
                 </a:solidFill>
-                <a:latin typeface="Calibri"/>
+                <a:latin typeface="Segoe UI"/>
               </a:rPr>
               <a:t>Coûts</a:t>
             </a:r>
@@ -13867,7 +13692,7 @@
       </p:sp>
       <p:sp>
         <p:nvSpPr>
-          <p:cNvPr id="45" name="TextBox 44"/>
+          <p:cNvPr id="44" name="TextBox 43"/>
           <p:cNvSpPr txBox="1"/>
           <p:nvPr/>
         </p:nvSpPr>
@@ -13891,9 +13716,9 @@
             <a:r>
               <a:rPr sz="1250" b="0" i="0">
                 <a:solidFill>
-                  <a:srgbClr val="2C3E50"/>
-                </a:solidFill>
-                <a:latin typeface="Calibri"/>
+                  <a:srgbClr val="1E2B26"/>
+                </a:solidFill>
+                <a:latin typeface="Segoe UI"/>
               </a:rPr>
               <a:t>Mix renouvelable engagé : réduction des coûts énergétiques à terme</a:t>
             </a:r>
@@ -13902,7 +13727,7 @@
       </p:sp>
       <p:sp>
         <p:nvSpPr>
-          <p:cNvPr id="46" name="Rounded Rectangle 45"/>
+          <p:cNvPr id="45" name="Rounded Rectangle 44"/>
           <p:cNvSpPr/>
           <p:nvPr/>
         </p:nvSpPr>
@@ -13915,7 +13740,7 @@
             <a:avLst/>
           </a:prstGeom>
           <a:solidFill>
-            <a:srgbClr val="27AE60"/>
+            <a:srgbClr val="2F6B4F"/>
           </a:solidFill>
           <a:ln>
             <a:noFill/>
@@ -13945,7 +13770,7 @@
       </p:sp>
       <p:sp>
         <p:nvSpPr>
-          <p:cNvPr id="47" name="TextBox 46"/>
+          <p:cNvPr id="46" name="TextBox 45"/>
           <p:cNvSpPr txBox="1"/>
           <p:nvPr/>
         </p:nvSpPr>
@@ -13971,7 +13796,7 @@
                 <a:solidFill>
                   <a:srgbClr val="FFFFFF"/>
                 </a:solidFill>
-                <a:latin typeface="Calibri"/>
+                <a:latin typeface="Segoe UI"/>
               </a:rPr>
               <a:t>Talents</a:t>
             </a:r>
@@ -13980,7 +13805,7 @@
       </p:sp>
       <p:sp>
         <p:nvSpPr>
-          <p:cNvPr id="48" name="TextBox 47"/>
+          <p:cNvPr id="47" name="TextBox 46"/>
           <p:cNvSpPr txBox="1"/>
           <p:nvPr/>
         </p:nvSpPr>
@@ -14004,9 +13829,9 @@
             <a:r>
               <a:rPr sz="1250" b="0" i="0">
                 <a:solidFill>
-                  <a:srgbClr val="2C3E50"/>
-                </a:solidFill>
-                <a:latin typeface="Calibri"/>
+                  <a:srgbClr val="1E2B26"/>
+                </a:solidFill>
+                <a:latin typeface="Segoe UI"/>
               </a:rPr>
               <a:t>Politique sociale : marque employeur et rétention des talents renforcées</a:t>
             </a:r>
@@ -14015,7 +13840,7 @@
       </p:sp>
       <p:sp>
         <p:nvSpPr>
-          <p:cNvPr id="49" name="TextBox 48"/>
+          <p:cNvPr id="48" name="TextBox 47"/>
           <p:cNvSpPr txBox="1"/>
           <p:nvPr/>
         </p:nvSpPr>
@@ -14039,9 +13864,9 @@
             <a:r>
               <a:rPr sz="800" b="0" i="0">
                 <a:solidFill>
-                  <a:srgbClr val="6B7C93"/>
-                </a:solidFill>
-                <a:latin typeface="Calibri"/>
+                  <a:srgbClr val="5F6B64"/>
+                </a:solidFill>
+                <a:latin typeface="Segoe UI"/>
               </a:rPr>
               <a:t>Acme Industries   |   18 / 23</a:t>
             </a:r>
@@ -14081,7 +13906,7 @@
             <a:avLst/>
           </a:prstGeom>
           <a:solidFill>
-            <a:srgbClr val="1B3A6B"/>
+            <a:srgbClr val="1F3D33"/>
           </a:solidFill>
           <a:ln>
             <a:noFill/>
@@ -14124,7 +13949,7 @@
             <a:avLst/>
           </a:prstGeom>
           <a:solidFill>
-            <a:srgbClr val="F39C12"/>
+            <a:srgbClr val="2E5A4B"/>
           </a:solidFill>
           <a:ln>
             <a:noFill/>
@@ -14178,9 +14003,9 @@
             <a:r>
               <a:rPr sz="20000" b="1" i="0">
                 <a:solidFill>
-                  <a:srgbClr val="EBF2FB"/>
-                </a:solidFill>
-                <a:latin typeface="Calibri"/>
+                  <a:srgbClr val="E6E6DC"/>
+                </a:solidFill>
+                <a:latin typeface="Georgia"/>
               </a:rPr>
               <a:t>02</a:t>
             </a:r>
@@ -14213,9 +14038,9 @@
             <a:r>
               <a:rPr sz="4000" b="1" i="0">
                 <a:solidFill>
-                  <a:srgbClr val="FFFFFF"/>
-                </a:solidFill>
-                <a:latin typeface="Calibri"/>
+                  <a:srgbClr val="F3F0E8"/>
+                </a:solidFill>
+                <a:latin typeface="Georgia"/>
               </a:rPr>
               <a:t>PLAN D'ACTION</a:t>
             </a:r>
@@ -14237,7 +14062,7 @@
             <a:avLst/>
           </a:prstGeom>
           <a:solidFill>
-            <a:srgbClr val="F39C12"/>
+            <a:srgbClr val="2E5A4B"/>
           </a:solidFill>
           <a:ln>
             <a:noFill/>
@@ -14291,9 +14116,9 @@
             <a:r>
               <a:rPr sz="1600" b="0" i="1">
                 <a:solidFill>
-                  <a:srgbClr val="AEC6E8"/>
-                </a:solidFill>
-                <a:latin typeface="Calibri"/>
+                  <a:srgbClr val="C9D8C5"/>
+                </a:solidFill>
+                <a:latin typeface="Segoe UI"/>
               </a:rPr>
               <a:t>Quoi faire, dans quel ordre, sous quel horizon.</a:t>
             </a:r>
@@ -14326,9 +14151,9 @@
             <a:r>
               <a:rPr sz="800" b="0" i="0">
                 <a:solidFill>
-                  <a:srgbClr val="6B7C93"/>
-                </a:solidFill>
-                <a:latin typeface="Calibri"/>
+                  <a:srgbClr val="5F6B64"/>
+                </a:solidFill>
+                <a:latin typeface="Segoe UI"/>
               </a:rPr>
               <a:t>Acme Industries   |   19 / 23</a:t>
             </a:r>
@@ -14368,7 +14193,7 @@
             <a:avLst/>
           </a:prstGeom>
           <a:solidFill>
-            <a:srgbClr val="F4F7FD"/>
+            <a:srgbClr val="F3F0E8"/>
           </a:solidFill>
           <a:ln>
             <a:noFill/>
@@ -14398,7 +14223,7 @@
       </p:sp>
       <p:pic>
         <p:nvPicPr>
-          <p:cNvPr id="3" name="Picture 2" descr="image.png"/>
+          <p:cNvPr id="3" name="Picture 2" descr="image.jpg"/>
           <p:cNvPicPr>
             <a:picLocks noChangeAspect="1"/>
           </p:cNvPicPr>
@@ -14446,9 +14271,9 @@
             <a:r>
               <a:rPr sz="3200" b="1" i="0">
                 <a:solidFill>
-                  <a:srgbClr val="2C3E50"/>
-                </a:solidFill>
-                <a:latin typeface="Calibri"/>
+                  <a:srgbClr val="1E2B26"/>
+                </a:solidFill>
+                <a:latin typeface="Georgia"/>
               </a:rPr>
               <a:t>Rapport ESG 2025</a:t>
             </a:r>
@@ -14481,9 +14306,9 @@
             <a:r>
               <a:rPr sz="1500" b="0" i="0">
                 <a:solidFill>
-                  <a:srgbClr val="6B7C93"/>
-                </a:solidFill>
-                <a:latin typeface="Calibri"/>
+                  <a:srgbClr val="5F6B64"/>
+                </a:solidFill>
+                <a:latin typeface="Segoe UI"/>
               </a:rPr>
               <a:t>Acme Industries  •  Industrie manufacturière</a:t>
             </a:r>
@@ -14516,9 +14341,9 @@
             <a:r>
               <a:rPr sz="800" b="0" i="0">
                 <a:solidFill>
-                  <a:srgbClr val="6B7C93"/>
-                </a:solidFill>
-                <a:latin typeface="Calibri"/>
+                  <a:srgbClr val="5F6B64"/>
+                </a:solidFill>
+                <a:latin typeface="Segoe UI"/>
               </a:rPr>
               <a:t>Acme Industries   |   2 / 23</a:t>
             </a:r>
@@ -14558,7 +14383,7 @@
             <a:avLst/>
           </a:prstGeom>
           <a:solidFill>
-            <a:srgbClr val="F4F7FD"/>
+            <a:srgbClr val="F3F0E8"/>
           </a:solidFill>
           <a:ln>
             <a:noFill/>
@@ -14594,14 +14419,14 @@
         </p:nvSpPr>
         <p:spPr>
           <a:xfrm>
-            <a:off x="0" y="0"/>
-            <a:ext cx="12188952" cy="1143000"/>
-          </a:xfrm>
-          <a:prstGeom prst="rect">
-            <a:avLst/>
-          </a:prstGeom>
-          <a:solidFill>
-            <a:srgbClr val="1B3A6B"/>
+            <a:off x="457200" y="384048"/>
+            <a:ext cx="201168" cy="201168"/>
+          </a:xfrm>
+          <a:prstGeom prst="rect">
+            <a:avLst/>
+          </a:prstGeom>
+          <a:solidFill>
+            <a:srgbClr val="1F3D33"/>
           </a:solidFill>
           <a:ln>
             <a:noFill/>
@@ -14631,20 +14456,55 @@
       </p:sp>
       <p:sp>
         <p:nvSpPr>
-          <p:cNvPr id="4" name="Rectangle 3"/>
+          <p:cNvPr id="4" name="TextBox 3"/>
+          <p:cNvSpPr txBox="1"/>
+          <p:nvPr/>
+        </p:nvSpPr>
+        <p:spPr>
+          <a:xfrm>
+            <a:off x="822960" y="237744"/>
+            <a:ext cx="10789920" cy="685800"/>
+          </a:xfrm>
+          <a:prstGeom prst="rect">
+            <a:avLst/>
+          </a:prstGeom>
+          <a:noFill/>
+        </p:spPr>
+        <p:txBody>
+          <a:bodyPr wrap="square">
+            <a:spAutoFit/>
+          </a:bodyPr>
+          <a:lstStyle/>
+          <a:p>
+            <a:pPr algn="l"/>
+            <a:r>
+              <a:rPr sz="1560" b="1" i="0">
+                <a:solidFill>
+                  <a:srgbClr val="1E2B26"/>
+                </a:solidFill>
+                <a:latin typeface="Georgia"/>
+              </a:rPr>
+              <a:t>Par où commencer : l'effort au regard de l'impact</a:t>
+            </a:r>
+          </a:p>
+        </p:txBody>
+      </p:sp>
+      <p:sp>
+        <p:nvSpPr>
+          <p:cNvPr id="5" name="Rectangle 4"/>
           <p:cNvSpPr/>
           <p:nvPr/>
         </p:nvSpPr>
         <p:spPr>
           <a:xfrm>
-            <a:off x="0" y="1143000"/>
-            <a:ext cx="64008" cy="5715000"/>
-          </a:xfrm>
-          <a:prstGeom prst="rect">
-            <a:avLst/>
-          </a:prstGeom>
-          <a:solidFill>
-            <a:srgbClr val="F39C12"/>
+            <a:off x="457200" y="1024128"/>
+            <a:ext cx="2011680" cy="18288"/>
+          </a:xfrm>
+          <a:prstGeom prst="rect">
+            <a:avLst/>
+          </a:prstGeom>
+          <a:solidFill>
+            <a:srgbClr val="1E2B26"/>
           </a:solidFill>
           <a:ln>
             <a:noFill/>
@@ -14672,79 +14532,9 @@
           </a:p>
         </p:txBody>
       </p:sp>
-      <p:sp>
-        <p:nvSpPr>
-          <p:cNvPr id="5" name="TextBox 4"/>
-          <p:cNvSpPr txBox="1"/>
-          <p:nvPr/>
-        </p:nvSpPr>
-        <p:spPr>
-          <a:xfrm>
-            <a:off x="292608" y="128016"/>
-            <a:ext cx="10972800" cy="292608"/>
-          </a:xfrm>
-          <a:prstGeom prst="rect">
-            <a:avLst/>
-          </a:prstGeom>
-          <a:noFill/>
-        </p:spPr>
-        <p:txBody>
-          <a:bodyPr wrap="square">
-            <a:spAutoFit/>
-          </a:bodyPr>
-          <a:lstStyle/>
-          <a:p>
-            <a:pPr algn="l"/>
-            <a:r>
-              <a:rPr sz="1100" b="1" i="0">
-                <a:solidFill>
-                  <a:srgbClr val="F39C12"/>
-                </a:solidFill>
-                <a:latin typeface="Calibri"/>
-              </a:rPr>
-              <a:t>PRIORISATION</a:t>
-            </a:r>
-          </a:p>
-        </p:txBody>
-      </p:sp>
-      <p:sp>
-        <p:nvSpPr>
-          <p:cNvPr id="6" name="TextBox 5"/>
-          <p:cNvSpPr txBox="1"/>
-          <p:nvPr/>
-        </p:nvSpPr>
-        <p:spPr>
-          <a:xfrm>
-            <a:off x="274320" y="384048"/>
-            <a:ext cx="11612880" cy="713232"/>
-          </a:xfrm>
-          <a:prstGeom prst="rect">
-            <a:avLst/>
-          </a:prstGeom>
-          <a:noFill/>
-        </p:spPr>
-        <p:txBody>
-          <a:bodyPr wrap="square">
-            <a:spAutoFit/>
-          </a:bodyPr>
-          <a:lstStyle/>
-          <a:p>
-            <a:pPr algn="l"/>
-            <a:r>
-              <a:rPr sz="2028" b="1" i="0">
-                <a:solidFill>
-                  <a:srgbClr val="FFFFFF"/>
-                </a:solidFill>
-                <a:latin typeface="Calibri"/>
-              </a:rPr>
-              <a:t>Par où commencer : l'effort au regard de l'impact</a:t>
-            </a:r>
-          </a:p>
-        </p:txBody>
-      </p:sp>
       <p:pic>
         <p:nvPicPr>
-          <p:cNvPr id="7" name="Picture 6" descr="image.png"/>
+          <p:cNvPr id="6" name="Picture 5" descr="image.png"/>
           <p:cNvPicPr>
             <a:picLocks noChangeAspect="1"/>
           </p:cNvPicPr>
@@ -14759,7 +14549,7 @@
         <p:spPr>
           <a:xfrm>
             <a:off x="320040" y="1463040"/>
-            <a:ext cx="8412480" cy="4896447"/>
+            <a:ext cx="8412480" cy="5163522"/>
           </a:xfrm>
           <a:prstGeom prst="rect">
             <a:avLst/>
@@ -14768,7 +14558,7 @@
       </p:pic>
       <p:sp>
         <p:nvSpPr>
-          <p:cNvPr id="8" name="Rounded Rectangle 7"/>
+          <p:cNvPr id="7" name="Rounded Rectangle 6"/>
           <p:cNvSpPr/>
           <p:nvPr/>
         </p:nvSpPr>
@@ -14781,11 +14571,11 @@
             <a:avLst/>
           </a:prstGeom>
           <a:solidFill>
-            <a:srgbClr val="EBF2FB"/>
+            <a:srgbClr val="E6E6DC"/>
           </a:solidFill>
           <a:ln w="15875">
             <a:solidFill>
-              <a:srgbClr val="F39C12"/>
+              <a:srgbClr val="2E5A4B"/>
             </a:solidFill>
           </a:ln>
         </p:spPr>
@@ -14813,7 +14603,7 @@
       </p:sp>
       <p:sp>
         <p:nvSpPr>
-          <p:cNvPr id="9" name="Rectangle 8"/>
+          <p:cNvPr id="8" name="Rectangle 7"/>
           <p:cNvSpPr/>
           <p:nvPr/>
         </p:nvSpPr>
@@ -14826,7 +14616,7 @@
             <a:avLst/>
           </a:prstGeom>
           <a:solidFill>
-            <a:srgbClr val="F39C12"/>
+            <a:srgbClr val="2E5A4B"/>
           </a:solidFill>
           <a:ln>
             <a:noFill/>
@@ -14856,7 +14646,7 @@
       </p:sp>
       <p:sp>
         <p:nvSpPr>
-          <p:cNvPr id="10" name="TextBox 9"/>
+          <p:cNvPr id="9" name="TextBox 8"/>
           <p:cNvSpPr txBox="1"/>
           <p:nvPr/>
         </p:nvSpPr>
@@ -14880,9 +14670,9 @@
             <a:r>
               <a:rPr sz="1200" b="1" i="0">
                 <a:solidFill>
-                  <a:srgbClr val="F39C12"/>
-                </a:solidFill>
-                <a:latin typeface="Calibri"/>
+                  <a:srgbClr val="2E5A4B"/>
+                </a:solidFill>
+                <a:latin typeface="Segoe UI"/>
               </a:rPr>
               <a:t>LECTURE MÉTIER</a:t>
             </a:r>
@@ -14891,7 +14681,7 @@
       </p:sp>
       <p:sp>
         <p:nvSpPr>
-          <p:cNvPr id="11" name="TextBox 10"/>
+          <p:cNvPr id="10" name="TextBox 9"/>
           <p:cNvSpPr txBox="1"/>
           <p:nvPr/>
         </p:nvSpPr>
@@ -14915,9 +14705,9 @@
             <a:r>
               <a:rPr sz="1300" b="0" i="0">
                 <a:solidFill>
-                  <a:srgbClr val="2C3E50"/>
-                </a:solidFill>
-                <a:latin typeface="Calibri"/>
+                  <a:srgbClr val="1E2B26"/>
+                </a:solidFill>
+                <a:latin typeface="Segoe UI"/>
               </a:rPr>
               <a:t>Trois actions combinent fort impact et effort limité — les actions 2, 3 et 4 — et peuvent être lancées immédiatement à moyens constants. Le chantier structurant du quadrant haut-droit justifie un budget et un responsable dédiés : il porte l'essentiel du potentiel de progression du score.</a:t>
             </a:r>
@@ -14926,7 +14716,7 @@
       </p:sp>
       <p:sp>
         <p:nvSpPr>
-          <p:cNvPr id="12" name="TextBox 11"/>
+          <p:cNvPr id="11" name="TextBox 10"/>
           <p:cNvSpPr txBox="1"/>
           <p:nvPr/>
         </p:nvSpPr>
@@ -14950,9 +14740,9 @@
             <a:r>
               <a:rPr sz="800" b="0" i="0">
                 <a:solidFill>
-                  <a:srgbClr val="6B7C93"/>
-                </a:solidFill>
-                <a:latin typeface="Calibri"/>
+                  <a:srgbClr val="5F6B64"/>
+                </a:solidFill>
+                <a:latin typeface="Segoe UI"/>
               </a:rPr>
               <a:t>Acme Industries   |   20 / 23</a:t>
             </a:r>
@@ -14992,7 +14782,7 @@
             <a:avLst/>
           </a:prstGeom>
           <a:solidFill>
-            <a:srgbClr val="F4F7FD"/>
+            <a:srgbClr val="F3F0E8"/>
           </a:solidFill>
           <a:ln>
             <a:noFill/>
@@ -15028,14 +14818,14 @@
         </p:nvSpPr>
         <p:spPr>
           <a:xfrm>
-            <a:off x="0" y="0"/>
-            <a:ext cx="12188952" cy="1143000"/>
-          </a:xfrm>
-          <a:prstGeom prst="rect">
-            <a:avLst/>
-          </a:prstGeom>
-          <a:solidFill>
-            <a:srgbClr val="1B3A6B"/>
+            <a:off x="457200" y="384048"/>
+            <a:ext cx="201168" cy="201168"/>
+          </a:xfrm>
+          <a:prstGeom prst="rect">
+            <a:avLst/>
+          </a:prstGeom>
+          <a:solidFill>
+            <a:srgbClr val="1F3D33"/>
           </a:solidFill>
           <a:ln>
             <a:noFill/>
@@ -15065,20 +14855,55 @@
       </p:sp>
       <p:sp>
         <p:nvSpPr>
-          <p:cNvPr id="4" name="Rectangle 3"/>
+          <p:cNvPr id="4" name="TextBox 3"/>
+          <p:cNvSpPr txBox="1"/>
+          <p:nvPr/>
+        </p:nvSpPr>
+        <p:spPr>
+          <a:xfrm>
+            <a:off x="822960" y="237744"/>
+            <a:ext cx="10789920" cy="685800"/>
+          </a:xfrm>
+          <a:prstGeom prst="rect">
+            <a:avLst/>
+          </a:prstGeom>
+          <a:noFill/>
+        </p:spPr>
+        <p:txBody>
+          <a:bodyPr wrap="square">
+            <a:spAutoFit/>
+          </a:bodyPr>
+          <a:lstStyle/>
+          <a:p>
+            <a:pPr algn="l"/>
+            <a:r>
+              <a:rPr sz="2000" b="1" i="0">
+                <a:solidFill>
+                  <a:srgbClr val="1E2B26"/>
+                </a:solidFill>
+                <a:latin typeface="Georgia"/>
+              </a:rPr>
+              <a:t>Recommandations Prioritaires</a:t>
+            </a:r>
+          </a:p>
+        </p:txBody>
+      </p:sp>
+      <p:sp>
+        <p:nvSpPr>
+          <p:cNvPr id="5" name="Rectangle 4"/>
           <p:cNvSpPr/>
           <p:nvPr/>
         </p:nvSpPr>
         <p:spPr>
           <a:xfrm>
-            <a:off x="0" y="1143000"/>
-            <a:ext cx="64008" cy="5715000"/>
-          </a:xfrm>
-          <a:prstGeom prst="rect">
-            <a:avLst/>
-          </a:prstGeom>
-          <a:solidFill>
-            <a:srgbClr val="F39C12"/>
+            <a:off x="457200" y="1024128"/>
+            <a:ext cx="2011680" cy="18288"/>
+          </a:xfrm>
+          <a:prstGeom prst="rect">
+            <a:avLst/>
+          </a:prstGeom>
+          <a:solidFill>
+            <a:srgbClr val="1E2B26"/>
           </a:solidFill>
           <a:ln>
             <a:noFill/>
@@ -15108,41 +14933,6 @@
       </p:sp>
       <p:sp>
         <p:nvSpPr>
-          <p:cNvPr id="5" name="TextBox 4"/>
-          <p:cNvSpPr txBox="1"/>
-          <p:nvPr/>
-        </p:nvSpPr>
-        <p:spPr>
-          <a:xfrm>
-            <a:off x="274320" y="182880"/>
-            <a:ext cx="11612880" cy="713232"/>
-          </a:xfrm>
-          <a:prstGeom prst="rect">
-            <a:avLst/>
-          </a:prstGeom>
-          <a:noFill/>
-        </p:spPr>
-        <p:txBody>
-          <a:bodyPr wrap="square">
-            <a:spAutoFit/>
-          </a:bodyPr>
-          <a:lstStyle/>
-          <a:p>
-            <a:pPr algn="l"/>
-            <a:r>
-              <a:rPr sz="2600" b="1" i="0">
-                <a:solidFill>
-                  <a:srgbClr val="FFFFFF"/>
-                </a:solidFill>
-                <a:latin typeface="Calibri"/>
-              </a:rPr>
-              <a:t>Recommandations Prioritaires</a:t>
-            </a:r>
-          </a:p>
-        </p:txBody>
-      </p:sp>
-      <p:sp>
-        <p:nvSpPr>
           <p:cNvPr id="6" name="TextBox 5"/>
           <p:cNvSpPr txBox="1"/>
           <p:nvPr/>
@@ -15167,9 +14957,9 @@
             <a:r>
               <a:rPr sz="1300" b="0" i="0">
                 <a:solidFill>
-                  <a:srgbClr val="6B7C93"/>
-                </a:solidFill>
-                <a:latin typeface="Calibri"/>
+                  <a:srgbClr val="5F6B64"/>
+                </a:solidFill>
+                <a:latin typeface="Segoe UI"/>
               </a:rPr>
               <a:t>Plan d'action priorisé — chaque levier, son bénéfice attendu et son horizon de mise en œuvre.</a:t>
             </a:r>
@@ -15191,11 +14981,11 @@
             <a:avLst/>
           </a:prstGeom>
           <a:solidFill>
-            <a:srgbClr val="EBF2FB"/>
+            <a:srgbClr val="E6E6DC"/>
           </a:solidFill>
           <a:ln w="15875">
             <a:solidFill>
-              <a:srgbClr val="27AE60"/>
+              <a:srgbClr val="2F6B4F"/>
             </a:solidFill>
           </a:ln>
         </p:spPr>
@@ -15236,7 +15026,7 @@
             <a:avLst/>
           </a:prstGeom>
           <a:solidFill>
-            <a:srgbClr val="27AE60"/>
+            <a:srgbClr val="2F6B4F"/>
           </a:solidFill>
           <a:ln>
             <a:noFill/>
@@ -15292,7 +15082,7 @@
                 <a:solidFill>
                   <a:srgbClr val="FFFFFF"/>
                 </a:solidFill>
-                <a:latin typeface="Calibri"/>
+                <a:latin typeface="Georgia"/>
               </a:rPr>
               <a:t>1</a:t>
             </a:r>
@@ -15325,9 +15115,9 @@
             <a:r>
               <a:rPr sz="1500" b="1" i="0">
                 <a:solidFill>
-                  <a:srgbClr val="2C3E50"/>
-                </a:solidFill>
-                <a:latin typeface="Calibri"/>
+                  <a:srgbClr val="1E2B26"/>
+                </a:solidFill>
+                <a:latin typeface="Georgia"/>
               </a:rPr>
               <a:t>Augmenter la part d'énergie renouvelable à 50%</a:t>
             </a:r>
@@ -15360,9 +15150,9 @@
             <a:r>
               <a:rPr sz="1100" b="0" i="0">
                 <a:solidFill>
-                  <a:srgbClr val="6B7C93"/>
-                </a:solidFill>
-                <a:latin typeface="Calibri"/>
+                  <a:srgbClr val="5F6B64"/>
+                </a:solidFill>
+                <a:latin typeface="Segoe UI"/>
               </a:rPr>
               <a:t>Réduit les émissions Scope 2 et l'exposition aux prix de l'énergie ; premier levier d'une trajectoire de réduction.  —  Direction des opérations</a:t>
             </a:r>
@@ -15384,7 +15174,7 @@
             <a:avLst/>
           </a:prstGeom>
           <a:solidFill>
-            <a:srgbClr val="27AE60"/>
+            <a:srgbClr val="2F6B4F"/>
           </a:solidFill>
           <a:ln>
             <a:noFill/>
@@ -15440,7 +15230,7 @@
                 <a:solidFill>
                   <a:srgbClr val="FFFFFF"/>
                 </a:solidFill>
-                <a:latin typeface="Calibri"/>
+                <a:latin typeface="Segoe UI"/>
               </a:rPr>
               <a:t>2027</a:t>
             </a:r>
@@ -15462,11 +15252,11 @@
             <a:avLst/>
           </a:prstGeom>
           <a:solidFill>
-            <a:srgbClr val="EBF2FB"/>
+            <a:srgbClr val="E6E6DC"/>
           </a:solidFill>
           <a:ln w="15875">
             <a:solidFill>
-              <a:srgbClr val="2E86C1"/>
+              <a:srgbClr val="3D6A8A"/>
             </a:solidFill>
           </a:ln>
         </p:spPr>
@@ -15507,7 +15297,7 @@
             <a:avLst/>
           </a:prstGeom>
           <a:solidFill>
-            <a:srgbClr val="2E86C1"/>
+            <a:srgbClr val="3D6A8A"/>
           </a:solidFill>
           <a:ln>
             <a:noFill/>
@@ -15563,7 +15353,7 @@
                 <a:solidFill>
                   <a:srgbClr val="FFFFFF"/>
                 </a:solidFill>
-                <a:latin typeface="Calibri"/>
+                <a:latin typeface="Georgia"/>
               </a:rPr>
               <a:t>2</a:t>
             </a:r>
@@ -15596,9 +15386,9 @@
             <a:r>
               <a:rPr sz="1500" b="1" i="0">
                 <a:solidFill>
-                  <a:srgbClr val="2C3E50"/>
-                </a:solidFill>
-                <a:latin typeface="Calibri"/>
+                  <a:srgbClr val="1E2B26"/>
+                </a:solidFill>
+                <a:latin typeface="Georgia"/>
               </a:rPr>
               <a:t>Définir des objectifs chiffrés de parité femme-homme</a:t>
             </a:r>
@@ -15631,9 +15421,9 @@
             <a:r>
               <a:rPr sz="1100" b="0" i="0">
                 <a:solidFill>
-                  <a:srgbClr val="6B7C93"/>
-                </a:solidFill>
-                <a:latin typeface="Calibri"/>
+                  <a:srgbClr val="5F6B64"/>
+                </a:solidFill>
+                <a:latin typeface="Segoe UI"/>
               </a:rPr>
               <a:t>Renforce la diversité des équipes et l'attractivité employeur ; améliore la fidélisation des talents.  —  Direction des ressources humaines</a:t>
             </a:r>
@@ -15655,7 +15445,7 @@
             <a:avLst/>
           </a:prstGeom>
           <a:solidFill>
-            <a:srgbClr val="2E86C1"/>
+            <a:srgbClr val="3D6A8A"/>
           </a:solidFill>
           <a:ln>
             <a:noFill/>
@@ -15711,7 +15501,7 @@
                 <a:solidFill>
                   <a:srgbClr val="FFFFFF"/>
                 </a:solidFill>
-                <a:latin typeface="Calibri"/>
+                <a:latin typeface="Segoe UI"/>
               </a:rPr>
               <a:t>2026</a:t>
             </a:r>
@@ -15733,11 +15523,11 @@
             <a:avLst/>
           </a:prstGeom>
           <a:solidFill>
-            <a:srgbClr val="EBF2FB"/>
+            <a:srgbClr val="E6E6DC"/>
           </a:solidFill>
           <a:ln w="15875">
             <a:solidFill>
-              <a:srgbClr val="8E44AD"/>
+              <a:srgbClr val="6B5B86"/>
             </a:solidFill>
           </a:ln>
         </p:spPr>
@@ -15778,7 +15568,7 @@
             <a:avLst/>
           </a:prstGeom>
           <a:solidFill>
-            <a:srgbClr val="8E44AD"/>
+            <a:srgbClr val="6B5B86"/>
           </a:solidFill>
           <a:ln>
             <a:noFill/>
@@ -15834,7 +15624,7 @@
                 <a:solidFill>
                   <a:srgbClr val="FFFFFF"/>
                 </a:solidFill>
-                <a:latin typeface="Calibri"/>
+                <a:latin typeface="Georgia"/>
               </a:rPr>
               <a:t>3</a:t>
             </a:r>
@@ -15867,9 +15657,9 @@
             <a:r>
               <a:rPr sz="1500" b="1" i="0">
                 <a:solidFill>
-                  <a:srgbClr val="2C3E50"/>
-                </a:solidFill>
-                <a:latin typeface="Calibri"/>
+                  <a:srgbClr val="1E2B26"/>
+                </a:solidFill>
+                <a:latin typeface="Georgia"/>
               </a:rPr>
               <a:t>Commander un audit ESG indépendant annuel</a:t>
             </a:r>
@@ -15902,9 +15692,9 @@
             <a:r>
               <a:rPr sz="1100" b="0" i="0">
                 <a:solidFill>
-                  <a:srgbClr val="6B7C93"/>
-                </a:solidFill>
-                <a:latin typeface="Calibri"/>
+                  <a:srgbClr val="5F6B64"/>
+                </a:solidFill>
+                <a:latin typeface="Segoe UI"/>
               </a:rPr>
               <a:t>Apporte l'assurance d'un tiers désormais requise par la CSRD ; renforce la confiance des investisseurs.  —  Direction générale</a:t>
             </a:r>
@@ -15926,7 +15716,7 @@
             <a:avLst/>
           </a:prstGeom>
           <a:solidFill>
-            <a:srgbClr val="8E44AD"/>
+            <a:srgbClr val="6B5B86"/>
           </a:solidFill>
           <a:ln>
             <a:noFill/>
@@ -15982,7 +15772,7 @@
                 <a:solidFill>
                   <a:srgbClr val="FFFFFF"/>
                 </a:solidFill>
-                <a:latin typeface="Calibri"/>
+                <a:latin typeface="Segoe UI"/>
               </a:rPr>
               <a:t>Annuel</a:t>
             </a:r>
@@ -16004,11 +15794,11 @@
             <a:avLst/>
           </a:prstGeom>
           <a:solidFill>
-            <a:srgbClr val="EBF2FB"/>
+            <a:srgbClr val="E6E6DC"/>
           </a:solidFill>
           <a:ln w="15875">
             <a:solidFill>
-              <a:srgbClr val="8E44AD"/>
+              <a:srgbClr val="6B5B86"/>
             </a:solidFill>
           </a:ln>
         </p:spPr>
@@ -16049,7 +15839,7 @@
             <a:avLst/>
           </a:prstGeom>
           <a:solidFill>
-            <a:srgbClr val="8E44AD"/>
+            <a:srgbClr val="6B5B86"/>
           </a:solidFill>
           <a:ln>
             <a:noFill/>
@@ -16105,7 +15895,7 @@
                 <a:solidFill>
                   <a:srgbClr val="FFFFFF"/>
                 </a:solidFill>
-                <a:latin typeface="Calibri"/>
+                <a:latin typeface="Georgia"/>
               </a:rPr>
               <a:t>4</a:t>
             </a:r>
@@ -16138,9 +15928,9 @@
             <a:r>
               <a:rPr sz="1500" b="1" i="0">
                 <a:solidFill>
-                  <a:srgbClr val="2C3E50"/>
-                </a:solidFill>
-                <a:latin typeface="Calibri"/>
+                  <a:srgbClr val="1E2B26"/>
+                </a:solidFill>
+                <a:latin typeface="Georgia"/>
               </a:rPr>
               <a:t>Aligner la stratégie ESG sur les ODD &amp; la TCFD</a:t>
             </a:r>
@@ -16173,9 +15963,9 @@
             <a:r>
               <a:rPr sz="1100" b="0" i="0">
                 <a:solidFill>
-                  <a:srgbClr val="6B7C93"/>
-                </a:solidFill>
-                <a:latin typeface="Calibri"/>
+                  <a:srgbClr val="5F6B64"/>
+                </a:solidFill>
+                <a:latin typeface="Segoe UI"/>
               </a:rPr>
               <a:t>Renforce l'alignement sur les cadres de référence (ODD, TCFD) et la comparabilité du reporting.  —  Direction RSE</a:t>
             </a:r>
@@ -16197,7 +15987,7 @@
             <a:avLst/>
           </a:prstGeom>
           <a:solidFill>
-            <a:srgbClr val="8E44AD"/>
+            <a:srgbClr val="6B5B86"/>
           </a:solidFill>
           <a:ln>
             <a:noFill/>
@@ -16253,7 +16043,7 @@
                 <a:solidFill>
                   <a:srgbClr val="FFFFFF"/>
                 </a:solidFill>
-                <a:latin typeface="Calibri"/>
+                <a:latin typeface="Segoe UI"/>
               </a:rPr>
               <a:t>Continu</a:t>
             </a:r>
@@ -16286,9 +16076,9 @@
             <a:r>
               <a:rPr sz="800" b="0" i="0">
                 <a:solidFill>
-                  <a:srgbClr val="6B7C93"/>
-                </a:solidFill>
-                <a:latin typeface="Calibri"/>
+                  <a:srgbClr val="5F6B64"/>
+                </a:solidFill>
+                <a:latin typeface="Segoe UI"/>
               </a:rPr>
               <a:t>Acme Industries   |   21 / 23</a:t>
             </a:r>
@@ -16328,7 +16118,7 @@
             <a:avLst/>
           </a:prstGeom>
           <a:solidFill>
-            <a:srgbClr val="F4F7FD"/>
+            <a:srgbClr val="F3F0E8"/>
           </a:solidFill>
           <a:ln>
             <a:noFill/>
@@ -16364,14 +16154,14 @@
         </p:nvSpPr>
         <p:spPr>
           <a:xfrm>
-            <a:off x="0" y="0"/>
-            <a:ext cx="12188952" cy="1143000"/>
-          </a:xfrm>
-          <a:prstGeom prst="rect">
-            <a:avLst/>
-          </a:prstGeom>
-          <a:solidFill>
-            <a:srgbClr val="1B3A6B"/>
+            <a:off x="457200" y="384048"/>
+            <a:ext cx="201168" cy="201168"/>
+          </a:xfrm>
+          <a:prstGeom prst="rect">
+            <a:avLst/>
+          </a:prstGeom>
+          <a:solidFill>
+            <a:srgbClr val="1F3D33"/>
           </a:solidFill>
           <a:ln>
             <a:noFill/>
@@ -16401,20 +16191,55 @@
       </p:sp>
       <p:sp>
         <p:nvSpPr>
-          <p:cNvPr id="4" name="Rectangle 3"/>
+          <p:cNvPr id="4" name="TextBox 3"/>
+          <p:cNvSpPr txBox="1"/>
+          <p:nvPr/>
+        </p:nvSpPr>
+        <p:spPr>
+          <a:xfrm>
+            <a:off x="822960" y="237744"/>
+            <a:ext cx="10789920" cy="685800"/>
+          </a:xfrm>
+          <a:prstGeom prst="rect">
+            <a:avLst/>
+          </a:prstGeom>
+          <a:noFill/>
+        </p:spPr>
+        <p:txBody>
+          <a:bodyPr wrap="square">
+            <a:spAutoFit/>
+          </a:bodyPr>
+          <a:lstStyle/>
+          <a:p>
+            <a:pPr algn="l"/>
+            <a:r>
+              <a:rPr sz="1800" b="1" i="0">
+                <a:solidFill>
+                  <a:srgbClr val="1E2B26"/>
+                </a:solidFill>
+                <a:latin typeface="Georgia"/>
+              </a:rPr>
+              <a:t>Un plan d'action ESG sur 12 mois</a:t>
+            </a:r>
+          </a:p>
+        </p:txBody>
+      </p:sp>
+      <p:sp>
+        <p:nvSpPr>
+          <p:cNvPr id="5" name="Rectangle 4"/>
           <p:cNvSpPr/>
           <p:nvPr/>
         </p:nvSpPr>
         <p:spPr>
           <a:xfrm>
-            <a:off x="0" y="1143000"/>
-            <a:ext cx="64008" cy="5715000"/>
-          </a:xfrm>
-          <a:prstGeom prst="rect">
-            <a:avLst/>
-          </a:prstGeom>
-          <a:solidFill>
-            <a:srgbClr val="F39C12"/>
+            <a:off x="457200" y="1024128"/>
+            <a:ext cx="2011680" cy="18288"/>
+          </a:xfrm>
+          <a:prstGeom prst="rect">
+            <a:avLst/>
+          </a:prstGeom>
+          <a:solidFill>
+            <a:srgbClr val="1E2B26"/>
           </a:solidFill>
           <a:ln>
             <a:noFill/>
@@ -16444,77 +16269,7 @@
       </p:sp>
       <p:sp>
         <p:nvSpPr>
-          <p:cNvPr id="5" name="TextBox 4"/>
-          <p:cNvSpPr txBox="1"/>
-          <p:nvPr/>
-        </p:nvSpPr>
-        <p:spPr>
-          <a:xfrm>
-            <a:off x="292608" y="128016"/>
-            <a:ext cx="10972800" cy="292608"/>
-          </a:xfrm>
-          <a:prstGeom prst="rect">
-            <a:avLst/>
-          </a:prstGeom>
-          <a:noFill/>
-        </p:spPr>
-        <p:txBody>
-          <a:bodyPr wrap="square">
-            <a:spAutoFit/>
-          </a:bodyPr>
-          <a:lstStyle/>
-          <a:p>
-            <a:pPr algn="l"/>
-            <a:r>
-              <a:rPr sz="1100" b="1" i="0">
-                <a:solidFill>
-                  <a:srgbClr val="F39C12"/>
-                </a:solidFill>
-                <a:latin typeface="Calibri"/>
-              </a:rPr>
-              <a:t>FEUILLE DE ROUTE 12 MOIS</a:t>
-            </a:r>
-          </a:p>
-        </p:txBody>
-      </p:sp>
-      <p:sp>
-        <p:nvSpPr>
-          <p:cNvPr id="6" name="TextBox 5"/>
-          <p:cNvSpPr txBox="1"/>
-          <p:nvPr/>
-        </p:nvSpPr>
-        <p:spPr>
-          <a:xfrm>
-            <a:off x="274320" y="384048"/>
-            <a:ext cx="11612880" cy="713232"/>
-          </a:xfrm>
-          <a:prstGeom prst="rect">
-            <a:avLst/>
-          </a:prstGeom>
-          <a:noFill/>
-        </p:spPr>
-        <p:txBody>
-          <a:bodyPr wrap="square">
-            <a:spAutoFit/>
-          </a:bodyPr>
-          <a:lstStyle/>
-          <a:p>
-            <a:pPr algn="l"/>
-            <a:r>
-              <a:rPr sz="2340" b="1" i="0">
-                <a:solidFill>
-                  <a:srgbClr val="FFFFFF"/>
-                </a:solidFill>
-                <a:latin typeface="Calibri"/>
-              </a:rPr>
-              <a:t>Un plan d'action ESG sur 12 mois</a:t>
-            </a:r>
-          </a:p>
-        </p:txBody>
-      </p:sp>
-      <p:sp>
-        <p:nvSpPr>
-          <p:cNvPr id="7" name="Rounded Rectangle 6"/>
+          <p:cNvPr id="6" name="Rounded Rectangle 5"/>
           <p:cNvSpPr/>
           <p:nvPr/>
         </p:nvSpPr>
@@ -16527,7 +16282,7 @@
             <a:avLst/>
           </a:prstGeom>
           <a:solidFill>
-            <a:srgbClr val="1B3A6B"/>
+            <a:srgbClr val="1F3D33"/>
           </a:solidFill>
           <a:ln>
             <a:noFill/>
@@ -16557,7 +16312,7 @@
       </p:sp>
       <p:sp>
         <p:nvSpPr>
-          <p:cNvPr id="8" name="TextBox 7"/>
+          <p:cNvPr id="7" name="TextBox 6"/>
           <p:cNvSpPr txBox="1"/>
           <p:nvPr/>
         </p:nvSpPr>
@@ -16581,9 +16336,9 @@
             <a:r>
               <a:rPr sz="1900" b="1" i="0">
                 <a:solidFill>
-                  <a:srgbClr val="F39C12"/>
-                </a:solidFill>
-                <a:latin typeface="Calibri"/>
+                  <a:srgbClr val="2E5A4B"/>
+                </a:solidFill>
+                <a:latin typeface="Georgia"/>
               </a:rPr>
               <a:t>0-3 mois</a:t>
             </a:r>
@@ -16592,7 +16347,7 @@
       </p:sp>
       <p:sp>
         <p:nvSpPr>
-          <p:cNvPr id="9" name="TextBox 8"/>
+          <p:cNvPr id="8" name="TextBox 7"/>
           <p:cNvSpPr txBox="1"/>
           <p:nvPr/>
         </p:nvSpPr>
@@ -16616,9 +16371,9 @@
             <a:r>
               <a:rPr sz="1100" b="0" i="0">
                 <a:solidFill>
-                  <a:srgbClr val="AEC6E8"/>
-                </a:solidFill>
-                <a:latin typeface="Calibri"/>
+                  <a:srgbClr val="C9D8C5"/>
+                </a:solidFill>
+                <a:latin typeface="Segoe UI"/>
               </a:rPr>
               <a:t>Quick wins &amp; fondations</a:t>
             </a:r>
@@ -16627,7 +16382,7 @@
       </p:sp>
       <p:sp>
         <p:nvSpPr>
-          <p:cNvPr id="10" name="Rounded Rectangle 9"/>
+          <p:cNvPr id="9" name="Rounded Rectangle 8"/>
           <p:cNvSpPr/>
           <p:nvPr/>
         </p:nvSpPr>
@@ -16640,11 +16395,11 @@
             <a:avLst/>
           </a:prstGeom>
           <a:solidFill>
-            <a:srgbClr val="EBF2FB"/>
+            <a:srgbClr val="E6E6DC"/>
           </a:solidFill>
           <a:ln w="12700">
             <a:solidFill>
-              <a:srgbClr val="8E44AD"/>
+              <a:srgbClr val="6B5B86"/>
             </a:solidFill>
           </a:ln>
         </p:spPr>
@@ -16672,7 +16427,7 @@
       </p:sp>
       <p:sp>
         <p:nvSpPr>
-          <p:cNvPr id="11" name="Rectangle 10"/>
+          <p:cNvPr id="10" name="Rectangle 9"/>
           <p:cNvSpPr/>
           <p:nvPr/>
         </p:nvSpPr>
@@ -16685,7 +16440,7 @@
             <a:avLst/>
           </a:prstGeom>
           <a:solidFill>
-            <a:srgbClr val="8E44AD"/>
+            <a:srgbClr val="6B5B86"/>
           </a:solidFill>
           <a:ln>
             <a:noFill/>
@@ -16715,7 +16470,7 @@
       </p:sp>
       <p:sp>
         <p:nvSpPr>
-          <p:cNvPr id="12" name="TextBox 11"/>
+          <p:cNvPr id="11" name="TextBox 10"/>
           <p:cNvSpPr txBox="1"/>
           <p:nvPr/>
         </p:nvSpPr>
@@ -16739,9 +16494,9 @@
             <a:r>
               <a:rPr sz="1200" b="1" i="0">
                 <a:solidFill>
-                  <a:srgbClr val="2C3E50"/>
-                </a:solidFill>
-                <a:latin typeface="Calibri"/>
+                  <a:srgbClr val="1E2B26"/>
+                </a:solidFill>
+                <a:latin typeface="Segoe UI"/>
               </a:rPr>
               <a:t>Commander un audit ESG indépendant annuel</a:t>
             </a:r>
@@ -16750,7 +16505,7 @@
       </p:sp>
       <p:sp>
         <p:nvSpPr>
-          <p:cNvPr id="13" name="Rounded Rectangle 12"/>
+          <p:cNvPr id="12" name="Rounded Rectangle 11"/>
           <p:cNvSpPr/>
           <p:nvPr/>
         </p:nvSpPr>
@@ -16763,7 +16518,7 @@
             <a:avLst/>
           </a:prstGeom>
           <a:solidFill>
-            <a:srgbClr val="F39C12"/>
+            <a:srgbClr val="2E5A4B"/>
           </a:solidFill>
           <a:ln>
             <a:noFill/>
@@ -16793,7 +16548,7 @@
       </p:sp>
       <p:sp>
         <p:nvSpPr>
-          <p:cNvPr id="14" name="TextBox 13"/>
+          <p:cNvPr id="13" name="TextBox 12"/>
           <p:cNvSpPr txBox="1"/>
           <p:nvPr/>
         </p:nvSpPr>
@@ -16817,9 +16572,9 @@
             <a:r>
               <a:rPr sz="850" b="1" i="0">
                 <a:solidFill>
-                  <a:srgbClr val="1B3A6B"/>
-                </a:solidFill>
-                <a:latin typeface="Calibri"/>
+                  <a:srgbClr val="1F3D33"/>
+                </a:solidFill>
+                <a:latin typeface="Segoe UI"/>
               </a:rPr>
               <a:t>QUICK WIN</a:t>
             </a:r>
@@ -16828,7 +16583,7 @@
       </p:sp>
       <p:sp>
         <p:nvSpPr>
-          <p:cNvPr id="15" name="Rounded Rectangle 14"/>
+          <p:cNvPr id="14" name="Rounded Rectangle 13"/>
           <p:cNvSpPr/>
           <p:nvPr/>
         </p:nvSpPr>
@@ -16841,7 +16596,7 @@
             <a:avLst/>
           </a:prstGeom>
           <a:solidFill>
-            <a:srgbClr val="1B3A6B"/>
+            <a:srgbClr val="1F3D33"/>
           </a:solidFill>
           <a:ln>
             <a:noFill/>
@@ -16871,7 +16626,7 @@
       </p:sp>
       <p:sp>
         <p:nvSpPr>
-          <p:cNvPr id="16" name="TextBox 15"/>
+          <p:cNvPr id="15" name="TextBox 14"/>
           <p:cNvSpPr txBox="1"/>
           <p:nvPr/>
         </p:nvSpPr>
@@ -16895,9 +16650,9 @@
             <a:r>
               <a:rPr sz="1900" b="1" i="0">
                 <a:solidFill>
-                  <a:srgbClr val="F39C12"/>
-                </a:solidFill>
-                <a:latin typeface="Calibri"/>
+                  <a:srgbClr val="2E5A4B"/>
+                </a:solidFill>
+                <a:latin typeface="Georgia"/>
               </a:rPr>
               <a:t>3-6 mois</a:t>
             </a:r>
@@ -16906,7 +16661,7 @@
       </p:sp>
       <p:sp>
         <p:nvSpPr>
-          <p:cNvPr id="17" name="TextBox 16"/>
+          <p:cNvPr id="16" name="TextBox 15"/>
           <p:cNvSpPr txBox="1"/>
           <p:nvPr/>
         </p:nvSpPr>
@@ -16930,9 +16685,9 @@
             <a:r>
               <a:rPr sz="1100" b="0" i="0">
                 <a:solidFill>
-                  <a:srgbClr val="AEC6E8"/>
-                </a:solidFill>
-                <a:latin typeface="Calibri"/>
+                  <a:srgbClr val="C9D8C5"/>
+                </a:solidFill>
+                <a:latin typeface="Segoe UI"/>
               </a:rPr>
               <a:t>Structuration</a:t>
             </a:r>
@@ -16941,7 +16696,7 @@
       </p:sp>
       <p:sp>
         <p:nvSpPr>
-          <p:cNvPr id="18" name="Rounded Rectangle 17"/>
+          <p:cNvPr id="17" name="Rounded Rectangle 16"/>
           <p:cNvSpPr/>
           <p:nvPr/>
         </p:nvSpPr>
@@ -16954,11 +16709,11 @@
             <a:avLst/>
           </a:prstGeom>
           <a:solidFill>
-            <a:srgbClr val="EBF2FB"/>
+            <a:srgbClr val="E6E6DC"/>
           </a:solidFill>
           <a:ln w="12700">
             <a:solidFill>
-              <a:srgbClr val="2E86C1"/>
+              <a:srgbClr val="3D6A8A"/>
             </a:solidFill>
           </a:ln>
         </p:spPr>
@@ -16986,7 +16741,7 @@
       </p:sp>
       <p:sp>
         <p:nvSpPr>
-          <p:cNvPr id="19" name="Rectangle 18"/>
+          <p:cNvPr id="18" name="Rectangle 17"/>
           <p:cNvSpPr/>
           <p:nvPr/>
         </p:nvSpPr>
@@ -16999,7 +16754,7 @@
             <a:avLst/>
           </a:prstGeom>
           <a:solidFill>
-            <a:srgbClr val="2E86C1"/>
+            <a:srgbClr val="3D6A8A"/>
           </a:solidFill>
           <a:ln>
             <a:noFill/>
@@ -17029,7 +16784,7 @@
       </p:sp>
       <p:sp>
         <p:nvSpPr>
-          <p:cNvPr id="20" name="TextBox 19"/>
+          <p:cNvPr id="19" name="TextBox 18"/>
           <p:cNvSpPr txBox="1"/>
           <p:nvPr/>
         </p:nvSpPr>
@@ -17053,9 +16808,9 @@
             <a:r>
               <a:rPr sz="1200" b="1" i="0">
                 <a:solidFill>
-                  <a:srgbClr val="2C3E50"/>
-                </a:solidFill>
-                <a:latin typeface="Calibri"/>
+                  <a:srgbClr val="1E2B26"/>
+                </a:solidFill>
+                <a:latin typeface="Segoe UI"/>
               </a:rPr>
               <a:t>Définir des objectifs chiffrés de parité femme-homme</a:t>
             </a:r>
@@ -17064,7 +16819,7 @@
       </p:sp>
       <p:sp>
         <p:nvSpPr>
-          <p:cNvPr id="21" name="Rounded Rectangle 20"/>
+          <p:cNvPr id="20" name="Rounded Rectangle 19"/>
           <p:cNvSpPr/>
           <p:nvPr/>
         </p:nvSpPr>
@@ -17077,7 +16832,7 @@
             <a:avLst/>
           </a:prstGeom>
           <a:solidFill>
-            <a:srgbClr val="F39C12"/>
+            <a:srgbClr val="2E5A4B"/>
           </a:solidFill>
           <a:ln>
             <a:noFill/>
@@ -17107,7 +16862,7 @@
       </p:sp>
       <p:sp>
         <p:nvSpPr>
-          <p:cNvPr id="22" name="TextBox 21"/>
+          <p:cNvPr id="21" name="TextBox 20"/>
           <p:cNvSpPr txBox="1"/>
           <p:nvPr/>
         </p:nvSpPr>
@@ -17131,9 +16886,9 @@
             <a:r>
               <a:rPr sz="850" b="1" i="0">
                 <a:solidFill>
-                  <a:srgbClr val="1B3A6B"/>
-                </a:solidFill>
-                <a:latin typeface="Calibri"/>
+                  <a:srgbClr val="1F3D33"/>
+                </a:solidFill>
+                <a:latin typeface="Segoe UI"/>
               </a:rPr>
               <a:t>QUICK WIN</a:t>
             </a:r>
@@ -17142,7 +16897,7 @@
       </p:sp>
       <p:sp>
         <p:nvSpPr>
-          <p:cNvPr id="23" name="Rounded Rectangle 22"/>
+          <p:cNvPr id="22" name="Rounded Rectangle 21"/>
           <p:cNvSpPr/>
           <p:nvPr/>
         </p:nvSpPr>
@@ -17155,11 +16910,11 @@
             <a:avLst/>
           </a:prstGeom>
           <a:solidFill>
-            <a:srgbClr val="EBF2FB"/>
+            <a:srgbClr val="E6E6DC"/>
           </a:solidFill>
           <a:ln w="12700">
             <a:solidFill>
-              <a:srgbClr val="8E44AD"/>
+              <a:srgbClr val="6B5B86"/>
             </a:solidFill>
           </a:ln>
         </p:spPr>
@@ -17187,7 +16942,7 @@
       </p:sp>
       <p:sp>
         <p:nvSpPr>
-          <p:cNvPr id="24" name="Rectangle 23"/>
+          <p:cNvPr id="23" name="Rectangle 22"/>
           <p:cNvSpPr/>
           <p:nvPr/>
         </p:nvSpPr>
@@ -17200,7 +16955,7 @@
             <a:avLst/>
           </a:prstGeom>
           <a:solidFill>
-            <a:srgbClr val="8E44AD"/>
+            <a:srgbClr val="6B5B86"/>
           </a:solidFill>
           <a:ln>
             <a:noFill/>
@@ -17230,7 +16985,7 @@
       </p:sp>
       <p:sp>
         <p:nvSpPr>
-          <p:cNvPr id="25" name="TextBox 24"/>
+          <p:cNvPr id="24" name="TextBox 23"/>
           <p:cNvSpPr txBox="1"/>
           <p:nvPr/>
         </p:nvSpPr>
@@ -17254,9 +17009,9 @@
             <a:r>
               <a:rPr sz="1200" b="1" i="0">
                 <a:solidFill>
-                  <a:srgbClr val="2C3E50"/>
-                </a:solidFill>
-                <a:latin typeface="Calibri"/>
+                  <a:srgbClr val="1E2B26"/>
+                </a:solidFill>
+                <a:latin typeface="Segoe UI"/>
               </a:rPr>
               <a:t>Aligner la stratégie ESG sur les ODD &amp; la TCFD</a:t>
             </a:r>
@@ -17265,7 +17020,7 @@
       </p:sp>
       <p:sp>
         <p:nvSpPr>
-          <p:cNvPr id="26" name="Rounded Rectangle 25"/>
+          <p:cNvPr id="25" name="Rounded Rectangle 24"/>
           <p:cNvSpPr/>
           <p:nvPr/>
         </p:nvSpPr>
@@ -17278,7 +17033,7 @@
             <a:avLst/>
           </a:prstGeom>
           <a:solidFill>
-            <a:srgbClr val="1B3A6B"/>
+            <a:srgbClr val="1F3D33"/>
           </a:solidFill>
           <a:ln>
             <a:noFill/>
@@ -17308,7 +17063,7 @@
       </p:sp>
       <p:sp>
         <p:nvSpPr>
-          <p:cNvPr id="27" name="TextBox 26"/>
+          <p:cNvPr id="26" name="TextBox 25"/>
           <p:cNvSpPr txBox="1"/>
           <p:nvPr/>
         </p:nvSpPr>
@@ -17332,9 +17087,9 @@
             <a:r>
               <a:rPr sz="1900" b="1" i="0">
                 <a:solidFill>
-                  <a:srgbClr val="F39C12"/>
-                </a:solidFill>
-                <a:latin typeface="Calibri"/>
+                  <a:srgbClr val="2E5A4B"/>
+                </a:solidFill>
+                <a:latin typeface="Georgia"/>
               </a:rPr>
               <a:t>6-12 mois</a:t>
             </a:r>
@@ -17343,7 +17098,7 @@
       </p:sp>
       <p:sp>
         <p:nvSpPr>
-          <p:cNvPr id="28" name="TextBox 27"/>
+          <p:cNvPr id="27" name="TextBox 26"/>
           <p:cNvSpPr txBox="1"/>
           <p:nvPr/>
         </p:nvSpPr>
@@ -17367,9 +17122,9 @@
             <a:r>
               <a:rPr sz="1100" b="0" i="0">
                 <a:solidFill>
-                  <a:srgbClr val="AEC6E8"/>
-                </a:solidFill>
-                <a:latin typeface="Calibri"/>
+                  <a:srgbClr val="C9D8C5"/>
+                </a:solidFill>
+                <a:latin typeface="Segoe UI"/>
               </a:rPr>
               <a:t>Deploiement</a:t>
             </a:r>
@@ -17378,7 +17133,7 @@
       </p:sp>
       <p:sp>
         <p:nvSpPr>
-          <p:cNvPr id="29" name="Rounded Rectangle 28"/>
+          <p:cNvPr id="28" name="Rounded Rectangle 27"/>
           <p:cNvSpPr/>
           <p:nvPr/>
         </p:nvSpPr>
@@ -17391,11 +17146,11 @@
             <a:avLst/>
           </a:prstGeom>
           <a:solidFill>
-            <a:srgbClr val="EBF2FB"/>
+            <a:srgbClr val="E6E6DC"/>
           </a:solidFill>
           <a:ln w="12700">
             <a:solidFill>
-              <a:srgbClr val="27AE60"/>
+              <a:srgbClr val="2F6B4F"/>
             </a:solidFill>
           </a:ln>
         </p:spPr>
@@ -17423,7 +17178,7 @@
       </p:sp>
       <p:sp>
         <p:nvSpPr>
-          <p:cNvPr id="30" name="Rectangle 29"/>
+          <p:cNvPr id="29" name="Rectangle 28"/>
           <p:cNvSpPr/>
           <p:nvPr/>
         </p:nvSpPr>
@@ -17436,7 +17191,7 @@
             <a:avLst/>
           </a:prstGeom>
           <a:solidFill>
-            <a:srgbClr val="27AE60"/>
+            <a:srgbClr val="2F6B4F"/>
           </a:solidFill>
           <a:ln>
             <a:noFill/>
@@ -17466,7 +17221,7 @@
       </p:sp>
       <p:sp>
         <p:nvSpPr>
-          <p:cNvPr id="31" name="TextBox 30"/>
+          <p:cNvPr id="30" name="TextBox 29"/>
           <p:cNvSpPr txBox="1"/>
           <p:nvPr/>
         </p:nvSpPr>
@@ -17490,9 +17245,9 @@
             <a:r>
               <a:rPr sz="1200" b="1" i="0">
                 <a:solidFill>
-                  <a:srgbClr val="2C3E50"/>
-                </a:solidFill>
-                <a:latin typeface="Calibri"/>
+                  <a:srgbClr val="1E2B26"/>
+                </a:solidFill>
+                <a:latin typeface="Segoe UI"/>
               </a:rPr>
               <a:t>Augmenter la part d'énergie renouvelable à 50%</a:t>
             </a:r>
@@ -17501,7 +17256,7 @@
       </p:sp>
       <p:sp>
         <p:nvSpPr>
-          <p:cNvPr id="32" name="TextBox 31"/>
+          <p:cNvPr id="31" name="TextBox 30"/>
           <p:cNvSpPr txBox="1"/>
           <p:nvPr/>
         </p:nvSpPr>
@@ -17525,9 +17280,9 @@
             <a:r>
               <a:rPr sz="800" b="0" i="0">
                 <a:solidFill>
-                  <a:srgbClr val="6B7C93"/>
-                </a:solidFill>
-                <a:latin typeface="Calibri"/>
+                  <a:srgbClr val="5F6B64"/>
+                </a:solidFill>
+                <a:latin typeface="Segoe UI"/>
               </a:rPr>
               <a:t>Acme Industries   |   22 / 23</a:t>
             </a:r>
@@ -17567,7 +17322,7 @@
             <a:avLst/>
           </a:prstGeom>
           <a:solidFill>
-            <a:srgbClr val="1B3A6B"/>
+            <a:srgbClr val="1F3D33"/>
           </a:solidFill>
           <a:ln>
             <a:noFill/>
@@ -17610,7 +17365,7 @@
             <a:avLst/>
           </a:prstGeom>
           <a:solidFill>
-            <a:srgbClr val="F39C12"/>
+            <a:srgbClr val="2E5A4B"/>
           </a:solidFill>
           <a:ln>
             <a:noFill/>
@@ -17664,9 +17419,9 @@
             <a:r>
               <a:rPr sz="3000" b="1" i="0">
                 <a:solidFill>
-                  <a:srgbClr val="FFFFFF"/>
-                </a:solidFill>
-                <a:latin typeface="Calibri"/>
+                  <a:srgbClr val="F3F0E8"/>
+                </a:solidFill>
+                <a:latin typeface="Georgia"/>
               </a:rPr>
               <a:t>Conclusion &amp; Engagements</a:t>
             </a:r>
@@ -17688,7 +17443,7 @@
             <a:avLst/>
           </a:prstGeom>
           <a:solidFill>
-            <a:srgbClr val="F39C12"/>
+            <a:srgbClr val="2E5A4B"/>
           </a:solidFill>
           <a:ln>
             <a:noFill/>
@@ -17742,9 +17497,9 @@
             <a:r>
               <a:rPr sz="2000" b="1" i="0">
                 <a:solidFill>
-                  <a:srgbClr val="FFFFFF"/>
-                </a:solidFill>
-                <a:latin typeface="Calibri"/>
+                  <a:srgbClr val="F3F0E8"/>
+                </a:solidFill>
+                <a:latin typeface="Georgia"/>
               </a:rPr>
               <a:t>Acme Industries affiche un profil ESG solide (66/100, A), porté par la gouvernance (75/100) ; le social (55/100) concentre le potentiel de progression.</a:t>
             </a:r>
@@ -17777,9 +17532,9 @@
             <a:r>
               <a:rPr sz="1300" b="1" i="0">
                 <a:solidFill>
-                  <a:srgbClr val="F39C12"/>
-                </a:solidFill>
-                <a:latin typeface="Calibri"/>
+                  <a:srgbClr val="2E5A4B"/>
+                </a:solidFill>
+                <a:latin typeface="Segoe UI"/>
               </a:rPr>
               <a:t>NOS ENGAGEMENTS PRIORITAIRES</a:t>
             </a:r>
@@ -17812,9 +17567,9 @@
             <a:r>
               <a:rPr sz="3000" b="1" i="0">
                 <a:solidFill>
-                  <a:srgbClr val="F39C12"/>
-                </a:solidFill>
-                <a:latin typeface="Calibri"/>
+                  <a:srgbClr val="2E5A4B"/>
+                </a:solidFill>
+                <a:latin typeface="Georgia"/>
               </a:rPr>
               <a:t>01</a:t>
             </a:r>
@@ -17847,9 +17602,9 @@
             <a:r>
               <a:rPr sz="1600" b="1" i="0">
                 <a:solidFill>
-                  <a:srgbClr val="FFFFFF"/>
-                </a:solidFill>
-                <a:latin typeface="Calibri"/>
+                  <a:srgbClr val="F3F0E8"/>
+                </a:solidFill>
+                <a:latin typeface="Segoe UI"/>
               </a:rPr>
               <a:t>Augmenter la part d'énergie renouvelable à 50%</a:t>
             </a:r>
@@ -17882,9 +17637,9 @@
             <a:r>
               <a:rPr sz="1300" b="1" i="0">
                 <a:solidFill>
-                  <a:srgbClr val="AEC6E8"/>
-                </a:solidFill>
-                <a:latin typeface="Calibri"/>
+                  <a:srgbClr val="C9D8C5"/>
+                </a:solidFill>
+                <a:latin typeface="Segoe UI"/>
               </a:rPr>
               <a:t>2027</a:t>
             </a:r>
@@ -17960,9 +17715,9 @@
             <a:r>
               <a:rPr sz="3000" b="1" i="0">
                 <a:solidFill>
-                  <a:srgbClr val="F39C12"/>
-                </a:solidFill>
-                <a:latin typeface="Calibri"/>
+                  <a:srgbClr val="2E5A4B"/>
+                </a:solidFill>
+                <a:latin typeface="Georgia"/>
               </a:rPr>
               <a:t>02</a:t>
             </a:r>
@@ -17995,9 +17750,9 @@
             <a:r>
               <a:rPr sz="1600" b="1" i="0">
                 <a:solidFill>
-                  <a:srgbClr val="FFFFFF"/>
-                </a:solidFill>
-                <a:latin typeface="Calibri"/>
+                  <a:srgbClr val="F3F0E8"/>
+                </a:solidFill>
+                <a:latin typeface="Segoe UI"/>
               </a:rPr>
               <a:t>Définir des objectifs chiffrés de parité femme-homme</a:t>
             </a:r>
@@ -18030,9 +17785,9 @@
             <a:r>
               <a:rPr sz="1300" b="1" i="0">
                 <a:solidFill>
-                  <a:srgbClr val="AEC6E8"/>
-                </a:solidFill>
-                <a:latin typeface="Calibri"/>
+                  <a:srgbClr val="C9D8C5"/>
+                </a:solidFill>
+                <a:latin typeface="Segoe UI"/>
               </a:rPr>
               <a:t>2026</a:t>
             </a:r>
@@ -18108,9 +17863,9 @@
             <a:r>
               <a:rPr sz="3000" b="1" i="0">
                 <a:solidFill>
-                  <a:srgbClr val="F39C12"/>
-                </a:solidFill>
-                <a:latin typeface="Calibri"/>
+                  <a:srgbClr val="2E5A4B"/>
+                </a:solidFill>
+                <a:latin typeface="Georgia"/>
               </a:rPr>
               <a:t>03</a:t>
             </a:r>
@@ -18143,9 +17898,9 @@
             <a:r>
               <a:rPr sz="1600" b="1" i="0">
                 <a:solidFill>
-                  <a:srgbClr val="FFFFFF"/>
-                </a:solidFill>
-                <a:latin typeface="Calibri"/>
+                  <a:srgbClr val="F3F0E8"/>
+                </a:solidFill>
+                <a:latin typeface="Segoe UI"/>
               </a:rPr>
               <a:t>Commander un audit ESG indépendant annuel</a:t>
             </a:r>
@@ -18178,9 +17933,9 @@
             <a:r>
               <a:rPr sz="1300" b="1" i="0">
                 <a:solidFill>
-                  <a:srgbClr val="AEC6E8"/>
-                </a:solidFill>
-                <a:latin typeface="Calibri"/>
+                  <a:srgbClr val="C9D8C5"/>
+                </a:solidFill>
+                <a:latin typeface="Segoe UI"/>
               </a:rPr>
               <a:t>Annuel</a:t>
             </a:r>
@@ -18213,9 +17968,9 @@
             <a:r>
               <a:rPr sz="900" b="0" i="1">
                 <a:solidFill>
-                  <a:srgbClr val="AEC6E8"/>
-                </a:solidFill>
-                <a:latin typeface="Calibri"/>
+                  <a:srgbClr val="C9D8C5"/>
+                </a:solidFill>
+                <a:latin typeface="Segoe UI"/>
               </a:rPr>
               <a:t>© 2025 Acme Industries — Document confidentiel</a:t>
             </a:r>
@@ -18248,9 +18003,9 @@
             <a:r>
               <a:rPr sz="800" b="0" i="0">
                 <a:solidFill>
-                  <a:srgbClr val="6B7C93"/>
-                </a:solidFill>
-                <a:latin typeface="Calibri"/>
+                  <a:srgbClr val="5F6B64"/>
+                </a:solidFill>
+                <a:latin typeface="Segoe UI"/>
               </a:rPr>
               <a:t>Acme Industries   |   23 / 23</a:t>
             </a:r>
@@ -18290,7 +18045,7 @@
             <a:avLst/>
           </a:prstGeom>
           <a:solidFill>
-            <a:srgbClr val="1B3A6B"/>
+            <a:srgbClr val="1F3D33"/>
           </a:solidFill>
           <a:ln>
             <a:noFill/>
@@ -18333,7 +18088,7 @@
             <a:avLst/>
           </a:prstGeom>
           <a:solidFill>
-            <a:srgbClr val="F39C12"/>
+            <a:srgbClr val="2E5A4B"/>
           </a:solidFill>
           <a:ln>
             <a:noFill/>
@@ -18387,9 +18142,9 @@
             <a:r>
               <a:rPr sz="1300" b="1" i="0">
                 <a:solidFill>
-                  <a:srgbClr val="F39C12"/>
-                </a:solidFill>
-                <a:latin typeface="Calibri"/>
+                  <a:srgbClr val="2E5A4B"/>
+                </a:solidFill>
+                <a:latin typeface="Segoe UI"/>
               </a:rPr>
               <a:t>LE MOT DE LA DIRECTION</a:t>
             </a:r>
@@ -18422,9 +18177,9 @@
             <a:r>
               <a:rPr sz="16000" b="1" i="0">
                 <a:solidFill>
-                  <a:srgbClr val="EBF2FB"/>
-                </a:solidFill>
-                <a:latin typeface="Calibri"/>
+                  <a:srgbClr val="E6E6DC"/>
+                </a:solidFill>
+                <a:latin typeface="Georgia"/>
               </a:rPr>
               <a:t>“</a:t>
             </a:r>
@@ -18457,9 +18212,9 @@
             <a:r>
               <a:rPr sz="2400" b="0" i="1">
                 <a:solidFill>
-                  <a:srgbClr val="FFFFFF"/>
-                </a:solidFill>
-                <a:latin typeface="Calibri"/>
+                  <a:srgbClr val="F3F0E8"/>
+                </a:solidFill>
+                <a:latin typeface="Georgia"/>
               </a:rPr>
               <a:t>« La performance durable est au cœur de notre stratégie industrielle : chaque euro investi doit créer de la valeur pour nos clients et pour la planète. »</a:t>
             </a:r>
@@ -18481,7 +18236,7 @@
             <a:avLst/>
           </a:prstGeom>
           <a:solidFill>
-            <a:srgbClr val="F39C12"/>
+            <a:srgbClr val="2E5A4B"/>
           </a:solidFill>
           <a:ln>
             <a:noFill/>
@@ -18535,9 +18290,9 @@
             <a:r>
               <a:rPr sz="1400" b="1" i="0">
                 <a:solidFill>
-                  <a:srgbClr val="AEC6E8"/>
-                </a:solidFill>
-                <a:latin typeface="Calibri"/>
+                  <a:srgbClr val="C9D8C5"/>
+                </a:solidFill>
+                <a:latin typeface="Segoe UI"/>
               </a:rPr>
               <a:t>J. Martin — Directrice Générale</a:t>
             </a:r>
@@ -18570,9 +18325,9 @@
             <a:r>
               <a:rPr sz="800" b="0" i="0">
                 <a:solidFill>
-                  <a:srgbClr val="6B7C93"/>
-                </a:solidFill>
-                <a:latin typeface="Calibri"/>
+                  <a:srgbClr val="5F6B64"/>
+                </a:solidFill>
+                <a:latin typeface="Segoe UI"/>
               </a:rPr>
               <a:t>Acme Industries   |   3 / 23</a:t>
             </a:r>
@@ -18612,7 +18367,7 @@
             <a:avLst/>
           </a:prstGeom>
           <a:solidFill>
-            <a:srgbClr val="F4F7FD"/>
+            <a:srgbClr val="F3F0E8"/>
           </a:solidFill>
           <a:ln>
             <a:noFill/>
@@ -18655,7 +18410,7 @@
             <a:avLst/>
           </a:prstGeom>
           <a:solidFill>
-            <a:srgbClr val="F39C12"/>
+            <a:srgbClr val="2E5A4B"/>
           </a:solidFill>
           <a:ln>
             <a:noFill/>
@@ -18709,9 +18464,9 @@
             <a:r>
               <a:rPr sz="3600" b="1" i="0">
                 <a:solidFill>
-                  <a:srgbClr val="2C3E50"/>
-                </a:solidFill>
-                <a:latin typeface="Calibri"/>
+                  <a:srgbClr val="1E2B26"/>
+                </a:solidFill>
+                <a:latin typeface="Georgia"/>
               </a:rPr>
               <a:t>SOMMAIRE</a:t>
             </a:r>
@@ -18733,7 +18488,7 @@
             <a:avLst/>
           </a:prstGeom>
           <a:solidFill>
-            <a:srgbClr val="F39C12"/>
+            <a:srgbClr val="2E5A4B"/>
           </a:solidFill>
           <a:ln>
             <a:noFill/>
@@ -18776,7 +18531,7 @@
             <a:avLst/>
           </a:prstGeom>
           <a:solidFill>
-            <a:srgbClr val="EBF2FB"/>
+            <a:srgbClr val="E6E6DC"/>
           </a:solidFill>
           <a:ln>
             <a:noFill/>
@@ -18830,9 +18585,9 @@
             <a:r>
               <a:rPr sz="4400" b="1" i="0">
                 <a:solidFill>
-                  <a:srgbClr val="F39C12"/>
-                </a:solidFill>
-                <a:latin typeface="Calibri"/>
+                  <a:srgbClr val="2E5A4B"/>
+                </a:solidFill>
+                <a:latin typeface="Georgia"/>
               </a:rPr>
               <a:t>01</a:t>
             </a:r>
@@ -18865,9 +18620,9 @@
             <a:r>
               <a:rPr sz="1500" b="1" i="0">
                 <a:solidFill>
-                  <a:srgbClr val="2C3E50"/>
-                </a:solidFill>
-                <a:latin typeface="Calibri"/>
+                  <a:srgbClr val="1E2B26"/>
+                </a:solidFill>
+                <a:latin typeface="Segoe UI"/>
               </a:rPr>
               <a:t>SITUATION</a:t>
             </a:r>
@@ -18889,7 +18644,7 @@
             <a:avLst/>
           </a:prstGeom>
           <a:solidFill>
-            <a:srgbClr val="F39C12"/>
+            <a:srgbClr val="2E5A4B"/>
           </a:solidFill>
           <a:ln>
             <a:noFill/>
@@ -18943,9 +18698,9 @@
             <a:r>
               <a:rPr sz="1200" b="0" i="0">
                 <a:solidFill>
-                  <a:srgbClr val="2C3E50"/>
-                </a:solidFill>
-                <a:latin typeface="Calibri"/>
+                  <a:srgbClr val="1E2B26"/>
+                </a:solidFill>
+                <a:latin typeface="Segoe UI"/>
               </a:rPr>
               <a:t>—  Synthèse Exécutive</a:t>
             </a:r>
@@ -18978,9 +18733,9 @@
             <a:r>
               <a:rPr sz="1200" b="0" i="0">
                 <a:solidFill>
-                  <a:srgbClr val="2C3E50"/>
-                </a:solidFill>
-                <a:latin typeface="Calibri"/>
+                  <a:srgbClr val="1E2B26"/>
+                </a:solidFill>
+                <a:latin typeface="Segoe UI"/>
               </a:rPr>
               <a:t>—  Pilier Environnemental</a:t>
             </a:r>
@@ -19013,9 +18768,9 @@
             <a:r>
               <a:rPr sz="1200" b="0" i="0">
                 <a:solidFill>
-                  <a:srgbClr val="2C3E50"/>
-                </a:solidFill>
-                <a:latin typeface="Calibri"/>
+                  <a:srgbClr val="1E2B26"/>
+                </a:solidFill>
+                <a:latin typeface="Segoe UI"/>
               </a:rPr>
               <a:t>—  Pilier Social</a:t>
             </a:r>
@@ -19048,9 +18803,9 @@
             <a:r>
               <a:rPr sz="1200" b="0" i="0">
                 <a:solidFill>
-                  <a:srgbClr val="2C3E50"/>
-                </a:solidFill>
-                <a:latin typeface="Calibri"/>
+                  <a:srgbClr val="1E2B26"/>
+                </a:solidFill>
+                <a:latin typeface="Segoe UI"/>
               </a:rPr>
               <a:t>—  Pilier Gouvernance</a:t>
             </a:r>
@@ -19072,7 +18827,7 @@
             <a:avLst/>
           </a:prstGeom>
           <a:solidFill>
-            <a:srgbClr val="EBF2FB"/>
+            <a:srgbClr val="E6E6DC"/>
           </a:solidFill>
           <a:ln>
             <a:noFill/>
@@ -19126,9 +18881,9 @@
             <a:r>
               <a:rPr sz="4400" b="1" i="0">
                 <a:solidFill>
-                  <a:srgbClr val="F39C12"/>
-                </a:solidFill>
-                <a:latin typeface="Calibri"/>
+                  <a:srgbClr val="2E5A4B"/>
+                </a:solidFill>
+                <a:latin typeface="Georgia"/>
               </a:rPr>
               <a:t>02</a:t>
             </a:r>
@@ -19161,9 +18916,9 @@
             <a:r>
               <a:rPr sz="1500" b="1" i="0">
                 <a:solidFill>
-                  <a:srgbClr val="2C3E50"/>
-                </a:solidFill>
-                <a:latin typeface="Calibri"/>
+                  <a:srgbClr val="1E2B26"/>
+                </a:solidFill>
+                <a:latin typeface="Segoe UI"/>
               </a:rPr>
               <a:t>DIAGNOSTIC</a:t>
             </a:r>
@@ -19185,7 +18940,7 @@
             <a:avLst/>
           </a:prstGeom>
           <a:solidFill>
-            <a:srgbClr val="F39C12"/>
+            <a:srgbClr val="2E5A4B"/>
           </a:solidFill>
           <a:ln>
             <a:noFill/>
@@ -19239,9 +18994,9 @@
             <a:r>
               <a:rPr sz="1200" b="0" i="0">
                 <a:solidFill>
-                  <a:srgbClr val="2C3E50"/>
-                </a:solidFill>
-                <a:latin typeface="Calibri"/>
+                  <a:srgbClr val="1E2B26"/>
+                </a:solidFill>
+                <a:latin typeface="Segoe UI"/>
               </a:rPr>
               <a:t>—  Positionnement</a:t>
             </a:r>
@@ -19274,9 +19029,9 @@
             <a:r>
               <a:rPr sz="1200" b="0" i="0">
                 <a:solidFill>
-                  <a:srgbClr val="2C3E50"/>
-                </a:solidFill>
-                <a:latin typeface="Calibri"/>
+                  <a:srgbClr val="1E2B26"/>
+                </a:solidFill>
+                <a:latin typeface="Segoe UI"/>
               </a:rPr>
               <a:t>—  Risques &amp; Opportunités</a:t>
             </a:r>
@@ -19309,9 +19064,9 @@
             <a:r>
               <a:rPr sz="1200" b="0" i="0">
                 <a:solidFill>
-                  <a:srgbClr val="2C3E50"/>
-                </a:solidFill>
-                <a:latin typeface="Calibri"/>
+                  <a:srgbClr val="1E2B26"/>
+                </a:solidFill>
+                <a:latin typeface="Segoe UI"/>
               </a:rPr>
               <a:t>—  Analyse Stratégique ESG</a:t>
             </a:r>
@@ -19333,7 +19088,7 @@
             <a:avLst/>
           </a:prstGeom>
           <a:solidFill>
-            <a:srgbClr val="EBF2FB"/>
+            <a:srgbClr val="E6E6DC"/>
           </a:solidFill>
           <a:ln>
             <a:noFill/>
@@ -19387,9 +19142,9 @@
             <a:r>
               <a:rPr sz="4400" b="1" i="0">
                 <a:solidFill>
-                  <a:srgbClr val="F39C12"/>
-                </a:solidFill>
-                <a:latin typeface="Calibri"/>
+                  <a:srgbClr val="2E5A4B"/>
+                </a:solidFill>
+                <a:latin typeface="Georgia"/>
               </a:rPr>
               <a:t>03</a:t>
             </a:r>
@@ -19422,9 +19177,9 @@
             <a:r>
               <a:rPr sz="1500" b="1" i="0">
                 <a:solidFill>
-                  <a:srgbClr val="2C3E50"/>
-                </a:solidFill>
-                <a:latin typeface="Calibri"/>
+                  <a:srgbClr val="1E2B26"/>
+                </a:solidFill>
+                <a:latin typeface="Segoe UI"/>
               </a:rPr>
               <a:t>PLAN D'ACTION</a:t>
             </a:r>
@@ -19446,7 +19201,7 @@
             <a:avLst/>
           </a:prstGeom>
           <a:solidFill>
-            <a:srgbClr val="F39C12"/>
+            <a:srgbClr val="2E5A4B"/>
           </a:solidFill>
           <a:ln>
             <a:noFill/>
@@ -19500,9 +19255,9 @@
             <a:r>
               <a:rPr sz="1200" b="0" i="0">
                 <a:solidFill>
-                  <a:srgbClr val="2C3E50"/>
-                </a:solidFill>
-                <a:latin typeface="Calibri"/>
+                  <a:srgbClr val="1E2B26"/>
+                </a:solidFill>
+                <a:latin typeface="Segoe UI"/>
               </a:rPr>
               <a:t>—  Recommandations Prioritaires</a:t>
             </a:r>
@@ -19535,9 +19290,9 @@
             <a:r>
               <a:rPr sz="1200" b="0" i="0">
                 <a:solidFill>
-                  <a:srgbClr val="2C3E50"/>
-                </a:solidFill>
-                <a:latin typeface="Calibri"/>
+                  <a:srgbClr val="1E2B26"/>
+                </a:solidFill>
+                <a:latin typeface="Segoe UI"/>
               </a:rPr>
               <a:t>—  Un plan d'action ESG sur 12 mois</a:t>
             </a:r>
@@ -19570,9 +19325,9 @@
             <a:r>
               <a:rPr sz="1200" b="0" i="0">
                 <a:solidFill>
-                  <a:srgbClr val="2C3E50"/>
-                </a:solidFill>
-                <a:latin typeface="Calibri"/>
+                  <a:srgbClr val="1E2B26"/>
+                </a:solidFill>
+                <a:latin typeface="Segoe UI"/>
               </a:rPr>
               <a:t>—  Conclusion &amp; Engagements</a:t>
             </a:r>
@@ -19605,9 +19360,9 @@
             <a:r>
               <a:rPr sz="800" b="0" i="0">
                 <a:solidFill>
-                  <a:srgbClr val="6B7C93"/>
-                </a:solidFill>
-                <a:latin typeface="Calibri"/>
+                  <a:srgbClr val="5F6B64"/>
+                </a:solidFill>
+                <a:latin typeface="Segoe UI"/>
               </a:rPr>
               <a:t>Acme Industries   |   4 / 23</a:t>
             </a:r>
@@ -19647,7 +19402,7 @@
             <a:avLst/>
           </a:prstGeom>
           <a:solidFill>
-            <a:srgbClr val="F4F7FD"/>
+            <a:srgbClr val="F3F0E8"/>
           </a:solidFill>
           <a:ln>
             <a:noFill/>
@@ -19690,7 +19445,7 @@
             <a:avLst/>
           </a:prstGeom>
           <a:solidFill>
-            <a:srgbClr val="1B3A6B"/>
+            <a:srgbClr val="1F3D33"/>
           </a:solidFill>
           <a:ln>
             <a:noFill/>
@@ -19733,7 +19488,7 @@
             <a:avLst/>
           </a:prstGeom>
           <a:solidFill>
-            <a:srgbClr val="F39C12"/>
+            <a:srgbClr val="2E5A4B"/>
           </a:solidFill>
           <a:ln>
             <a:noFill/>
@@ -19787,9 +19542,9 @@
             <a:r>
               <a:rPr sz="1300" b="1" i="0">
                 <a:solidFill>
-                  <a:srgbClr val="F39C12"/>
-                </a:solidFill>
-                <a:latin typeface="Calibri"/>
+                  <a:srgbClr val="2E5A4B"/>
+                </a:solidFill>
+                <a:latin typeface="Segoe UI"/>
               </a:rPr>
               <a:t>SYNTHÈSE ESG 2025</a:t>
             </a:r>
@@ -19824,7 +19579,7 @@
                 <a:solidFill>
                   <a:srgbClr val="FFFFFF"/>
                 </a:solidFill>
-                <a:latin typeface="Calibri"/>
+                <a:latin typeface="Georgia"/>
               </a:rPr>
               <a:t>66</a:t>
             </a:r>
@@ -19857,9 +19612,9 @@
             <a:r>
               <a:rPr sz="2200" b="0" i="0">
                 <a:solidFill>
-                  <a:srgbClr val="AEC6E8"/>
-                </a:solidFill>
-                <a:latin typeface="Calibri"/>
+                  <a:srgbClr val="C9D8C5"/>
+                </a:solidFill>
+                <a:latin typeface="Segoe UI"/>
               </a:rPr>
               <a:t>/ 100</a:t>
             </a:r>
@@ -19881,7 +19636,7 @@
             <a:avLst/>
           </a:prstGeom>
           <a:solidFill>
-            <a:srgbClr val="F39C12"/>
+            <a:srgbClr val="2E5A4B"/>
           </a:solidFill>
           <a:ln>
             <a:noFill/>
@@ -19935,9 +19690,9 @@
             <a:r>
               <a:rPr sz="3000" b="1" i="0">
                 <a:solidFill>
-                  <a:srgbClr val="1B3A6B"/>
-                </a:solidFill>
-                <a:latin typeface="Calibri"/>
+                  <a:srgbClr val="1F3D33"/>
+                </a:solidFill>
+                <a:latin typeface="Georgia"/>
               </a:rPr>
               <a:t>A</a:t>
             </a:r>
@@ -19970,9 +19725,9 @@
             <a:r>
               <a:rPr sz="1200" b="1" i="0">
                 <a:solidFill>
-                  <a:srgbClr val="AEC6E8"/>
-                </a:solidFill>
-                <a:latin typeface="Calibri"/>
+                  <a:srgbClr val="C9D8C5"/>
+                </a:solidFill>
+                <a:latin typeface="Segoe UI"/>
               </a:rPr>
               <a:t>SCORE ESG GLOBAL</a:t>
             </a:r>
@@ -20007,7 +19762,7 @@
                 <a:solidFill>
                   <a:srgbClr val="4CAF50"/>
                 </a:solidFill>
-                <a:latin typeface="Calibri"/>
+                <a:latin typeface="Segoe UI"/>
               </a:rPr>
               <a:t>+10 pts  vs 2024</a:t>
             </a:r>
@@ -20040,9 +19795,9 @@
             <a:r>
               <a:rPr sz="3400" b="1" i="0">
                 <a:solidFill>
-                  <a:srgbClr val="2C3E50"/>
-                </a:solidFill>
-                <a:latin typeface="Calibri"/>
+                  <a:srgbClr val="1E2B26"/>
+                </a:solidFill>
+                <a:latin typeface="Georgia"/>
               </a:rPr>
               <a:t>Synthèse Exécutive</a:t>
             </a:r>
@@ -20064,7 +19819,7 @@
             <a:avLst/>
           </a:prstGeom>
           <a:solidFill>
-            <a:srgbClr val="F39C12"/>
+            <a:srgbClr val="2E5A4B"/>
           </a:solidFill>
           <a:ln>
             <a:noFill/>
@@ -20118,9 +19873,9 @@
             <a:r>
               <a:rPr sz="1600" b="0" i="0">
                 <a:solidFill>
-                  <a:srgbClr val="2C3E50"/>
-                </a:solidFill>
-                <a:latin typeface="Calibri"/>
+                  <a:srgbClr val="1E2B26"/>
+                </a:solidFill>
+                <a:latin typeface="Segoe UI"/>
               </a:rPr>
               <a:t>Acme Industries affiche un profil ESG solide (66/100, A), porté par la gouvernance (75/100) ; le social (55/100) concentre le potentiel de progression.</a:t>
             </a:r>
@@ -20153,9 +19908,9 @@
             <a:r>
               <a:rPr sz="1200" b="1" i="0">
                 <a:solidFill>
-                  <a:srgbClr val="6B7C93"/>
-                </a:solidFill>
-                <a:latin typeface="Calibri"/>
+                  <a:srgbClr val="5F6B64"/>
+                </a:solidFill>
+                <a:latin typeface="Segoe UI"/>
               </a:rPr>
               <a:t>PERFORMANCE PAR PILIER</a:t>
             </a:r>
@@ -20188,9 +19943,9 @@
             <a:r>
               <a:rPr sz="1250" b="1" i="0">
                 <a:solidFill>
-                  <a:srgbClr val="2C3E50"/>
-                </a:solidFill>
-                <a:latin typeface="Calibri"/>
+                  <a:srgbClr val="1E2B26"/>
+                </a:solidFill>
+                <a:latin typeface="Segoe UI"/>
               </a:rPr>
               <a:t>Environnement</a:t>
             </a:r>
@@ -20223,9 +19978,9 @@
             <a:r>
               <a:rPr sz="1300" b="1" i="0">
                 <a:solidFill>
-                  <a:srgbClr val="27AE60"/>
-                </a:solidFill>
-                <a:latin typeface="Calibri"/>
+                  <a:srgbClr val="2F6B4F"/>
+                </a:solidFill>
+                <a:latin typeface="Georgia"/>
               </a:rPr>
               <a:t>70</a:t>
             </a:r>
@@ -20290,7 +20045,7 @@
             <a:avLst/>
           </a:prstGeom>
           <a:solidFill>
-            <a:srgbClr val="27AE60"/>
+            <a:srgbClr val="2F6B4F"/>
           </a:solidFill>
           <a:ln>
             <a:noFill/>
@@ -20344,9 +20099,9 @@
             <a:r>
               <a:rPr sz="1250" b="1" i="0">
                 <a:solidFill>
-                  <a:srgbClr val="2C3E50"/>
-                </a:solidFill>
-                <a:latin typeface="Calibri"/>
+                  <a:srgbClr val="1E2B26"/>
+                </a:solidFill>
+                <a:latin typeface="Segoe UI"/>
               </a:rPr>
               <a:t>Social</a:t>
             </a:r>
@@ -20379,9 +20134,9 @@
             <a:r>
               <a:rPr sz="1300" b="1" i="0">
                 <a:solidFill>
-                  <a:srgbClr val="2E86C1"/>
-                </a:solidFill>
-                <a:latin typeface="Calibri"/>
+                  <a:srgbClr val="3D6A8A"/>
+                </a:solidFill>
+                <a:latin typeface="Georgia"/>
               </a:rPr>
               <a:t>55</a:t>
             </a:r>
@@ -20446,7 +20201,7 @@
             <a:avLst/>
           </a:prstGeom>
           <a:solidFill>
-            <a:srgbClr val="2E86C1"/>
+            <a:srgbClr val="3D6A8A"/>
           </a:solidFill>
           <a:ln>
             <a:noFill/>
@@ -20500,9 +20255,9 @@
             <a:r>
               <a:rPr sz="1250" b="1" i="0">
                 <a:solidFill>
-                  <a:srgbClr val="2C3E50"/>
-                </a:solidFill>
-                <a:latin typeface="Calibri"/>
+                  <a:srgbClr val="1E2B26"/>
+                </a:solidFill>
+                <a:latin typeface="Segoe UI"/>
               </a:rPr>
               <a:t>Gouvernance</a:t>
             </a:r>
@@ -20535,9 +20290,9 @@
             <a:r>
               <a:rPr sz="1300" b="1" i="0">
                 <a:solidFill>
-                  <a:srgbClr val="8E44AD"/>
-                </a:solidFill>
-                <a:latin typeface="Calibri"/>
+                  <a:srgbClr val="6B5B86"/>
+                </a:solidFill>
+                <a:latin typeface="Georgia"/>
               </a:rPr>
               <a:t>75</a:t>
             </a:r>
@@ -20602,7 +20357,7 @@
             <a:avLst/>
           </a:prstGeom>
           <a:solidFill>
-            <a:srgbClr val="8E44AD"/>
+            <a:srgbClr val="6B5B86"/>
           </a:solidFill>
           <a:ln>
             <a:noFill/>
@@ -20656,9 +20411,9 @@
             <a:r>
               <a:rPr sz="800" b="0" i="0">
                 <a:solidFill>
-                  <a:srgbClr val="6B7C93"/>
-                </a:solidFill>
-                <a:latin typeface="Calibri"/>
+                  <a:srgbClr val="5F6B64"/>
+                </a:solidFill>
+                <a:latin typeface="Segoe UI"/>
               </a:rPr>
               <a:t>Acme Industries   |   5 / 23</a:t>
             </a:r>
@@ -20698,7 +20453,7 @@
             <a:avLst/>
           </a:prstGeom>
           <a:solidFill>
-            <a:srgbClr val="F4F7FD"/>
+            <a:srgbClr val="F3F0E8"/>
           </a:solidFill>
           <a:ln>
             <a:noFill/>
@@ -20741,7 +20496,7 @@
             <a:avLst/>
           </a:prstGeom>
           <a:solidFill>
-            <a:srgbClr val="F39C12"/>
+            <a:srgbClr val="2E5A4B"/>
           </a:solidFill>
           <a:ln>
             <a:noFill/>
@@ -20795,9 +20550,9 @@
             <a:r>
               <a:rPr sz="1400" b="1" i="0">
                 <a:solidFill>
-                  <a:srgbClr val="F39C12"/>
-                </a:solidFill>
-                <a:latin typeface="Calibri"/>
+                  <a:srgbClr val="2E5A4B"/>
+                </a:solidFill>
+                <a:latin typeface="Segoe UI"/>
               </a:rPr>
               <a:t>L'ANALYSE DU CONSULTANT</a:t>
             </a:r>
@@ -20819,7 +20574,7 @@
             <a:avLst/>
           </a:prstGeom>
           <a:solidFill>
-            <a:srgbClr val="F39C12"/>
+            <a:srgbClr val="2E5A4B"/>
           </a:solidFill>
           <a:ln>
             <a:noFill/>
@@ -20873,9 +20628,9 @@
             <a:r>
               <a:rPr sz="1900" b="0" i="1">
                 <a:solidFill>
-                  <a:srgbClr val="2C3E50"/>
-                </a:solidFill>
-                <a:latin typeface="Calibri"/>
+                  <a:srgbClr val="1E2B26"/>
+                </a:solidFill>
+                <a:latin typeface="Georgia"/>
               </a:rPr>
               <a:t>La priorité 2026 est la fiabilisation du reporting énergie avant l'audit de certification prévu au troisième trimestre.</a:t>
             </a:r>
@@ -20908,9 +20663,9 @@
             <a:r>
               <a:rPr sz="1200" b="1" i="0">
                 <a:solidFill>
-                  <a:srgbClr val="6B7C93"/>
-                </a:solidFill>
-                <a:latin typeface="Calibri"/>
+                  <a:srgbClr val="5F6B64"/>
+                </a:solidFill>
+                <a:latin typeface="Segoe UI"/>
               </a:rPr>
               <a:t>J. Martin</a:t>
             </a:r>
@@ -20943,9 +20698,9 @@
             <a:r>
               <a:rPr sz="800" b="0" i="0">
                 <a:solidFill>
-                  <a:srgbClr val="6B7C93"/>
-                </a:solidFill>
-                <a:latin typeface="Calibri"/>
+                  <a:srgbClr val="5F6B64"/>
+                </a:solidFill>
+                <a:latin typeface="Segoe UI"/>
               </a:rPr>
               <a:t>Acme Industries   |   6 / 23</a:t>
             </a:r>
@@ -20985,7 +20740,7 @@
             <a:avLst/>
           </a:prstGeom>
           <a:solidFill>
-            <a:srgbClr val="1B3A6B"/>
+            <a:srgbClr val="1F3D33"/>
           </a:solidFill>
           <a:ln>
             <a:noFill/>
@@ -21028,7 +20783,7 @@
             <a:avLst/>
           </a:prstGeom>
           <a:solidFill>
-            <a:srgbClr val="F39C12"/>
+            <a:srgbClr val="2E5A4B"/>
           </a:solidFill>
           <a:ln>
             <a:noFill/>
@@ -21082,9 +20837,9 @@
             <a:r>
               <a:rPr sz="20000" b="1" i="0">
                 <a:solidFill>
-                  <a:srgbClr val="EBF2FB"/>
-                </a:solidFill>
-                <a:latin typeface="Calibri"/>
+                  <a:srgbClr val="E6E6DC"/>
+                </a:solidFill>
+                <a:latin typeface="Georgia"/>
               </a:rPr>
               <a:t>01</a:t>
             </a:r>
@@ -21117,9 +20872,9 @@
             <a:r>
               <a:rPr sz="4000" b="1" i="0">
                 <a:solidFill>
-                  <a:srgbClr val="FFFFFF"/>
-                </a:solidFill>
-                <a:latin typeface="Calibri"/>
+                  <a:srgbClr val="F3F0E8"/>
+                </a:solidFill>
+                <a:latin typeface="Georgia"/>
               </a:rPr>
               <a:t>DIAGNOSTIC</a:t>
             </a:r>
@@ -21141,7 +20896,7 @@
             <a:avLst/>
           </a:prstGeom>
           <a:solidFill>
-            <a:srgbClr val="F39C12"/>
+            <a:srgbClr val="2E5A4B"/>
           </a:solidFill>
           <a:ln>
             <a:noFill/>
@@ -21195,9 +20950,9 @@
             <a:r>
               <a:rPr sz="1600" b="0" i="1">
                 <a:solidFill>
-                  <a:srgbClr val="AEC6E8"/>
-                </a:solidFill>
-                <a:latin typeface="Calibri"/>
+                  <a:srgbClr val="C9D8C5"/>
+                </a:solidFill>
+                <a:latin typeface="Segoe UI"/>
               </a:rPr>
               <a:t>Où vous situez-vous, et face à qui ?</a:t>
             </a:r>
@@ -21230,9 +20985,9 @@
             <a:r>
               <a:rPr sz="800" b="0" i="0">
                 <a:solidFill>
-                  <a:srgbClr val="6B7C93"/>
-                </a:solidFill>
-                <a:latin typeface="Calibri"/>
+                  <a:srgbClr val="5F6B64"/>
+                </a:solidFill>
+                <a:latin typeface="Segoe UI"/>
               </a:rPr>
               <a:t>Acme Industries   |   7 / 23</a:t>
             </a:r>
@@ -21272,7 +21027,7 @@
             <a:avLst/>
           </a:prstGeom>
           <a:solidFill>
-            <a:srgbClr val="F4F7FD"/>
+            <a:srgbClr val="F3F0E8"/>
           </a:solidFill>
           <a:ln>
             <a:noFill/>
@@ -21308,14 +21063,14 @@
         </p:nvSpPr>
         <p:spPr>
           <a:xfrm>
-            <a:off x="0" y="0"/>
-            <a:ext cx="12188952" cy="1143000"/>
-          </a:xfrm>
-          <a:prstGeom prst="rect">
-            <a:avLst/>
-          </a:prstGeom>
-          <a:solidFill>
-            <a:srgbClr val="1B3A6B"/>
+            <a:off x="457200" y="384048"/>
+            <a:ext cx="201168" cy="201168"/>
+          </a:xfrm>
+          <a:prstGeom prst="rect">
+            <a:avLst/>
+          </a:prstGeom>
+          <a:solidFill>
+            <a:srgbClr val="1F3D33"/>
           </a:solidFill>
           <a:ln>
             <a:noFill/>
@@ -21345,20 +21100,55 @@
       </p:sp>
       <p:sp>
         <p:nvSpPr>
-          <p:cNvPr id="4" name="Rectangle 3"/>
+          <p:cNvPr id="4" name="TextBox 3"/>
+          <p:cNvSpPr txBox="1"/>
+          <p:nvPr/>
+        </p:nvSpPr>
+        <p:spPr>
+          <a:xfrm>
+            <a:off x="822960" y="237744"/>
+            <a:ext cx="10789920" cy="685800"/>
+          </a:xfrm>
+          <a:prstGeom prst="rect">
+            <a:avLst/>
+          </a:prstGeom>
+          <a:noFill/>
+        </p:spPr>
+        <p:txBody>
+          <a:bodyPr wrap="square">
+            <a:spAutoFit/>
+          </a:bodyPr>
+          <a:lstStyle/>
+          <a:p>
+            <a:pPr algn="l"/>
+            <a:r>
+              <a:rPr sz="1320" b="1" i="0">
+                <a:solidFill>
+                  <a:srgbClr val="1E2B26"/>
+                </a:solidFill>
+                <a:latin typeface="Georgia"/>
+              </a:rPr>
+              <a:t>La gouvernance est le point fort d'Acme Industries, le social sa priorité</a:t>
+            </a:r>
+          </a:p>
+        </p:txBody>
+      </p:sp>
+      <p:sp>
+        <p:nvSpPr>
+          <p:cNvPr id="5" name="Rectangle 4"/>
           <p:cNvSpPr/>
           <p:nvPr/>
         </p:nvSpPr>
         <p:spPr>
           <a:xfrm>
-            <a:off x="0" y="1143000"/>
-            <a:ext cx="64008" cy="5715000"/>
-          </a:xfrm>
-          <a:prstGeom prst="rect">
-            <a:avLst/>
-          </a:prstGeom>
-          <a:solidFill>
-            <a:srgbClr val="F39C12"/>
+            <a:off x="457200" y="1024128"/>
+            <a:ext cx="2011680" cy="18288"/>
+          </a:xfrm>
+          <a:prstGeom prst="rect">
+            <a:avLst/>
+          </a:prstGeom>
+          <a:solidFill>
+            <a:srgbClr val="1E2B26"/>
           </a:solidFill>
           <a:ln>
             <a:noFill/>
@@ -21386,79 +21176,9 @@
           </a:p>
         </p:txBody>
       </p:sp>
-      <p:sp>
-        <p:nvSpPr>
-          <p:cNvPr id="5" name="TextBox 4"/>
-          <p:cNvSpPr txBox="1"/>
-          <p:nvPr/>
-        </p:nvSpPr>
-        <p:spPr>
-          <a:xfrm>
-            <a:off x="292608" y="128016"/>
-            <a:ext cx="10972800" cy="292608"/>
-          </a:xfrm>
-          <a:prstGeom prst="rect">
-            <a:avLst/>
-          </a:prstGeom>
-          <a:noFill/>
-        </p:spPr>
-        <p:txBody>
-          <a:bodyPr wrap="square">
-            <a:spAutoFit/>
-          </a:bodyPr>
-          <a:lstStyle/>
-          <a:p>
-            <a:pPr algn="l"/>
-            <a:r>
-              <a:rPr sz="1100" b="1" i="0">
-                <a:solidFill>
-                  <a:srgbClr val="F39C12"/>
-                </a:solidFill>
-                <a:latin typeface="Calibri"/>
-              </a:rPr>
-              <a:t>POSITIONNEMENT</a:t>
-            </a:r>
-          </a:p>
-        </p:txBody>
-      </p:sp>
-      <p:sp>
-        <p:nvSpPr>
-          <p:cNvPr id="6" name="TextBox 5"/>
-          <p:cNvSpPr txBox="1"/>
-          <p:nvPr/>
-        </p:nvSpPr>
-        <p:spPr>
-          <a:xfrm>
-            <a:off x="274320" y="384048"/>
-            <a:ext cx="11612880" cy="713232"/>
-          </a:xfrm>
-          <a:prstGeom prst="rect">
-            <a:avLst/>
-          </a:prstGeom>
-          <a:noFill/>
-        </p:spPr>
-        <p:txBody>
-          <a:bodyPr wrap="square">
-            <a:spAutoFit/>
-          </a:bodyPr>
-          <a:lstStyle/>
-          <a:p>
-            <a:pPr algn="l"/>
-            <a:r>
-              <a:rPr sz="1716" b="1" i="0">
-                <a:solidFill>
-                  <a:srgbClr val="FFFFFF"/>
-                </a:solidFill>
-                <a:latin typeface="Calibri"/>
-              </a:rPr>
-              <a:t>La gouvernance est le point fort d'Acme Industries, le social sa priorité</a:t>
-            </a:r>
-          </a:p>
-        </p:txBody>
-      </p:sp>
       <p:pic>
         <p:nvPicPr>
-          <p:cNvPr id="7" name="Picture 6" descr="image.png"/>
+          <p:cNvPr id="6" name="Picture 5" descr="image.png"/>
           <p:cNvPicPr>
             <a:picLocks noChangeAspect="1"/>
           </p:cNvPicPr>
@@ -21473,7 +21193,7 @@
         <p:spPr>
           <a:xfrm>
             <a:off x="320040" y="1554480"/>
-            <a:ext cx="6858000" cy="4213575"/>
+            <a:ext cx="6858000" cy="4205907"/>
           </a:xfrm>
           <a:prstGeom prst="rect">
             <a:avLst/>
@@ -21482,7 +21202,7 @@
       </p:pic>
       <p:sp>
         <p:nvSpPr>
-          <p:cNvPr id="8" name="Rounded Rectangle 7"/>
+          <p:cNvPr id="7" name="Rounded Rectangle 6"/>
           <p:cNvSpPr/>
           <p:nvPr/>
         </p:nvSpPr>
@@ -21495,11 +21215,11 @@
             <a:avLst/>
           </a:prstGeom>
           <a:solidFill>
-            <a:srgbClr val="EBF2FB"/>
+            <a:srgbClr val="E6E6DC"/>
           </a:solidFill>
           <a:ln w="15875">
             <a:solidFill>
-              <a:srgbClr val="F39C12"/>
+              <a:srgbClr val="2E5A4B"/>
             </a:solidFill>
           </a:ln>
         </p:spPr>
@@ -21527,7 +21247,7 @@
       </p:sp>
       <p:sp>
         <p:nvSpPr>
-          <p:cNvPr id="9" name="Rectangle 8"/>
+          <p:cNvPr id="8" name="Rectangle 7"/>
           <p:cNvSpPr/>
           <p:nvPr/>
         </p:nvSpPr>
@@ -21540,7 +21260,7 @@
             <a:avLst/>
           </a:prstGeom>
           <a:solidFill>
-            <a:srgbClr val="F39C12"/>
+            <a:srgbClr val="2E5A4B"/>
           </a:solidFill>
           <a:ln>
             <a:noFill/>
@@ -21570,7 +21290,7 @@
       </p:sp>
       <p:sp>
         <p:nvSpPr>
-          <p:cNvPr id="10" name="TextBox 9"/>
+          <p:cNvPr id="9" name="TextBox 8"/>
           <p:cNvSpPr txBox="1"/>
           <p:nvPr/>
         </p:nvSpPr>
@@ -21594,9 +21314,9 @@
             <a:r>
               <a:rPr sz="1200" b="1" i="0">
                 <a:solidFill>
-                  <a:srgbClr val="F39C12"/>
-                </a:solidFill>
-                <a:latin typeface="Calibri"/>
+                  <a:srgbClr val="2E5A4B"/>
+                </a:solidFill>
+                <a:latin typeface="Segoe UI"/>
               </a:rPr>
               <a:t>LECTURE MÉTIER</a:t>
             </a:r>
@@ -21605,7 +21325,7 @@
       </p:sp>
       <p:sp>
         <p:nvSpPr>
-          <p:cNvPr id="11" name="TextBox 10"/>
+          <p:cNvPr id="10" name="TextBox 9"/>
           <p:cNvSpPr txBox="1"/>
           <p:nvPr/>
         </p:nvSpPr>
@@ -21629,9 +21349,9 @@
             <a:r>
               <a:rPr sz="1400" b="0" i="0">
                 <a:solidFill>
-                  <a:srgbClr val="2C3E50"/>
-                </a:solidFill>
-                <a:latin typeface="Calibri"/>
+                  <a:srgbClr val="1E2B26"/>
+                </a:solidFill>
+                <a:latin typeface="Segoe UI"/>
               </a:rPr>
               <a:t>20 points séparent votre pilier le plus solide du plus fragile — l'écart interne à réduire en priorité.</a:t>
             </a:r>
@@ -21640,7 +21360,7 @@
       </p:sp>
       <p:sp>
         <p:nvSpPr>
-          <p:cNvPr id="12" name="TextBox 11"/>
+          <p:cNvPr id="11" name="TextBox 10"/>
           <p:cNvSpPr txBox="1"/>
           <p:nvPr/>
         </p:nvSpPr>
@@ -21664,9 +21384,9 @@
             <a:r>
               <a:rPr sz="1200" b="1" i="0">
                 <a:solidFill>
-                  <a:srgbClr val="6B7C93"/>
-                </a:solidFill>
-                <a:latin typeface="Calibri"/>
+                  <a:srgbClr val="5F6B64"/>
+                </a:solidFill>
+                <a:latin typeface="Segoe UI"/>
               </a:rPr>
               <a:t>MATURITÉ ESG</a:t>
             </a:r>
@@ -21675,7 +21395,7 @@
       </p:sp>
       <p:sp>
         <p:nvSpPr>
-          <p:cNvPr id="13" name="Rounded Rectangle 12"/>
+          <p:cNvPr id="12" name="Rounded Rectangle 11"/>
           <p:cNvSpPr/>
           <p:nvPr/>
         </p:nvSpPr>
@@ -21688,11 +21408,11 @@
             <a:avLst/>
           </a:prstGeom>
           <a:solidFill>
-            <a:srgbClr val="EBF2FB"/>
+            <a:srgbClr val="E6E6DC"/>
           </a:solidFill>
           <a:ln w="12700">
             <a:solidFill>
-              <a:srgbClr val="F39C12"/>
+              <a:srgbClr val="2E5A4B"/>
             </a:solidFill>
           </a:ln>
         </p:spPr>
@@ -21720,7 +21440,7 @@
       </p:sp>
       <p:sp>
         <p:nvSpPr>
-          <p:cNvPr id="14" name="TextBox 13"/>
+          <p:cNvPr id="13" name="TextBox 12"/>
           <p:cNvSpPr txBox="1"/>
           <p:nvPr/>
         </p:nvSpPr>
@@ -21744,9 +21464,9 @@
             <a:r>
               <a:rPr sz="1400" b="1" i="0">
                 <a:solidFill>
-                  <a:srgbClr val="6B7C93"/>
-                </a:solidFill>
-                <a:latin typeface="Calibri"/>
+                  <a:srgbClr val="5F6B64"/>
+                </a:solidFill>
+                <a:latin typeface="Georgia"/>
               </a:rPr>
               <a:t>1</a:t>
             </a:r>
@@ -21755,7 +21475,7 @@
       </p:sp>
       <p:sp>
         <p:nvSpPr>
-          <p:cNvPr id="15" name="Rounded Rectangle 14"/>
+          <p:cNvPr id="14" name="Rounded Rectangle 13"/>
           <p:cNvSpPr/>
           <p:nvPr/>
         </p:nvSpPr>
@@ -21768,11 +21488,11 @@
             <a:avLst/>
           </a:prstGeom>
           <a:solidFill>
-            <a:srgbClr val="EBF2FB"/>
+            <a:srgbClr val="E6E6DC"/>
           </a:solidFill>
           <a:ln w="12700">
             <a:solidFill>
-              <a:srgbClr val="F39C12"/>
+              <a:srgbClr val="2E5A4B"/>
             </a:solidFill>
           </a:ln>
         </p:spPr>
@@ -21800,7 +21520,7 @@
       </p:sp>
       <p:sp>
         <p:nvSpPr>
-          <p:cNvPr id="16" name="TextBox 15"/>
+          <p:cNvPr id="15" name="TextBox 14"/>
           <p:cNvSpPr txBox="1"/>
           <p:nvPr/>
         </p:nvSpPr>
@@ -21824,9 +21544,9 @@
             <a:r>
               <a:rPr sz="1400" b="1" i="0">
                 <a:solidFill>
-                  <a:srgbClr val="6B7C93"/>
-                </a:solidFill>
-                <a:latin typeface="Calibri"/>
+                  <a:srgbClr val="5F6B64"/>
+                </a:solidFill>
+                <a:latin typeface="Georgia"/>
               </a:rPr>
               <a:t>2</a:t>
             </a:r>
@@ -21835,7 +21555,7 @@
       </p:sp>
       <p:sp>
         <p:nvSpPr>
-          <p:cNvPr id="17" name="Rounded Rectangle 16"/>
+          <p:cNvPr id="16" name="Rounded Rectangle 15"/>
           <p:cNvSpPr/>
           <p:nvPr/>
         </p:nvSpPr>
@@ -21848,11 +21568,11 @@
             <a:avLst/>
           </a:prstGeom>
           <a:solidFill>
-            <a:srgbClr val="F39C12"/>
+            <a:srgbClr val="2E5A4B"/>
           </a:solidFill>
           <a:ln w="12700">
             <a:solidFill>
-              <a:srgbClr val="F39C12"/>
+              <a:srgbClr val="2E5A4B"/>
             </a:solidFill>
           </a:ln>
         </p:spPr>
@@ -21880,7 +21600,7 @@
       </p:sp>
       <p:sp>
         <p:nvSpPr>
-          <p:cNvPr id="18" name="TextBox 17"/>
+          <p:cNvPr id="17" name="TextBox 16"/>
           <p:cNvSpPr txBox="1"/>
           <p:nvPr/>
         </p:nvSpPr>
@@ -21904,9 +21624,9 @@
             <a:r>
               <a:rPr sz="1400" b="1" i="0">
                 <a:solidFill>
-                  <a:srgbClr val="1B3A6B"/>
-                </a:solidFill>
-                <a:latin typeface="Calibri"/>
+                  <a:srgbClr val="1F3D33"/>
+                </a:solidFill>
+                <a:latin typeface="Georgia"/>
               </a:rPr>
               <a:t>3</a:t>
             </a:r>
@@ -21915,7 +21635,7 @@
       </p:sp>
       <p:sp>
         <p:nvSpPr>
-          <p:cNvPr id="19" name="Rounded Rectangle 18"/>
+          <p:cNvPr id="18" name="Rounded Rectangle 17"/>
           <p:cNvSpPr/>
           <p:nvPr/>
         </p:nvSpPr>
@@ -21928,11 +21648,11 @@
             <a:avLst/>
           </a:prstGeom>
           <a:solidFill>
-            <a:srgbClr val="EBF2FB"/>
+            <a:srgbClr val="E6E6DC"/>
           </a:solidFill>
           <a:ln w="12700">
             <a:solidFill>
-              <a:srgbClr val="F39C12"/>
+              <a:srgbClr val="2E5A4B"/>
             </a:solidFill>
           </a:ln>
         </p:spPr>
@@ -21960,7 +21680,7 @@
       </p:sp>
       <p:sp>
         <p:nvSpPr>
-          <p:cNvPr id="20" name="TextBox 19"/>
+          <p:cNvPr id="19" name="TextBox 18"/>
           <p:cNvSpPr txBox="1"/>
           <p:nvPr/>
         </p:nvSpPr>
@@ -21984,9 +21704,9 @@
             <a:r>
               <a:rPr sz="1400" b="1" i="0">
                 <a:solidFill>
-                  <a:srgbClr val="6B7C93"/>
-                </a:solidFill>
-                <a:latin typeface="Calibri"/>
+                  <a:srgbClr val="5F6B64"/>
+                </a:solidFill>
+                <a:latin typeface="Georgia"/>
               </a:rPr>
               <a:t>4</a:t>
             </a:r>
@@ -21995,7 +21715,7 @@
       </p:sp>
       <p:sp>
         <p:nvSpPr>
-          <p:cNvPr id="21" name="Rounded Rectangle 20"/>
+          <p:cNvPr id="20" name="Rounded Rectangle 19"/>
           <p:cNvSpPr/>
           <p:nvPr/>
         </p:nvSpPr>
@@ -22008,11 +21728,11 @@
             <a:avLst/>
           </a:prstGeom>
           <a:solidFill>
-            <a:srgbClr val="EBF2FB"/>
+            <a:srgbClr val="E6E6DC"/>
           </a:solidFill>
           <a:ln w="12700">
             <a:solidFill>
-              <a:srgbClr val="F39C12"/>
+              <a:srgbClr val="2E5A4B"/>
             </a:solidFill>
           </a:ln>
         </p:spPr>
@@ -22040,7 +21760,7 @@
       </p:sp>
       <p:sp>
         <p:nvSpPr>
-          <p:cNvPr id="22" name="TextBox 21"/>
+          <p:cNvPr id="21" name="TextBox 20"/>
           <p:cNvSpPr txBox="1"/>
           <p:nvPr/>
         </p:nvSpPr>
@@ -22064,9 +21784,9 @@
             <a:r>
               <a:rPr sz="1400" b="1" i="0">
                 <a:solidFill>
-                  <a:srgbClr val="6B7C93"/>
-                </a:solidFill>
-                <a:latin typeface="Calibri"/>
+                  <a:srgbClr val="5F6B64"/>
+                </a:solidFill>
+                <a:latin typeface="Georgia"/>
               </a:rPr>
               <a:t>5</a:t>
             </a:r>
@@ -22075,7 +21795,7 @@
       </p:sp>
       <p:sp>
         <p:nvSpPr>
-          <p:cNvPr id="23" name="TextBox 22"/>
+          <p:cNvPr id="22" name="TextBox 21"/>
           <p:cNvSpPr txBox="1"/>
           <p:nvPr/>
         </p:nvSpPr>
@@ -22099,9 +21819,9 @@
             <a:r>
               <a:rPr sz="1600" b="1" i="0">
                 <a:solidFill>
-                  <a:srgbClr val="F39C12"/>
-                </a:solidFill>
-                <a:latin typeface="Calibri"/>
+                  <a:srgbClr val="2E5A4B"/>
+                </a:solidFill>
+                <a:latin typeface="Georgia"/>
               </a:rPr>
               <a:t>Structurée</a:t>
             </a:r>
@@ -22110,7 +21830,7 @@
       </p:sp>
       <p:sp>
         <p:nvSpPr>
-          <p:cNvPr id="24" name="TextBox 23"/>
+          <p:cNvPr id="23" name="TextBox 22"/>
           <p:cNvSpPr txBox="1"/>
           <p:nvPr/>
         </p:nvSpPr>
@@ -22134,9 +21854,9 @@
             <a:r>
               <a:rPr sz="1250" b="0" i="0">
                 <a:solidFill>
-                  <a:srgbClr val="2C3E50"/>
-                </a:solidFill>
-                <a:latin typeface="Calibri"/>
+                  <a:srgbClr val="1E2B26"/>
+                </a:solidFill>
+                <a:latin typeface="Segoe UI"/>
               </a:rPr>
               <a:t>Pour franchir le cap suivant : faire auditer le reporting.</a:t>
             </a:r>
@@ -22145,7 +21865,7 @@
       </p:sp>
       <p:sp>
         <p:nvSpPr>
-          <p:cNvPr id="25" name="TextBox 24"/>
+          <p:cNvPr id="24" name="TextBox 23"/>
           <p:cNvSpPr txBox="1"/>
           <p:nvPr/>
         </p:nvSpPr>
@@ -22169,9 +21889,9 @@
             <a:r>
               <a:rPr sz="800" b="0" i="0">
                 <a:solidFill>
-                  <a:srgbClr val="6B7C93"/>
-                </a:solidFill>
-                <a:latin typeface="Calibri"/>
+                  <a:srgbClr val="5F6B64"/>
+                </a:solidFill>
+                <a:latin typeface="Segoe UI"/>
               </a:rPr>
               <a:t>Acme Industries   |   8 / 23</a:t>
             </a:r>
@@ -22211,7 +21931,7 @@
             <a:avLst/>
           </a:prstGeom>
           <a:solidFill>
-            <a:srgbClr val="F4F7FD"/>
+            <a:srgbClr val="F3F0E8"/>
           </a:solidFill>
           <a:ln>
             <a:noFill/>
@@ -22247,14 +21967,14 @@
         </p:nvSpPr>
         <p:spPr>
           <a:xfrm>
-            <a:off x="0" y="0"/>
-            <a:ext cx="12188952" cy="1143000"/>
-          </a:xfrm>
-          <a:prstGeom prst="rect">
-            <a:avLst/>
-          </a:prstGeom>
-          <a:solidFill>
-            <a:srgbClr val="1B3A6B"/>
+            <a:off x="457200" y="384048"/>
+            <a:ext cx="201168" cy="201168"/>
+          </a:xfrm>
+          <a:prstGeom prst="rect">
+            <a:avLst/>
+          </a:prstGeom>
+          <a:solidFill>
+            <a:srgbClr val="1F3D33"/>
           </a:solidFill>
           <a:ln>
             <a:noFill/>
@@ -22284,20 +22004,55 @@
       </p:sp>
       <p:sp>
         <p:nvSpPr>
-          <p:cNvPr id="4" name="Rectangle 3"/>
+          <p:cNvPr id="4" name="TextBox 3"/>
+          <p:cNvSpPr txBox="1"/>
+          <p:nvPr/>
+        </p:nvSpPr>
+        <p:spPr>
+          <a:xfrm>
+            <a:off x="822960" y="237744"/>
+            <a:ext cx="10789920" cy="685800"/>
+          </a:xfrm>
+          <a:prstGeom prst="rect">
+            <a:avLst/>
+          </a:prstGeom>
+          <a:noFill/>
+        </p:spPr>
+        <p:txBody>
+          <a:bodyPr wrap="square">
+            <a:spAutoFit/>
+          </a:bodyPr>
+          <a:lstStyle/>
+          <a:p>
+            <a:pPr algn="l"/>
+            <a:r>
+              <a:rPr sz="1560" b="1" i="0">
+                <a:solidFill>
+                  <a:srgbClr val="1E2B26"/>
+                </a:solidFill>
+                <a:latin typeface="Georgia"/>
+              </a:rPr>
+              <a:t>Une trajectoire ESG mesurée exercice après exercice</a:t>
+            </a:r>
+          </a:p>
+        </p:txBody>
+      </p:sp>
+      <p:sp>
+        <p:nvSpPr>
+          <p:cNvPr id="5" name="Rectangle 4"/>
           <p:cNvSpPr/>
           <p:nvPr/>
         </p:nvSpPr>
         <p:spPr>
           <a:xfrm>
-            <a:off x="0" y="1143000"/>
-            <a:ext cx="64008" cy="5715000"/>
-          </a:xfrm>
-          <a:prstGeom prst="rect">
-            <a:avLst/>
-          </a:prstGeom>
-          <a:solidFill>
-            <a:srgbClr val="F39C12"/>
+            <a:off x="457200" y="1024128"/>
+            <a:ext cx="2011680" cy="18288"/>
+          </a:xfrm>
+          <a:prstGeom prst="rect">
+            <a:avLst/>
+          </a:prstGeom>
+          <a:solidFill>
+            <a:srgbClr val="1E2B26"/>
           </a:solidFill>
           <a:ln>
             <a:noFill/>
@@ -22325,79 +22080,9 @@
           </a:p>
         </p:txBody>
       </p:sp>
-      <p:sp>
-        <p:nvSpPr>
-          <p:cNvPr id="5" name="TextBox 4"/>
-          <p:cNvSpPr txBox="1"/>
-          <p:nvPr/>
-        </p:nvSpPr>
-        <p:spPr>
-          <a:xfrm>
-            <a:off x="292608" y="128016"/>
-            <a:ext cx="10972800" cy="292608"/>
-          </a:xfrm>
-          <a:prstGeom prst="rect">
-            <a:avLst/>
-          </a:prstGeom>
-          <a:noFill/>
-        </p:spPr>
-        <p:txBody>
-          <a:bodyPr wrap="square">
-            <a:spAutoFit/>
-          </a:bodyPr>
-          <a:lstStyle/>
-          <a:p>
-            <a:pPr algn="l"/>
-            <a:r>
-              <a:rPr sz="1100" b="1" i="0">
-                <a:solidFill>
-                  <a:srgbClr val="F39C12"/>
-                </a:solidFill>
-                <a:latin typeface="Calibri"/>
-              </a:rPr>
-              <a:t>TRAJECTOIRE</a:t>
-            </a:r>
-          </a:p>
-        </p:txBody>
-      </p:sp>
-      <p:sp>
-        <p:nvSpPr>
-          <p:cNvPr id="6" name="TextBox 5"/>
-          <p:cNvSpPr txBox="1"/>
-          <p:nvPr/>
-        </p:nvSpPr>
-        <p:spPr>
-          <a:xfrm>
-            <a:off x="274320" y="384048"/>
-            <a:ext cx="11612880" cy="713232"/>
-          </a:xfrm>
-          <a:prstGeom prst="rect">
-            <a:avLst/>
-          </a:prstGeom>
-          <a:noFill/>
-        </p:spPr>
-        <p:txBody>
-          <a:bodyPr wrap="square">
-            <a:spAutoFit/>
-          </a:bodyPr>
-          <a:lstStyle/>
-          <a:p>
-            <a:pPr algn="l"/>
-            <a:r>
-              <a:rPr sz="2028" b="1" i="0">
-                <a:solidFill>
-                  <a:srgbClr val="FFFFFF"/>
-                </a:solidFill>
-                <a:latin typeface="Calibri"/>
-              </a:rPr>
-              <a:t>Une trajectoire ESG mesurée exercice après exercice</a:t>
-            </a:r>
-          </a:p>
-        </p:txBody>
-      </p:sp>
       <p:pic>
         <p:nvPicPr>
-          <p:cNvPr id="7" name="Picture 6" descr="image.png"/>
+          <p:cNvPr id="6" name="Picture 5" descr="image.png"/>
           <p:cNvPicPr>
             <a:picLocks noChangeAspect="1"/>
           </p:cNvPicPr>
@@ -22412,7 +22097,7 @@
         <p:spPr>
           <a:xfrm>
             <a:off x="1188720" y="1463040"/>
-            <a:ext cx="9784080" cy="5208916"/>
+            <a:ext cx="9784080" cy="5294605"/>
           </a:xfrm>
           <a:prstGeom prst="rect">
             <a:avLst/>
@@ -22421,7 +22106,7 @@
       </p:pic>
       <p:sp>
         <p:nvSpPr>
-          <p:cNvPr id="8" name="TextBox 7"/>
+          <p:cNvPr id="7" name="TextBox 6"/>
           <p:cNvSpPr txBox="1"/>
           <p:nvPr/>
         </p:nvSpPr>
@@ -22445,9 +22130,9 @@
             <a:r>
               <a:rPr sz="1000" b="0" i="1">
                 <a:solidFill>
-                  <a:srgbClr val="6B7C93"/>
-                </a:solidFill>
-                <a:latin typeface="Calibri"/>
+                  <a:srgbClr val="5F6B64"/>
+                </a:solidFill>
+                <a:latin typeface="Segoe UI"/>
               </a:rPr>
               <a:t>Évolution pluriannuelle du score ESG (global et par pilier)</a:t>
             </a:r>
@@ -22456,7 +22141,7 @@
       </p:sp>
       <p:sp>
         <p:nvSpPr>
-          <p:cNvPr id="9" name="TextBox 8"/>
+          <p:cNvPr id="8" name="TextBox 7"/>
           <p:cNvSpPr txBox="1"/>
           <p:nvPr/>
         </p:nvSpPr>
@@ -22480,9 +22165,9 @@
             <a:r>
               <a:rPr sz="800" b="0" i="0">
                 <a:solidFill>
-                  <a:srgbClr val="6B7C93"/>
-                </a:solidFill>
-                <a:latin typeface="Calibri"/>
+                  <a:srgbClr val="5F6B64"/>
+                </a:solidFill>
+                <a:latin typeface="Segoe UI"/>
               </a:rPr>
               <a:t>Acme Industries   |   9 / 23</a:t>
             </a:r>

--- a/examples/Presentation.pptx
+++ b/examples/Presentation.pptx
@@ -10,24 +10,24 @@
     <p:sldId id="258" r:id="rId9"/>
     <p:sldId id="259" r:id="rId10"/>
     <p:sldId id="260" r:id="rId11"/>
-    <p:sldId id="261" r:id="rId12"/>
-    <p:sldId id="262" r:id="rId13"/>
-    <p:sldId id="263" r:id="rId14"/>
-    <p:sldId id="264" r:id="rId15"/>
-    <p:sldId id="265" r:id="rId16"/>
-    <p:sldId id="266" r:id="rId17"/>
-    <p:sldId id="267" r:id="rId18"/>
-    <p:sldId id="268" r:id="rId19"/>
-    <p:sldId id="269" r:id="rId20"/>
-    <p:sldId id="270" r:id="rId21"/>
-    <p:sldId id="271" r:id="rId22"/>
-    <p:sldId id="272" r:id="rId23"/>
-    <p:sldId id="273" r:id="rId24"/>
-    <p:sldId id="274" r:id="rId25"/>
-    <p:sldId id="275" r:id="rId26"/>
-    <p:sldId id="276" r:id="rId27"/>
-    <p:sldId id="277" r:id="rId28"/>
-    <p:sldId id="278" r:id="rId29"/>
+    <p:sldId id="261" r:id="rId13"/>
+    <p:sldId id="262" r:id="rId14"/>
+    <p:sldId id="263" r:id="rId15"/>
+    <p:sldId id="264" r:id="rId16"/>
+    <p:sldId id="265" r:id="rId17"/>
+    <p:sldId id="266" r:id="rId18"/>
+    <p:sldId id="267" r:id="rId19"/>
+    <p:sldId id="268" r:id="rId20"/>
+    <p:sldId id="269" r:id="rId21"/>
+    <p:sldId id="270" r:id="rId22"/>
+    <p:sldId id="271" r:id="rId23"/>
+    <p:sldId id="272" r:id="rId24"/>
+    <p:sldId id="273" r:id="rId25"/>
+    <p:sldId id="274" r:id="rId26"/>
+    <p:sldId id="275" r:id="rId27"/>
+    <p:sldId id="276" r:id="rId28"/>
+    <p:sldId id="277" r:id="rId29"/>
+    <p:sldId id="278" r:id="rId30"/>
   </p:sldIdLst>
   <p:sldSz cx="12188952" cy="6858000" type="screen4x3"/>
   <p:notesSz cx="6858000" cy="9144000"/>
@@ -127,6 +127,988 @@
     </a:lvl9pPr>
   </p:defaultTextStyle>
 </p:presentation>
+</file>
+
+<file path=ppt/notesMasters/notesMaster1.xml><?xml version="1.0" encoding="utf-8"?>
+<p:notesMaster xmlns:a="http://schemas.openxmlformats.org/drawingml/2006/main" xmlns:p="http://schemas.openxmlformats.org/presentationml/2006/main" xmlns:r="http://schemas.openxmlformats.org/officeDocument/2006/relationships">
+  <p:cSld>
+    <p:bg>
+      <p:bgRef idx="1001">
+        <a:schemeClr val="bg1"/>
+      </p:bgRef>
+    </p:bg>
+    <p:spTree>
+      <p:nvGrpSpPr>
+        <p:cNvPr id="1" name=""/>
+        <p:cNvGrpSpPr/>
+        <p:nvPr/>
+      </p:nvGrpSpPr>
+      <p:grpSpPr>
+        <a:xfrm>
+          <a:off x="0" y="0"/>
+          <a:ext cx="0" cy="0"/>
+          <a:chOff x="0" y="0"/>
+          <a:chExt cx="0" cy="0"/>
+        </a:xfrm>
+      </p:grpSpPr>
+      <p:sp>
+        <p:nvSpPr>
+          <p:cNvPr id="2" name="Header Placeholder 1"/>
+          <p:cNvSpPr>
+            <a:spLocks noGrp="1"/>
+          </p:cNvSpPr>
+          <p:nvPr>
+            <p:ph type="hdr" sz="quarter"/>
+          </p:nvPr>
+        </p:nvSpPr>
+        <p:spPr>
+          <a:xfrm>
+            <a:off x="0" y="0"/>
+            <a:ext cx="2971800" cy="457200"/>
+          </a:xfrm>
+          <a:prstGeom prst="rect">
+            <a:avLst/>
+          </a:prstGeom>
+        </p:spPr>
+        <p:txBody>
+          <a:bodyPr vert="horz" lIns="91440" tIns="45720" rIns="91440" bIns="45720" rtlCol="0"/>
+          <a:lstStyle>
+            <a:lvl1pPr algn="l">
+              <a:defRPr sz="1200"/>
+            </a:lvl1pPr>
+          </a:lstStyle>
+          <a:p>
+            <a:endParaRPr lang="en-US"/>
+          </a:p>
+        </p:txBody>
+      </p:sp>
+      <p:sp>
+        <p:nvSpPr>
+          <p:cNvPr id="3" name="Date Placeholder 2"/>
+          <p:cNvSpPr>
+            <a:spLocks noGrp="1"/>
+          </p:cNvSpPr>
+          <p:nvPr>
+            <p:ph type="dt" idx="1"/>
+          </p:nvPr>
+        </p:nvSpPr>
+        <p:spPr>
+          <a:xfrm>
+            <a:off x="3884613" y="0"/>
+            <a:ext cx="2971800" cy="457200"/>
+          </a:xfrm>
+          <a:prstGeom prst="rect">
+            <a:avLst/>
+          </a:prstGeom>
+        </p:spPr>
+        <p:txBody>
+          <a:bodyPr vert="horz" lIns="91440" tIns="45720" rIns="91440" bIns="45720" rtlCol="0"/>
+          <a:lstStyle>
+            <a:lvl1pPr algn="r">
+              <a:defRPr sz="1200"/>
+            </a:lvl1pPr>
+          </a:lstStyle>
+          <a:p>
+            <a:fld id="{0F89C1C7-3DCD-1040-A9CF-14679D8B5DDD}" type="datetimeFigureOut">
+              <a:rPr lang="en-US" smtClean="0"/>
+              <a:t>10/17/16</a:t>
+            </a:fld>
+            <a:endParaRPr lang="en-US"/>
+          </a:p>
+        </p:txBody>
+      </p:sp>
+      <p:sp>
+        <p:nvSpPr>
+          <p:cNvPr id="4" name="Slide Image Placeholder 3"/>
+          <p:cNvSpPr>
+            <a:spLocks noGrp="1" noRot="1" noChangeAspect="1"/>
+          </p:cNvSpPr>
+          <p:nvPr>
+            <p:ph type="sldImg" idx="2"/>
+          </p:nvPr>
+        </p:nvSpPr>
+        <p:spPr>
+          <a:xfrm>
+            <a:off x="1143000" y="685800"/>
+            <a:ext cx="4572000" cy="3429000"/>
+          </a:xfrm>
+          <a:prstGeom prst="rect">
+            <a:avLst/>
+          </a:prstGeom>
+          <a:noFill/>
+          <a:ln w="12700">
+            <a:solidFill>
+              <a:prstClr val="black"/>
+            </a:solidFill>
+          </a:ln>
+        </p:spPr>
+        <p:txBody>
+          <a:bodyPr vert="horz" lIns="91440" tIns="45720" rIns="91440" bIns="45720" rtlCol="0" anchor="ctr"/>
+          <a:lstStyle/>
+          <a:p>
+            <a:endParaRPr lang="en-US"/>
+          </a:p>
+        </p:txBody>
+      </p:sp>
+      <p:sp>
+        <p:nvSpPr>
+          <p:cNvPr id="5" name="Notes Placeholder 4"/>
+          <p:cNvSpPr>
+            <a:spLocks noGrp="1"/>
+          </p:cNvSpPr>
+          <p:nvPr>
+            <p:ph type="body" sz="quarter" idx="3"/>
+          </p:nvPr>
+        </p:nvSpPr>
+        <p:spPr>
+          <a:xfrm>
+            <a:off x="685800" y="4343400"/>
+            <a:ext cx="5486400" cy="4114800"/>
+          </a:xfrm>
+          <a:prstGeom prst="rect">
+            <a:avLst/>
+          </a:prstGeom>
+        </p:spPr>
+        <p:txBody>
+          <a:bodyPr vert="horz" lIns="91440" tIns="45720" rIns="91440" bIns="45720" rtlCol="0"/>
+          <a:lstStyle/>
+          <a:p>
+            <a:pPr lvl="0"/>
+            <a:r>
+              <a:rPr lang="en-US" smtClean="0"/>
+              <a:t>Click to edit Master text styles</a:t>
+            </a:r>
+          </a:p>
+          <a:p>
+            <a:pPr lvl="1"/>
+            <a:r>
+              <a:rPr lang="en-US" smtClean="0"/>
+              <a:t>Second level</a:t>
+            </a:r>
+          </a:p>
+          <a:p>
+            <a:pPr lvl="2"/>
+            <a:r>
+              <a:rPr lang="en-US" smtClean="0"/>
+              <a:t>Third level</a:t>
+            </a:r>
+          </a:p>
+          <a:p>
+            <a:pPr lvl="3"/>
+            <a:r>
+              <a:rPr lang="en-US" smtClean="0"/>
+              <a:t>Fourth level</a:t>
+            </a:r>
+          </a:p>
+          <a:p>
+            <a:pPr lvl="4"/>
+            <a:r>
+              <a:rPr lang="en-US" smtClean="0"/>
+              <a:t>Fifth level</a:t>
+            </a:r>
+            <a:endParaRPr lang="en-US"/>
+          </a:p>
+        </p:txBody>
+      </p:sp>
+      <p:sp>
+        <p:nvSpPr>
+          <p:cNvPr id="6" name="Footer Placeholder 5"/>
+          <p:cNvSpPr>
+            <a:spLocks noGrp="1"/>
+          </p:cNvSpPr>
+          <p:nvPr>
+            <p:ph type="ftr" sz="quarter" idx="4"/>
+          </p:nvPr>
+        </p:nvSpPr>
+        <p:spPr>
+          <a:xfrm>
+            <a:off x="0" y="8685213"/>
+            <a:ext cx="2971800" cy="457200"/>
+          </a:xfrm>
+          <a:prstGeom prst="rect">
+            <a:avLst/>
+          </a:prstGeom>
+        </p:spPr>
+        <p:txBody>
+          <a:bodyPr vert="horz" lIns="91440" tIns="45720" rIns="91440" bIns="45720" rtlCol="0" anchor="b"/>
+          <a:lstStyle>
+            <a:lvl1pPr algn="l">
+              <a:defRPr sz="1200"/>
+            </a:lvl1pPr>
+          </a:lstStyle>
+          <a:p>
+            <a:endParaRPr lang="en-US"/>
+          </a:p>
+        </p:txBody>
+      </p:sp>
+      <p:sp>
+        <p:nvSpPr>
+          <p:cNvPr id="7" name="Slide Number Placeholder 6"/>
+          <p:cNvSpPr>
+            <a:spLocks noGrp="1"/>
+          </p:cNvSpPr>
+          <p:nvPr>
+            <p:ph type="sldNum" sz="quarter" idx="5"/>
+          </p:nvPr>
+        </p:nvSpPr>
+        <p:spPr>
+          <a:xfrm>
+            <a:off x="3884613" y="8685213"/>
+            <a:ext cx="2971800" cy="457200"/>
+          </a:xfrm>
+          <a:prstGeom prst="rect">
+            <a:avLst/>
+          </a:prstGeom>
+        </p:spPr>
+        <p:txBody>
+          <a:bodyPr vert="horz" lIns="91440" tIns="45720" rIns="91440" bIns="45720" rtlCol="0" anchor="b"/>
+          <a:lstStyle>
+            <a:lvl1pPr algn="r">
+              <a:defRPr sz="1200"/>
+            </a:lvl1pPr>
+          </a:lstStyle>
+          <a:p>
+            <a:fld id="{BB5E49A5-4136-284D-997B-48E1D791AD67}" type="slidenum">
+              <a:rPr lang="en-US" smtClean="0"/>
+              <a:t>‹#›</a:t>
+            </a:fld>
+            <a:endParaRPr lang="en-US"/>
+          </a:p>
+        </p:txBody>
+      </p:sp>
+    </p:spTree>
+    <p:extLst>
+      <p:ext uri="{BB962C8B-B14F-4D97-AF65-F5344CB8AC3E}">
+        <p14:creationId xmlns:p14="http://schemas.microsoft.com/office/powerpoint/2010/main" val="2623252185"/>
+      </p:ext>
+    </p:extLst>
+  </p:cSld>
+  <p:clrMap bg1="lt1" tx1="dk1" bg2="lt2" tx2="dk2" accent1="accent1" accent2="accent2" accent3="accent3" accent4="accent4" accent5="accent5" accent6="accent6" hlink="hlink" folHlink="folHlink"/>
+  <p:notesStyle>
+    <a:lvl1pPr marL="0" algn="l" defTabSz="457200" rtl="0" eaLnBrk="1" latinLnBrk="0" hangingPunct="1">
+      <a:defRPr sz="1200" kern="1200">
+        <a:solidFill>
+          <a:schemeClr val="tx1"/>
+        </a:solidFill>
+        <a:latin typeface="+mn-lt"/>
+        <a:ea typeface="+mn-ea"/>
+        <a:cs typeface="+mn-cs"/>
+      </a:defRPr>
+    </a:lvl1pPr>
+    <a:lvl2pPr marL="457200" algn="l" defTabSz="457200" rtl="0" eaLnBrk="1" latinLnBrk="0" hangingPunct="1">
+      <a:defRPr sz="1200" kern="1200">
+        <a:solidFill>
+          <a:schemeClr val="tx1"/>
+        </a:solidFill>
+        <a:latin typeface="+mn-lt"/>
+        <a:ea typeface="+mn-ea"/>
+        <a:cs typeface="+mn-cs"/>
+      </a:defRPr>
+    </a:lvl2pPr>
+    <a:lvl3pPr marL="914400" algn="l" defTabSz="457200" rtl="0" eaLnBrk="1" latinLnBrk="0" hangingPunct="1">
+      <a:defRPr sz="1200" kern="1200">
+        <a:solidFill>
+          <a:schemeClr val="tx1"/>
+        </a:solidFill>
+        <a:latin typeface="+mn-lt"/>
+        <a:ea typeface="+mn-ea"/>
+        <a:cs typeface="+mn-cs"/>
+      </a:defRPr>
+    </a:lvl3pPr>
+    <a:lvl4pPr marL="1371600" algn="l" defTabSz="457200" rtl="0" eaLnBrk="1" latinLnBrk="0" hangingPunct="1">
+      <a:defRPr sz="1200" kern="1200">
+        <a:solidFill>
+          <a:schemeClr val="tx1"/>
+        </a:solidFill>
+        <a:latin typeface="+mn-lt"/>
+        <a:ea typeface="+mn-ea"/>
+        <a:cs typeface="+mn-cs"/>
+      </a:defRPr>
+    </a:lvl4pPr>
+    <a:lvl5pPr marL="1828800" algn="l" defTabSz="457200" rtl="0" eaLnBrk="1" latinLnBrk="0" hangingPunct="1">
+      <a:defRPr sz="1200" kern="1200">
+        <a:solidFill>
+          <a:schemeClr val="tx1"/>
+        </a:solidFill>
+        <a:latin typeface="+mn-lt"/>
+        <a:ea typeface="+mn-ea"/>
+        <a:cs typeface="+mn-cs"/>
+      </a:defRPr>
+    </a:lvl5pPr>
+    <a:lvl6pPr marL="2286000" algn="l" defTabSz="457200" rtl="0" eaLnBrk="1" latinLnBrk="0" hangingPunct="1">
+      <a:defRPr sz="1200" kern="1200">
+        <a:solidFill>
+          <a:schemeClr val="tx1"/>
+        </a:solidFill>
+        <a:latin typeface="+mn-lt"/>
+        <a:ea typeface="+mn-ea"/>
+        <a:cs typeface="+mn-cs"/>
+      </a:defRPr>
+    </a:lvl6pPr>
+    <a:lvl7pPr marL="2743200" algn="l" defTabSz="457200" rtl="0" eaLnBrk="1" latinLnBrk="0" hangingPunct="1">
+      <a:defRPr sz="1200" kern="1200">
+        <a:solidFill>
+          <a:schemeClr val="tx1"/>
+        </a:solidFill>
+        <a:latin typeface="+mn-lt"/>
+        <a:ea typeface="+mn-ea"/>
+        <a:cs typeface="+mn-cs"/>
+      </a:defRPr>
+    </a:lvl7pPr>
+    <a:lvl8pPr marL="3200400" algn="l" defTabSz="457200" rtl="0" eaLnBrk="1" latinLnBrk="0" hangingPunct="1">
+      <a:defRPr sz="1200" kern="1200">
+        <a:solidFill>
+          <a:schemeClr val="tx1"/>
+        </a:solidFill>
+        <a:latin typeface="+mn-lt"/>
+        <a:ea typeface="+mn-ea"/>
+        <a:cs typeface="+mn-cs"/>
+      </a:defRPr>
+    </a:lvl8pPr>
+    <a:lvl9pPr marL="3657600" algn="l" defTabSz="457200" rtl="0" eaLnBrk="1" latinLnBrk="0" hangingPunct="1">
+      <a:defRPr sz="1200" kern="1200">
+        <a:solidFill>
+          <a:schemeClr val="tx1"/>
+        </a:solidFill>
+        <a:latin typeface="+mn-lt"/>
+        <a:ea typeface="+mn-ea"/>
+        <a:cs typeface="+mn-cs"/>
+      </a:defRPr>
+    </a:lvl9pPr>
+  </p:notesStyle>
+</p:notesMaster>
+</file>
+
+<file path=ppt/notesSlides/notesSlide1.xml><?xml version="1.0" encoding="utf-8"?>
+<p:notes xmlns:a="http://schemas.openxmlformats.org/drawingml/2006/main" xmlns:p="http://schemas.openxmlformats.org/presentationml/2006/main" xmlns:r="http://schemas.openxmlformats.org/officeDocument/2006/relationships">
+  <p:cSld>
+    <p:spTree>
+      <p:nvGrpSpPr>
+        <p:cNvPr id="1" name=""/>
+        <p:cNvGrpSpPr/>
+        <p:nvPr/>
+      </p:nvGrpSpPr>
+      <p:grpSpPr>
+        <a:xfrm>
+          <a:off x="0" y="0"/>
+          <a:ext cx="0" cy="0"/>
+          <a:chOff x="0" y="0"/>
+          <a:chExt cx="0" cy="0"/>
+        </a:xfrm>
+      </p:grpSpPr>
+      <p:sp>
+        <p:nvSpPr>
+          <p:cNvPr id="2" name="Slide Image Placeholder 1"/>
+          <p:cNvSpPr>
+            <a:spLocks noGrp="1"/>
+          </p:cNvSpPr>
+          <p:nvPr>
+            <p:ph type="sldImg" idx="2"/>
+          </p:nvPr>
+        </p:nvSpPr>
+        <p:spPr/>
+      </p:sp>
+      <p:sp>
+        <p:nvSpPr>
+          <p:cNvPr id="3" name="Notes Placeholder 2"/>
+          <p:cNvSpPr>
+            <a:spLocks noGrp="1"/>
+          </p:cNvSpPr>
+          <p:nvPr>
+            <p:ph type="body" idx="3" sz="quarter"/>
+          </p:nvPr>
+        </p:nvSpPr>
+        <p:spPr/>
+        <p:txBody>
+          <a:bodyPr/>
+          <a:lstStyle/>
+          <a:p>
+            <a:r>
+              <a:t>Acme Industries présente son rapport de durabilité pour l'exercice 2025. Acteur du secteur industrie manufacturière (France), l'entreprise emploie 320 collaborateurs et a réalisé un chiffre d'affaires de 48 millions d'euros sur l'exercice.</a:t>
+            </a:r>
+          </a:p>
+          <a:p/>
+          <a:p>
+            <a:r>
+              <a:t>Le diagnostic suit 29 indicateurs répartis entre l'environnement, le social et la gouvernance ; 20 sont renseignés pour cet exercice, soit un taux de complétude de 69 %. La lecture des piliers est fiable sur les indicateurs renseignés ; les données manquantes sont signalées section par section.</a:t>
+            </a:r>
+          </a:p>
+          <a:p/>
+          <a:p>
+            <a:r>
+              <a:t>Le rapport suit trois temps. La situation présente la performance de chaque pilier et les indicateurs qui la fondent. Le diagnostic confronte ces résultats aux exigences de reporting du référentiel CSRD / ESRS, aux risques et aux opportunités identifiés. Le plan d'action traduit ces constats en recommandations priorisées et en feuille de route sur douze mois. Les objectifs de l'entreprise sont fixés à l'horizon 2030.</a:t>
+            </a:r>
+          </a:p>
+        </p:txBody>
+      </p:sp>
+      <p:sp>
+        <p:nvSpPr>
+          <p:cNvPr id="4" name="Slide Number Placeholder 3"/>
+          <p:cNvSpPr>
+            <a:spLocks noGrp="1"/>
+          </p:cNvSpPr>
+          <p:nvPr>
+            <p:ph type="sldNum" idx="5" sz="quarter"/>
+          </p:nvPr>
+        </p:nvSpPr>
+        <p:spPr/>
+      </p:sp>
+    </p:spTree>
+  </p:cSld>
+  <p:clrMapOvr>
+    <a:masterClrMapping/>
+  </p:clrMapOvr>
+</p:notes>
+</file>
+
+<file path=ppt/notesSlides/notesSlide2.xml><?xml version="1.0" encoding="utf-8"?>
+<p:notes xmlns:a="http://schemas.openxmlformats.org/drawingml/2006/main" xmlns:p="http://schemas.openxmlformats.org/presentationml/2006/main" xmlns:r="http://schemas.openxmlformats.org/officeDocument/2006/relationships">
+  <p:cSld>
+    <p:spTree>
+      <p:nvGrpSpPr>
+        <p:cNvPr id="1" name=""/>
+        <p:cNvGrpSpPr/>
+        <p:nvPr/>
+      </p:nvGrpSpPr>
+      <p:grpSpPr>
+        <a:xfrm>
+          <a:off x="0" y="0"/>
+          <a:ext cx="0" cy="0"/>
+          <a:chOff x="0" y="0"/>
+          <a:chExt cx="0" cy="0"/>
+        </a:xfrm>
+      </p:grpSpPr>
+      <p:sp>
+        <p:nvSpPr>
+          <p:cNvPr id="2" name="Slide Image Placeholder 1"/>
+          <p:cNvSpPr>
+            <a:spLocks noGrp="1"/>
+          </p:cNvSpPr>
+          <p:nvPr>
+            <p:ph type="sldImg" idx="2"/>
+          </p:nvPr>
+        </p:nvSpPr>
+        <p:spPr/>
+      </p:sp>
+      <p:sp>
+        <p:nvSpPr>
+          <p:cNvPr id="3" name="Notes Placeholder 2"/>
+          <p:cNvSpPr>
+            <a:spLocks noGrp="1"/>
+          </p:cNvSpPr>
+          <p:nvPr>
+            <p:ph type="body" idx="3" sz="quarter"/>
+          </p:nvPr>
+        </p:nvSpPr>
+        <p:spPr/>
+        <p:txBody>
+          <a:bodyPr/>
+          <a:lstStyle/>
+          <a:p>
+            <a:r>
+              <a:t>Avec 70/100, le pilier environnemental se situe 4 points au-dessus du score global (66/100). Rapportées au chiffre d'affaires, les émissions représentent 171 t CO2e par million d'euros, une intensité satisfaisante pour le secteur selon la grille du diagnostic. La part d'énergie renouvelable atteint 42 %, un niveau satisfaisant selon la grille de lecture du diagnostic. 63 % des déchets sont valorisés, ce que la grille du diagnostic classe comme solide.</a:t>
+            </a:r>
+          </a:p>
+          <a:p/>
+          <a:p>
+            <a:r>
+              <a:t>La consommation d'énergie atteint 21 500 MWh, soit 67,2 MWh par salarié. La consommation d'eau de l'exercice est de 120 000 m3. Restent à documenter : le volume de déchets et les initiatives en faveur de la biodiversité. Leur collecte, au prochain exercice, fiabilisera la lecture de ce pilier.</a:t>
+            </a:r>
+          </a:p>
+          <a:p/>
+          <a:p>
+            <a:r>
+              <a:t>Le plan d'action retient un levier pour ce pilier : augmenter la part d'énergie renouvelable à 50 % (objectif : 50 % d'énergie renouvelable dans le mix ; échéance : 2027).</a:t>
+            </a:r>
+          </a:p>
+          <a:p/>
+          <a:p>
+            <a:r>
+              <a:t>L'empreinte mesurée s'élève à 8 200 t CO2e sur les scopes renseignés. Le Scope 3 en concentre la plus grande part (60 %) : c'est le périmètre sur lequel les leviers de réduction auront le plus d'effet. Rapportées à l'effectif, les émissions représentent 25,6 t CO2e par salarié.</a:t>
+            </a:r>
+          </a:p>
+        </p:txBody>
+      </p:sp>
+      <p:sp>
+        <p:nvSpPr>
+          <p:cNvPr id="4" name="Slide Number Placeholder 3"/>
+          <p:cNvSpPr>
+            <a:spLocks noGrp="1"/>
+          </p:cNvSpPr>
+          <p:nvPr>
+            <p:ph type="sldNum" idx="5" sz="quarter"/>
+          </p:nvPr>
+        </p:nvSpPr>
+        <p:spPr/>
+      </p:sp>
+    </p:spTree>
+  </p:cSld>
+  <p:clrMapOvr>
+    <a:masterClrMapping/>
+  </p:clrMapOvr>
+</p:notes>
+</file>
+
+<file path=ppt/notesSlides/notesSlide3.xml><?xml version="1.0" encoding="utf-8"?>
+<p:notes xmlns:a="http://schemas.openxmlformats.org/drawingml/2006/main" xmlns:p="http://schemas.openxmlformats.org/presentationml/2006/main" xmlns:r="http://schemas.openxmlformats.org/officeDocument/2006/relationships">
+  <p:cSld>
+    <p:spTree>
+      <p:nvGrpSpPr>
+        <p:cNvPr id="1" name=""/>
+        <p:cNvGrpSpPr/>
+        <p:nvPr/>
+      </p:nvGrpSpPr>
+      <p:grpSpPr>
+        <a:xfrm>
+          <a:off x="0" y="0"/>
+          <a:ext cx="0" cy="0"/>
+          <a:chOff x="0" y="0"/>
+          <a:chExt cx="0" cy="0"/>
+        </a:xfrm>
+      </p:grpSpPr>
+      <p:sp>
+        <p:nvSpPr>
+          <p:cNvPr id="2" name="Slide Image Placeholder 1"/>
+          <p:cNvSpPr>
+            <a:spLocks noGrp="1"/>
+          </p:cNvSpPr>
+          <p:nvPr>
+            <p:ph type="sldImg" idx="2"/>
+          </p:nvPr>
+        </p:nvSpPr>
+        <p:spPr/>
+      </p:sp>
+      <p:sp>
+        <p:nvSpPr>
+          <p:cNvPr id="3" name="Notes Placeholder 2"/>
+          <p:cNvSpPr>
+            <a:spLocks noGrp="1"/>
+          </p:cNvSpPr>
+          <p:nvPr>
+            <p:ph type="body" idx="3" sz="quarter"/>
+          </p:nvPr>
+        </p:nvSpPr>
+        <p:spPr/>
+        <p:txBody>
+          <a:bodyPr/>
+          <a:lstStyle/>
+          <a:p>
+            <a:r>
+              <a:t>Avec 55/100, le pilier social se situe 11 points en dessous du score global (66/100). Les femmes représentent 34 % de l'effectif, une situation satisfaisante selon la grille de lecture retenue. Chaque salarié a suivi en moyenne 22 h de formation sur l'exercice, un effort satisfaisant au regard de la grille du diagnostic. Le taux de fréquence des accidents s'établit à 6,2, un résultat fragile selon la grille de lecture retenue. Le taux de rotation du personnel est de 11 %, un niveau satisfaisant selon la grille du diagnostic.</a:t>
+            </a:r>
+          </a:p>
+          <a:p/>
+          <a:p>
+            <a:r>
+              <a:t>L'effectif s'établit à 320 collaborateurs sur l'exercice. Restent à documenter : le nombre d'accidents du travail, l'investissement communautaire, la part d'achats locaux, la satisfaction client et l'emploi de personnes en situation de handicap. Leur collecte, au prochain exercice, fiabilisera la lecture de ce pilier.</a:t>
+            </a:r>
+          </a:p>
+          <a:p/>
+          <a:p>
+            <a:r>
+              <a:t>Le plan d'action retient un levier pour ce pilier : définir des objectifs chiffrés de parité femme-homme (objectif : cible de mixité définie et suivie annuellement ; échéance : 2026).</a:t>
+            </a:r>
+          </a:p>
+        </p:txBody>
+      </p:sp>
+      <p:sp>
+        <p:nvSpPr>
+          <p:cNvPr id="4" name="Slide Number Placeholder 3"/>
+          <p:cNvSpPr>
+            <a:spLocks noGrp="1"/>
+          </p:cNvSpPr>
+          <p:nvPr>
+            <p:ph type="sldNum" idx="5" sz="quarter"/>
+          </p:nvPr>
+        </p:nvSpPr>
+        <p:spPr/>
+      </p:sp>
+    </p:spTree>
+  </p:cSld>
+  <p:clrMapOvr>
+    <a:masterClrMapping/>
+  </p:clrMapOvr>
+</p:notes>
+</file>
+
+<file path=ppt/notesSlides/notesSlide4.xml><?xml version="1.0" encoding="utf-8"?>
+<p:notes xmlns:a="http://schemas.openxmlformats.org/drawingml/2006/main" xmlns:p="http://schemas.openxmlformats.org/presentationml/2006/main" xmlns:r="http://schemas.openxmlformats.org/officeDocument/2006/relationships">
+  <p:cSld>
+    <p:spTree>
+      <p:nvGrpSpPr>
+        <p:cNvPr id="1" name=""/>
+        <p:cNvGrpSpPr/>
+        <p:nvPr/>
+      </p:nvGrpSpPr>
+      <p:grpSpPr>
+        <a:xfrm>
+          <a:off x="0" y="0"/>
+          <a:ext cx="0" cy="0"/>
+          <a:chOff x="0" y="0"/>
+          <a:chExt cx="0" cy="0"/>
+        </a:xfrm>
+      </p:grpSpPr>
+      <p:sp>
+        <p:nvSpPr>
+          <p:cNvPr id="2" name="Slide Image Placeholder 1"/>
+          <p:cNvSpPr>
+            <a:spLocks noGrp="1"/>
+          </p:cNvSpPr>
+          <p:nvPr>
+            <p:ph type="sldImg" idx="2"/>
+          </p:nvPr>
+        </p:nvSpPr>
+        <p:spPr/>
+      </p:sp>
+      <p:sp>
+        <p:nvSpPr>
+          <p:cNvPr id="3" name="Notes Placeholder 2"/>
+          <p:cNvSpPr>
+            <a:spLocks noGrp="1"/>
+          </p:cNvSpPr>
+          <p:nvPr>
+            <p:ph type="body" idx="3" sz="quarter"/>
+          </p:nvPr>
+        </p:nvSpPr>
+        <p:spPr/>
+        <p:txBody>
+          <a:bodyPr/>
+          <a:lstStyle/>
+          <a:p>
+            <a:r>
+              <a:t>Avec 75/100, le pilier de gouvernance se situe 9 points au-dessus du score global (66/100). Les administrateurs indépendants représentent 45 % du conseil, une proportion satisfaisante selon la grille du diagnostic. Les femmes occupent 44 % des sièges du conseil, une représentation exemplaire selon la grille de lecture retenue.</a:t>
+            </a:r>
+          </a:p>
+          <a:p/>
+          <a:p>
+            <a:r>
+              <a:t>Le conseil compte 9 membres. Un comité de durabilité est en place : il donne un cadre de pilotage aux engagements présentés dans ce rapport. Aucun audit ESG indépendant n'a été conduit sur l'exercice. Aucun manquement éthique n'a été enregistré. Un incident de cybersécurité a été déclaré. Restent à documenter : les cas de corruption et le budget RSE. Leur collecte, au prochain exercice, fiabilisera la lecture de ce pilier.</a:t>
+            </a:r>
+          </a:p>
+          <a:p/>
+          <a:p>
+            <a:r>
+              <a:t>Le plan d'action retient 2 leviers pour ce pilier : commander un audit ESG indépendant annuel (objectif : assurance limitée obtenue sur le reporting ; échéance : annuel); aligner la stratégie ESG sur les ODD &amp; la TCFD (objectif : alignement ODD / TCFD documenté ; échéance : continu).</a:t>
+            </a:r>
+          </a:p>
+        </p:txBody>
+      </p:sp>
+      <p:sp>
+        <p:nvSpPr>
+          <p:cNvPr id="4" name="Slide Number Placeholder 3"/>
+          <p:cNvSpPr>
+            <a:spLocks noGrp="1"/>
+          </p:cNvSpPr>
+          <p:nvPr>
+            <p:ph type="sldNum" idx="5" sz="quarter"/>
+          </p:nvPr>
+        </p:nvSpPr>
+        <p:spPr/>
+      </p:sp>
+    </p:spTree>
+  </p:cSld>
+  <p:clrMapOvr>
+    <a:masterClrMapping/>
+  </p:clrMapOvr>
+</p:notes>
+</file>
+
+<file path=ppt/notesSlides/notesSlide5.xml><?xml version="1.0" encoding="utf-8"?>
+<p:notes xmlns:a="http://schemas.openxmlformats.org/drawingml/2006/main" xmlns:p="http://schemas.openxmlformats.org/presentationml/2006/main" xmlns:r="http://schemas.openxmlformats.org/officeDocument/2006/relationships">
+  <p:cSld>
+    <p:spTree>
+      <p:nvGrpSpPr>
+        <p:cNvPr id="1" name=""/>
+        <p:cNvGrpSpPr/>
+        <p:nvPr/>
+      </p:nvGrpSpPr>
+      <p:grpSpPr>
+        <a:xfrm>
+          <a:off x="0" y="0"/>
+          <a:ext cx="0" cy="0"/>
+          <a:chOff x="0" y="0"/>
+          <a:chExt cx="0" cy="0"/>
+        </a:xfrm>
+      </p:grpSpPr>
+      <p:sp>
+        <p:nvSpPr>
+          <p:cNvPr id="2" name="Slide Image Placeholder 1"/>
+          <p:cNvSpPr>
+            <a:spLocks noGrp="1"/>
+          </p:cNvSpPr>
+          <p:nvPr>
+            <p:ph type="sldImg" idx="2"/>
+          </p:nvPr>
+        </p:nvSpPr>
+        <p:spPr/>
+      </p:sp>
+      <p:sp>
+        <p:nvSpPr>
+          <p:cNvPr id="3" name="Notes Placeholder 2"/>
+          <p:cNvSpPr>
+            <a:spLocks noGrp="1"/>
+          </p:cNvSpPr>
+          <p:nvPr>
+            <p:ph type="body" idx="3" sz="quarter"/>
+          </p:nvPr>
+        </p:nvSpPr>
+        <p:spPr/>
+        <p:txBody>
+          <a:bodyPr/>
+          <a:lstStyle/>
+          <a:p>
+            <a:r>
+              <a:t>Ce chapitre met en regard les résultats et leurs causes. Il identifie 5 forces et 5 axes de progrès, examine la couverture de 7 exigences de reporting (dont 2 encore ouvertes) et hiérarchise 4 risques majeurs (dont 2 de priorité 1).</a:t>
+            </a:r>
+          </a:p>
+          <a:p/>
+          <a:p>
+            <a:r>
+              <a:t>Le positionnement ci-dessous compare les trois piliers entre eux, sans référence externe : il indique où se concentre la marge de progression de l'entreprise.</a:t>
+            </a:r>
+          </a:p>
+          <a:p/>
+          <a:p>
+            <a:r>
+              <a:t>Le tableau ci-dessous examine 7 exigences de reporting du référentiel CSRD / ESRS : 4 sont couvertes par les données de l'exercice, 2 restent ouvertes ou partiellement couvertes. Chaque ligne indique la référence concernée et ce qui manque pour la couvrir.</a:t>
+            </a:r>
+          </a:p>
+        </p:txBody>
+      </p:sp>
+      <p:sp>
+        <p:nvSpPr>
+          <p:cNvPr id="4" name="Slide Number Placeholder 3"/>
+          <p:cNvSpPr>
+            <a:spLocks noGrp="1"/>
+          </p:cNvSpPr>
+          <p:nvPr>
+            <p:ph type="sldNum" idx="5" sz="quarter"/>
+          </p:nvPr>
+        </p:nvSpPr>
+        <p:spPr/>
+      </p:sp>
+    </p:spTree>
+  </p:cSld>
+  <p:clrMapOvr>
+    <a:masterClrMapping/>
+  </p:clrMapOvr>
+</p:notes>
+</file>
+
+<file path=ppt/notesSlides/notesSlide6.xml><?xml version="1.0" encoding="utf-8"?>
+<p:notes xmlns:a="http://schemas.openxmlformats.org/drawingml/2006/main" xmlns:p="http://schemas.openxmlformats.org/presentationml/2006/main" xmlns:r="http://schemas.openxmlformats.org/officeDocument/2006/relationships">
+  <p:cSld>
+    <p:spTree>
+      <p:nvGrpSpPr>
+        <p:cNvPr id="1" name=""/>
+        <p:cNvGrpSpPr/>
+        <p:nvPr/>
+      </p:nvGrpSpPr>
+      <p:grpSpPr>
+        <a:xfrm>
+          <a:off x="0" y="0"/>
+          <a:ext cx="0" cy="0"/>
+          <a:chOff x="0" y="0"/>
+          <a:chExt cx="0" cy="0"/>
+        </a:xfrm>
+      </p:grpSpPr>
+      <p:sp>
+        <p:nvSpPr>
+          <p:cNvPr id="2" name="Slide Image Placeholder 1"/>
+          <p:cNvSpPr>
+            <a:spLocks noGrp="1"/>
+          </p:cNvSpPr>
+          <p:nvPr>
+            <p:ph type="sldImg" idx="2"/>
+          </p:nvPr>
+        </p:nvSpPr>
+        <p:spPr/>
+      </p:sp>
+      <p:sp>
+        <p:nvSpPr>
+          <p:cNvPr id="3" name="Notes Placeholder 2"/>
+          <p:cNvSpPr>
+            <a:spLocks noGrp="1"/>
+          </p:cNvSpPr>
+          <p:nvPr>
+            <p:ph type="body" idx="3" sz="quarter"/>
+          </p:nvPr>
+        </p:nvSpPr>
+        <p:spPr/>
+        <p:txBody>
+          <a:bodyPr/>
+          <a:lstStyle/>
+          <a:p>
+            <a:r>
+              <a:t>L'analyse retient 4 risques majeurs. Leur priorité combine l'impact estimé et la probabilité d'occurrence : 2 sont classés en priorité 1 et appellent une action dans les douze prochains mois.</a:t>
+            </a:r>
+          </a:p>
+        </p:txBody>
+      </p:sp>
+      <p:sp>
+        <p:nvSpPr>
+          <p:cNvPr id="4" name="Slide Number Placeholder 3"/>
+          <p:cNvSpPr>
+            <a:spLocks noGrp="1"/>
+          </p:cNvSpPr>
+          <p:nvPr>
+            <p:ph type="sldNum" idx="5" sz="quarter"/>
+          </p:nvPr>
+        </p:nvSpPr>
+        <p:spPr/>
+      </p:sp>
+    </p:spTree>
+  </p:cSld>
+  <p:clrMapOvr>
+    <a:masterClrMapping/>
+  </p:clrMapOvr>
+</p:notes>
+</file>
+
+<file path=ppt/notesSlides/notesSlide7.xml><?xml version="1.0" encoding="utf-8"?>
+<p:notes xmlns:a="http://schemas.openxmlformats.org/drawingml/2006/main" xmlns:p="http://schemas.openxmlformats.org/presentationml/2006/main" xmlns:r="http://schemas.openxmlformats.org/officeDocument/2006/relationships">
+  <p:cSld>
+    <p:spTree>
+      <p:nvGrpSpPr>
+        <p:cNvPr id="1" name=""/>
+        <p:cNvGrpSpPr/>
+        <p:nvPr/>
+      </p:nvGrpSpPr>
+      <p:grpSpPr>
+        <a:xfrm>
+          <a:off x="0" y="0"/>
+          <a:ext cx="0" cy="0"/>
+          <a:chOff x="0" y="0"/>
+          <a:chExt cx="0" cy="0"/>
+        </a:xfrm>
+      </p:grpSpPr>
+      <p:sp>
+        <p:nvSpPr>
+          <p:cNvPr id="2" name="Slide Image Placeholder 1"/>
+          <p:cNvSpPr>
+            <a:spLocks noGrp="1"/>
+          </p:cNvSpPr>
+          <p:nvPr>
+            <p:ph type="sldImg" idx="2"/>
+          </p:nvPr>
+        </p:nvSpPr>
+        <p:spPr/>
+      </p:sp>
+      <p:sp>
+        <p:nvSpPr>
+          <p:cNvPr id="3" name="Notes Placeholder 2"/>
+          <p:cNvSpPr>
+            <a:spLocks noGrp="1"/>
+          </p:cNvSpPr>
+          <p:nvPr>
+            <p:ph type="body" idx="3" sz="quarter"/>
+          </p:nvPr>
+        </p:nvSpPr>
+        <p:spPr/>
+        <p:txBody>
+          <a:bodyPr/>
+          <a:lstStyle/>
+          <a:p>
+            <a:r>
+              <a:t>Ce chapitre traduit le diagnostic en actions. Il propose 4 recommandations, dont 2 gains rapides, et les ordonne dans une feuille de route en trois phases sur douze mois, en cohérence avec l'horizon 2030 fixé par l'entreprise.</a:t>
+            </a:r>
+          </a:p>
+          <a:p/>
+          <a:p>
+            <a:r>
+              <a:t>Les recommandations sont ordonnées par priorité. Elles se répartissent entre l'environnement (1), le social (1) et la gouvernance (2) ; chacune précise un objectif, un responsable et une échéance.</a:t>
+            </a:r>
+          </a:p>
+        </p:txBody>
+      </p:sp>
+      <p:sp>
+        <p:nvSpPr>
+          <p:cNvPr id="4" name="Slide Number Placeholder 3"/>
+          <p:cNvSpPr>
+            <a:spLocks noGrp="1"/>
+          </p:cNvSpPr>
+          <p:nvPr>
+            <p:ph type="sldNum" idx="5" sz="quarter"/>
+          </p:nvPr>
+        </p:nvSpPr>
+        <p:spPr/>
+      </p:sp>
+    </p:spTree>
+  </p:cSld>
+  <p:clrMapOvr>
+    <a:masterClrMapping/>
+  </p:clrMapOvr>
+</p:notes>
+</file>
+
+<file path=ppt/notesSlides/notesSlide8.xml><?xml version="1.0" encoding="utf-8"?>
+<p:notes xmlns:a="http://schemas.openxmlformats.org/drawingml/2006/main" xmlns:p="http://schemas.openxmlformats.org/presentationml/2006/main" xmlns:r="http://schemas.openxmlformats.org/officeDocument/2006/relationships">
+  <p:cSld>
+    <p:spTree>
+      <p:nvGrpSpPr>
+        <p:cNvPr id="1" name=""/>
+        <p:cNvGrpSpPr/>
+        <p:nvPr/>
+      </p:nvGrpSpPr>
+      <p:grpSpPr>
+        <a:xfrm>
+          <a:off x="0" y="0"/>
+          <a:ext cx="0" cy="0"/>
+          <a:chOff x="0" y="0"/>
+          <a:chExt cx="0" cy="0"/>
+        </a:xfrm>
+      </p:grpSpPr>
+      <p:sp>
+        <p:nvSpPr>
+          <p:cNvPr id="2" name="Slide Image Placeholder 1"/>
+          <p:cNvSpPr>
+            <a:spLocks noGrp="1"/>
+          </p:cNvSpPr>
+          <p:nvPr>
+            <p:ph type="sldImg" idx="2"/>
+          </p:nvPr>
+        </p:nvSpPr>
+        <p:spPr/>
+      </p:sp>
+      <p:sp>
+        <p:nvSpPr>
+          <p:cNvPr id="3" name="Notes Placeholder 2"/>
+          <p:cNvSpPr>
+            <a:spLocks noGrp="1"/>
+          </p:cNvSpPr>
+          <p:nvPr>
+            <p:ph type="body" idx="3" sz="quarter"/>
+          </p:nvPr>
+        </p:nvSpPr>
+        <p:spPr/>
+        <p:txBody>
+          <a:bodyPr/>
+          <a:lstStyle/>
+          <a:p>
+            <a:r>
+              <a:t>La feuille de route répartit les actions en trois phases. 0-3 mois : 1 action, 3-6 mois : 2 actions et 6-12 mois : 1 action. Les gains rapides, signalés dans le tableau, peuvent être engagés sans attendre les chantiers structurants.</a:t>
+            </a:r>
+          </a:p>
+        </p:txBody>
+      </p:sp>
+      <p:sp>
+        <p:nvSpPr>
+          <p:cNvPr id="4" name="Slide Number Placeholder 3"/>
+          <p:cNvSpPr>
+            <a:spLocks noGrp="1"/>
+          </p:cNvSpPr>
+          <p:nvPr>
+            <p:ph type="sldNum" idx="5" sz="quarter"/>
+          </p:nvPr>
+        </p:nvSpPr>
+        <p:spPr/>
+      </p:sp>
+    </p:spTree>
+  </p:cSld>
+  <p:clrMapOvr>
+    <a:masterClrMapping/>
+  </p:clrMapOvr>
+</p:notes>
 </file>
 
 <file path=ppt/slideLayouts/slideLayout1.xml><?xml version="1.0" encoding="utf-8"?>
@@ -4826,7 +5808,7 @@
                 </a:solidFill>
                 <a:latin typeface="Segoe UI"/>
               </a:rPr>
-              <a:t>45 % d'administrateurs indépendants</a:t>
+              <a:t>45 % d'administrateurs indépendants</a:t>
             </a:r>
           </a:p>
         </p:txBody>
@@ -6109,7 +7091,7 @@
                 </a:solidFill>
                 <a:latin typeface="Georgia"/>
               </a:rPr>
-              <a:t>8,200 t</a:t>
+              <a:t>8 200 t</a:t>
             </a:r>
           </a:p>
         </p:txBody>
@@ -6334,7 +7316,7 @@
                 </a:solidFill>
                 <a:latin typeface="Georgia"/>
               </a:rPr>
-              <a:t>42%</a:t>
+              <a:t>42 %</a:t>
             </a:r>
           </a:p>
         </p:txBody>
@@ -6559,7 +7541,7 @@
                 </a:solidFill>
                 <a:latin typeface="Georgia"/>
               </a:rPr>
-              <a:t>21,500</a:t>
+              <a:t>21 500</a:t>
             </a:r>
           </a:p>
         </p:txBody>
@@ -6784,7 +7766,7 @@
                 </a:solidFill>
                 <a:latin typeface="Georgia"/>
               </a:rPr>
-              <a:t>120,000</a:t>
+              <a:t>120 000</a:t>
             </a:r>
           </a:p>
         </p:txBody>
@@ -7167,7 +8149,7 @@
                 </a:solidFill>
                 <a:latin typeface="Georgia"/>
               </a:rPr>
-              <a:t>La sécurité au travail (TF 6.2), priorité à traiter</a:t>
+              <a:t>La sécurité au travail (TF 6,2), priorité à traiter</a:t>
             </a:r>
           </a:p>
         </p:txBody>
@@ -7754,7 +8736,7 @@
                 </a:solidFill>
                 <a:latin typeface="Georgia"/>
               </a:rPr>
-              <a:t>34%</a:t>
+              <a:t>34 %</a:t>
             </a:r>
           </a:p>
         </p:txBody>
@@ -8204,7 +9186,7 @@
                 </a:solidFill>
                 <a:latin typeface="Georgia"/>
               </a:rPr>
-              <a:t>6.2</a:t>
+              <a:t>6,2</a:t>
             </a:r>
           </a:p>
         </p:txBody>
@@ -9174,7 +10156,7 @@
                 </a:solidFill>
                 <a:latin typeface="Georgia"/>
               </a:rPr>
-              <a:t>44%</a:t>
+              <a:t>44 %</a:t>
             </a:r>
           </a:p>
         </p:txBody>
@@ -9399,7 +10381,7 @@
                 </a:solidFill>
                 <a:latin typeface="Georgia"/>
               </a:rPr>
-              <a:t>45%</a:t>
+              <a:t>45 %</a:t>
             </a:r>
           </a:p>
         </p:txBody>
@@ -10390,7 +11372,7 @@
                 </a:solidFill>
                 <a:latin typeface="Georgia"/>
               </a:rPr>
-              <a:t>52 % des investissements (CapEx) déjà alignés à la Taxonomie UE</a:t>
+              <a:t>52 % des investissements (CapEx) déjà alignés à la Taxonomie UE</a:t>
             </a:r>
           </a:p>
         </p:txBody>
@@ -10468,7 +11450,7 @@
                 </a:solidFill>
                 <a:latin typeface="Georgia"/>
               </a:rPr>
-              <a:t>52%</a:t>
+              <a:t>52 %</a:t>
             </a:r>
           </a:p>
         </p:txBody>
@@ -11294,7 +12276,7 @@
                 </a:solidFill>
                 <a:latin typeface="Segoe UI"/>
               </a:rPr>
-              <a:t>Parité exemplaire au Conseil d'Administration (44%)</a:t>
+              <a:t>Parité exemplaire au Conseil d'Administration (44 %)</a:t>
             </a:r>
           </a:p>
         </p:txBody>
@@ -11686,7 +12668,7 @@
                 </a:solidFill>
                 <a:latin typeface="Segoe UI"/>
               </a:rPr>
-              <a:t>Énergie renouvelable à renforcer (actuellement 42%, objectif 50%)</a:t>
+              <a:t>Énergie renouvelable à renforcer (actuellement 42 %, objectif 50 %)</a:t>
             </a:r>
           </a:p>
         </p:txBody>
@@ -11764,7 +12746,7 @@
                 </a:solidFill>
                 <a:latin typeface="Segoe UI"/>
               </a:rPr>
-              <a:t>Déséquilibre de genre dans les effectifs (34% de femmes)</a:t>
+              <a:t>Déséquilibre de genre dans les effectifs (34 % de femmes)</a:t>
             </a:r>
           </a:p>
         </p:txBody>
@@ -11842,7 +12824,7 @@
                 </a:solidFill>
                 <a:latin typeface="Segoe UI"/>
               </a:rPr>
-              <a:t>Taux de fréquence des accidents élevé (TF 6.2)</a:t>
+              <a:t>Taux de fréquence des accidents élevé (TF 6,2)</a:t>
             </a:r>
           </a:p>
         </p:txBody>
@@ -15119,7 +16101,7 @@
                 </a:solidFill>
                 <a:latin typeface="Georgia"/>
               </a:rPr>
-              <a:t>Augmenter la part d'énergie renouvelable à 50%</a:t>
+              <a:t>Augmenter la part d'énergie renouvelable à 50 %</a:t>
             </a:r>
           </a:p>
         </p:txBody>
@@ -17249,7 +18231,7 @@
                 </a:solidFill>
                 <a:latin typeface="Segoe UI"/>
               </a:rPr>
-              <a:t>Augmenter la part d'énergie renouvelable à 50%</a:t>
+              <a:t>Augmenter la part d'énergie renouvelable à 50 %</a:t>
             </a:r>
           </a:p>
         </p:txBody>
@@ -17606,7 +18588,7 @@
                 </a:solidFill>
                 <a:latin typeface="Segoe UI"/>
               </a:rPr>
-              <a:t>Augmenter la part d'énergie renouvelable à 50%</a:t>
+              <a:t>Augmenter la part d'énergie renouvelable à 50 %</a:t>
             </a:r>
           </a:p>
         </p:txBody>
@@ -22500,4 +23482,324 @@
   </a:objectDefaults>
   <a:extraClrSchemeLst/>
 </a:theme>
+</file>
+
+<file path=ppt/theme/theme2.xml><?xml version="1.0" encoding="utf-8"?>
+<a:theme xmlns:a="http://schemas.openxmlformats.org/drawingml/2006/main" name="Office Theme">
+  <a:themeElements>
+    <a:clrScheme name="Office">
+      <a:dk1>
+        <a:sysClr val="windowText" lastClr="000000"/>
+      </a:dk1>
+      <a:lt1>
+        <a:sysClr val="window" lastClr="FFFFFF"/>
+      </a:lt1>
+      <a:dk2>
+        <a:srgbClr val="1F497D"/>
+      </a:dk2>
+      <a:lt2>
+        <a:srgbClr val="EEECE1"/>
+      </a:lt2>
+      <a:accent1>
+        <a:srgbClr val="4F81BD"/>
+      </a:accent1>
+      <a:accent2>
+        <a:srgbClr val="C0504D"/>
+      </a:accent2>
+      <a:accent3>
+        <a:srgbClr val="9BBB59"/>
+      </a:accent3>
+      <a:accent4>
+        <a:srgbClr val="8064A2"/>
+      </a:accent4>
+      <a:accent5>
+        <a:srgbClr val="4BACC6"/>
+      </a:accent5>
+      <a:accent6>
+        <a:srgbClr val="F79646"/>
+      </a:accent6>
+      <a:hlink>
+        <a:srgbClr val="0000FF"/>
+      </a:hlink>
+      <a:folHlink>
+        <a:srgbClr val="800080"/>
+      </a:folHlink>
+    </a:clrScheme>
+    <a:fontScheme name="Office">
+      <a:majorFont>
+        <a:latin typeface="Calibri"/>
+        <a:ea typeface=""/>
+        <a:cs typeface=""/>
+        <a:font script="Jpan" typeface="ＭＳ Ｐゴシック"/>
+        <a:font script="Hang" typeface="맑은 고딕"/>
+        <a:font script="Hans" typeface="宋体"/>
+        <a:font script="Hant" typeface="新細明體"/>
+        <a:font script="Arab" typeface="Times New Roman"/>
+        <a:font script="Hebr" typeface="Times New Roman"/>
+        <a:font script="Thai" typeface="Angsana New"/>
+        <a:font script="Ethi" typeface="Nyala"/>
+        <a:font script="Beng" typeface="Vrinda"/>
+        <a:font script="Gujr" typeface="Shruti"/>
+        <a:font script="Khmr" typeface="MoolBoran"/>
+        <a:font script="Knda" typeface="Tunga"/>
+        <a:font script="Guru" typeface="Raavi"/>
+        <a:font script="Cans" typeface="Euphemia"/>
+        <a:font script="Cher" typeface="Plantagenet Cherokee"/>
+        <a:font script="Yiii" typeface="Microsoft Yi Baiti"/>
+        <a:font script="Tibt" typeface="Microsoft Himalaya"/>
+        <a:font script="Thaa" typeface="MV Boli"/>
+        <a:font script="Deva" typeface="Mangal"/>
+        <a:font script="Telu" typeface="Gautami"/>
+        <a:font script="Taml" typeface="Latha"/>
+        <a:font script="Syrc" typeface="Estrangelo Edessa"/>
+        <a:font script="Orya" typeface="Kalinga"/>
+        <a:font script="Mlym" typeface="Kartika"/>
+        <a:font script="Laoo" typeface="DokChampa"/>
+        <a:font script="Sinh" typeface="Iskoola Pota"/>
+        <a:font script="Mong" typeface="Mongolian Baiti"/>
+        <a:font script="Viet" typeface="Times New Roman"/>
+        <a:font script="Uigh" typeface="Microsoft Uighur"/>
+        <a:font script="Geor" typeface="Sylfaen"/>
+      </a:majorFont>
+      <a:minorFont>
+        <a:latin typeface="Calibri"/>
+        <a:ea typeface=""/>
+        <a:cs typeface=""/>
+        <a:font script="Jpan" typeface="ＭＳ Ｐゴシック"/>
+        <a:font script="Hang" typeface="맑은 고딕"/>
+        <a:font script="Hans" typeface="宋体"/>
+        <a:font script="Hant" typeface="新細明體"/>
+        <a:font script="Arab" typeface="Arial"/>
+        <a:font script="Hebr" typeface="Arial"/>
+        <a:font script="Thai" typeface="Cordia New"/>
+        <a:font script="Ethi" typeface="Nyala"/>
+        <a:font script="Beng" typeface="Vrinda"/>
+        <a:font script="Gujr" typeface="Shruti"/>
+        <a:font script="Khmr" typeface="DaunPenh"/>
+        <a:font script="Knda" typeface="Tunga"/>
+        <a:font script="Guru" typeface="Raavi"/>
+        <a:font script="Cans" typeface="Euphemia"/>
+        <a:font script="Cher" typeface="Plantagenet Cherokee"/>
+        <a:font script="Yiii" typeface="Microsoft Yi Baiti"/>
+        <a:font script="Tibt" typeface="Microsoft Himalaya"/>
+        <a:font script="Thaa" typeface="MV Boli"/>
+        <a:font script="Deva" typeface="Mangal"/>
+        <a:font script="Telu" typeface="Gautami"/>
+        <a:font script="Taml" typeface="Latha"/>
+        <a:font script="Syrc" typeface="Estrangelo Edessa"/>
+        <a:font script="Orya" typeface="Kalinga"/>
+        <a:font script="Mlym" typeface="Kartika"/>
+        <a:font script="Laoo" typeface="DokChampa"/>
+        <a:font script="Sinh" typeface="Iskoola Pota"/>
+        <a:font script="Mong" typeface="Mongolian Baiti"/>
+        <a:font script="Viet" typeface="Arial"/>
+        <a:font script="Uigh" typeface="Microsoft Uighur"/>
+        <a:font script="Geor" typeface="Sylfaen"/>
+      </a:minorFont>
+    </a:fontScheme>
+    <a:fmtScheme name="Office">
+      <a:fillStyleLst>
+        <a:solidFill>
+          <a:schemeClr val="phClr"/>
+        </a:solidFill>
+        <a:gradFill rotWithShape="1">
+          <a:gsLst>
+            <a:gs pos="0">
+              <a:schemeClr val="phClr">
+                <a:tint val="50000"/>
+                <a:satMod val="300000"/>
+              </a:schemeClr>
+            </a:gs>
+            <a:gs pos="35000">
+              <a:schemeClr val="phClr">
+                <a:tint val="37000"/>
+                <a:satMod val="300000"/>
+              </a:schemeClr>
+            </a:gs>
+            <a:gs pos="100000">
+              <a:schemeClr val="phClr">
+                <a:tint val="15000"/>
+                <a:satMod val="350000"/>
+              </a:schemeClr>
+            </a:gs>
+          </a:gsLst>
+          <a:lin ang="16200000" scaled="1"/>
+        </a:gradFill>
+        <a:gradFill rotWithShape="1">
+          <a:gsLst>
+            <a:gs pos="0">
+              <a:schemeClr val="phClr">
+                <a:tint val="100000"/>
+                <a:shade val="100000"/>
+                <a:satMod val="130000"/>
+              </a:schemeClr>
+            </a:gs>
+            <a:gs pos="100000">
+              <a:schemeClr val="phClr">
+                <a:tint val="50000"/>
+                <a:shade val="100000"/>
+                <a:satMod val="350000"/>
+              </a:schemeClr>
+            </a:gs>
+          </a:gsLst>
+          <a:lin ang="16200000" scaled="0"/>
+        </a:gradFill>
+      </a:fillStyleLst>
+      <a:lnStyleLst>
+        <a:ln w="9525" cap="flat" cmpd="sng" algn="ctr">
+          <a:solidFill>
+            <a:schemeClr val="phClr">
+              <a:shade val="95000"/>
+              <a:satMod val="105000"/>
+            </a:schemeClr>
+          </a:solidFill>
+          <a:prstDash val="solid"/>
+        </a:ln>
+        <a:ln w="25400" cap="flat" cmpd="sng" algn="ctr">
+          <a:solidFill>
+            <a:schemeClr val="phClr"/>
+          </a:solidFill>
+          <a:prstDash val="solid"/>
+        </a:ln>
+        <a:ln w="38100" cap="flat" cmpd="sng" algn="ctr">
+          <a:solidFill>
+            <a:schemeClr val="phClr"/>
+          </a:solidFill>
+          <a:prstDash val="solid"/>
+        </a:ln>
+      </a:lnStyleLst>
+      <a:effectStyleLst>
+        <a:effectStyle>
+          <a:effectLst>
+            <a:outerShdw blurRad="40000" dist="20000" dir="5400000" rotWithShape="0">
+              <a:srgbClr val="000000">
+                <a:alpha val="38000"/>
+              </a:srgbClr>
+            </a:outerShdw>
+          </a:effectLst>
+        </a:effectStyle>
+        <a:effectStyle>
+          <a:effectLst>
+            <a:outerShdw blurRad="40000" dist="23000" dir="5400000" rotWithShape="0">
+              <a:srgbClr val="000000">
+                <a:alpha val="35000"/>
+              </a:srgbClr>
+            </a:outerShdw>
+          </a:effectLst>
+        </a:effectStyle>
+        <a:effectStyle>
+          <a:effectLst>
+            <a:outerShdw blurRad="40000" dist="23000" dir="5400000" rotWithShape="0">
+              <a:srgbClr val="000000">
+                <a:alpha val="35000"/>
+              </a:srgbClr>
+            </a:outerShdw>
+          </a:effectLst>
+          <a:scene3d>
+            <a:camera prst="orthographicFront">
+              <a:rot lat="0" lon="0" rev="0"/>
+            </a:camera>
+            <a:lightRig rig="threePt" dir="t">
+              <a:rot lat="0" lon="0" rev="1200000"/>
+            </a:lightRig>
+          </a:scene3d>
+          <a:sp3d>
+            <a:bevelT w="63500" h="25400"/>
+          </a:sp3d>
+        </a:effectStyle>
+      </a:effectStyleLst>
+      <a:bgFillStyleLst>
+        <a:solidFill>
+          <a:schemeClr val="phClr"/>
+        </a:solidFill>
+        <a:gradFill rotWithShape="1">
+          <a:gsLst>
+            <a:gs pos="0">
+              <a:schemeClr val="phClr">
+                <a:tint val="40000"/>
+                <a:satMod val="350000"/>
+              </a:schemeClr>
+            </a:gs>
+            <a:gs pos="40000">
+              <a:schemeClr val="phClr">
+                <a:tint val="45000"/>
+                <a:shade val="99000"/>
+                <a:satMod val="350000"/>
+              </a:schemeClr>
+            </a:gs>
+            <a:gs pos="100000">
+              <a:schemeClr val="phClr">
+                <a:shade val="20000"/>
+                <a:satMod val="255000"/>
+              </a:schemeClr>
+            </a:gs>
+          </a:gsLst>
+          <a:path path="circle">
+            <a:fillToRect l="50000" t="-80000" r="50000" b="180000"/>
+          </a:path>
+        </a:gradFill>
+        <a:gradFill rotWithShape="1">
+          <a:gsLst>
+            <a:gs pos="0">
+              <a:schemeClr val="phClr">
+                <a:tint val="80000"/>
+                <a:satMod val="300000"/>
+              </a:schemeClr>
+            </a:gs>
+            <a:gs pos="100000">
+              <a:schemeClr val="phClr">
+                <a:shade val="30000"/>
+                <a:satMod val="200000"/>
+              </a:schemeClr>
+            </a:gs>
+          </a:gsLst>
+          <a:path path="circle">
+            <a:fillToRect l="50000" t="50000" r="50000" b="50000"/>
+          </a:path>
+        </a:gradFill>
+      </a:bgFillStyleLst>
+    </a:fmtScheme>
+  </a:themeElements>
+  <a:objectDefaults>
+    <a:spDef>
+      <a:spPr/>
+      <a:bodyPr/>
+      <a:lstStyle/>
+      <a:style>
+        <a:lnRef idx="1">
+          <a:schemeClr val="accent1"/>
+        </a:lnRef>
+        <a:fillRef idx="3">
+          <a:schemeClr val="accent1"/>
+        </a:fillRef>
+        <a:effectRef idx="2">
+          <a:schemeClr val="accent1"/>
+        </a:effectRef>
+        <a:fontRef idx="minor">
+          <a:schemeClr val="lt1"/>
+        </a:fontRef>
+      </a:style>
+    </a:spDef>
+    <a:lnDef>
+      <a:spPr/>
+      <a:bodyPr/>
+      <a:lstStyle/>
+      <a:style>
+        <a:lnRef idx="2">
+          <a:schemeClr val="accent1"/>
+        </a:lnRef>
+        <a:fillRef idx="0">
+          <a:schemeClr val="accent1"/>
+        </a:fillRef>
+        <a:effectRef idx="1">
+          <a:schemeClr val="accent1"/>
+        </a:effectRef>
+        <a:fontRef idx="minor">
+          <a:schemeClr val="tx1"/>
+        </a:fontRef>
+      </a:style>
+    </a:lnDef>
+  </a:objectDefaults>
+  <a:extraClrSchemeLst/>
+</a:theme>
 </file>
--- a/examples/Presentation.pptx
+++ b/examples/Presentation.pptx
@@ -10,24 +10,24 @@
     <p:sldId id="258" r:id="rId9"/>
     <p:sldId id="259" r:id="rId10"/>
     <p:sldId id="260" r:id="rId11"/>
-    <p:sldId id="261" r:id="rId12"/>
-    <p:sldId id="262" r:id="rId13"/>
-    <p:sldId id="263" r:id="rId14"/>
-    <p:sldId id="264" r:id="rId15"/>
-    <p:sldId id="265" r:id="rId16"/>
-    <p:sldId id="266" r:id="rId17"/>
-    <p:sldId id="267" r:id="rId18"/>
-    <p:sldId id="268" r:id="rId19"/>
-    <p:sldId id="269" r:id="rId20"/>
-    <p:sldId id="270" r:id="rId21"/>
-    <p:sldId id="271" r:id="rId22"/>
-    <p:sldId id="272" r:id="rId23"/>
-    <p:sldId id="273" r:id="rId24"/>
-    <p:sldId id="274" r:id="rId25"/>
-    <p:sldId id="275" r:id="rId26"/>
-    <p:sldId id="276" r:id="rId27"/>
-    <p:sldId id="277" r:id="rId28"/>
-    <p:sldId id="278" r:id="rId29"/>
+    <p:sldId id="261" r:id="rId13"/>
+    <p:sldId id="262" r:id="rId14"/>
+    <p:sldId id="263" r:id="rId15"/>
+    <p:sldId id="264" r:id="rId16"/>
+    <p:sldId id="265" r:id="rId17"/>
+    <p:sldId id="266" r:id="rId18"/>
+    <p:sldId id="267" r:id="rId19"/>
+    <p:sldId id="268" r:id="rId20"/>
+    <p:sldId id="269" r:id="rId21"/>
+    <p:sldId id="270" r:id="rId22"/>
+    <p:sldId id="271" r:id="rId23"/>
+    <p:sldId id="272" r:id="rId24"/>
+    <p:sldId id="273" r:id="rId25"/>
+    <p:sldId id="274" r:id="rId26"/>
+    <p:sldId id="275" r:id="rId27"/>
+    <p:sldId id="276" r:id="rId28"/>
+    <p:sldId id="277" r:id="rId29"/>
+    <p:sldId id="278" r:id="rId30"/>
   </p:sldIdLst>
   <p:sldSz cx="12188952" cy="6858000" type="screen4x3"/>
   <p:notesSz cx="6858000" cy="9144000"/>
@@ -127,6 +127,988 @@
     </a:lvl9pPr>
   </p:defaultTextStyle>
 </p:presentation>
+</file>
+
+<file path=ppt/notesMasters/notesMaster1.xml><?xml version="1.0" encoding="utf-8"?>
+<p:notesMaster xmlns:a="http://schemas.openxmlformats.org/drawingml/2006/main" xmlns:p="http://schemas.openxmlformats.org/presentationml/2006/main" xmlns:r="http://schemas.openxmlformats.org/officeDocument/2006/relationships">
+  <p:cSld>
+    <p:bg>
+      <p:bgRef idx="1001">
+        <a:schemeClr val="bg1"/>
+      </p:bgRef>
+    </p:bg>
+    <p:spTree>
+      <p:nvGrpSpPr>
+        <p:cNvPr id="1" name=""/>
+        <p:cNvGrpSpPr/>
+        <p:nvPr/>
+      </p:nvGrpSpPr>
+      <p:grpSpPr>
+        <a:xfrm>
+          <a:off x="0" y="0"/>
+          <a:ext cx="0" cy="0"/>
+          <a:chOff x="0" y="0"/>
+          <a:chExt cx="0" cy="0"/>
+        </a:xfrm>
+      </p:grpSpPr>
+      <p:sp>
+        <p:nvSpPr>
+          <p:cNvPr id="2" name="Header Placeholder 1"/>
+          <p:cNvSpPr>
+            <a:spLocks noGrp="1"/>
+          </p:cNvSpPr>
+          <p:nvPr>
+            <p:ph type="hdr" sz="quarter"/>
+          </p:nvPr>
+        </p:nvSpPr>
+        <p:spPr>
+          <a:xfrm>
+            <a:off x="0" y="0"/>
+            <a:ext cx="2971800" cy="457200"/>
+          </a:xfrm>
+          <a:prstGeom prst="rect">
+            <a:avLst/>
+          </a:prstGeom>
+        </p:spPr>
+        <p:txBody>
+          <a:bodyPr vert="horz" lIns="91440" tIns="45720" rIns="91440" bIns="45720" rtlCol="0"/>
+          <a:lstStyle>
+            <a:lvl1pPr algn="l">
+              <a:defRPr sz="1200"/>
+            </a:lvl1pPr>
+          </a:lstStyle>
+          <a:p>
+            <a:endParaRPr lang="en-US"/>
+          </a:p>
+        </p:txBody>
+      </p:sp>
+      <p:sp>
+        <p:nvSpPr>
+          <p:cNvPr id="3" name="Date Placeholder 2"/>
+          <p:cNvSpPr>
+            <a:spLocks noGrp="1"/>
+          </p:cNvSpPr>
+          <p:nvPr>
+            <p:ph type="dt" idx="1"/>
+          </p:nvPr>
+        </p:nvSpPr>
+        <p:spPr>
+          <a:xfrm>
+            <a:off x="3884613" y="0"/>
+            <a:ext cx="2971800" cy="457200"/>
+          </a:xfrm>
+          <a:prstGeom prst="rect">
+            <a:avLst/>
+          </a:prstGeom>
+        </p:spPr>
+        <p:txBody>
+          <a:bodyPr vert="horz" lIns="91440" tIns="45720" rIns="91440" bIns="45720" rtlCol="0"/>
+          <a:lstStyle>
+            <a:lvl1pPr algn="r">
+              <a:defRPr sz="1200"/>
+            </a:lvl1pPr>
+          </a:lstStyle>
+          <a:p>
+            <a:fld id="{0F89C1C7-3DCD-1040-A9CF-14679D8B5DDD}" type="datetimeFigureOut">
+              <a:rPr lang="en-US" smtClean="0"/>
+              <a:t>10/17/16</a:t>
+            </a:fld>
+            <a:endParaRPr lang="en-US"/>
+          </a:p>
+        </p:txBody>
+      </p:sp>
+      <p:sp>
+        <p:nvSpPr>
+          <p:cNvPr id="4" name="Slide Image Placeholder 3"/>
+          <p:cNvSpPr>
+            <a:spLocks noGrp="1" noRot="1" noChangeAspect="1"/>
+          </p:cNvSpPr>
+          <p:nvPr>
+            <p:ph type="sldImg" idx="2"/>
+          </p:nvPr>
+        </p:nvSpPr>
+        <p:spPr>
+          <a:xfrm>
+            <a:off x="1143000" y="685800"/>
+            <a:ext cx="4572000" cy="3429000"/>
+          </a:xfrm>
+          <a:prstGeom prst="rect">
+            <a:avLst/>
+          </a:prstGeom>
+          <a:noFill/>
+          <a:ln w="12700">
+            <a:solidFill>
+              <a:prstClr val="black"/>
+            </a:solidFill>
+          </a:ln>
+        </p:spPr>
+        <p:txBody>
+          <a:bodyPr vert="horz" lIns="91440" tIns="45720" rIns="91440" bIns="45720" rtlCol="0" anchor="ctr"/>
+          <a:lstStyle/>
+          <a:p>
+            <a:endParaRPr lang="en-US"/>
+          </a:p>
+        </p:txBody>
+      </p:sp>
+      <p:sp>
+        <p:nvSpPr>
+          <p:cNvPr id="5" name="Notes Placeholder 4"/>
+          <p:cNvSpPr>
+            <a:spLocks noGrp="1"/>
+          </p:cNvSpPr>
+          <p:nvPr>
+            <p:ph type="body" sz="quarter" idx="3"/>
+          </p:nvPr>
+        </p:nvSpPr>
+        <p:spPr>
+          <a:xfrm>
+            <a:off x="685800" y="4343400"/>
+            <a:ext cx="5486400" cy="4114800"/>
+          </a:xfrm>
+          <a:prstGeom prst="rect">
+            <a:avLst/>
+          </a:prstGeom>
+        </p:spPr>
+        <p:txBody>
+          <a:bodyPr vert="horz" lIns="91440" tIns="45720" rIns="91440" bIns="45720" rtlCol="0"/>
+          <a:lstStyle/>
+          <a:p>
+            <a:pPr lvl="0"/>
+            <a:r>
+              <a:rPr lang="en-US" smtClean="0"/>
+              <a:t>Click to edit Master text styles</a:t>
+            </a:r>
+          </a:p>
+          <a:p>
+            <a:pPr lvl="1"/>
+            <a:r>
+              <a:rPr lang="en-US" smtClean="0"/>
+              <a:t>Second level</a:t>
+            </a:r>
+          </a:p>
+          <a:p>
+            <a:pPr lvl="2"/>
+            <a:r>
+              <a:rPr lang="en-US" smtClean="0"/>
+              <a:t>Third level</a:t>
+            </a:r>
+          </a:p>
+          <a:p>
+            <a:pPr lvl="3"/>
+            <a:r>
+              <a:rPr lang="en-US" smtClean="0"/>
+              <a:t>Fourth level</a:t>
+            </a:r>
+          </a:p>
+          <a:p>
+            <a:pPr lvl="4"/>
+            <a:r>
+              <a:rPr lang="en-US" smtClean="0"/>
+              <a:t>Fifth level</a:t>
+            </a:r>
+            <a:endParaRPr lang="en-US"/>
+          </a:p>
+        </p:txBody>
+      </p:sp>
+      <p:sp>
+        <p:nvSpPr>
+          <p:cNvPr id="6" name="Footer Placeholder 5"/>
+          <p:cNvSpPr>
+            <a:spLocks noGrp="1"/>
+          </p:cNvSpPr>
+          <p:nvPr>
+            <p:ph type="ftr" sz="quarter" idx="4"/>
+          </p:nvPr>
+        </p:nvSpPr>
+        <p:spPr>
+          <a:xfrm>
+            <a:off x="0" y="8685213"/>
+            <a:ext cx="2971800" cy="457200"/>
+          </a:xfrm>
+          <a:prstGeom prst="rect">
+            <a:avLst/>
+          </a:prstGeom>
+        </p:spPr>
+        <p:txBody>
+          <a:bodyPr vert="horz" lIns="91440" tIns="45720" rIns="91440" bIns="45720" rtlCol="0" anchor="b"/>
+          <a:lstStyle>
+            <a:lvl1pPr algn="l">
+              <a:defRPr sz="1200"/>
+            </a:lvl1pPr>
+          </a:lstStyle>
+          <a:p>
+            <a:endParaRPr lang="en-US"/>
+          </a:p>
+        </p:txBody>
+      </p:sp>
+      <p:sp>
+        <p:nvSpPr>
+          <p:cNvPr id="7" name="Slide Number Placeholder 6"/>
+          <p:cNvSpPr>
+            <a:spLocks noGrp="1"/>
+          </p:cNvSpPr>
+          <p:nvPr>
+            <p:ph type="sldNum" sz="quarter" idx="5"/>
+          </p:nvPr>
+        </p:nvSpPr>
+        <p:spPr>
+          <a:xfrm>
+            <a:off x="3884613" y="8685213"/>
+            <a:ext cx="2971800" cy="457200"/>
+          </a:xfrm>
+          <a:prstGeom prst="rect">
+            <a:avLst/>
+          </a:prstGeom>
+        </p:spPr>
+        <p:txBody>
+          <a:bodyPr vert="horz" lIns="91440" tIns="45720" rIns="91440" bIns="45720" rtlCol="0" anchor="b"/>
+          <a:lstStyle>
+            <a:lvl1pPr algn="r">
+              <a:defRPr sz="1200"/>
+            </a:lvl1pPr>
+          </a:lstStyle>
+          <a:p>
+            <a:fld id="{BB5E49A5-4136-284D-997B-48E1D791AD67}" type="slidenum">
+              <a:rPr lang="en-US" smtClean="0"/>
+              <a:t>‹#›</a:t>
+            </a:fld>
+            <a:endParaRPr lang="en-US"/>
+          </a:p>
+        </p:txBody>
+      </p:sp>
+    </p:spTree>
+    <p:extLst>
+      <p:ext uri="{BB962C8B-B14F-4D97-AF65-F5344CB8AC3E}">
+        <p14:creationId xmlns:p14="http://schemas.microsoft.com/office/powerpoint/2010/main" val="2623252185"/>
+      </p:ext>
+    </p:extLst>
+  </p:cSld>
+  <p:clrMap bg1="lt1" tx1="dk1" bg2="lt2" tx2="dk2" accent1="accent1" accent2="accent2" accent3="accent3" accent4="accent4" accent5="accent5" accent6="accent6" hlink="hlink" folHlink="folHlink"/>
+  <p:notesStyle>
+    <a:lvl1pPr marL="0" algn="l" defTabSz="457200" rtl="0" eaLnBrk="1" latinLnBrk="0" hangingPunct="1">
+      <a:defRPr sz="1200" kern="1200">
+        <a:solidFill>
+          <a:schemeClr val="tx1"/>
+        </a:solidFill>
+        <a:latin typeface="+mn-lt"/>
+        <a:ea typeface="+mn-ea"/>
+        <a:cs typeface="+mn-cs"/>
+      </a:defRPr>
+    </a:lvl1pPr>
+    <a:lvl2pPr marL="457200" algn="l" defTabSz="457200" rtl="0" eaLnBrk="1" latinLnBrk="0" hangingPunct="1">
+      <a:defRPr sz="1200" kern="1200">
+        <a:solidFill>
+          <a:schemeClr val="tx1"/>
+        </a:solidFill>
+        <a:latin typeface="+mn-lt"/>
+        <a:ea typeface="+mn-ea"/>
+        <a:cs typeface="+mn-cs"/>
+      </a:defRPr>
+    </a:lvl2pPr>
+    <a:lvl3pPr marL="914400" algn="l" defTabSz="457200" rtl="0" eaLnBrk="1" latinLnBrk="0" hangingPunct="1">
+      <a:defRPr sz="1200" kern="1200">
+        <a:solidFill>
+          <a:schemeClr val="tx1"/>
+        </a:solidFill>
+        <a:latin typeface="+mn-lt"/>
+        <a:ea typeface="+mn-ea"/>
+        <a:cs typeface="+mn-cs"/>
+      </a:defRPr>
+    </a:lvl3pPr>
+    <a:lvl4pPr marL="1371600" algn="l" defTabSz="457200" rtl="0" eaLnBrk="1" latinLnBrk="0" hangingPunct="1">
+      <a:defRPr sz="1200" kern="1200">
+        <a:solidFill>
+          <a:schemeClr val="tx1"/>
+        </a:solidFill>
+        <a:latin typeface="+mn-lt"/>
+        <a:ea typeface="+mn-ea"/>
+        <a:cs typeface="+mn-cs"/>
+      </a:defRPr>
+    </a:lvl4pPr>
+    <a:lvl5pPr marL="1828800" algn="l" defTabSz="457200" rtl="0" eaLnBrk="1" latinLnBrk="0" hangingPunct="1">
+      <a:defRPr sz="1200" kern="1200">
+        <a:solidFill>
+          <a:schemeClr val="tx1"/>
+        </a:solidFill>
+        <a:latin typeface="+mn-lt"/>
+        <a:ea typeface="+mn-ea"/>
+        <a:cs typeface="+mn-cs"/>
+      </a:defRPr>
+    </a:lvl5pPr>
+    <a:lvl6pPr marL="2286000" algn="l" defTabSz="457200" rtl="0" eaLnBrk="1" latinLnBrk="0" hangingPunct="1">
+      <a:defRPr sz="1200" kern="1200">
+        <a:solidFill>
+          <a:schemeClr val="tx1"/>
+        </a:solidFill>
+        <a:latin typeface="+mn-lt"/>
+        <a:ea typeface="+mn-ea"/>
+        <a:cs typeface="+mn-cs"/>
+      </a:defRPr>
+    </a:lvl6pPr>
+    <a:lvl7pPr marL="2743200" algn="l" defTabSz="457200" rtl="0" eaLnBrk="1" latinLnBrk="0" hangingPunct="1">
+      <a:defRPr sz="1200" kern="1200">
+        <a:solidFill>
+          <a:schemeClr val="tx1"/>
+        </a:solidFill>
+        <a:latin typeface="+mn-lt"/>
+        <a:ea typeface="+mn-ea"/>
+        <a:cs typeface="+mn-cs"/>
+      </a:defRPr>
+    </a:lvl7pPr>
+    <a:lvl8pPr marL="3200400" algn="l" defTabSz="457200" rtl="0" eaLnBrk="1" latinLnBrk="0" hangingPunct="1">
+      <a:defRPr sz="1200" kern="1200">
+        <a:solidFill>
+          <a:schemeClr val="tx1"/>
+        </a:solidFill>
+        <a:latin typeface="+mn-lt"/>
+        <a:ea typeface="+mn-ea"/>
+        <a:cs typeface="+mn-cs"/>
+      </a:defRPr>
+    </a:lvl8pPr>
+    <a:lvl9pPr marL="3657600" algn="l" defTabSz="457200" rtl="0" eaLnBrk="1" latinLnBrk="0" hangingPunct="1">
+      <a:defRPr sz="1200" kern="1200">
+        <a:solidFill>
+          <a:schemeClr val="tx1"/>
+        </a:solidFill>
+        <a:latin typeface="+mn-lt"/>
+        <a:ea typeface="+mn-ea"/>
+        <a:cs typeface="+mn-cs"/>
+      </a:defRPr>
+    </a:lvl9pPr>
+  </p:notesStyle>
+</p:notesMaster>
+</file>
+
+<file path=ppt/notesSlides/notesSlide1.xml><?xml version="1.0" encoding="utf-8"?>
+<p:notes xmlns:a="http://schemas.openxmlformats.org/drawingml/2006/main" xmlns:p="http://schemas.openxmlformats.org/presentationml/2006/main" xmlns:r="http://schemas.openxmlformats.org/officeDocument/2006/relationships">
+  <p:cSld>
+    <p:spTree>
+      <p:nvGrpSpPr>
+        <p:cNvPr id="1" name=""/>
+        <p:cNvGrpSpPr/>
+        <p:nvPr/>
+      </p:nvGrpSpPr>
+      <p:grpSpPr>
+        <a:xfrm>
+          <a:off x="0" y="0"/>
+          <a:ext cx="0" cy="0"/>
+          <a:chOff x="0" y="0"/>
+          <a:chExt cx="0" cy="0"/>
+        </a:xfrm>
+      </p:grpSpPr>
+      <p:sp>
+        <p:nvSpPr>
+          <p:cNvPr id="2" name="Slide Image Placeholder 1"/>
+          <p:cNvSpPr>
+            <a:spLocks noGrp="1"/>
+          </p:cNvSpPr>
+          <p:nvPr>
+            <p:ph type="sldImg" idx="2"/>
+          </p:nvPr>
+        </p:nvSpPr>
+        <p:spPr/>
+      </p:sp>
+      <p:sp>
+        <p:nvSpPr>
+          <p:cNvPr id="3" name="Notes Placeholder 2"/>
+          <p:cNvSpPr>
+            <a:spLocks noGrp="1"/>
+          </p:cNvSpPr>
+          <p:nvPr>
+            <p:ph type="body" idx="3" sz="quarter"/>
+          </p:nvPr>
+        </p:nvSpPr>
+        <p:spPr/>
+        <p:txBody>
+          <a:bodyPr/>
+          <a:lstStyle/>
+          <a:p>
+            <a:r>
+              <a:t>Acme Industries présente son rapport de durabilité pour l'exercice 2025. Acteur du secteur industrie manufacturière (France), l'entreprise emploie 320 collaborateurs et a réalisé un chiffre d'affaires de 48 millions d'euros sur l'exercice.</a:t>
+            </a:r>
+          </a:p>
+          <a:p/>
+          <a:p>
+            <a:r>
+              <a:t>Le diagnostic suit 29 indicateurs répartis entre l'environnement, le social et la gouvernance ; 20 sont renseignés pour cet exercice, soit un taux de complétude de 69 %. La lecture des piliers est fiable sur les indicateurs renseignés ; les données manquantes sont signalées section par section.</a:t>
+            </a:r>
+          </a:p>
+          <a:p/>
+          <a:p>
+            <a:r>
+              <a:t>Le rapport suit trois temps. La situation présente la performance de chaque pilier et les indicateurs qui la fondent. Le diagnostic confronte ces résultats aux exigences de reporting du référentiel CSRD / ESRS, aux risques et aux opportunités identifiés. Le plan d'action traduit ces constats en recommandations priorisées et en feuille de route sur douze mois. Les objectifs de l'entreprise sont fixés à l'horizon 2030.</a:t>
+            </a:r>
+          </a:p>
+        </p:txBody>
+      </p:sp>
+      <p:sp>
+        <p:nvSpPr>
+          <p:cNvPr id="4" name="Slide Number Placeholder 3"/>
+          <p:cNvSpPr>
+            <a:spLocks noGrp="1"/>
+          </p:cNvSpPr>
+          <p:nvPr>
+            <p:ph type="sldNum" idx="5" sz="quarter"/>
+          </p:nvPr>
+        </p:nvSpPr>
+        <p:spPr/>
+      </p:sp>
+    </p:spTree>
+  </p:cSld>
+  <p:clrMapOvr>
+    <a:masterClrMapping/>
+  </p:clrMapOvr>
+</p:notes>
+</file>
+
+<file path=ppt/notesSlides/notesSlide2.xml><?xml version="1.0" encoding="utf-8"?>
+<p:notes xmlns:a="http://schemas.openxmlformats.org/drawingml/2006/main" xmlns:p="http://schemas.openxmlformats.org/presentationml/2006/main" xmlns:r="http://schemas.openxmlformats.org/officeDocument/2006/relationships">
+  <p:cSld>
+    <p:spTree>
+      <p:nvGrpSpPr>
+        <p:cNvPr id="1" name=""/>
+        <p:cNvGrpSpPr/>
+        <p:nvPr/>
+      </p:nvGrpSpPr>
+      <p:grpSpPr>
+        <a:xfrm>
+          <a:off x="0" y="0"/>
+          <a:ext cx="0" cy="0"/>
+          <a:chOff x="0" y="0"/>
+          <a:chExt cx="0" cy="0"/>
+        </a:xfrm>
+      </p:grpSpPr>
+      <p:sp>
+        <p:nvSpPr>
+          <p:cNvPr id="2" name="Slide Image Placeholder 1"/>
+          <p:cNvSpPr>
+            <a:spLocks noGrp="1"/>
+          </p:cNvSpPr>
+          <p:nvPr>
+            <p:ph type="sldImg" idx="2"/>
+          </p:nvPr>
+        </p:nvSpPr>
+        <p:spPr/>
+      </p:sp>
+      <p:sp>
+        <p:nvSpPr>
+          <p:cNvPr id="3" name="Notes Placeholder 2"/>
+          <p:cNvSpPr>
+            <a:spLocks noGrp="1"/>
+          </p:cNvSpPr>
+          <p:nvPr>
+            <p:ph type="body" idx="3" sz="quarter"/>
+          </p:nvPr>
+        </p:nvSpPr>
+        <p:spPr/>
+        <p:txBody>
+          <a:bodyPr/>
+          <a:lstStyle/>
+          <a:p>
+            <a:r>
+              <a:t>Avec 70/100, le pilier environnemental se situe 4 points au-dessus du score global (66/100). Rapportées au chiffre d'affaires, les émissions représentent 171 t CO2e par million d'euros, une intensité satisfaisante pour le secteur selon la grille du diagnostic. La part d'énergie renouvelable atteint 42 %, un niveau satisfaisant selon la grille de lecture du diagnostic. 63 % des déchets sont valorisés, ce que la grille du diagnostic classe comme solide.</a:t>
+            </a:r>
+          </a:p>
+          <a:p/>
+          <a:p>
+            <a:r>
+              <a:t>La consommation d'énergie atteint 21 500 MWh, soit 67,2 MWh par salarié. La consommation d'eau de l'exercice est de 120 000 m3. Restent à documenter : le volume de déchets et les initiatives en faveur de la biodiversité. Leur collecte, au prochain exercice, fiabilisera la lecture de ce pilier.</a:t>
+            </a:r>
+          </a:p>
+          <a:p/>
+          <a:p>
+            <a:r>
+              <a:t>Le plan d'action retient un levier pour ce pilier : augmenter la part d'énergie renouvelable à 50 % (objectif : 50 % d'énergie renouvelable dans le mix ; échéance : 2027).</a:t>
+            </a:r>
+          </a:p>
+          <a:p/>
+          <a:p>
+            <a:r>
+              <a:t>L'empreinte mesurée s'élève à 8 200 t CO2e sur les scopes renseignés. Le Scope 3 en concentre la plus grande part (60 %) : c'est le périmètre sur lequel les leviers de réduction auront le plus d'effet. Rapportées à l'effectif, les émissions représentent 25,6 t CO2e par salarié.</a:t>
+            </a:r>
+          </a:p>
+        </p:txBody>
+      </p:sp>
+      <p:sp>
+        <p:nvSpPr>
+          <p:cNvPr id="4" name="Slide Number Placeholder 3"/>
+          <p:cNvSpPr>
+            <a:spLocks noGrp="1"/>
+          </p:cNvSpPr>
+          <p:nvPr>
+            <p:ph type="sldNum" idx="5" sz="quarter"/>
+          </p:nvPr>
+        </p:nvSpPr>
+        <p:spPr/>
+      </p:sp>
+    </p:spTree>
+  </p:cSld>
+  <p:clrMapOvr>
+    <a:masterClrMapping/>
+  </p:clrMapOvr>
+</p:notes>
+</file>
+
+<file path=ppt/notesSlides/notesSlide3.xml><?xml version="1.0" encoding="utf-8"?>
+<p:notes xmlns:a="http://schemas.openxmlformats.org/drawingml/2006/main" xmlns:p="http://schemas.openxmlformats.org/presentationml/2006/main" xmlns:r="http://schemas.openxmlformats.org/officeDocument/2006/relationships">
+  <p:cSld>
+    <p:spTree>
+      <p:nvGrpSpPr>
+        <p:cNvPr id="1" name=""/>
+        <p:cNvGrpSpPr/>
+        <p:nvPr/>
+      </p:nvGrpSpPr>
+      <p:grpSpPr>
+        <a:xfrm>
+          <a:off x="0" y="0"/>
+          <a:ext cx="0" cy="0"/>
+          <a:chOff x="0" y="0"/>
+          <a:chExt cx="0" cy="0"/>
+        </a:xfrm>
+      </p:grpSpPr>
+      <p:sp>
+        <p:nvSpPr>
+          <p:cNvPr id="2" name="Slide Image Placeholder 1"/>
+          <p:cNvSpPr>
+            <a:spLocks noGrp="1"/>
+          </p:cNvSpPr>
+          <p:nvPr>
+            <p:ph type="sldImg" idx="2"/>
+          </p:nvPr>
+        </p:nvSpPr>
+        <p:spPr/>
+      </p:sp>
+      <p:sp>
+        <p:nvSpPr>
+          <p:cNvPr id="3" name="Notes Placeholder 2"/>
+          <p:cNvSpPr>
+            <a:spLocks noGrp="1"/>
+          </p:cNvSpPr>
+          <p:nvPr>
+            <p:ph type="body" idx="3" sz="quarter"/>
+          </p:nvPr>
+        </p:nvSpPr>
+        <p:spPr/>
+        <p:txBody>
+          <a:bodyPr/>
+          <a:lstStyle/>
+          <a:p>
+            <a:r>
+              <a:t>Avec 55/100, le pilier social se situe 11 points en dessous du score global (66/100). Les femmes représentent 34 % de l'effectif, une situation satisfaisante selon la grille de lecture retenue. Chaque salarié a suivi en moyenne 22 h de formation sur l'exercice, un effort satisfaisant au regard de la grille du diagnostic. Le taux de fréquence des accidents s'établit à 6,2, un résultat fragile selon la grille de lecture retenue. Le taux de rotation du personnel est de 11 %, un niveau satisfaisant selon la grille du diagnostic.</a:t>
+            </a:r>
+          </a:p>
+          <a:p/>
+          <a:p>
+            <a:r>
+              <a:t>L'effectif s'établit à 320 collaborateurs sur l'exercice. Restent à documenter : le nombre d'accidents du travail, l'investissement communautaire, la part d'achats locaux, la satisfaction client et l'emploi de personnes en situation de handicap. Leur collecte, au prochain exercice, fiabilisera la lecture de ce pilier.</a:t>
+            </a:r>
+          </a:p>
+          <a:p/>
+          <a:p>
+            <a:r>
+              <a:t>Le plan d'action retient un levier pour ce pilier : définir des objectifs chiffrés de parité femme-homme (objectif : cible de mixité définie et suivie annuellement ; échéance : 2026).</a:t>
+            </a:r>
+          </a:p>
+        </p:txBody>
+      </p:sp>
+      <p:sp>
+        <p:nvSpPr>
+          <p:cNvPr id="4" name="Slide Number Placeholder 3"/>
+          <p:cNvSpPr>
+            <a:spLocks noGrp="1"/>
+          </p:cNvSpPr>
+          <p:nvPr>
+            <p:ph type="sldNum" idx="5" sz="quarter"/>
+          </p:nvPr>
+        </p:nvSpPr>
+        <p:spPr/>
+      </p:sp>
+    </p:spTree>
+  </p:cSld>
+  <p:clrMapOvr>
+    <a:masterClrMapping/>
+  </p:clrMapOvr>
+</p:notes>
+</file>
+
+<file path=ppt/notesSlides/notesSlide4.xml><?xml version="1.0" encoding="utf-8"?>
+<p:notes xmlns:a="http://schemas.openxmlformats.org/drawingml/2006/main" xmlns:p="http://schemas.openxmlformats.org/presentationml/2006/main" xmlns:r="http://schemas.openxmlformats.org/officeDocument/2006/relationships">
+  <p:cSld>
+    <p:spTree>
+      <p:nvGrpSpPr>
+        <p:cNvPr id="1" name=""/>
+        <p:cNvGrpSpPr/>
+        <p:nvPr/>
+      </p:nvGrpSpPr>
+      <p:grpSpPr>
+        <a:xfrm>
+          <a:off x="0" y="0"/>
+          <a:ext cx="0" cy="0"/>
+          <a:chOff x="0" y="0"/>
+          <a:chExt cx="0" cy="0"/>
+        </a:xfrm>
+      </p:grpSpPr>
+      <p:sp>
+        <p:nvSpPr>
+          <p:cNvPr id="2" name="Slide Image Placeholder 1"/>
+          <p:cNvSpPr>
+            <a:spLocks noGrp="1"/>
+          </p:cNvSpPr>
+          <p:nvPr>
+            <p:ph type="sldImg" idx="2"/>
+          </p:nvPr>
+        </p:nvSpPr>
+        <p:spPr/>
+      </p:sp>
+      <p:sp>
+        <p:nvSpPr>
+          <p:cNvPr id="3" name="Notes Placeholder 2"/>
+          <p:cNvSpPr>
+            <a:spLocks noGrp="1"/>
+          </p:cNvSpPr>
+          <p:nvPr>
+            <p:ph type="body" idx="3" sz="quarter"/>
+          </p:nvPr>
+        </p:nvSpPr>
+        <p:spPr/>
+        <p:txBody>
+          <a:bodyPr/>
+          <a:lstStyle/>
+          <a:p>
+            <a:r>
+              <a:t>Avec 75/100, le pilier de gouvernance se situe 9 points au-dessus du score global (66/100). Les administrateurs indépendants représentent 45 % du conseil, une proportion satisfaisante selon la grille du diagnostic. Les femmes occupent 44 % des sièges du conseil, une représentation exemplaire selon la grille de lecture retenue.</a:t>
+            </a:r>
+          </a:p>
+          <a:p/>
+          <a:p>
+            <a:r>
+              <a:t>Le conseil compte 9 membres. Un comité de durabilité est en place : il donne un cadre de pilotage aux engagements présentés dans ce rapport. Aucun audit ESG indépendant n'a été conduit sur l'exercice. Aucun manquement éthique n'a été enregistré. Un incident de cybersécurité a été déclaré. Restent à documenter : les cas de corruption et le budget RSE. Leur collecte, au prochain exercice, fiabilisera la lecture de ce pilier.</a:t>
+            </a:r>
+          </a:p>
+          <a:p/>
+          <a:p>
+            <a:r>
+              <a:t>Le plan d'action retient 2 leviers pour ce pilier : commander un audit ESG indépendant annuel (objectif : assurance limitée obtenue sur le reporting ; échéance : annuel); aligner la stratégie ESG sur les ODD &amp; la TCFD (objectif : alignement ODD / TCFD documenté ; échéance : continu).</a:t>
+            </a:r>
+          </a:p>
+        </p:txBody>
+      </p:sp>
+      <p:sp>
+        <p:nvSpPr>
+          <p:cNvPr id="4" name="Slide Number Placeholder 3"/>
+          <p:cNvSpPr>
+            <a:spLocks noGrp="1"/>
+          </p:cNvSpPr>
+          <p:nvPr>
+            <p:ph type="sldNum" idx="5" sz="quarter"/>
+          </p:nvPr>
+        </p:nvSpPr>
+        <p:spPr/>
+      </p:sp>
+    </p:spTree>
+  </p:cSld>
+  <p:clrMapOvr>
+    <a:masterClrMapping/>
+  </p:clrMapOvr>
+</p:notes>
+</file>
+
+<file path=ppt/notesSlides/notesSlide5.xml><?xml version="1.0" encoding="utf-8"?>
+<p:notes xmlns:a="http://schemas.openxmlformats.org/drawingml/2006/main" xmlns:p="http://schemas.openxmlformats.org/presentationml/2006/main" xmlns:r="http://schemas.openxmlformats.org/officeDocument/2006/relationships">
+  <p:cSld>
+    <p:spTree>
+      <p:nvGrpSpPr>
+        <p:cNvPr id="1" name=""/>
+        <p:cNvGrpSpPr/>
+        <p:nvPr/>
+      </p:nvGrpSpPr>
+      <p:grpSpPr>
+        <a:xfrm>
+          <a:off x="0" y="0"/>
+          <a:ext cx="0" cy="0"/>
+          <a:chOff x="0" y="0"/>
+          <a:chExt cx="0" cy="0"/>
+        </a:xfrm>
+      </p:grpSpPr>
+      <p:sp>
+        <p:nvSpPr>
+          <p:cNvPr id="2" name="Slide Image Placeholder 1"/>
+          <p:cNvSpPr>
+            <a:spLocks noGrp="1"/>
+          </p:cNvSpPr>
+          <p:nvPr>
+            <p:ph type="sldImg" idx="2"/>
+          </p:nvPr>
+        </p:nvSpPr>
+        <p:spPr/>
+      </p:sp>
+      <p:sp>
+        <p:nvSpPr>
+          <p:cNvPr id="3" name="Notes Placeholder 2"/>
+          <p:cNvSpPr>
+            <a:spLocks noGrp="1"/>
+          </p:cNvSpPr>
+          <p:nvPr>
+            <p:ph type="body" idx="3" sz="quarter"/>
+          </p:nvPr>
+        </p:nvSpPr>
+        <p:spPr/>
+        <p:txBody>
+          <a:bodyPr/>
+          <a:lstStyle/>
+          <a:p>
+            <a:r>
+              <a:t>Ce chapitre met en regard les résultats et leurs causes. Il identifie 5 forces et 5 axes de progrès, examine la couverture de 7 exigences de reporting (dont 2 encore ouvertes) et hiérarchise 4 risques majeurs (dont 2 de priorité 1).</a:t>
+            </a:r>
+          </a:p>
+          <a:p/>
+          <a:p>
+            <a:r>
+              <a:t>Le positionnement ci-dessous compare les trois piliers entre eux, sans référence externe : il indique où se concentre la marge de progression de l'entreprise.</a:t>
+            </a:r>
+          </a:p>
+          <a:p/>
+          <a:p>
+            <a:r>
+              <a:t>Le tableau ci-dessous examine 7 exigences de reporting du référentiel CSRD / ESRS : 4 sont couvertes par les données de l'exercice, 2 restent ouvertes ou partiellement couvertes. Chaque ligne indique la référence concernée et ce qui manque pour la couvrir.</a:t>
+            </a:r>
+          </a:p>
+        </p:txBody>
+      </p:sp>
+      <p:sp>
+        <p:nvSpPr>
+          <p:cNvPr id="4" name="Slide Number Placeholder 3"/>
+          <p:cNvSpPr>
+            <a:spLocks noGrp="1"/>
+          </p:cNvSpPr>
+          <p:nvPr>
+            <p:ph type="sldNum" idx="5" sz="quarter"/>
+          </p:nvPr>
+        </p:nvSpPr>
+        <p:spPr/>
+      </p:sp>
+    </p:spTree>
+  </p:cSld>
+  <p:clrMapOvr>
+    <a:masterClrMapping/>
+  </p:clrMapOvr>
+</p:notes>
+</file>
+
+<file path=ppt/notesSlides/notesSlide6.xml><?xml version="1.0" encoding="utf-8"?>
+<p:notes xmlns:a="http://schemas.openxmlformats.org/drawingml/2006/main" xmlns:p="http://schemas.openxmlformats.org/presentationml/2006/main" xmlns:r="http://schemas.openxmlformats.org/officeDocument/2006/relationships">
+  <p:cSld>
+    <p:spTree>
+      <p:nvGrpSpPr>
+        <p:cNvPr id="1" name=""/>
+        <p:cNvGrpSpPr/>
+        <p:nvPr/>
+      </p:nvGrpSpPr>
+      <p:grpSpPr>
+        <a:xfrm>
+          <a:off x="0" y="0"/>
+          <a:ext cx="0" cy="0"/>
+          <a:chOff x="0" y="0"/>
+          <a:chExt cx="0" cy="0"/>
+        </a:xfrm>
+      </p:grpSpPr>
+      <p:sp>
+        <p:nvSpPr>
+          <p:cNvPr id="2" name="Slide Image Placeholder 1"/>
+          <p:cNvSpPr>
+            <a:spLocks noGrp="1"/>
+          </p:cNvSpPr>
+          <p:nvPr>
+            <p:ph type="sldImg" idx="2"/>
+          </p:nvPr>
+        </p:nvSpPr>
+        <p:spPr/>
+      </p:sp>
+      <p:sp>
+        <p:nvSpPr>
+          <p:cNvPr id="3" name="Notes Placeholder 2"/>
+          <p:cNvSpPr>
+            <a:spLocks noGrp="1"/>
+          </p:cNvSpPr>
+          <p:nvPr>
+            <p:ph type="body" idx="3" sz="quarter"/>
+          </p:nvPr>
+        </p:nvSpPr>
+        <p:spPr/>
+        <p:txBody>
+          <a:bodyPr/>
+          <a:lstStyle/>
+          <a:p>
+            <a:r>
+              <a:t>L'analyse retient 4 risques majeurs. Leur priorité combine l'impact estimé et la probabilité d'occurrence : 2 sont classés en priorité 1 et appellent une action dans les douze prochains mois.</a:t>
+            </a:r>
+          </a:p>
+        </p:txBody>
+      </p:sp>
+      <p:sp>
+        <p:nvSpPr>
+          <p:cNvPr id="4" name="Slide Number Placeholder 3"/>
+          <p:cNvSpPr>
+            <a:spLocks noGrp="1"/>
+          </p:cNvSpPr>
+          <p:nvPr>
+            <p:ph type="sldNum" idx="5" sz="quarter"/>
+          </p:nvPr>
+        </p:nvSpPr>
+        <p:spPr/>
+      </p:sp>
+    </p:spTree>
+  </p:cSld>
+  <p:clrMapOvr>
+    <a:masterClrMapping/>
+  </p:clrMapOvr>
+</p:notes>
+</file>
+
+<file path=ppt/notesSlides/notesSlide7.xml><?xml version="1.0" encoding="utf-8"?>
+<p:notes xmlns:a="http://schemas.openxmlformats.org/drawingml/2006/main" xmlns:p="http://schemas.openxmlformats.org/presentationml/2006/main" xmlns:r="http://schemas.openxmlformats.org/officeDocument/2006/relationships">
+  <p:cSld>
+    <p:spTree>
+      <p:nvGrpSpPr>
+        <p:cNvPr id="1" name=""/>
+        <p:cNvGrpSpPr/>
+        <p:nvPr/>
+      </p:nvGrpSpPr>
+      <p:grpSpPr>
+        <a:xfrm>
+          <a:off x="0" y="0"/>
+          <a:ext cx="0" cy="0"/>
+          <a:chOff x="0" y="0"/>
+          <a:chExt cx="0" cy="0"/>
+        </a:xfrm>
+      </p:grpSpPr>
+      <p:sp>
+        <p:nvSpPr>
+          <p:cNvPr id="2" name="Slide Image Placeholder 1"/>
+          <p:cNvSpPr>
+            <a:spLocks noGrp="1"/>
+          </p:cNvSpPr>
+          <p:nvPr>
+            <p:ph type="sldImg" idx="2"/>
+          </p:nvPr>
+        </p:nvSpPr>
+        <p:spPr/>
+      </p:sp>
+      <p:sp>
+        <p:nvSpPr>
+          <p:cNvPr id="3" name="Notes Placeholder 2"/>
+          <p:cNvSpPr>
+            <a:spLocks noGrp="1"/>
+          </p:cNvSpPr>
+          <p:nvPr>
+            <p:ph type="body" idx="3" sz="quarter"/>
+          </p:nvPr>
+        </p:nvSpPr>
+        <p:spPr/>
+        <p:txBody>
+          <a:bodyPr/>
+          <a:lstStyle/>
+          <a:p>
+            <a:r>
+              <a:t>Ce chapitre traduit le diagnostic en actions. Il propose 4 recommandations, dont 2 gains rapides, et les ordonne dans une feuille de route en trois phases sur douze mois, en cohérence avec l'horizon 2030 fixé par l'entreprise.</a:t>
+            </a:r>
+          </a:p>
+          <a:p/>
+          <a:p>
+            <a:r>
+              <a:t>Les recommandations sont ordonnées par priorité. Elles se répartissent entre l'environnement (1), le social (1) et la gouvernance (2) ; chacune précise un objectif, un responsable et une échéance.</a:t>
+            </a:r>
+          </a:p>
+        </p:txBody>
+      </p:sp>
+      <p:sp>
+        <p:nvSpPr>
+          <p:cNvPr id="4" name="Slide Number Placeholder 3"/>
+          <p:cNvSpPr>
+            <a:spLocks noGrp="1"/>
+          </p:cNvSpPr>
+          <p:nvPr>
+            <p:ph type="sldNum" idx="5" sz="quarter"/>
+          </p:nvPr>
+        </p:nvSpPr>
+        <p:spPr/>
+      </p:sp>
+    </p:spTree>
+  </p:cSld>
+  <p:clrMapOvr>
+    <a:masterClrMapping/>
+  </p:clrMapOvr>
+</p:notes>
+</file>
+
+<file path=ppt/notesSlides/notesSlide8.xml><?xml version="1.0" encoding="utf-8"?>
+<p:notes xmlns:a="http://schemas.openxmlformats.org/drawingml/2006/main" xmlns:p="http://schemas.openxmlformats.org/presentationml/2006/main" xmlns:r="http://schemas.openxmlformats.org/officeDocument/2006/relationships">
+  <p:cSld>
+    <p:spTree>
+      <p:nvGrpSpPr>
+        <p:cNvPr id="1" name=""/>
+        <p:cNvGrpSpPr/>
+        <p:nvPr/>
+      </p:nvGrpSpPr>
+      <p:grpSpPr>
+        <a:xfrm>
+          <a:off x="0" y="0"/>
+          <a:ext cx="0" cy="0"/>
+          <a:chOff x="0" y="0"/>
+          <a:chExt cx="0" cy="0"/>
+        </a:xfrm>
+      </p:grpSpPr>
+      <p:sp>
+        <p:nvSpPr>
+          <p:cNvPr id="2" name="Slide Image Placeholder 1"/>
+          <p:cNvSpPr>
+            <a:spLocks noGrp="1"/>
+          </p:cNvSpPr>
+          <p:nvPr>
+            <p:ph type="sldImg" idx="2"/>
+          </p:nvPr>
+        </p:nvSpPr>
+        <p:spPr/>
+      </p:sp>
+      <p:sp>
+        <p:nvSpPr>
+          <p:cNvPr id="3" name="Notes Placeholder 2"/>
+          <p:cNvSpPr>
+            <a:spLocks noGrp="1"/>
+          </p:cNvSpPr>
+          <p:nvPr>
+            <p:ph type="body" idx="3" sz="quarter"/>
+          </p:nvPr>
+        </p:nvSpPr>
+        <p:spPr/>
+        <p:txBody>
+          <a:bodyPr/>
+          <a:lstStyle/>
+          <a:p>
+            <a:r>
+              <a:t>La feuille de route répartit les actions en trois phases. 0-3 mois : 1 action, 3-6 mois : 2 actions et 6-12 mois : 1 action. Les gains rapides, signalés dans le tableau, peuvent être engagés sans attendre les chantiers structurants.</a:t>
+            </a:r>
+          </a:p>
+        </p:txBody>
+      </p:sp>
+      <p:sp>
+        <p:nvSpPr>
+          <p:cNvPr id="4" name="Slide Number Placeholder 3"/>
+          <p:cNvSpPr>
+            <a:spLocks noGrp="1"/>
+          </p:cNvSpPr>
+          <p:nvPr>
+            <p:ph type="sldNum" idx="5" sz="quarter"/>
+          </p:nvPr>
+        </p:nvSpPr>
+        <p:spPr/>
+      </p:sp>
+    </p:spTree>
+  </p:cSld>
+  <p:clrMapOvr>
+    <a:masterClrMapping/>
+  </p:clrMapOvr>
+</p:notes>
 </file>
 
 <file path=ppt/slideLayouts/slideLayout1.xml><?xml version="1.0" encoding="utf-8"?>
@@ -3125,7 +4107,7 @@
             <a:avLst/>
           </a:prstGeom>
           <a:solidFill>
-            <a:srgbClr val="1B3A6B"/>
+            <a:srgbClr val="1F3D33"/>
           </a:solidFill>
           <a:ln>
             <a:noFill/>
@@ -3168,7 +4150,7 @@
             <a:avLst/>
           </a:prstGeom>
           <a:solidFill>
-            <a:srgbClr val="F39C12"/>
+            <a:srgbClr val="C9D8C5"/>
           </a:solidFill>
           <a:ln>
             <a:noFill/>
@@ -3211,7 +4193,7 @@
             <a:avLst/>
           </a:prstGeom>
           <a:solidFill>
-            <a:srgbClr val="1B3A6B"/>
+            <a:srgbClr val="1F3D33"/>
           </a:solidFill>
           <a:ln>
             <a:noFill/>
@@ -3265,9 +4247,9 @@
             <a:r>
               <a:rPr sz="1500" b="1" i="0">
                 <a:solidFill>
-                  <a:srgbClr val="F39C12"/>
-                </a:solidFill>
-                <a:latin typeface="Calibri"/>
+                  <a:srgbClr val="C9D8C5"/>
+                </a:solidFill>
+                <a:latin typeface="Segoe UI"/>
               </a:rPr>
               <a:t>RAPPORT ESG — SYNTHÈSE EXÉCUTIVE</a:t>
             </a:r>
@@ -3300,9 +4282,9 @@
             <a:r>
               <a:rPr sz="5200" b="1" i="0">
                 <a:solidFill>
-                  <a:srgbClr val="FFFFFF"/>
-                </a:solidFill>
-                <a:latin typeface="Calibri"/>
+                  <a:srgbClr val="F3F0E8"/>
+                </a:solidFill>
+                <a:latin typeface="Georgia"/>
               </a:rPr>
               <a:t>ACME INDUSTRIES</a:t>
             </a:r>
@@ -3324,7 +4306,7 @@
             <a:avLst/>
           </a:prstGeom>
           <a:solidFill>
-            <a:srgbClr val="F39C12"/>
+            <a:srgbClr val="C9D8C5"/>
           </a:solidFill>
           <a:ln>
             <a:noFill/>
@@ -3378,9 +4360,9 @@
             <a:r>
               <a:rPr sz="2100" b="0" i="1">
                 <a:solidFill>
-                  <a:srgbClr val="AEC6E8"/>
-                </a:solidFill>
-                <a:latin typeface="Calibri"/>
+                  <a:srgbClr val="C9D8C5"/>
+                </a:solidFill>
+                <a:latin typeface="Segoe UI"/>
               </a:rPr>
               <a:t>Une performance ESG solide et engagée</a:t>
             </a:r>
@@ -3413,9 +4395,9 @@
             <a:r>
               <a:rPr sz="1300" b="0" i="0">
                 <a:solidFill>
-                  <a:srgbClr val="AEC6E8"/>
-                </a:solidFill>
-                <a:latin typeface="Calibri"/>
+                  <a:srgbClr val="C9D8C5"/>
+                </a:solidFill>
+                <a:latin typeface="Segoe UI"/>
               </a:rPr>
               <a:t>Exercice 2025   |   Industrie manufacturière   |   France</a:t>
             </a:r>
@@ -3448,9 +4430,9 @@
             <a:r>
               <a:rPr sz="8200" b="1" i="0">
                 <a:solidFill>
-                  <a:srgbClr val="F39C12"/>
-                </a:solidFill>
-                <a:latin typeface="Calibri"/>
+                  <a:srgbClr val="C9D8C5"/>
+                </a:solidFill>
+                <a:latin typeface="Georgia"/>
               </a:rPr>
               <a:t>66</a:t>
             </a:r>
@@ -3483,9 +4465,9 @@
             <a:r>
               <a:rPr sz="1400" b="0" i="0">
                 <a:solidFill>
-                  <a:srgbClr val="AEC6E8"/>
-                </a:solidFill>
-                <a:latin typeface="Calibri"/>
+                  <a:srgbClr val="C9D8C5"/>
+                </a:solidFill>
+                <a:latin typeface="Segoe UI"/>
               </a:rPr>
               <a:t>/100</a:t>
             </a:r>
@@ -3507,7 +4489,7 @@
             <a:avLst/>
           </a:prstGeom>
           <a:solidFill>
-            <a:srgbClr val="F39C12"/>
+            <a:srgbClr val="C9D8C5"/>
           </a:solidFill>
           <a:ln>
             <a:noFill/>
@@ -3561,9 +4543,9 @@
             <a:r>
               <a:rPr sz="3200" b="1" i="0">
                 <a:solidFill>
-                  <a:srgbClr val="1B3A6B"/>
-                </a:solidFill>
-                <a:latin typeface="Calibri"/>
+                  <a:srgbClr val="1F3D33"/>
+                </a:solidFill>
+                <a:latin typeface="Georgia"/>
               </a:rPr>
               <a:t>A</a:t>
             </a:r>
@@ -3596,9 +4578,9 @@
             <a:r>
               <a:rPr sz="1200" b="0" i="1">
                 <a:solidFill>
-                  <a:srgbClr val="AEC6E8"/>
-                </a:solidFill>
-                <a:latin typeface="Calibri"/>
+                  <a:srgbClr val="C9D8C5"/>
+                </a:solidFill>
+                <a:latin typeface="Segoe UI"/>
               </a:rPr>
               <a:t>Présenté par J. Martin — Directrice Générale</a:t>
             </a:r>
@@ -3638,7 +4620,7 @@
             <a:avLst/>
           </a:prstGeom>
           <a:solidFill>
-            <a:srgbClr val="F4F7FD"/>
+            <a:srgbClr val="F3F0E8"/>
           </a:solidFill>
           <a:ln>
             <a:noFill/>
@@ -3674,14 +4656,14 @@
         </p:nvSpPr>
         <p:spPr>
           <a:xfrm>
-            <a:off x="0" y="0"/>
-            <a:ext cx="12188952" cy="1143000"/>
+            <a:off x="457200" y="384048"/>
+            <a:ext cx="201168" cy="201168"/>
           </a:xfrm>
           <a:prstGeom prst="rect">
             <a:avLst/>
           </a:prstGeom>
           <a:solidFill>
-            <a:srgbClr val="1B3A6B"/>
+            <a:srgbClr val="1F3D33"/>
           </a:solidFill>
           <a:ln>
             <a:noFill/>
@@ -3711,20 +4693,55 @@
       </p:sp>
       <p:sp>
         <p:nvSpPr>
-          <p:cNvPr id="4" name="Rectangle 3"/>
+          <p:cNvPr id="4" name="TextBox 3"/>
+          <p:cNvSpPr txBox="1"/>
+          <p:nvPr/>
+        </p:nvSpPr>
+        <p:spPr>
+          <a:xfrm>
+            <a:off x="822960" y="237744"/>
+            <a:ext cx="10789920" cy="685800"/>
+          </a:xfrm>
+          <a:prstGeom prst="rect">
+            <a:avLst/>
+          </a:prstGeom>
+          <a:noFill/>
+        </p:spPr>
+        <p:txBody>
+          <a:bodyPr wrap="square">
+            <a:spAutoFit/>
+          </a:bodyPr>
+          <a:lstStyle/>
+          <a:p>
+            <a:pPr algn="l"/>
+            <a:r>
+              <a:rPr sz="1800" b="1" i="0">
+                <a:solidFill>
+                  <a:srgbClr val="1E2B26"/>
+                </a:solidFill>
+                <a:latin typeface="Georgia"/>
+              </a:rPr>
+              <a:t>Couverture des exigences de reporting</a:t>
+            </a:r>
+          </a:p>
+        </p:txBody>
+      </p:sp>
+      <p:sp>
+        <p:nvSpPr>
+          <p:cNvPr id="5" name="Rectangle 4"/>
           <p:cNvSpPr/>
           <p:nvPr/>
         </p:nvSpPr>
         <p:spPr>
           <a:xfrm>
-            <a:off x="0" y="1143000"/>
-            <a:ext cx="64008" cy="5715000"/>
+            <a:off x="457200" y="1024128"/>
+            <a:ext cx="2011680" cy="18288"/>
           </a:xfrm>
           <a:prstGeom prst="rect">
             <a:avLst/>
           </a:prstGeom>
           <a:solidFill>
-            <a:srgbClr val="F39C12"/>
+            <a:srgbClr val="1E2B26"/>
           </a:solidFill>
           <a:ln>
             <a:noFill/>
@@ -3754,77 +4771,7 @@
       </p:sp>
       <p:sp>
         <p:nvSpPr>
-          <p:cNvPr id="5" name="TextBox 4"/>
-          <p:cNvSpPr txBox="1"/>
-          <p:nvPr/>
-        </p:nvSpPr>
-        <p:spPr>
-          <a:xfrm>
-            <a:off x="292608" y="128016"/>
-            <a:ext cx="10972800" cy="292608"/>
-          </a:xfrm>
-          <a:prstGeom prst="rect">
-            <a:avLst/>
-          </a:prstGeom>
-          <a:noFill/>
-        </p:spPr>
-        <p:txBody>
-          <a:bodyPr wrap="square">
-            <a:spAutoFit/>
-          </a:bodyPr>
-          <a:lstStyle/>
-          <a:p>
-            <a:pPr algn="l"/>
-            <a:r>
-              <a:rPr sz="1100" b="1" i="0">
-                <a:solidFill>
-                  <a:srgbClr val="F39C12"/>
-                </a:solidFill>
-                <a:latin typeface="Calibri"/>
-              </a:rPr>
-              <a:t>POSITIONNEMENT</a:t>
-            </a:r>
-          </a:p>
-        </p:txBody>
-      </p:sp>
-      <p:sp>
-        <p:nvSpPr>
-          <p:cNvPr id="6" name="TextBox 5"/>
-          <p:cNvSpPr txBox="1"/>
-          <p:nvPr/>
-        </p:nvSpPr>
-        <p:spPr>
-          <a:xfrm>
-            <a:off x="274320" y="384048"/>
-            <a:ext cx="11612880" cy="713232"/>
-          </a:xfrm>
-          <a:prstGeom prst="rect">
-            <a:avLst/>
-          </a:prstGeom>
-          <a:noFill/>
-        </p:spPr>
-        <p:txBody>
-          <a:bodyPr wrap="square">
-            <a:spAutoFit/>
-          </a:bodyPr>
-          <a:lstStyle/>
-          <a:p>
-            <a:pPr algn="l"/>
-            <a:r>
-              <a:rPr sz="2340" b="1" i="0">
-                <a:solidFill>
-                  <a:srgbClr val="FFFFFF"/>
-                </a:solidFill>
-                <a:latin typeface="Calibri"/>
-              </a:rPr>
-              <a:t>Couverture des exigences de reporting</a:t>
-            </a:r>
-          </a:p>
-        </p:txBody>
-      </p:sp>
-      <p:sp>
-        <p:nvSpPr>
-          <p:cNvPr id="7" name="Rectangle 6"/>
+          <p:cNvPr id="6" name="Rectangle 5"/>
           <p:cNvSpPr/>
           <p:nvPr/>
         </p:nvSpPr>
@@ -3837,7 +4784,7 @@
             <a:avLst/>
           </a:prstGeom>
           <a:solidFill>
-            <a:srgbClr val="EBF2FB"/>
+            <a:srgbClr val="E6E6DC"/>
           </a:solidFill>
           <a:ln>
             <a:noFill/>
@@ -3867,7 +4814,7 @@
       </p:sp>
       <p:sp>
         <p:nvSpPr>
-          <p:cNvPr id="8" name="TextBox 7"/>
+          <p:cNvPr id="7" name="TextBox 6"/>
           <p:cNvSpPr txBox="1"/>
           <p:nvPr/>
         </p:nvSpPr>
@@ -3891,9 +4838,9 @@
             <a:r>
               <a:rPr sz="1250" b="1" i="0">
                 <a:solidFill>
-                  <a:srgbClr val="2C3E50"/>
-                </a:solidFill>
-                <a:latin typeface="Calibri"/>
+                  <a:srgbClr val="1E2B26"/>
+                </a:solidFill>
+                <a:latin typeface="Segoe UI"/>
               </a:rPr>
               <a:t>Bilan GES Scopes 1 &amp; 2</a:t>
             </a:r>
@@ -3902,7 +4849,7 @@
       </p:sp>
       <p:sp>
         <p:nvSpPr>
-          <p:cNvPr id="9" name="TextBox 8"/>
+          <p:cNvPr id="8" name="TextBox 7"/>
           <p:cNvSpPr txBox="1"/>
           <p:nvPr/>
         </p:nvSpPr>
@@ -3926,9 +4873,9 @@
             <a:r>
               <a:rPr sz="1000" b="0" i="0">
                 <a:solidFill>
-                  <a:srgbClr val="6B7C93"/>
-                </a:solidFill>
-                <a:latin typeface="Calibri"/>
+                  <a:srgbClr val="5F6B64"/>
+                </a:solidFill>
+                <a:latin typeface="Segoe UI"/>
               </a:rPr>
               <a:t>ESRS E1-6</a:t>
             </a:r>
@@ -3937,7 +4884,7 @@
       </p:sp>
       <p:sp>
         <p:nvSpPr>
-          <p:cNvPr id="10" name="Rounded Rectangle 9"/>
+          <p:cNvPr id="9" name="Rounded Rectangle 8"/>
           <p:cNvSpPr/>
           <p:nvPr/>
         </p:nvSpPr>
@@ -3980,7 +4927,7 @@
       </p:sp>
       <p:sp>
         <p:nvSpPr>
-          <p:cNvPr id="11" name="TextBox 10"/>
+          <p:cNvPr id="10" name="TextBox 9"/>
           <p:cNvSpPr txBox="1"/>
           <p:nvPr/>
         </p:nvSpPr>
@@ -4006,7 +4953,7 @@
                 <a:solidFill>
                   <a:srgbClr val="FFFFFF"/>
                 </a:solidFill>
-                <a:latin typeface="Calibri"/>
+                <a:latin typeface="Segoe UI"/>
               </a:rPr>
               <a:t>Publié</a:t>
             </a:r>
@@ -4015,7 +4962,7 @@
       </p:sp>
       <p:sp>
         <p:nvSpPr>
-          <p:cNvPr id="12" name="TextBox 11"/>
+          <p:cNvPr id="11" name="TextBox 10"/>
           <p:cNvSpPr txBox="1"/>
           <p:nvPr/>
         </p:nvSpPr>
@@ -4039,9 +4986,9 @@
             <a:r>
               <a:rPr sz="1000" b="0" i="0">
                 <a:solidFill>
-                  <a:srgbClr val="2C3E50"/>
-                </a:solidFill>
-                <a:latin typeface="Calibri"/>
+                  <a:srgbClr val="1E2B26"/>
+                </a:solidFill>
+                <a:latin typeface="Segoe UI"/>
               </a:rPr>
               <a:t>Émissions mesurées et publiées</a:t>
             </a:r>
@@ -4050,7 +4997,7 @@
       </p:sp>
       <p:sp>
         <p:nvSpPr>
-          <p:cNvPr id="13" name="TextBox 12"/>
+          <p:cNvPr id="12" name="TextBox 11"/>
           <p:cNvSpPr txBox="1"/>
           <p:nvPr/>
         </p:nvSpPr>
@@ -4074,9 +5021,9 @@
             <a:r>
               <a:rPr sz="1250" b="1" i="0">
                 <a:solidFill>
-                  <a:srgbClr val="2C3E50"/>
-                </a:solidFill>
-                <a:latin typeface="Calibri"/>
+                  <a:srgbClr val="1E2B26"/>
+                </a:solidFill>
+                <a:latin typeface="Segoe UI"/>
               </a:rPr>
               <a:t>Émissions de la chaîne de valeur (Scope 3)</a:t>
             </a:r>
@@ -4085,7 +5032,7 @@
       </p:sp>
       <p:sp>
         <p:nvSpPr>
-          <p:cNvPr id="14" name="TextBox 13"/>
+          <p:cNvPr id="13" name="TextBox 12"/>
           <p:cNvSpPr txBox="1"/>
           <p:nvPr/>
         </p:nvSpPr>
@@ -4109,9 +5056,9 @@
             <a:r>
               <a:rPr sz="1000" b="0" i="0">
                 <a:solidFill>
-                  <a:srgbClr val="6B7C93"/>
-                </a:solidFill>
-                <a:latin typeface="Calibri"/>
+                  <a:srgbClr val="5F6B64"/>
+                </a:solidFill>
+                <a:latin typeface="Segoe UI"/>
               </a:rPr>
               <a:t>ESRS E1-6</a:t>
             </a:r>
@@ -4120,7 +5067,7 @@
       </p:sp>
       <p:sp>
         <p:nvSpPr>
-          <p:cNvPr id="15" name="Rounded Rectangle 14"/>
+          <p:cNvPr id="14" name="Rounded Rectangle 13"/>
           <p:cNvSpPr/>
           <p:nvPr/>
         </p:nvSpPr>
@@ -4163,7 +5110,7 @@
       </p:sp>
       <p:sp>
         <p:nvSpPr>
-          <p:cNvPr id="16" name="TextBox 15"/>
+          <p:cNvPr id="15" name="TextBox 14"/>
           <p:cNvSpPr txBox="1"/>
           <p:nvPr/>
         </p:nvSpPr>
@@ -4189,7 +5136,7 @@
                 <a:solidFill>
                   <a:srgbClr val="FFFFFF"/>
                 </a:solidFill>
-                <a:latin typeface="Calibri"/>
+                <a:latin typeface="Segoe UI"/>
               </a:rPr>
               <a:t>Publié</a:t>
             </a:r>
@@ -4198,7 +5145,7 @@
       </p:sp>
       <p:sp>
         <p:nvSpPr>
-          <p:cNvPr id="17" name="TextBox 16"/>
+          <p:cNvPr id="16" name="TextBox 15"/>
           <p:cNvSpPr txBox="1"/>
           <p:nvPr/>
         </p:nvSpPr>
@@ -4222,9 +5169,9 @@
             <a:r>
               <a:rPr sz="1000" b="0" i="0">
                 <a:solidFill>
-                  <a:srgbClr val="2C3E50"/>
-                </a:solidFill>
-                <a:latin typeface="Calibri"/>
+                  <a:srgbClr val="1E2B26"/>
+                </a:solidFill>
+                <a:latin typeface="Segoe UI"/>
               </a:rPr>
               <a:t>Scope 3 mesuré et publié</a:t>
             </a:r>
@@ -4233,7 +5180,7 @@
       </p:sp>
       <p:sp>
         <p:nvSpPr>
-          <p:cNvPr id="18" name="Rectangle 17"/>
+          <p:cNvPr id="17" name="Rectangle 16"/>
           <p:cNvSpPr/>
           <p:nvPr/>
         </p:nvSpPr>
@@ -4246,7 +5193,7 @@
             <a:avLst/>
           </a:prstGeom>
           <a:solidFill>
-            <a:srgbClr val="EBF2FB"/>
+            <a:srgbClr val="E6E6DC"/>
           </a:solidFill>
           <a:ln>
             <a:noFill/>
@@ -4276,7 +5223,7 @@
       </p:sp>
       <p:sp>
         <p:nvSpPr>
-          <p:cNvPr id="19" name="TextBox 18"/>
+          <p:cNvPr id="18" name="TextBox 17"/>
           <p:cNvSpPr txBox="1"/>
           <p:nvPr/>
         </p:nvSpPr>
@@ -4300,9 +5247,9 @@
             <a:r>
               <a:rPr sz="1250" b="1" i="0">
                 <a:solidFill>
-                  <a:srgbClr val="2C3E50"/>
-                </a:solidFill>
-                <a:latin typeface="Calibri"/>
+                  <a:srgbClr val="1E2B26"/>
+                </a:solidFill>
+                <a:latin typeface="Segoe UI"/>
               </a:rPr>
               <a:t>Vérification du reporting par un tiers</a:t>
             </a:r>
@@ -4311,7 +5258,7 @@
       </p:sp>
       <p:sp>
         <p:nvSpPr>
-          <p:cNvPr id="20" name="TextBox 19"/>
+          <p:cNvPr id="19" name="TextBox 18"/>
           <p:cNvSpPr txBox="1"/>
           <p:nvPr/>
         </p:nvSpPr>
@@ -4335,9 +5282,9 @@
             <a:r>
               <a:rPr sz="1000" b="0" i="0">
                 <a:solidFill>
-                  <a:srgbClr val="6B7C93"/>
-                </a:solidFill>
-                <a:latin typeface="Calibri"/>
+                  <a:srgbClr val="5F6B64"/>
+                </a:solidFill>
+                <a:latin typeface="Segoe UI"/>
               </a:rPr>
               <a:t>CSRD (assurance limitée)</a:t>
             </a:r>
@@ -4346,7 +5293,7 @@
       </p:sp>
       <p:sp>
         <p:nvSpPr>
-          <p:cNvPr id="21" name="Rounded Rectangle 20"/>
+          <p:cNvPr id="20" name="Rounded Rectangle 19"/>
           <p:cNvSpPr/>
           <p:nvPr/>
         </p:nvSpPr>
@@ -4389,7 +5336,7 @@
       </p:sp>
       <p:sp>
         <p:nvSpPr>
-          <p:cNvPr id="22" name="TextBox 21"/>
+          <p:cNvPr id="21" name="TextBox 20"/>
           <p:cNvSpPr txBox="1"/>
           <p:nvPr/>
         </p:nvSpPr>
@@ -4415,7 +5362,7 @@
                 <a:solidFill>
                   <a:srgbClr val="FFFFFF"/>
                 </a:solidFill>
-                <a:latin typeface="Calibri"/>
+                <a:latin typeface="Segoe UI"/>
               </a:rPr>
               <a:t>Non publié</a:t>
             </a:r>
@@ -4424,7 +5371,7 @@
       </p:sp>
       <p:sp>
         <p:nvSpPr>
-          <p:cNvPr id="23" name="TextBox 22"/>
+          <p:cNvPr id="22" name="TextBox 21"/>
           <p:cNvSpPr txBox="1"/>
           <p:nvPr/>
         </p:nvSpPr>
@@ -4448,9 +5395,9 @@
             <a:r>
               <a:rPr sz="1000" b="0" i="0">
                 <a:solidFill>
-                  <a:srgbClr val="2C3E50"/>
-                </a:solidFill>
-                <a:latin typeface="Calibri"/>
+                  <a:srgbClr val="1E2B26"/>
+                </a:solidFill>
+                <a:latin typeface="Segoe UI"/>
               </a:rPr>
               <a:t>Aucune assurance externe à date</a:t>
             </a:r>
@@ -4459,7 +5406,7 @@
       </p:sp>
       <p:sp>
         <p:nvSpPr>
-          <p:cNvPr id="24" name="TextBox 23"/>
+          <p:cNvPr id="23" name="TextBox 22"/>
           <p:cNvSpPr txBox="1"/>
           <p:nvPr/>
         </p:nvSpPr>
@@ -4483,9 +5430,9 @@
             <a:r>
               <a:rPr sz="1250" b="1" i="0">
                 <a:solidFill>
-                  <a:srgbClr val="2C3E50"/>
-                </a:solidFill>
-                <a:latin typeface="Calibri"/>
+                  <a:srgbClr val="1E2B26"/>
+                </a:solidFill>
+                <a:latin typeface="Segoe UI"/>
               </a:rPr>
               <a:t>Supervision de la durabilité par la gouvernance</a:t>
             </a:r>
@@ -4494,7 +5441,7 @@
       </p:sp>
       <p:sp>
         <p:nvSpPr>
-          <p:cNvPr id="25" name="TextBox 24"/>
+          <p:cNvPr id="24" name="TextBox 23"/>
           <p:cNvSpPr txBox="1"/>
           <p:nvPr/>
         </p:nvSpPr>
@@ -4518,9 +5465,9 @@
             <a:r>
               <a:rPr sz="1000" b="0" i="0">
                 <a:solidFill>
-                  <a:srgbClr val="6B7C93"/>
-                </a:solidFill>
-                <a:latin typeface="Calibri"/>
+                  <a:srgbClr val="5F6B64"/>
+                </a:solidFill>
+                <a:latin typeface="Segoe UI"/>
               </a:rPr>
               <a:t>ESRS 2 GOV-1</a:t>
             </a:r>
@@ -4529,7 +5476,7 @@
       </p:sp>
       <p:sp>
         <p:nvSpPr>
-          <p:cNvPr id="26" name="Rounded Rectangle 25"/>
+          <p:cNvPr id="25" name="Rounded Rectangle 24"/>
           <p:cNvSpPr/>
           <p:nvPr/>
         </p:nvSpPr>
@@ -4572,7 +5519,7 @@
       </p:sp>
       <p:sp>
         <p:nvSpPr>
-          <p:cNvPr id="27" name="TextBox 26"/>
+          <p:cNvPr id="26" name="TextBox 25"/>
           <p:cNvSpPr txBox="1"/>
           <p:nvPr/>
         </p:nvSpPr>
@@ -4598,7 +5545,7 @@
                 <a:solidFill>
                   <a:srgbClr val="FFFFFF"/>
                 </a:solidFill>
-                <a:latin typeface="Calibri"/>
+                <a:latin typeface="Segoe UI"/>
               </a:rPr>
               <a:t>Publié</a:t>
             </a:r>
@@ -4607,7 +5554,7 @@
       </p:sp>
       <p:sp>
         <p:nvSpPr>
-          <p:cNvPr id="28" name="TextBox 27"/>
+          <p:cNvPr id="27" name="TextBox 26"/>
           <p:cNvSpPr txBox="1"/>
           <p:nvPr/>
         </p:nvSpPr>
@@ -4631,9 +5578,9 @@
             <a:r>
               <a:rPr sz="1000" b="0" i="0">
                 <a:solidFill>
-                  <a:srgbClr val="2C3E50"/>
-                </a:solidFill>
-                <a:latin typeface="Calibri"/>
+                  <a:srgbClr val="1E2B26"/>
+                </a:solidFill>
+                <a:latin typeface="Segoe UI"/>
               </a:rPr>
               <a:t>Comité de durabilité en place</a:t>
             </a:r>
@@ -4642,7 +5589,7 @@
       </p:sp>
       <p:sp>
         <p:nvSpPr>
-          <p:cNvPr id="29" name="Rectangle 28"/>
+          <p:cNvPr id="28" name="Rectangle 27"/>
           <p:cNvSpPr/>
           <p:nvPr/>
         </p:nvSpPr>
@@ -4655,7 +5602,7 @@
             <a:avLst/>
           </a:prstGeom>
           <a:solidFill>
-            <a:srgbClr val="EBF2FB"/>
+            <a:srgbClr val="E6E6DC"/>
           </a:solidFill>
           <a:ln>
             <a:noFill/>
@@ -4685,7 +5632,7 @@
       </p:sp>
       <p:sp>
         <p:nvSpPr>
-          <p:cNvPr id="30" name="TextBox 29"/>
+          <p:cNvPr id="29" name="TextBox 28"/>
           <p:cNvSpPr txBox="1"/>
           <p:nvPr/>
         </p:nvSpPr>
@@ -4709,9 +5656,9 @@
             <a:r>
               <a:rPr sz="1250" b="1" i="0">
                 <a:solidFill>
-                  <a:srgbClr val="2C3E50"/>
-                </a:solidFill>
-                <a:latin typeface="Calibri"/>
+                  <a:srgbClr val="1E2B26"/>
+                </a:solidFill>
+                <a:latin typeface="Segoe UI"/>
               </a:rPr>
               <a:t>Indépendance du conseil (AFEP-MEDEF, appliquer ou expliquer)</a:t>
             </a:r>
@@ -4720,7 +5667,7 @@
       </p:sp>
       <p:sp>
         <p:nvSpPr>
-          <p:cNvPr id="31" name="TextBox 30"/>
+          <p:cNvPr id="30" name="TextBox 29"/>
           <p:cNvSpPr txBox="1"/>
           <p:nvPr/>
         </p:nvSpPr>
@@ -4744,9 +5691,9 @@
             <a:r>
               <a:rPr sz="1000" b="0" i="0">
                 <a:solidFill>
-                  <a:srgbClr val="6B7C93"/>
-                </a:solidFill>
-                <a:latin typeface="Calibri"/>
+                  <a:srgbClr val="5F6B64"/>
+                </a:solidFill>
+                <a:latin typeface="Segoe UI"/>
               </a:rPr>
               <a:t>AFEP-MEDEF</a:t>
             </a:r>
@@ -4755,7 +5702,7 @@
       </p:sp>
       <p:sp>
         <p:nvSpPr>
-          <p:cNvPr id="32" name="Rounded Rectangle 31"/>
+          <p:cNvPr id="31" name="Rounded Rectangle 30"/>
           <p:cNvSpPr/>
           <p:nvPr/>
         </p:nvSpPr>
@@ -4798,7 +5745,7 @@
       </p:sp>
       <p:sp>
         <p:nvSpPr>
-          <p:cNvPr id="33" name="TextBox 32"/>
+          <p:cNvPr id="32" name="TextBox 31"/>
           <p:cNvSpPr txBox="1"/>
           <p:nvPr/>
         </p:nvSpPr>
@@ -4824,7 +5771,7 @@
                 <a:solidFill>
                   <a:srgbClr val="FFFFFF"/>
                 </a:solidFill>
-                <a:latin typeface="Calibri"/>
+                <a:latin typeface="Segoe UI"/>
               </a:rPr>
               <a:t>Sous le seuil</a:t>
             </a:r>
@@ -4833,7 +5780,7 @@
       </p:sp>
       <p:sp>
         <p:nvSpPr>
-          <p:cNvPr id="34" name="TextBox 33"/>
+          <p:cNvPr id="33" name="TextBox 32"/>
           <p:cNvSpPr txBox="1"/>
           <p:nvPr/>
         </p:nvSpPr>
@@ -4857,18 +5804,18 @@
             <a:r>
               <a:rPr sz="1000" b="0" i="0">
                 <a:solidFill>
-                  <a:srgbClr val="2C3E50"/>
-                </a:solidFill>
-                <a:latin typeface="Calibri"/>
-              </a:rPr>
-              <a:t>45 % d'administrateurs indépendants</a:t>
-            </a:r>
-          </a:p>
-        </p:txBody>
-      </p:sp>
-      <p:sp>
-        <p:nvSpPr>
-          <p:cNvPr id="35" name="TextBox 34"/>
+                  <a:srgbClr val="1E2B26"/>
+                </a:solidFill>
+                <a:latin typeface="Segoe UI"/>
+              </a:rPr>
+              <a:t>45 % d'administrateurs indépendants</a:t>
+            </a:r>
+          </a:p>
+        </p:txBody>
+      </p:sp>
+      <p:sp>
+        <p:nvSpPr>
+          <p:cNvPr id="34" name="TextBox 33"/>
           <p:cNvSpPr txBox="1"/>
           <p:nvPr/>
         </p:nvSpPr>
@@ -4892,9 +5839,9 @@
             <a:r>
               <a:rPr sz="1250" b="1" i="0">
                 <a:solidFill>
-                  <a:srgbClr val="2C3E50"/>
-                </a:solidFill>
-                <a:latin typeface="Calibri"/>
+                  <a:srgbClr val="1E2B26"/>
+                </a:solidFill>
+                <a:latin typeface="Segoe UI"/>
               </a:rPr>
               <a:t>Publication des indicateurs Taxonomie UE</a:t>
             </a:r>
@@ -4903,7 +5850,7 @@
       </p:sp>
       <p:sp>
         <p:nvSpPr>
-          <p:cNvPr id="36" name="TextBox 35"/>
+          <p:cNvPr id="35" name="TextBox 34"/>
           <p:cNvSpPr txBox="1"/>
           <p:nvPr/>
         </p:nvSpPr>
@@ -4927,9 +5874,9 @@
             <a:r>
               <a:rPr sz="1000" b="0" i="0">
                 <a:solidFill>
-                  <a:srgbClr val="6B7C93"/>
-                </a:solidFill>
-                <a:latin typeface="Calibri"/>
+                  <a:srgbClr val="5F6B64"/>
+                </a:solidFill>
+                <a:latin typeface="Segoe UI"/>
               </a:rPr>
               <a:t>Règlement (UE) 2020/852</a:t>
             </a:r>
@@ -4938,7 +5885,7 @@
       </p:sp>
       <p:sp>
         <p:nvSpPr>
-          <p:cNvPr id="37" name="Rounded Rectangle 36"/>
+          <p:cNvPr id="36" name="Rounded Rectangle 35"/>
           <p:cNvSpPr/>
           <p:nvPr/>
         </p:nvSpPr>
@@ -4981,7 +5928,7 @@
       </p:sp>
       <p:sp>
         <p:nvSpPr>
-          <p:cNvPr id="38" name="TextBox 37"/>
+          <p:cNvPr id="37" name="TextBox 36"/>
           <p:cNvSpPr txBox="1"/>
           <p:nvPr/>
         </p:nvSpPr>
@@ -5007,7 +5954,7 @@
                 <a:solidFill>
                   <a:srgbClr val="FFFFFF"/>
                 </a:solidFill>
-                <a:latin typeface="Calibri"/>
+                <a:latin typeface="Segoe UI"/>
               </a:rPr>
               <a:t>Publié</a:t>
             </a:r>
@@ -5016,7 +5963,7 @@
       </p:sp>
       <p:sp>
         <p:nvSpPr>
-          <p:cNvPr id="39" name="TextBox 38"/>
+          <p:cNvPr id="38" name="TextBox 37"/>
           <p:cNvSpPr txBox="1"/>
           <p:nvPr/>
         </p:nvSpPr>
@@ -5040,9 +5987,9 @@
             <a:r>
               <a:rPr sz="1000" b="0" i="0">
                 <a:solidFill>
-                  <a:srgbClr val="2C3E50"/>
-                </a:solidFill>
-                <a:latin typeface="Calibri"/>
+                  <a:srgbClr val="1E2B26"/>
+                </a:solidFill>
+                <a:latin typeface="Segoe UI"/>
               </a:rPr>
               <a:t>Parts alignées publiées (CA/CapEx/OpEx)</a:t>
             </a:r>
@@ -5051,7 +5998,7 @@
       </p:sp>
       <p:sp>
         <p:nvSpPr>
-          <p:cNvPr id="40" name="Rectangle 39"/>
+          <p:cNvPr id="39" name="Rectangle 38"/>
           <p:cNvSpPr/>
           <p:nvPr/>
         </p:nvSpPr>
@@ -5064,7 +6011,7 @@
             <a:avLst/>
           </a:prstGeom>
           <a:solidFill>
-            <a:srgbClr val="EBF2FB"/>
+            <a:srgbClr val="E6E6DC"/>
           </a:solidFill>
           <a:ln>
             <a:noFill/>
@@ -5094,7 +6041,7 @@
       </p:sp>
       <p:sp>
         <p:nvSpPr>
-          <p:cNvPr id="41" name="TextBox 40"/>
+          <p:cNvPr id="40" name="TextBox 39"/>
           <p:cNvSpPr txBox="1"/>
           <p:nvPr/>
         </p:nvSpPr>
@@ -5118,9 +6065,9 @@
             <a:r>
               <a:rPr sz="1250" b="1" i="0">
                 <a:solidFill>
-                  <a:srgbClr val="2C3E50"/>
-                </a:solidFill>
-                <a:latin typeface="Calibri"/>
+                  <a:srgbClr val="1E2B26"/>
+                </a:solidFill>
+                <a:latin typeface="Segoe UI"/>
               </a:rPr>
               <a:t>Objectifs climatiques chiffrés</a:t>
             </a:r>
@@ -5129,7 +6076,7 @@
       </p:sp>
       <p:sp>
         <p:nvSpPr>
-          <p:cNvPr id="42" name="TextBox 41"/>
+          <p:cNvPr id="41" name="TextBox 40"/>
           <p:cNvSpPr txBox="1"/>
           <p:nvPr/>
         </p:nvSpPr>
@@ -5153,9 +6100,9 @@
             <a:r>
               <a:rPr sz="1000" b="0" i="0">
                 <a:solidFill>
-                  <a:srgbClr val="6B7C93"/>
-                </a:solidFill>
-                <a:latin typeface="Calibri"/>
+                  <a:srgbClr val="5F6B64"/>
+                </a:solidFill>
+                <a:latin typeface="Segoe UI"/>
               </a:rPr>
               <a:t>ESRS E1-4</a:t>
             </a:r>
@@ -5164,7 +6111,7 @@
       </p:sp>
       <p:sp>
         <p:nvSpPr>
-          <p:cNvPr id="43" name="Rounded Rectangle 42"/>
+          <p:cNvPr id="42" name="Rounded Rectangle 41"/>
           <p:cNvSpPr/>
           <p:nvPr/>
         </p:nvSpPr>
@@ -5207,7 +6154,7 @@
       </p:sp>
       <p:sp>
         <p:nvSpPr>
-          <p:cNvPr id="44" name="TextBox 43"/>
+          <p:cNvPr id="43" name="TextBox 42"/>
           <p:cNvSpPr txBox="1"/>
           <p:nvPr/>
         </p:nvSpPr>
@@ -5233,7 +6180,7 @@
                 <a:solidFill>
                   <a:srgbClr val="FFFFFF"/>
                 </a:solidFill>
-                <a:latin typeface="Calibri"/>
+                <a:latin typeface="Segoe UI"/>
               </a:rPr>
               <a:t>Non couvert par ce reporting</a:t>
             </a:r>
@@ -5242,7 +6189,7 @@
       </p:sp>
       <p:sp>
         <p:nvSpPr>
-          <p:cNvPr id="45" name="TextBox 44"/>
+          <p:cNvPr id="44" name="TextBox 43"/>
           <p:cNvSpPr txBox="1"/>
           <p:nvPr/>
         </p:nvSpPr>
@@ -5266,9 +6213,9 @@
             <a:r>
               <a:rPr sz="1000" b="0" i="0">
                 <a:solidFill>
-                  <a:srgbClr val="2C3E50"/>
-                </a:solidFill>
-                <a:latin typeface="Calibri"/>
+                  <a:srgbClr val="1E2B26"/>
+                </a:solidFill>
+                <a:latin typeface="Segoe UI"/>
               </a:rPr>
               <a:t>Cibles climatiques non documentées dans ce reporting</a:t>
             </a:r>
@@ -5277,7 +6224,7 @@
       </p:sp>
       <p:sp>
         <p:nvSpPr>
-          <p:cNvPr id="46" name="TextBox 45"/>
+          <p:cNvPr id="45" name="TextBox 44"/>
           <p:cNvSpPr txBox="1"/>
           <p:nvPr/>
         </p:nvSpPr>
@@ -5301,9 +6248,9 @@
             <a:r>
               <a:rPr sz="800" b="0" i="0">
                 <a:solidFill>
-                  <a:srgbClr val="6B7C93"/>
-                </a:solidFill>
-                <a:latin typeface="Calibri"/>
+                  <a:srgbClr val="5F6B64"/>
+                </a:solidFill>
+                <a:latin typeface="Segoe UI"/>
               </a:rPr>
               <a:t>Acme Industries   |   10 / 23</a:t>
             </a:r>
@@ -5343,7 +6290,7 @@
             <a:avLst/>
           </a:prstGeom>
           <a:solidFill>
-            <a:srgbClr val="1B3A6B"/>
+            <a:srgbClr val="1F3D33"/>
           </a:solidFill>
           <a:ln>
             <a:noFill/>
@@ -5386,7 +6333,7 @@
             <a:avLst/>
           </a:prstGeom>
           <a:solidFill>
-            <a:srgbClr val="F39C12"/>
+            <a:srgbClr val="2E5A4B"/>
           </a:solidFill>
           <a:ln>
             <a:noFill/>
@@ -5440,9 +6387,9 @@
             <a:r>
               <a:rPr sz="23000" b="1" i="0">
                 <a:solidFill>
-                  <a:srgbClr val="F39C12"/>
-                </a:solidFill>
-                <a:latin typeface="Calibri"/>
+                  <a:srgbClr val="2E5A4B"/>
+                </a:solidFill>
+                <a:latin typeface="Georgia"/>
               </a:rPr>
               <a:t>60</a:t>
             </a:r>
@@ -5475,9 +6422,9 @@
             <a:r>
               <a:rPr sz="3400" b="1" i="0">
                 <a:solidFill>
-                  <a:srgbClr val="FFFFFF"/>
-                </a:solidFill>
-                <a:latin typeface="Calibri"/>
+                  <a:srgbClr val="F3F0E8"/>
+                </a:solidFill>
+                <a:latin typeface="Segoe UI"/>
               </a:rPr>
               <a:t>%</a:t>
             </a:r>
@@ -5510,9 +6457,9 @@
             <a:r>
               <a:rPr sz="2000" b="0" i="0">
                 <a:solidFill>
-                  <a:srgbClr val="AEC6E8"/>
-                </a:solidFill>
-                <a:latin typeface="Calibri"/>
+                  <a:srgbClr val="C9D8C5"/>
+                </a:solidFill>
+                <a:latin typeface="Segoe UI"/>
               </a:rPr>
               <a:t>des émissions relèvent du Scope 3</a:t>
             </a:r>
@@ -5534,7 +6481,7 @@
             <a:avLst/>
           </a:prstGeom>
           <a:solidFill>
-            <a:srgbClr val="F39C12"/>
+            <a:srgbClr val="2E5A4B"/>
           </a:solidFill>
           <a:ln>
             <a:noFill/>
@@ -5588,9 +6535,9 @@
             <a:r>
               <a:rPr sz="1600" b="0" i="1">
                 <a:solidFill>
-                  <a:srgbClr val="FFFFFF"/>
-                </a:solidFill>
-                <a:latin typeface="Calibri"/>
+                  <a:srgbClr val="F3F0E8"/>
+                </a:solidFill>
+                <a:latin typeface="Segoe UI"/>
               </a:rPr>
               <a:t>La chaîne de valeur, principal terrain d'action climat.</a:t>
             </a:r>
@@ -5623,9 +6570,9 @@
             <a:r>
               <a:rPr sz="800" b="0" i="0">
                 <a:solidFill>
-                  <a:srgbClr val="6B7C93"/>
-                </a:solidFill>
-                <a:latin typeface="Calibri"/>
+                  <a:srgbClr val="5F6B64"/>
+                </a:solidFill>
+                <a:latin typeface="Segoe UI"/>
               </a:rPr>
               <a:t>Acme Industries   |   11 / 23</a:t>
             </a:r>
@@ -5665,7 +6612,7 @@
             <a:avLst/>
           </a:prstGeom>
           <a:solidFill>
-            <a:srgbClr val="F4F7FD"/>
+            <a:srgbClr val="F3F0E8"/>
           </a:solidFill>
           <a:ln>
             <a:noFill/>
@@ -5743,9 +6690,9 @@
             <a:r>
               <a:rPr sz="1300" b="1" i="0">
                 <a:solidFill>
-                  <a:srgbClr val="F39C12"/>
-                </a:solidFill>
-                <a:latin typeface="Calibri"/>
+                  <a:srgbClr val="2E5A4B"/>
+                </a:solidFill>
+                <a:latin typeface="Segoe UI"/>
               </a:rPr>
               <a:t>PILIER ENVIRONNEMENTAL</a:t>
             </a:r>
@@ -5780,7 +6727,7 @@
                 <a:solidFill>
                   <a:srgbClr val="FFFFFF"/>
                 </a:solidFill>
-                <a:latin typeface="Calibri"/>
+                <a:latin typeface="Georgia"/>
               </a:rPr>
               <a:t>Un bilan carbone complet, socle de la trajectoire climat</a:t>
             </a:r>
@@ -5839,7 +6786,7 @@
                 <a:solidFill>
                   <a:srgbClr val="FFFFFF"/>
                 </a:solidFill>
-                <a:latin typeface="Calibri"/>
+                <a:latin typeface="Georgia"/>
               </a:rPr>
               <a:t>70</a:t>
             </a:r>
@@ -5874,7 +6821,7 @@
                 <a:solidFill>
                   <a:srgbClr val="FFFFFF"/>
                 </a:solidFill>
-                <a:latin typeface="Calibri"/>
+                <a:latin typeface="Segoe UI"/>
               </a:rPr>
               <a:t>SCORE / 100</a:t>
             </a:r>
@@ -5907,9 +6854,9 @@
             <a:r>
               <a:rPr sz="1500" b="1" i="0">
                 <a:solidFill>
-                  <a:srgbClr val="6B7C93"/>
-                </a:solidFill>
-                <a:latin typeface="Calibri"/>
+                  <a:srgbClr val="5F6B64"/>
+                </a:solidFill>
+                <a:latin typeface="Segoe UI"/>
               </a:rPr>
               <a:t>INDICATEURS CLÉS</a:t>
             </a:r>
@@ -5931,7 +6878,7 @@
             <a:avLst/>
           </a:prstGeom>
           <a:solidFill>
-            <a:srgbClr val="27AE60"/>
+            <a:srgbClr val="2F6B4F"/>
           </a:solidFill>
           <a:ln>
             <a:noFill/>
@@ -5974,7 +6921,7 @@
             <a:avLst/>
           </a:prstGeom>
           <a:solidFill>
-            <a:srgbClr val="EBF2FB"/>
+            <a:srgbClr val="E6E6DC"/>
           </a:solidFill>
           <a:ln w="9525">
             <a:solidFill>
@@ -6019,7 +6966,7 @@
             <a:avLst/>
           </a:prstGeom>
           <a:solidFill>
-            <a:srgbClr val="27AE60"/>
+            <a:srgbClr val="2F6B4F"/>
           </a:solidFill>
           <a:ln>
             <a:noFill/>
@@ -6062,7 +7009,7 @@
             <a:avLst/>
           </a:prstGeom>
           <a:solidFill>
-            <a:srgbClr val="27AE60"/>
+            <a:srgbClr val="2F6B4F"/>
           </a:solidFill>
           <a:ln>
             <a:noFill/>
@@ -6140,11 +7087,11 @@
             <a:r>
               <a:rPr sz="2300" b="1" i="0">
                 <a:solidFill>
-                  <a:srgbClr val="27AE60"/>
-                </a:solidFill>
-                <a:latin typeface="Calibri"/>
-              </a:rPr>
-              <a:t>8,200 t</a:t>
+                  <a:srgbClr val="2F6B4F"/>
+                </a:solidFill>
+                <a:latin typeface="Georgia"/>
+              </a:rPr>
+              <a:t>8 200 t</a:t>
             </a:r>
           </a:p>
         </p:txBody>
@@ -6175,9 +7122,9 @@
             <a:r>
               <a:rPr sz="1050" b="0" i="0">
                 <a:solidFill>
-                  <a:srgbClr val="6B7C93"/>
-                </a:solidFill>
-                <a:latin typeface="Calibri"/>
+                  <a:srgbClr val="5F6B64"/>
+                </a:solidFill>
+                <a:latin typeface="Segoe UI"/>
               </a:rPr>
               <a:t>Émissions CO2 totales</a:t>
             </a:r>
@@ -6199,7 +7146,7 @@
             <a:avLst/>
           </a:prstGeom>
           <a:solidFill>
-            <a:srgbClr val="EBF2FB"/>
+            <a:srgbClr val="E6E6DC"/>
           </a:solidFill>
           <a:ln w="9525">
             <a:solidFill>
@@ -6244,7 +7191,7 @@
             <a:avLst/>
           </a:prstGeom>
           <a:solidFill>
-            <a:srgbClr val="27AE60"/>
+            <a:srgbClr val="2F6B4F"/>
           </a:solidFill>
           <a:ln>
             <a:noFill/>
@@ -6287,7 +7234,7 @@
             <a:avLst/>
           </a:prstGeom>
           <a:solidFill>
-            <a:srgbClr val="27AE60"/>
+            <a:srgbClr val="2F6B4F"/>
           </a:solidFill>
           <a:ln>
             <a:noFill/>
@@ -6365,11 +7312,11 @@
             <a:r>
               <a:rPr sz="2300" b="1" i="0">
                 <a:solidFill>
-                  <a:srgbClr val="27AE60"/>
-                </a:solidFill>
-                <a:latin typeface="Calibri"/>
-              </a:rPr>
-              <a:t>42%</a:t>
+                  <a:srgbClr val="2F6B4F"/>
+                </a:solidFill>
+                <a:latin typeface="Georgia"/>
+              </a:rPr>
+              <a:t>42 %</a:t>
             </a:r>
           </a:p>
         </p:txBody>
@@ -6400,9 +7347,9 @@
             <a:r>
               <a:rPr sz="1050" b="0" i="0">
                 <a:solidFill>
-                  <a:srgbClr val="6B7C93"/>
-                </a:solidFill>
-                <a:latin typeface="Calibri"/>
+                  <a:srgbClr val="5F6B64"/>
+                </a:solidFill>
+                <a:latin typeface="Segoe UI"/>
               </a:rPr>
               <a:t>Énergie renouvelable</a:t>
             </a:r>
@@ -6424,7 +7371,7 @@
             <a:avLst/>
           </a:prstGeom>
           <a:solidFill>
-            <a:srgbClr val="EBF2FB"/>
+            <a:srgbClr val="E6E6DC"/>
           </a:solidFill>
           <a:ln w="9525">
             <a:solidFill>
@@ -6469,7 +7416,7 @@
             <a:avLst/>
           </a:prstGeom>
           <a:solidFill>
-            <a:srgbClr val="27AE60"/>
+            <a:srgbClr val="2F6B4F"/>
           </a:solidFill>
           <a:ln>
             <a:noFill/>
@@ -6512,7 +7459,7 @@
             <a:avLst/>
           </a:prstGeom>
           <a:solidFill>
-            <a:srgbClr val="27AE60"/>
+            <a:srgbClr val="2F6B4F"/>
           </a:solidFill>
           <a:ln>
             <a:noFill/>
@@ -6590,11 +7537,11 @@
             <a:r>
               <a:rPr sz="2300" b="1" i="0">
                 <a:solidFill>
-                  <a:srgbClr val="27AE60"/>
-                </a:solidFill>
-                <a:latin typeface="Calibri"/>
-              </a:rPr>
-              <a:t>21,500</a:t>
+                  <a:srgbClr val="2F6B4F"/>
+                </a:solidFill>
+                <a:latin typeface="Georgia"/>
+              </a:rPr>
+              <a:t>21 500</a:t>
             </a:r>
           </a:p>
         </p:txBody>
@@ -6625,9 +7572,9 @@
             <a:r>
               <a:rPr sz="1050" b="0" i="0">
                 <a:solidFill>
-                  <a:srgbClr val="6B7C93"/>
-                </a:solidFill>
-                <a:latin typeface="Calibri"/>
+                  <a:srgbClr val="5F6B64"/>
+                </a:solidFill>
+                <a:latin typeface="Segoe UI"/>
               </a:rPr>
               <a:t>Consommation (MWh)</a:t>
             </a:r>
@@ -6649,7 +7596,7 @@
             <a:avLst/>
           </a:prstGeom>
           <a:solidFill>
-            <a:srgbClr val="EBF2FB"/>
+            <a:srgbClr val="E6E6DC"/>
           </a:solidFill>
           <a:ln w="9525">
             <a:solidFill>
@@ -6694,7 +7641,7 @@
             <a:avLst/>
           </a:prstGeom>
           <a:solidFill>
-            <a:srgbClr val="27AE60"/>
+            <a:srgbClr val="2F6B4F"/>
           </a:solidFill>
           <a:ln>
             <a:noFill/>
@@ -6737,7 +7684,7 @@
             <a:avLst/>
           </a:prstGeom>
           <a:solidFill>
-            <a:srgbClr val="27AE60"/>
+            <a:srgbClr val="2F6B4F"/>
           </a:solidFill>
           <a:ln>
             <a:noFill/>
@@ -6815,11 +7762,11 @@
             <a:r>
               <a:rPr sz="2300" b="1" i="0">
                 <a:solidFill>
-                  <a:srgbClr val="27AE60"/>
-                </a:solidFill>
-                <a:latin typeface="Calibri"/>
-              </a:rPr>
-              <a:t>120,000</a:t>
+                  <a:srgbClr val="2F6B4F"/>
+                </a:solidFill>
+                <a:latin typeface="Georgia"/>
+              </a:rPr>
+              <a:t>120 000</a:t>
             </a:r>
           </a:p>
         </p:txBody>
@@ -6850,9 +7797,9 @@
             <a:r>
               <a:rPr sz="1050" b="0" i="0">
                 <a:solidFill>
-                  <a:srgbClr val="6B7C93"/>
-                </a:solidFill>
-                <a:latin typeface="Calibri"/>
+                  <a:srgbClr val="5F6B64"/>
+                </a:solidFill>
+                <a:latin typeface="Segoe UI"/>
               </a:rPr>
               <a:t>Eau prélevée (m3)</a:t>
             </a:r>
@@ -6874,11 +7821,11 @@
             <a:avLst/>
           </a:prstGeom>
           <a:solidFill>
-            <a:srgbClr val="EBF2FB"/>
+            <a:srgbClr val="E6E6DC"/>
           </a:solidFill>
           <a:ln w="19050">
             <a:solidFill>
-              <a:srgbClr val="27AE60"/>
+              <a:srgbClr val="2F6B4F"/>
             </a:solidFill>
           </a:ln>
         </p:spPr>
@@ -6919,7 +7866,7 @@
             <a:avLst/>
           </a:prstGeom>
           <a:solidFill>
-            <a:srgbClr val="27AE60"/>
+            <a:srgbClr val="2F6B4F"/>
           </a:solidFill>
           <a:ln>
             <a:noFill/>
@@ -6973,9 +7920,9 @@
             <a:r>
               <a:rPr sz="1250" b="1" i="0">
                 <a:solidFill>
-                  <a:srgbClr val="27AE60"/>
-                </a:solidFill>
-                <a:latin typeface="Calibri"/>
+                  <a:srgbClr val="2F6B4F"/>
+                </a:solidFill>
+                <a:latin typeface="Segoe UI"/>
               </a:rPr>
               <a:t>LECTURE MÉTIER</a:t>
             </a:r>
@@ -7008,9 +7955,9 @@
             <a:r>
               <a:rPr sz="1600" b="0" i="0">
                 <a:solidFill>
-                  <a:srgbClr val="2C3E50"/>
-                </a:solidFill>
-                <a:latin typeface="Calibri"/>
+                  <a:srgbClr val="1E2B26"/>
+                </a:solidFill>
+                <a:latin typeface="Segoe UI"/>
               </a:rPr>
               <a:t>Performance environnementale solide ; l'intensité carbone reste le principal levier de création de valeur durable.</a:t>
             </a:r>
@@ -7043,9 +7990,9 @@
             <a:r>
               <a:rPr sz="800" b="0" i="0">
                 <a:solidFill>
-                  <a:srgbClr val="6B7C93"/>
-                </a:solidFill>
-                <a:latin typeface="Calibri"/>
+                  <a:srgbClr val="5F6B64"/>
+                </a:solidFill>
+                <a:latin typeface="Segoe UI"/>
               </a:rPr>
               <a:t>Acme Industries   |   12 / 23</a:t>
             </a:r>
@@ -7085,7 +8032,7 @@
             <a:avLst/>
           </a:prstGeom>
           <a:solidFill>
-            <a:srgbClr val="F4F7FD"/>
+            <a:srgbClr val="F3F0E8"/>
           </a:solidFill>
           <a:ln>
             <a:noFill/>
@@ -7163,9 +8110,9 @@
             <a:r>
               <a:rPr sz="1300" b="1" i="0">
                 <a:solidFill>
-                  <a:srgbClr val="F39C12"/>
-                </a:solidFill>
-                <a:latin typeface="Calibri"/>
+                  <a:srgbClr val="2E5A4B"/>
+                </a:solidFill>
+                <a:latin typeface="Segoe UI"/>
               </a:rPr>
               <a:t>PILIER SOCIAL</a:t>
             </a:r>
@@ -7200,9 +8147,9 @@
                 <a:solidFill>
                   <a:srgbClr val="FFFFFF"/>
                 </a:solidFill>
-                <a:latin typeface="Calibri"/>
-              </a:rPr>
-              <a:t>La sécurité au travail (TF 6.2), priorité à traiter</a:t>
+                <a:latin typeface="Georgia"/>
+              </a:rPr>
+              <a:t>La sécurité au travail (TF 6,2), priorité à traiter</a:t>
             </a:r>
           </a:p>
         </p:txBody>
@@ -7259,7 +8206,7 @@
                 <a:solidFill>
                   <a:srgbClr val="FFFFFF"/>
                 </a:solidFill>
-                <a:latin typeface="Calibri"/>
+                <a:latin typeface="Georgia"/>
               </a:rPr>
               <a:t>55</a:t>
             </a:r>
@@ -7294,7 +8241,7 @@
                 <a:solidFill>
                   <a:srgbClr val="FFFFFF"/>
                 </a:solidFill>
-                <a:latin typeface="Calibri"/>
+                <a:latin typeface="Segoe UI"/>
               </a:rPr>
               <a:t>SCORE / 100</a:t>
             </a:r>
@@ -7327,9 +8274,9 @@
             <a:r>
               <a:rPr sz="1500" b="1" i="0">
                 <a:solidFill>
-                  <a:srgbClr val="6B7C93"/>
-                </a:solidFill>
-                <a:latin typeface="Calibri"/>
+                  <a:srgbClr val="5F6B64"/>
+                </a:solidFill>
+                <a:latin typeface="Segoe UI"/>
               </a:rPr>
               <a:t>INDICATEURS CLÉS</a:t>
             </a:r>
@@ -7351,7 +8298,7 @@
             <a:avLst/>
           </a:prstGeom>
           <a:solidFill>
-            <a:srgbClr val="2E86C1"/>
+            <a:srgbClr val="3D6A8A"/>
           </a:solidFill>
           <a:ln>
             <a:noFill/>
@@ -7394,7 +8341,7 @@
             <a:avLst/>
           </a:prstGeom>
           <a:solidFill>
-            <a:srgbClr val="EBF2FB"/>
+            <a:srgbClr val="E6E6DC"/>
           </a:solidFill>
           <a:ln w="9525">
             <a:solidFill>
@@ -7439,7 +8386,7 @@
             <a:avLst/>
           </a:prstGeom>
           <a:solidFill>
-            <a:srgbClr val="2E86C1"/>
+            <a:srgbClr val="3D6A8A"/>
           </a:solidFill>
           <a:ln>
             <a:noFill/>
@@ -7482,7 +8429,7 @@
             <a:avLst/>
           </a:prstGeom>
           <a:solidFill>
-            <a:srgbClr val="2E86C1"/>
+            <a:srgbClr val="3D6A8A"/>
           </a:solidFill>
           <a:ln>
             <a:noFill/>
@@ -7560,9 +8507,9 @@
             <a:r>
               <a:rPr sz="2300" b="1" i="0">
                 <a:solidFill>
-                  <a:srgbClr val="2E86C1"/>
-                </a:solidFill>
-                <a:latin typeface="Calibri"/>
+                  <a:srgbClr val="3D6A8A"/>
+                </a:solidFill>
+                <a:latin typeface="Georgia"/>
               </a:rPr>
               <a:t>320</a:t>
             </a:r>
@@ -7595,9 +8542,9 @@
             <a:r>
               <a:rPr sz="1050" b="0" i="0">
                 <a:solidFill>
-                  <a:srgbClr val="6B7C93"/>
-                </a:solidFill>
-                <a:latin typeface="Calibri"/>
+                  <a:srgbClr val="5F6B64"/>
+                </a:solidFill>
+                <a:latin typeface="Segoe UI"/>
               </a:rPr>
               <a:t>Effectif total</a:t>
             </a:r>
@@ -7619,7 +8566,7 @@
             <a:avLst/>
           </a:prstGeom>
           <a:solidFill>
-            <a:srgbClr val="EBF2FB"/>
+            <a:srgbClr val="E6E6DC"/>
           </a:solidFill>
           <a:ln w="9525">
             <a:solidFill>
@@ -7664,7 +8611,7 @@
             <a:avLst/>
           </a:prstGeom>
           <a:solidFill>
-            <a:srgbClr val="2E86C1"/>
+            <a:srgbClr val="3D6A8A"/>
           </a:solidFill>
           <a:ln>
             <a:noFill/>
@@ -7707,7 +8654,7 @@
             <a:avLst/>
           </a:prstGeom>
           <a:solidFill>
-            <a:srgbClr val="2E86C1"/>
+            <a:srgbClr val="3D6A8A"/>
           </a:solidFill>
           <a:ln>
             <a:noFill/>
@@ -7785,11 +8732,11 @@
             <a:r>
               <a:rPr sz="2300" b="1" i="0">
                 <a:solidFill>
-                  <a:srgbClr val="2E86C1"/>
-                </a:solidFill>
-                <a:latin typeface="Calibri"/>
-              </a:rPr>
-              <a:t>34%</a:t>
+                  <a:srgbClr val="3D6A8A"/>
+                </a:solidFill>
+                <a:latin typeface="Georgia"/>
+              </a:rPr>
+              <a:t>34 %</a:t>
             </a:r>
           </a:p>
         </p:txBody>
@@ -7820,9 +8767,9 @@
             <a:r>
               <a:rPr sz="1050" b="0" i="0">
                 <a:solidFill>
-                  <a:srgbClr val="6B7C93"/>
-                </a:solidFill>
-                <a:latin typeface="Calibri"/>
+                  <a:srgbClr val="5F6B64"/>
+                </a:solidFill>
+                <a:latin typeface="Segoe UI"/>
               </a:rPr>
               <a:t>Femmes dans l'effectif</a:t>
             </a:r>
@@ -7844,7 +8791,7 @@
             <a:avLst/>
           </a:prstGeom>
           <a:solidFill>
-            <a:srgbClr val="EBF2FB"/>
+            <a:srgbClr val="E6E6DC"/>
           </a:solidFill>
           <a:ln w="9525">
             <a:solidFill>
@@ -7889,7 +8836,7 @@
             <a:avLst/>
           </a:prstGeom>
           <a:solidFill>
-            <a:srgbClr val="2E86C1"/>
+            <a:srgbClr val="3D6A8A"/>
           </a:solidFill>
           <a:ln>
             <a:noFill/>
@@ -7932,7 +8879,7 @@
             <a:avLst/>
           </a:prstGeom>
           <a:solidFill>
-            <a:srgbClr val="2E86C1"/>
+            <a:srgbClr val="3D6A8A"/>
           </a:solidFill>
           <a:ln>
             <a:noFill/>
@@ -8010,9 +8957,9 @@
             <a:r>
               <a:rPr sz="2300" b="1" i="0">
                 <a:solidFill>
-                  <a:srgbClr val="2E86C1"/>
-                </a:solidFill>
-                <a:latin typeface="Calibri"/>
+                  <a:srgbClr val="3D6A8A"/>
+                </a:solidFill>
+                <a:latin typeface="Georgia"/>
               </a:rPr>
               <a:t>22 h</a:t>
             </a:r>
@@ -8045,9 +8992,9 @@
             <a:r>
               <a:rPr sz="1050" b="0" i="0">
                 <a:solidFill>
-                  <a:srgbClr val="6B7C93"/>
-                </a:solidFill>
-                <a:latin typeface="Calibri"/>
+                  <a:srgbClr val="5F6B64"/>
+                </a:solidFill>
+                <a:latin typeface="Segoe UI"/>
               </a:rPr>
               <a:t>Formation / an</a:t>
             </a:r>
@@ -8069,7 +9016,7 @@
             <a:avLst/>
           </a:prstGeom>
           <a:solidFill>
-            <a:srgbClr val="EBF2FB"/>
+            <a:srgbClr val="E6E6DC"/>
           </a:solidFill>
           <a:ln w="9525">
             <a:solidFill>
@@ -8114,7 +9061,7 @@
             <a:avLst/>
           </a:prstGeom>
           <a:solidFill>
-            <a:srgbClr val="2E86C1"/>
+            <a:srgbClr val="3D6A8A"/>
           </a:solidFill>
           <a:ln>
             <a:noFill/>
@@ -8157,7 +9104,7 @@
             <a:avLst/>
           </a:prstGeom>
           <a:solidFill>
-            <a:srgbClr val="2E86C1"/>
+            <a:srgbClr val="3D6A8A"/>
           </a:solidFill>
           <a:ln>
             <a:noFill/>
@@ -8235,11 +9182,11 @@
             <a:r>
               <a:rPr sz="2300" b="1" i="0">
                 <a:solidFill>
-                  <a:srgbClr val="2E86C1"/>
-                </a:solidFill>
-                <a:latin typeface="Calibri"/>
-              </a:rPr>
-              <a:t>6.2</a:t>
+                  <a:srgbClr val="3D6A8A"/>
+                </a:solidFill>
+                <a:latin typeface="Georgia"/>
+              </a:rPr>
+              <a:t>6,2</a:t>
             </a:r>
           </a:p>
         </p:txBody>
@@ -8270,9 +9217,9 @@
             <a:r>
               <a:rPr sz="1050" b="0" i="0">
                 <a:solidFill>
-                  <a:srgbClr val="6B7C93"/>
-                </a:solidFill>
-                <a:latin typeface="Calibri"/>
+                  <a:srgbClr val="5F6B64"/>
+                </a:solidFill>
+                <a:latin typeface="Segoe UI"/>
               </a:rPr>
               <a:t>Taux fréquence accidents</a:t>
             </a:r>
@@ -8294,11 +9241,11 @@
             <a:avLst/>
           </a:prstGeom>
           <a:solidFill>
-            <a:srgbClr val="EBF2FB"/>
+            <a:srgbClr val="E6E6DC"/>
           </a:solidFill>
           <a:ln w="19050">
             <a:solidFill>
-              <a:srgbClr val="2E86C1"/>
+              <a:srgbClr val="3D6A8A"/>
             </a:solidFill>
           </a:ln>
         </p:spPr>
@@ -8339,7 +9286,7 @@
             <a:avLst/>
           </a:prstGeom>
           <a:solidFill>
-            <a:srgbClr val="2E86C1"/>
+            <a:srgbClr val="3D6A8A"/>
           </a:solidFill>
           <a:ln>
             <a:noFill/>
@@ -8393,9 +9340,9 @@
             <a:r>
               <a:rPr sz="1250" b="1" i="0">
                 <a:solidFill>
-                  <a:srgbClr val="2E86C1"/>
-                </a:solidFill>
-                <a:latin typeface="Calibri"/>
+                  <a:srgbClr val="3D6A8A"/>
+                </a:solidFill>
+                <a:latin typeface="Segoe UI"/>
               </a:rPr>
               <a:t>LECTURE MÉTIER</a:t>
             </a:r>
@@ -8428,9 +9375,9 @@
             <a:r>
               <a:rPr sz="1600" b="0" i="0">
                 <a:solidFill>
-                  <a:srgbClr val="2C3E50"/>
-                </a:solidFill>
-                <a:latin typeface="Calibri"/>
+                  <a:srgbClr val="1E2B26"/>
+                </a:solidFill>
+                <a:latin typeface="Segoe UI"/>
               </a:rPr>
               <a:t>Performance sociale en construction : parité et sécurité au travail appellent des objectifs chiffrés pour fidéliser les talents.</a:t>
             </a:r>
@@ -8463,9 +9410,9 @@
             <a:r>
               <a:rPr sz="800" b="0" i="0">
                 <a:solidFill>
-                  <a:srgbClr val="6B7C93"/>
-                </a:solidFill>
-                <a:latin typeface="Calibri"/>
+                  <a:srgbClr val="5F6B64"/>
+                </a:solidFill>
+                <a:latin typeface="Segoe UI"/>
               </a:rPr>
               <a:t>Acme Industries   |   13 / 23</a:t>
             </a:r>
@@ -8505,7 +9452,7 @@
             <a:avLst/>
           </a:prstGeom>
           <a:solidFill>
-            <a:srgbClr val="F4F7FD"/>
+            <a:srgbClr val="F3F0E8"/>
           </a:solidFill>
           <a:ln>
             <a:noFill/>
@@ -8583,9 +9530,9 @@
             <a:r>
               <a:rPr sz="1300" b="1" i="0">
                 <a:solidFill>
-                  <a:srgbClr val="F39C12"/>
-                </a:solidFill>
-                <a:latin typeface="Calibri"/>
+                  <a:srgbClr val="2E5A4B"/>
+                </a:solidFill>
+                <a:latin typeface="Segoe UI"/>
               </a:rPr>
               <a:t>PILIER GOUVERNANCE</a:t>
             </a:r>
@@ -8620,7 +9567,7 @@
                 <a:solidFill>
                   <a:srgbClr val="FFFFFF"/>
                 </a:solidFill>
-                <a:latin typeface="Calibri"/>
+                <a:latin typeface="Georgia"/>
               </a:rPr>
               <a:t>L'assurance ESG indépendante, priorité de la gouvernance</a:t>
             </a:r>
@@ -8679,7 +9626,7 @@
                 <a:solidFill>
                   <a:srgbClr val="FFFFFF"/>
                 </a:solidFill>
-                <a:latin typeface="Calibri"/>
+                <a:latin typeface="Georgia"/>
               </a:rPr>
               <a:t>75</a:t>
             </a:r>
@@ -8714,7 +9661,7 @@
                 <a:solidFill>
                   <a:srgbClr val="FFFFFF"/>
                 </a:solidFill>
-                <a:latin typeface="Calibri"/>
+                <a:latin typeface="Segoe UI"/>
               </a:rPr>
               <a:t>SCORE / 100</a:t>
             </a:r>
@@ -8747,9 +9694,9 @@
             <a:r>
               <a:rPr sz="1500" b="1" i="0">
                 <a:solidFill>
-                  <a:srgbClr val="6B7C93"/>
-                </a:solidFill>
-                <a:latin typeface="Calibri"/>
+                  <a:srgbClr val="5F6B64"/>
+                </a:solidFill>
+                <a:latin typeface="Segoe UI"/>
               </a:rPr>
               <a:t>INDICATEURS CLÉS</a:t>
             </a:r>
@@ -8771,7 +9718,7 @@
             <a:avLst/>
           </a:prstGeom>
           <a:solidFill>
-            <a:srgbClr val="8E44AD"/>
+            <a:srgbClr val="6B5B86"/>
           </a:solidFill>
           <a:ln>
             <a:noFill/>
@@ -8814,7 +9761,7 @@
             <a:avLst/>
           </a:prstGeom>
           <a:solidFill>
-            <a:srgbClr val="EBF2FB"/>
+            <a:srgbClr val="E6E6DC"/>
           </a:solidFill>
           <a:ln w="9525">
             <a:solidFill>
@@ -8859,7 +9806,7 @@
             <a:avLst/>
           </a:prstGeom>
           <a:solidFill>
-            <a:srgbClr val="8E44AD"/>
+            <a:srgbClr val="6B5B86"/>
           </a:solidFill>
           <a:ln>
             <a:noFill/>
@@ -8902,7 +9849,7 @@
             <a:avLst/>
           </a:prstGeom>
           <a:solidFill>
-            <a:srgbClr val="8E44AD"/>
+            <a:srgbClr val="6B5B86"/>
           </a:solidFill>
           <a:ln>
             <a:noFill/>
@@ -8980,9 +9927,9 @@
             <a:r>
               <a:rPr sz="2300" b="1" i="0">
                 <a:solidFill>
-                  <a:srgbClr val="8E44AD"/>
-                </a:solidFill>
-                <a:latin typeface="Calibri"/>
+                  <a:srgbClr val="6B5B86"/>
+                </a:solidFill>
+                <a:latin typeface="Georgia"/>
               </a:rPr>
               <a:t>9</a:t>
             </a:r>
@@ -9015,9 +9962,9 @@
             <a:r>
               <a:rPr sz="1050" b="0" i="0">
                 <a:solidFill>
-                  <a:srgbClr val="6B7C93"/>
-                </a:solidFill>
-                <a:latin typeface="Calibri"/>
+                  <a:srgbClr val="5F6B64"/>
+                </a:solidFill>
+                <a:latin typeface="Segoe UI"/>
               </a:rPr>
               <a:t>Membres du Conseil</a:t>
             </a:r>
@@ -9039,7 +9986,7 @@
             <a:avLst/>
           </a:prstGeom>
           <a:solidFill>
-            <a:srgbClr val="EBF2FB"/>
+            <a:srgbClr val="E6E6DC"/>
           </a:solidFill>
           <a:ln w="9525">
             <a:solidFill>
@@ -9084,7 +10031,7 @@
             <a:avLst/>
           </a:prstGeom>
           <a:solidFill>
-            <a:srgbClr val="8E44AD"/>
+            <a:srgbClr val="6B5B86"/>
           </a:solidFill>
           <a:ln>
             <a:noFill/>
@@ -9127,7 +10074,7 @@
             <a:avLst/>
           </a:prstGeom>
           <a:solidFill>
-            <a:srgbClr val="8E44AD"/>
+            <a:srgbClr val="6B5B86"/>
           </a:solidFill>
           <a:ln>
             <a:noFill/>
@@ -9205,11 +10152,11 @@
             <a:r>
               <a:rPr sz="2300" b="1" i="0">
                 <a:solidFill>
-                  <a:srgbClr val="8E44AD"/>
-                </a:solidFill>
-                <a:latin typeface="Calibri"/>
-              </a:rPr>
-              <a:t>44%</a:t>
+                  <a:srgbClr val="6B5B86"/>
+                </a:solidFill>
+                <a:latin typeface="Georgia"/>
+              </a:rPr>
+              <a:t>44 %</a:t>
             </a:r>
           </a:p>
         </p:txBody>
@@ -9240,9 +10187,9 @@
             <a:r>
               <a:rPr sz="1050" b="0" i="0">
                 <a:solidFill>
-                  <a:srgbClr val="6B7C93"/>
-                </a:solidFill>
-                <a:latin typeface="Calibri"/>
+                  <a:srgbClr val="5F6B64"/>
+                </a:solidFill>
+                <a:latin typeface="Segoe UI"/>
               </a:rPr>
               <a:t>Femmes au CA</a:t>
             </a:r>
@@ -9264,7 +10211,7 @@
             <a:avLst/>
           </a:prstGeom>
           <a:solidFill>
-            <a:srgbClr val="EBF2FB"/>
+            <a:srgbClr val="E6E6DC"/>
           </a:solidFill>
           <a:ln w="9525">
             <a:solidFill>
@@ -9309,7 +10256,7 @@
             <a:avLst/>
           </a:prstGeom>
           <a:solidFill>
-            <a:srgbClr val="8E44AD"/>
+            <a:srgbClr val="6B5B86"/>
           </a:solidFill>
           <a:ln>
             <a:noFill/>
@@ -9352,7 +10299,7 @@
             <a:avLst/>
           </a:prstGeom>
           <a:solidFill>
-            <a:srgbClr val="8E44AD"/>
+            <a:srgbClr val="6B5B86"/>
           </a:solidFill>
           <a:ln>
             <a:noFill/>
@@ -9430,11 +10377,11 @@
             <a:r>
               <a:rPr sz="2300" b="1" i="0">
                 <a:solidFill>
-                  <a:srgbClr val="8E44AD"/>
-                </a:solidFill>
-                <a:latin typeface="Calibri"/>
-              </a:rPr>
-              <a:t>45%</a:t>
+                  <a:srgbClr val="6B5B86"/>
+                </a:solidFill>
+                <a:latin typeface="Georgia"/>
+              </a:rPr>
+              <a:t>45 %</a:t>
             </a:r>
           </a:p>
         </p:txBody>
@@ -9465,9 +10412,9 @@
             <a:r>
               <a:rPr sz="1050" b="0" i="0">
                 <a:solidFill>
-                  <a:srgbClr val="6B7C93"/>
-                </a:solidFill>
-                <a:latin typeface="Calibri"/>
+                  <a:srgbClr val="5F6B64"/>
+                </a:solidFill>
+                <a:latin typeface="Segoe UI"/>
               </a:rPr>
               <a:t>Administrateurs indépendants</a:t>
             </a:r>
@@ -9489,7 +10436,7 @@
             <a:avLst/>
           </a:prstGeom>
           <a:solidFill>
-            <a:srgbClr val="EBF2FB"/>
+            <a:srgbClr val="E6E6DC"/>
           </a:solidFill>
           <a:ln w="9525">
             <a:solidFill>
@@ -9534,7 +10481,7 @@
             <a:avLst/>
           </a:prstGeom>
           <a:solidFill>
-            <a:srgbClr val="8E44AD"/>
+            <a:srgbClr val="6B5B86"/>
           </a:solidFill>
           <a:ln>
             <a:noFill/>
@@ -9577,7 +10524,7 @@
             <a:avLst/>
           </a:prstGeom>
           <a:solidFill>
-            <a:srgbClr val="8E44AD"/>
+            <a:srgbClr val="6B5B86"/>
           </a:solidFill>
           <a:ln>
             <a:noFill/>
@@ -9655,9 +10602,9 @@
             <a:r>
               <a:rPr sz="2300" b="1" i="0">
                 <a:solidFill>
-                  <a:srgbClr val="8E44AD"/>
-                </a:solidFill>
-                <a:latin typeface="Calibri"/>
+                  <a:srgbClr val="6B5B86"/>
+                </a:solidFill>
+                <a:latin typeface="Georgia"/>
               </a:rPr>
               <a:t>Non</a:t>
             </a:r>
@@ -9690,9 +10637,9 @@
             <a:r>
               <a:rPr sz="1050" b="0" i="0">
                 <a:solidFill>
-                  <a:srgbClr val="6B7C93"/>
-                </a:solidFill>
-                <a:latin typeface="Calibri"/>
+                  <a:srgbClr val="5F6B64"/>
+                </a:solidFill>
+                <a:latin typeface="Segoe UI"/>
               </a:rPr>
               <a:t>Audit ESG indépendant</a:t>
             </a:r>
@@ -9714,11 +10661,11 @@
             <a:avLst/>
           </a:prstGeom>
           <a:solidFill>
-            <a:srgbClr val="EBF2FB"/>
+            <a:srgbClr val="E6E6DC"/>
           </a:solidFill>
           <a:ln w="19050">
             <a:solidFill>
-              <a:srgbClr val="8E44AD"/>
+              <a:srgbClr val="6B5B86"/>
             </a:solidFill>
           </a:ln>
         </p:spPr>
@@ -9759,7 +10706,7 @@
             <a:avLst/>
           </a:prstGeom>
           <a:solidFill>
-            <a:srgbClr val="8E44AD"/>
+            <a:srgbClr val="6B5B86"/>
           </a:solidFill>
           <a:ln>
             <a:noFill/>
@@ -9813,9 +10760,9 @@
             <a:r>
               <a:rPr sz="1250" b="1" i="0">
                 <a:solidFill>
-                  <a:srgbClr val="8E44AD"/>
-                </a:solidFill>
-                <a:latin typeface="Calibri"/>
+                  <a:srgbClr val="6B5B86"/>
+                </a:solidFill>
+                <a:latin typeface="Segoe UI"/>
               </a:rPr>
               <a:t>LECTURE MÉTIER</a:t>
             </a:r>
@@ -9848,9 +10795,9 @@
             <a:r>
               <a:rPr sz="1600" b="0" i="0">
                 <a:solidFill>
-                  <a:srgbClr val="2C3E50"/>
-                </a:solidFill>
-                <a:latin typeface="Calibri"/>
+                  <a:srgbClr val="1E2B26"/>
+                </a:solidFill>
+                <a:latin typeface="Segoe UI"/>
               </a:rPr>
               <a:t>Gouvernance exemplaire : indépendance, audit et supervision ESG inspirent confiance aux investisseurs.</a:t>
             </a:r>
@@ -9883,9 +10830,9 @@
             <a:r>
               <a:rPr sz="800" b="0" i="0">
                 <a:solidFill>
-                  <a:srgbClr val="6B7C93"/>
-                </a:solidFill>
-                <a:latin typeface="Calibri"/>
+                  <a:srgbClr val="5F6B64"/>
+                </a:solidFill>
+                <a:latin typeface="Segoe UI"/>
               </a:rPr>
               <a:t>Acme Industries   |   14 / 23</a:t>
             </a:r>
@@ -9925,7 +10872,7 @@
             <a:avLst/>
           </a:prstGeom>
           <a:solidFill>
-            <a:srgbClr val="F4F7FD"/>
+            <a:srgbClr val="F3F0E8"/>
           </a:solidFill>
           <a:ln>
             <a:noFill/>
@@ -9961,14 +10908,14 @@
         </p:nvSpPr>
         <p:spPr>
           <a:xfrm>
-            <a:off x="0" y="0"/>
-            <a:ext cx="12188952" cy="1143000"/>
+            <a:off x="457200" y="384048"/>
+            <a:ext cx="201168" cy="201168"/>
           </a:xfrm>
           <a:prstGeom prst="rect">
             <a:avLst/>
           </a:prstGeom>
           <a:solidFill>
-            <a:srgbClr val="1B3A6B"/>
+            <a:srgbClr val="1F3D33"/>
           </a:solidFill>
           <a:ln>
             <a:noFill/>
@@ -9998,20 +10945,55 @@
       </p:sp>
       <p:sp>
         <p:nvSpPr>
-          <p:cNvPr id="4" name="Rectangle 3"/>
+          <p:cNvPr id="4" name="TextBox 3"/>
+          <p:cNvSpPr txBox="1"/>
+          <p:nvPr/>
+        </p:nvSpPr>
+        <p:spPr>
+          <a:xfrm>
+            <a:off x="822960" y="237744"/>
+            <a:ext cx="10789920" cy="685800"/>
+          </a:xfrm>
+          <a:prstGeom prst="rect">
+            <a:avLst/>
+          </a:prstGeom>
+          <a:noFill/>
+        </p:spPr>
+        <p:txBody>
+          <a:bodyPr wrap="square">
+            <a:spAutoFit/>
+          </a:bodyPr>
+          <a:lstStyle/>
+          <a:p>
+            <a:pPr algn="l"/>
+            <a:r>
+              <a:rPr sz="1320" b="1" i="0">
+                <a:solidFill>
+                  <a:srgbClr val="1E2B26"/>
+                </a:solidFill>
+                <a:latin typeface="Georgia"/>
+              </a:rPr>
+              <a:t>Le changement climatique concentre les enjeux ESG prioritaires</a:t>
+            </a:r>
+          </a:p>
+        </p:txBody>
+      </p:sp>
+      <p:sp>
+        <p:nvSpPr>
+          <p:cNvPr id="5" name="Rectangle 4"/>
           <p:cNvSpPr/>
           <p:nvPr/>
         </p:nvSpPr>
         <p:spPr>
           <a:xfrm>
-            <a:off x="0" y="1143000"/>
-            <a:ext cx="64008" cy="5715000"/>
+            <a:off x="457200" y="1024128"/>
+            <a:ext cx="2011680" cy="18288"/>
           </a:xfrm>
           <a:prstGeom prst="rect">
             <a:avLst/>
           </a:prstGeom>
           <a:solidFill>
-            <a:srgbClr val="F39C12"/>
+            <a:srgbClr val="1E2B26"/>
           </a:solidFill>
           <a:ln>
             <a:noFill/>
@@ -10039,79 +11021,9 @@
           </a:p>
         </p:txBody>
       </p:sp>
-      <p:sp>
-        <p:nvSpPr>
-          <p:cNvPr id="5" name="TextBox 4"/>
-          <p:cNvSpPr txBox="1"/>
-          <p:nvPr/>
-        </p:nvSpPr>
-        <p:spPr>
-          <a:xfrm>
-            <a:off x="292608" y="128016"/>
-            <a:ext cx="10972800" cy="292608"/>
-          </a:xfrm>
-          <a:prstGeom prst="rect">
-            <a:avLst/>
-          </a:prstGeom>
-          <a:noFill/>
-        </p:spPr>
-        <p:txBody>
-          <a:bodyPr wrap="square">
-            <a:spAutoFit/>
-          </a:bodyPr>
-          <a:lstStyle/>
-          <a:p>
-            <a:pPr algn="l"/>
-            <a:r>
-              <a:rPr sz="1100" b="1" i="0">
-                <a:solidFill>
-                  <a:srgbClr val="F39C12"/>
-                </a:solidFill>
-                <a:latin typeface="Calibri"/>
-              </a:rPr>
-              <a:t>PRIORISATION DES ENJEUX ESG</a:t>
-            </a:r>
-          </a:p>
-        </p:txBody>
-      </p:sp>
-      <p:sp>
-        <p:nvSpPr>
-          <p:cNvPr id="6" name="TextBox 5"/>
-          <p:cNvSpPr txBox="1"/>
-          <p:nvPr/>
-        </p:nvSpPr>
-        <p:spPr>
-          <a:xfrm>
-            <a:off x="274320" y="384048"/>
-            <a:ext cx="11612880" cy="713232"/>
-          </a:xfrm>
-          <a:prstGeom prst="rect">
-            <a:avLst/>
-          </a:prstGeom>
-          <a:noFill/>
-        </p:spPr>
-        <p:txBody>
-          <a:bodyPr wrap="square">
-            <a:spAutoFit/>
-          </a:bodyPr>
-          <a:lstStyle/>
-          <a:p>
-            <a:pPr algn="l"/>
-            <a:r>
-              <a:rPr sz="1716" b="1" i="0">
-                <a:solidFill>
-                  <a:srgbClr val="FFFFFF"/>
-                </a:solidFill>
-                <a:latin typeface="Calibri"/>
-              </a:rPr>
-              <a:t>Le changement climatique concentre les enjeux ESG prioritaires</a:t>
-            </a:r>
-          </a:p>
-        </p:txBody>
-      </p:sp>
       <p:pic>
         <p:nvPicPr>
-          <p:cNvPr id="7" name="Picture 6" descr="image.png"/>
+          <p:cNvPr id="6" name="Picture 5" descr="image.png"/>
           <p:cNvPicPr>
             <a:picLocks noChangeAspect="1"/>
           </p:cNvPicPr>
@@ -10126,7 +11038,7 @@
         <p:spPr>
           <a:xfrm>
             <a:off x="320040" y="1600200"/>
-            <a:ext cx="7394055" cy="4480560"/>
+            <a:ext cx="7299789" cy="4480560"/>
           </a:xfrm>
           <a:prstGeom prst="rect">
             <a:avLst/>
@@ -10135,7 +11047,7 @@
       </p:pic>
       <p:sp>
         <p:nvSpPr>
-          <p:cNvPr id="8" name="Rounded Rectangle 7"/>
+          <p:cNvPr id="7" name="Rounded Rectangle 6"/>
           <p:cNvSpPr/>
           <p:nvPr/>
         </p:nvSpPr>
@@ -10148,11 +11060,11 @@
             <a:avLst/>
           </a:prstGeom>
           <a:solidFill>
-            <a:srgbClr val="EBF2FB"/>
+            <a:srgbClr val="E6E6DC"/>
           </a:solidFill>
           <a:ln w="15875">
             <a:solidFill>
-              <a:srgbClr val="F39C12"/>
+              <a:srgbClr val="2E5A4B"/>
             </a:solidFill>
           </a:ln>
         </p:spPr>
@@ -10180,7 +11092,7 @@
       </p:sp>
       <p:sp>
         <p:nvSpPr>
-          <p:cNvPr id="9" name="Rectangle 8"/>
+          <p:cNvPr id="8" name="Rectangle 7"/>
           <p:cNvSpPr/>
           <p:nvPr/>
         </p:nvSpPr>
@@ -10193,7 +11105,7 @@
             <a:avLst/>
           </a:prstGeom>
           <a:solidFill>
-            <a:srgbClr val="F39C12"/>
+            <a:srgbClr val="2E5A4B"/>
           </a:solidFill>
           <a:ln>
             <a:noFill/>
@@ -10223,7 +11135,7 @@
       </p:sp>
       <p:sp>
         <p:nvSpPr>
-          <p:cNvPr id="10" name="TextBox 9"/>
+          <p:cNvPr id="9" name="TextBox 8"/>
           <p:cNvSpPr txBox="1"/>
           <p:nvPr/>
         </p:nvSpPr>
@@ -10247,9 +11159,9 @@
             <a:r>
               <a:rPr sz="1200" b="1" i="0">
                 <a:solidFill>
-                  <a:srgbClr val="F39C12"/>
-                </a:solidFill>
-                <a:latin typeface="Calibri"/>
+                  <a:srgbClr val="2E5A4B"/>
+                </a:solidFill>
+                <a:latin typeface="Segoe UI"/>
               </a:rPr>
               <a:t>LECTURE MÉTIER</a:t>
             </a:r>
@@ -10258,7 +11170,7 @@
       </p:sp>
       <p:sp>
         <p:nvSpPr>
-          <p:cNvPr id="11" name="TextBox 10"/>
+          <p:cNvPr id="10" name="TextBox 9"/>
           <p:cNvSpPr txBox="1"/>
           <p:nvPr/>
         </p:nvSpPr>
@@ -10282,9 +11194,9 @@
             <a:r>
               <a:rPr sz="1350" b="0" i="0">
                 <a:solidFill>
-                  <a:srgbClr val="2C3E50"/>
-                </a:solidFill>
-                <a:latin typeface="Calibri"/>
+                  <a:srgbClr val="1E2B26"/>
+                </a:solidFill>
+                <a:latin typeface="Segoe UI"/>
               </a:rPr>
               <a:t>Enjeux positionnés selon leur exposition estimée et leur sensibilité économique, à partir des données déclarées.</a:t>
             </a:r>
@@ -10293,7 +11205,7 @@
       </p:sp>
       <p:sp>
         <p:nvSpPr>
-          <p:cNvPr id="12" name="TextBox 11"/>
+          <p:cNvPr id="11" name="TextBox 10"/>
           <p:cNvSpPr txBox="1"/>
           <p:nvPr/>
         </p:nvSpPr>
@@ -10317,9 +11229,9 @@
             <a:r>
               <a:rPr sz="800" b="0" i="0">
                 <a:solidFill>
-                  <a:srgbClr val="6B7C93"/>
-                </a:solidFill>
-                <a:latin typeface="Calibri"/>
+                  <a:srgbClr val="5F6B64"/>
+                </a:solidFill>
+                <a:latin typeface="Segoe UI"/>
               </a:rPr>
               <a:t>Acme Industries   |   15 / 23</a:t>
             </a:r>
@@ -10359,7 +11271,7 @@
             <a:avLst/>
           </a:prstGeom>
           <a:solidFill>
-            <a:srgbClr val="F4F7FD"/>
+            <a:srgbClr val="F3F0E8"/>
           </a:solidFill>
           <a:ln>
             <a:noFill/>
@@ -10395,14 +11307,14 @@
         </p:nvSpPr>
         <p:spPr>
           <a:xfrm>
-            <a:off x="0" y="0"/>
-            <a:ext cx="12188952" cy="1143000"/>
+            <a:off x="457200" y="384048"/>
+            <a:ext cx="201168" cy="201168"/>
           </a:xfrm>
           <a:prstGeom prst="rect">
             <a:avLst/>
           </a:prstGeom>
           <a:solidFill>
-            <a:srgbClr val="1B3A6B"/>
+            <a:srgbClr val="1F3D33"/>
           </a:solidFill>
           <a:ln>
             <a:noFill/>
@@ -10432,20 +11344,55 @@
       </p:sp>
       <p:sp>
         <p:nvSpPr>
-          <p:cNvPr id="4" name="Rectangle 3"/>
+          <p:cNvPr id="4" name="TextBox 3"/>
+          <p:cNvSpPr txBox="1"/>
+          <p:nvPr/>
+        </p:nvSpPr>
+        <p:spPr>
+          <a:xfrm>
+            <a:off x="822960" y="237744"/>
+            <a:ext cx="10789920" cy="685800"/>
+          </a:xfrm>
+          <a:prstGeom prst="rect">
+            <a:avLst/>
+          </a:prstGeom>
+          <a:noFill/>
+        </p:spPr>
+        <p:txBody>
+          <a:bodyPr wrap="square">
+            <a:spAutoFit/>
+          </a:bodyPr>
+          <a:lstStyle/>
+          <a:p>
+            <a:pPr algn="l"/>
+            <a:r>
+              <a:rPr sz="1320" b="1" i="0">
+                <a:solidFill>
+                  <a:srgbClr val="1E2B26"/>
+                </a:solidFill>
+                <a:latin typeface="Georgia"/>
+              </a:rPr>
+              <a:t>52 % des investissements (CapEx) déjà alignés à la Taxonomie UE</a:t>
+            </a:r>
+          </a:p>
+        </p:txBody>
+      </p:sp>
+      <p:sp>
+        <p:nvSpPr>
+          <p:cNvPr id="5" name="Rectangle 4"/>
           <p:cNvSpPr/>
           <p:nvPr/>
         </p:nvSpPr>
         <p:spPr>
           <a:xfrm>
-            <a:off x="0" y="1143000"/>
-            <a:ext cx="64008" cy="5715000"/>
+            <a:off x="457200" y="1024128"/>
+            <a:ext cx="2011680" cy="18288"/>
           </a:xfrm>
           <a:prstGeom prst="rect">
             <a:avLst/>
           </a:prstGeom>
           <a:solidFill>
-            <a:srgbClr val="F39C12"/>
+            <a:srgbClr val="1E2B26"/>
           </a:solidFill>
           <a:ln>
             <a:noFill/>
@@ -10475,77 +11422,7 @@
       </p:sp>
       <p:sp>
         <p:nvSpPr>
-          <p:cNvPr id="5" name="TextBox 4"/>
-          <p:cNvSpPr txBox="1"/>
-          <p:nvPr/>
-        </p:nvSpPr>
-        <p:spPr>
-          <a:xfrm>
-            <a:off x="292608" y="128016"/>
-            <a:ext cx="10972800" cy="292608"/>
-          </a:xfrm>
-          <a:prstGeom prst="rect">
-            <a:avLst/>
-          </a:prstGeom>
-          <a:noFill/>
-        </p:spPr>
-        <p:txBody>
-          <a:bodyPr wrap="square">
-            <a:spAutoFit/>
-          </a:bodyPr>
-          <a:lstStyle/>
-          <a:p>
-            <a:pPr algn="l"/>
-            <a:r>
-              <a:rPr sz="1100" b="1" i="0">
-                <a:solidFill>
-                  <a:srgbClr val="F39C12"/>
-                </a:solidFill>
-                <a:latin typeface="Calibri"/>
-              </a:rPr>
-              <a:t>ALIGNEMENT TAXONOMIE EUROPÉENNE</a:t>
-            </a:r>
-          </a:p>
-        </p:txBody>
-      </p:sp>
-      <p:sp>
-        <p:nvSpPr>
           <p:cNvPr id="6" name="TextBox 5"/>
-          <p:cNvSpPr txBox="1"/>
-          <p:nvPr/>
-        </p:nvSpPr>
-        <p:spPr>
-          <a:xfrm>
-            <a:off x="274320" y="384048"/>
-            <a:ext cx="11612880" cy="713232"/>
-          </a:xfrm>
-          <a:prstGeom prst="rect">
-            <a:avLst/>
-          </a:prstGeom>
-          <a:noFill/>
-        </p:spPr>
-        <p:txBody>
-          <a:bodyPr wrap="square">
-            <a:spAutoFit/>
-          </a:bodyPr>
-          <a:lstStyle/>
-          <a:p>
-            <a:pPr algn="l"/>
-            <a:r>
-              <a:rPr sz="1716" b="1" i="0">
-                <a:solidFill>
-                  <a:srgbClr val="FFFFFF"/>
-                </a:solidFill>
-                <a:latin typeface="Calibri"/>
-              </a:rPr>
-              <a:t>52 % des investissements (CapEx) déjà alignés à la Taxonomie UE</a:t>
-            </a:r>
-          </a:p>
-        </p:txBody>
-      </p:sp>
-      <p:sp>
-        <p:nvSpPr>
-          <p:cNvPr id="7" name="TextBox 6"/>
           <p:cNvSpPr txBox="1"/>
           <p:nvPr/>
         </p:nvSpPr>
@@ -10569,18 +11446,18 @@
             <a:r>
               <a:rPr sz="9600" b="1" i="0">
                 <a:solidFill>
-                  <a:srgbClr val="27AE60"/>
-                </a:solidFill>
-                <a:latin typeface="Calibri"/>
-              </a:rPr>
-              <a:t>52%</a:t>
-            </a:r>
-          </a:p>
-        </p:txBody>
-      </p:sp>
-      <p:sp>
-        <p:nvSpPr>
-          <p:cNvPr id="8" name="TextBox 7"/>
+                  <a:srgbClr val="2F6B4F"/>
+                </a:solidFill>
+                <a:latin typeface="Georgia"/>
+              </a:rPr>
+              <a:t>52 %</a:t>
+            </a:r>
+          </a:p>
+        </p:txBody>
+      </p:sp>
+      <p:sp>
+        <p:nvSpPr>
+          <p:cNvPr id="7" name="TextBox 6"/>
           <p:cNvSpPr txBox="1"/>
           <p:nvPr/>
         </p:nvSpPr>
@@ -10604,9 +11481,9 @@
             <a:r>
               <a:rPr sz="1500" b="1" i="0">
                 <a:solidFill>
-                  <a:srgbClr val="2C3E50"/>
-                </a:solidFill>
-                <a:latin typeface="Calibri"/>
+                  <a:srgbClr val="1E2B26"/>
+                </a:solidFill>
+                <a:latin typeface="Segoe UI"/>
               </a:rPr>
               <a:t>Part maximale d'activités alignées à la Taxonomie UE</a:t>
             </a:r>
@@ -10615,7 +11492,7 @@
       </p:sp>
       <p:sp>
         <p:nvSpPr>
-          <p:cNvPr id="9" name="Rounded Rectangle 8"/>
+          <p:cNvPr id="8" name="Rounded Rectangle 7"/>
           <p:cNvSpPr/>
           <p:nvPr/>
         </p:nvSpPr>
@@ -10628,11 +11505,11 @@
             <a:avLst/>
           </a:prstGeom>
           <a:solidFill>
-            <a:srgbClr val="EBF2FB"/>
+            <a:srgbClr val="E6E6DC"/>
           </a:solidFill>
           <a:ln w="15875">
             <a:solidFill>
-              <a:srgbClr val="27AE60"/>
+              <a:srgbClr val="2F6B4F"/>
             </a:solidFill>
           </a:ln>
         </p:spPr>
@@ -10660,7 +11537,7 @@
       </p:sp>
       <p:sp>
         <p:nvSpPr>
-          <p:cNvPr id="10" name="Rectangle 9"/>
+          <p:cNvPr id="9" name="Rectangle 8"/>
           <p:cNvSpPr/>
           <p:nvPr/>
         </p:nvSpPr>
@@ -10673,7 +11550,7 @@
             <a:avLst/>
           </a:prstGeom>
           <a:solidFill>
-            <a:srgbClr val="27AE60"/>
+            <a:srgbClr val="2F6B4F"/>
           </a:solidFill>
           <a:ln>
             <a:noFill/>
@@ -10703,7 +11580,7 @@
       </p:sp>
       <p:sp>
         <p:nvSpPr>
-          <p:cNvPr id="11" name="TextBox 10"/>
+          <p:cNvPr id="10" name="TextBox 9"/>
           <p:cNvSpPr txBox="1"/>
           <p:nvPr/>
         </p:nvSpPr>
@@ -10727,9 +11604,9 @@
             <a:r>
               <a:rPr sz="1150" b="1" i="0">
                 <a:solidFill>
-                  <a:srgbClr val="27AE60"/>
-                </a:solidFill>
-                <a:latin typeface="Calibri"/>
+                  <a:srgbClr val="2F6B4F"/>
+                </a:solidFill>
+                <a:latin typeface="Segoe UI"/>
               </a:rPr>
               <a:t>LECTURE MÉTIER</a:t>
             </a:r>
@@ -10738,7 +11615,7 @@
       </p:sp>
       <p:sp>
         <p:nvSpPr>
-          <p:cNvPr id="12" name="TextBox 11"/>
+          <p:cNvPr id="11" name="TextBox 10"/>
           <p:cNvSpPr txBox="1"/>
           <p:nvPr/>
         </p:nvSpPr>
@@ -10762,9 +11639,9 @@
             <a:r>
               <a:rPr sz="1300" b="0" i="0">
                 <a:solidFill>
-                  <a:srgbClr val="2C3E50"/>
-                </a:solidFill>
-                <a:latin typeface="Calibri"/>
+                  <a:srgbClr val="1E2B26"/>
+                </a:solidFill>
+                <a:latin typeface="Segoe UI"/>
               </a:rPr>
               <a:t>Parts d'activités déclarées comme alignées à la Taxonomie UE par l'entreprise. Le respect du principe DNSH et des garanties minimales sociales (diligence raisonnable au sens des Principes directeurs de l'OCDE et des Nations unies) n'est pas évalué dans ce rapport.</a:t>
             </a:r>
@@ -10773,7 +11650,7 @@
       </p:sp>
       <p:pic>
         <p:nvPicPr>
-          <p:cNvPr id="13" name="Picture 12" descr="image.png"/>
+          <p:cNvPr id="12" name="Picture 11" descr="image.png"/>
           <p:cNvPicPr>
             <a:picLocks noChangeAspect="1"/>
           </p:cNvPicPr>
@@ -10788,7 +11665,7 @@
         <p:spPr>
           <a:xfrm>
             <a:off x="5760720" y="2286000"/>
-            <a:ext cx="6126480" cy="2728414"/>
+            <a:ext cx="6126480" cy="2782209"/>
           </a:xfrm>
           <a:prstGeom prst="rect">
             <a:avLst/>
@@ -10797,7 +11674,7 @@
       </p:pic>
       <p:sp>
         <p:nvSpPr>
-          <p:cNvPr id="14" name="TextBox 13"/>
+          <p:cNvPr id="13" name="TextBox 12"/>
           <p:cNvSpPr txBox="1"/>
           <p:nvPr/>
         </p:nvSpPr>
@@ -10821,9 +11698,9 @@
             <a:r>
               <a:rPr sz="800" b="0" i="0">
                 <a:solidFill>
-                  <a:srgbClr val="6B7C93"/>
-                </a:solidFill>
-                <a:latin typeface="Calibri"/>
+                  <a:srgbClr val="5F6B64"/>
+                </a:solidFill>
+                <a:latin typeface="Segoe UI"/>
               </a:rPr>
               <a:t>Acme Industries   |   16 / 23</a:t>
             </a:r>
@@ -10863,7 +11740,7 @@
             <a:avLst/>
           </a:prstGeom>
           <a:solidFill>
-            <a:srgbClr val="F4F7FD"/>
+            <a:srgbClr val="F3F0E8"/>
           </a:solidFill>
           <a:ln>
             <a:noFill/>
@@ -10899,14 +11776,14 @@
         </p:nvSpPr>
         <p:spPr>
           <a:xfrm>
-            <a:off x="0" y="0"/>
-            <a:ext cx="12188952" cy="1143000"/>
+            <a:off x="457200" y="384048"/>
+            <a:ext cx="201168" cy="201168"/>
           </a:xfrm>
           <a:prstGeom prst="rect">
             <a:avLst/>
           </a:prstGeom>
           <a:solidFill>
-            <a:srgbClr val="1B3A6B"/>
+            <a:srgbClr val="1F3D33"/>
           </a:solidFill>
           <a:ln>
             <a:noFill/>
@@ -10936,20 +11813,55 @@
       </p:sp>
       <p:sp>
         <p:nvSpPr>
-          <p:cNvPr id="4" name="Rectangle 3"/>
+          <p:cNvPr id="4" name="TextBox 3"/>
+          <p:cNvSpPr txBox="1"/>
+          <p:nvPr/>
+        </p:nvSpPr>
+        <p:spPr>
+          <a:xfrm>
+            <a:off x="822960" y="237744"/>
+            <a:ext cx="10789920" cy="685800"/>
+          </a:xfrm>
+          <a:prstGeom prst="rect">
+            <a:avLst/>
+          </a:prstGeom>
+          <a:noFill/>
+        </p:spPr>
+        <p:txBody>
+          <a:bodyPr wrap="square">
+            <a:spAutoFit/>
+          </a:bodyPr>
+          <a:lstStyle/>
+          <a:p>
+            <a:pPr algn="l"/>
+            <a:r>
+              <a:rPr sz="1560" b="1" i="0">
+                <a:solidFill>
+                  <a:srgbClr val="1E2B26"/>
+                </a:solidFill>
+                <a:latin typeface="Georgia"/>
+              </a:rPr>
+              <a:t>5 forces établies, 5 leviers de progression</a:t>
+            </a:r>
+          </a:p>
+        </p:txBody>
+      </p:sp>
+      <p:sp>
+        <p:nvSpPr>
+          <p:cNvPr id="5" name="Rectangle 4"/>
           <p:cNvSpPr/>
           <p:nvPr/>
         </p:nvSpPr>
         <p:spPr>
           <a:xfrm>
-            <a:off x="0" y="1143000"/>
-            <a:ext cx="64008" cy="5715000"/>
+            <a:off x="457200" y="1024128"/>
+            <a:ext cx="2011680" cy="18288"/>
           </a:xfrm>
           <a:prstGeom prst="rect">
             <a:avLst/>
           </a:prstGeom>
           <a:solidFill>
-            <a:srgbClr val="F39C12"/>
+            <a:srgbClr val="1E2B26"/>
           </a:solidFill>
           <a:ln>
             <a:noFill/>
@@ -10979,77 +11891,7 @@
       </p:sp>
       <p:sp>
         <p:nvSpPr>
-          <p:cNvPr id="5" name="TextBox 4"/>
-          <p:cNvSpPr txBox="1"/>
-          <p:nvPr/>
-        </p:nvSpPr>
-        <p:spPr>
-          <a:xfrm>
-            <a:off x="292608" y="128016"/>
-            <a:ext cx="10972800" cy="292608"/>
-          </a:xfrm>
-          <a:prstGeom prst="rect">
-            <a:avLst/>
-          </a:prstGeom>
-          <a:noFill/>
-        </p:spPr>
-        <p:txBody>
-          <a:bodyPr wrap="square">
-            <a:spAutoFit/>
-          </a:bodyPr>
-          <a:lstStyle/>
-          <a:p>
-            <a:pPr algn="l"/>
-            <a:r>
-              <a:rPr sz="1100" b="1" i="0">
-                <a:solidFill>
-                  <a:srgbClr val="F39C12"/>
-                </a:solidFill>
-                <a:latin typeface="Calibri"/>
-              </a:rPr>
-              <a:t>ANALYSE STRATÉGIQUE ESG</a:t>
-            </a:r>
-          </a:p>
-        </p:txBody>
-      </p:sp>
-      <p:sp>
-        <p:nvSpPr>
-          <p:cNvPr id="6" name="TextBox 5"/>
-          <p:cNvSpPr txBox="1"/>
-          <p:nvPr/>
-        </p:nvSpPr>
-        <p:spPr>
-          <a:xfrm>
-            <a:off x="274320" y="384048"/>
-            <a:ext cx="11612880" cy="713232"/>
-          </a:xfrm>
-          <a:prstGeom prst="rect">
-            <a:avLst/>
-          </a:prstGeom>
-          <a:noFill/>
-        </p:spPr>
-        <p:txBody>
-          <a:bodyPr wrap="square">
-            <a:spAutoFit/>
-          </a:bodyPr>
-          <a:lstStyle/>
-          <a:p>
-            <a:pPr algn="l"/>
-            <a:r>
-              <a:rPr sz="2028" b="1" i="0">
-                <a:solidFill>
-                  <a:srgbClr val="FFFFFF"/>
-                </a:solidFill>
-                <a:latin typeface="Calibri"/>
-              </a:rPr>
-              <a:t>5 forces établies, 5 leviers de progression</a:t>
-            </a:r>
-          </a:p>
-        </p:txBody>
-      </p:sp>
-      <p:sp>
-        <p:nvSpPr>
-          <p:cNvPr id="7" name="Rectangle 6"/>
+          <p:cNvPr id="6" name="Rectangle 5"/>
           <p:cNvSpPr/>
           <p:nvPr/>
         </p:nvSpPr>
@@ -11062,11 +11904,11 @@
             <a:avLst/>
           </a:prstGeom>
           <a:solidFill>
-            <a:srgbClr val="EBF2FB"/>
+            <a:srgbClr val="E6E6DC"/>
           </a:solidFill>
           <a:ln w="12700">
             <a:solidFill>
-              <a:srgbClr val="27AE60"/>
+              <a:srgbClr val="2F6B4F"/>
             </a:solidFill>
           </a:ln>
         </p:spPr>
@@ -11094,7 +11936,7 @@
       </p:sp>
       <p:sp>
         <p:nvSpPr>
-          <p:cNvPr id="8" name="TextBox 7"/>
+          <p:cNvPr id="7" name="TextBox 6"/>
           <p:cNvSpPr txBox="1"/>
           <p:nvPr/>
         </p:nvSpPr>
@@ -11118,9 +11960,9 @@
             <a:r>
               <a:rPr sz="4600" b="1" i="0">
                 <a:solidFill>
-                  <a:srgbClr val="27AE60"/>
-                </a:solidFill>
-                <a:latin typeface="Calibri"/>
+                  <a:srgbClr val="2F6B4F"/>
+                </a:solidFill>
+                <a:latin typeface="Georgia"/>
               </a:rPr>
               <a:t>5</a:t>
             </a:r>
@@ -11129,7 +11971,7 @@
       </p:sp>
       <p:sp>
         <p:nvSpPr>
-          <p:cNvPr id="9" name="TextBox 8"/>
+          <p:cNvPr id="8" name="TextBox 7"/>
           <p:cNvSpPr txBox="1"/>
           <p:nvPr/>
         </p:nvSpPr>
@@ -11153,9 +11995,9 @@
             <a:r>
               <a:rPr sz="1500" b="1" i="0">
                 <a:solidFill>
-                  <a:srgbClr val="2C3E50"/>
-                </a:solidFill>
-                <a:latin typeface="Calibri"/>
+                  <a:srgbClr val="1E2B26"/>
+                </a:solidFill>
+                <a:latin typeface="Segoe UI"/>
               </a:rPr>
               <a:t>POINTS FORTS</a:t>
             </a:r>
@@ -11164,7 +12006,7 @@
       </p:sp>
       <p:sp>
         <p:nvSpPr>
-          <p:cNvPr id="10" name="Rectangle 9"/>
+          <p:cNvPr id="9" name="Rectangle 8"/>
           <p:cNvSpPr/>
           <p:nvPr/>
         </p:nvSpPr>
@@ -11177,7 +12019,7 @@
             <a:avLst/>
           </a:prstGeom>
           <a:solidFill>
-            <a:srgbClr val="27AE60"/>
+            <a:srgbClr val="2F6B4F"/>
           </a:solidFill>
           <a:ln>
             <a:noFill/>
@@ -11207,7 +12049,7 @@
       </p:sp>
       <p:sp>
         <p:nvSpPr>
-          <p:cNvPr id="11" name="Oval 10"/>
+          <p:cNvPr id="10" name="Oval 9"/>
           <p:cNvSpPr/>
           <p:nvPr/>
         </p:nvSpPr>
@@ -11220,7 +12062,7 @@
             <a:avLst/>
           </a:prstGeom>
           <a:solidFill>
-            <a:srgbClr val="27AE60"/>
+            <a:srgbClr val="2F6B4F"/>
           </a:solidFill>
           <a:ln>
             <a:noFill/>
@@ -11250,7 +12092,7 @@
       </p:sp>
       <p:sp>
         <p:nvSpPr>
-          <p:cNvPr id="12" name="TextBox 11"/>
+          <p:cNvPr id="11" name="TextBox 10"/>
           <p:cNvSpPr txBox="1"/>
           <p:nvPr/>
         </p:nvSpPr>
@@ -11274,9 +12116,9 @@
             <a:r>
               <a:rPr sz="1250" b="0" i="0">
                 <a:solidFill>
-                  <a:srgbClr val="2C3E50"/>
-                </a:solidFill>
-                <a:latin typeface="Calibri"/>
+                  <a:srgbClr val="1E2B26"/>
+                </a:solidFill>
+                <a:latin typeface="Segoe UI"/>
               </a:rPr>
               <a:t>Excellente performance environnementale globale</a:t>
             </a:r>
@@ -11285,7 +12127,7 @@
       </p:sp>
       <p:sp>
         <p:nvSpPr>
-          <p:cNvPr id="13" name="Oval 12"/>
+          <p:cNvPr id="12" name="Oval 11"/>
           <p:cNvSpPr/>
           <p:nvPr/>
         </p:nvSpPr>
@@ -11298,7 +12140,7 @@
             <a:avLst/>
           </a:prstGeom>
           <a:solidFill>
-            <a:srgbClr val="27AE60"/>
+            <a:srgbClr val="2F6B4F"/>
           </a:solidFill>
           <a:ln>
             <a:noFill/>
@@ -11328,7 +12170,7 @@
       </p:sp>
       <p:sp>
         <p:nvSpPr>
-          <p:cNvPr id="14" name="TextBox 13"/>
+          <p:cNvPr id="13" name="TextBox 12"/>
           <p:cNvSpPr txBox="1"/>
           <p:nvPr/>
         </p:nvSpPr>
@@ -11352,9 +12194,9 @@
             <a:r>
               <a:rPr sz="1250" b="0" i="0">
                 <a:solidFill>
-                  <a:srgbClr val="2C3E50"/>
-                </a:solidFill>
-                <a:latin typeface="Calibri"/>
+                  <a:srgbClr val="1E2B26"/>
+                </a:solidFill>
+                <a:latin typeface="Segoe UI"/>
               </a:rPr>
               <a:t>Comité de durabilité opérationnel au niveau du CA</a:t>
             </a:r>
@@ -11363,7 +12205,7 @@
       </p:sp>
       <p:sp>
         <p:nvSpPr>
-          <p:cNvPr id="15" name="Oval 14"/>
+          <p:cNvPr id="14" name="Oval 13"/>
           <p:cNvSpPr/>
           <p:nvPr/>
         </p:nvSpPr>
@@ -11376,7 +12218,7 @@
             <a:avLst/>
           </a:prstGeom>
           <a:solidFill>
-            <a:srgbClr val="27AE60"/>
+            <a:srgbClr val="2F6B4F"/>
           </a:solidFill>
           <a:ln>
             <a:noFill/>
@@ -11406,7 +12248,7 @@
       </p:sp>
       <p:sp>
         <p:nvSpPr>
-          <p:cNvPr id="16" name="TextBox 15"/>
+          <p:cNvPr id="15" name="TextBox 14"/>
           <p:cNvSpPr txBox="1"/>
           <p:nvPr/>
         </p:nvSpPr>
@@ -11430,18 +12272,18 @@
             <a:r>
               <a:rPr sz="1250" b="0" i="0">
                 <a:solidFill>
-                  <a:srgbClr val="2C3E50"/>
-                </a:solidFill>
-                <a:latin typeface="Calibri"/>
-              </a:rPr>
-              <a:t>Parité exemplaire au Conseil d'Administration (44%)</a:t>
-            </a:r>
-          </a:p>
-        </p:txBody>
-      </p:sp>
-      <p:sp>
-        <p:nvSpPr>
-          <p:cNvPr id="17" name="Oval 16"/>
+                  <a:srgbClr val="1E2B26"/>
+                </a:solidFill>
+                <a:latin typeface="Segoe UI"/>
+              </a:rPr>
+              <a:t>Parité exemplaire au Conseil d'Administration (44 %)</a:t>
+            </a:r>
+          </a:p>
+        </p:txBody>
+      </p:sp>
+      <p:sp>
+        <p:nvSpPr>
+          <p:cNvPr id="16" name="Oval 15"/>
           <p:cNvSpPr/>
           <p:nvPr/>
         </p:nvSpPr>
@@ -11454,7 +12296,7 @@
             <a:avLst/>
           </a:prstGeom>
           <a:solidFill>
-            <a:srgbClr val="27AE60"/>
+            <a:srgbClr val="2F6B4F"/>
           </a:solidFill>
           <a:ln>
             <a:noFill/>
@@ -11484,7 +12326,7 @@
       </p:sp>
       <p:sp>
         <p:nvSpPr>
-          <p:cNvPr id="18" name="TextBox 17"/>
+          <p:cNvPr id="17" name="TextBox 16"/>
           <p:cNvSpPr txBox="1"/>
           <p:nvPr/>
         </p:nvSpPr>
@@ -11508,9 +12350,9 @@
             <a:r>
               <a:rPr sz="1250" b="0" i="0">
                 <a:solidFill>
-                  <a:srgbClr val="2C3E50"/>
-                </a:solidFill>
-                <a:latin typeface="Calibri"/>
+                  <a:srgbClr val="1E2B26"/>
+                </a:solidFill>
+                <a:latin typeface="Segoe UI"/>
               </a:rPr>
               <a:t>Gouvernance de haute qualité et transparente</a:t>
             </a:r>
@@ -11519,7 +12361,7 @@
       </p:sp>
       <p:sp>
         <p:nvSpPr>
-          <p:cNvPr id="19" name="Oval 18"/>
+          <p:cNvPr id="18" name="Oval 17"/>
           <p:cNvSpPr/>
           <p:nvPr/>
         </p:nvSpPr>
@@ -11532,7 +12374,7 @@
             <a:avLst/>
           </a:prstGeom>
           <a:solidFill>
-            <a:srgbClr val="27AE60"/>
+            <a:srgbClr val="2F6B4F"/>
           </a:solidFill>
           <a:ln>
             <a:noFill/>
@@ -11562,7 +12404,7 @@
       </p:sp>
       <p:sp>
         <p:nvSpPr>
-          <p:cNvPr id="20" name="TextBox 19"/>
+          <p:cNvPr id="19" name="TextBox 18"/>
           <p:cNvSpPr txBox="1"/>
           <p:nvPr/>
         </p:nvSpPr>
@@ -11586,9 +12428,9 @@
             <a:r>
               <a:rPr sz="1250" b="0" i="0">
                 <a:solidFill>
-                  <a:srgbClr val="2C3E50"/>
-                </a:solidFill>
-                <a:latin typeface="Calibri"/>
+                  <a:srgbClr val="1E2B26"/>
+                </a:solidFill>
+                <a:latin typeface="Segoe UI"/>
               </a:rPr>
               <a:t>Reporting complet des émissions Scope 1, 2 et 3</a:t>
             </a:r>
@@ -11597,7 +12439,7 @@
       </p:sp>
       <p:sp>
         <p:nvSpPr>
-          <p:cNvPr id="21" name="Rectangle 20"/>
+          <p:cNvPr id="20" name="Rectangle 19"/>
           <p:cNvSpPr/>
           <p:nvPr/>
         </p:nvSpPr>
@@ -11610,7 +12452,7 @@
             <a:avLst/>
           </a:prstGeom>
           <a:solidFill>
-            <a:srgbClr val="EBF2FB"/>
+            <a:srgbClr val="E6E6DC"/>
           </a:solidFill>
           <a:ln w="12700">
             <a:solidFill>
@@ -11642,7 +12484,7 @@
       </p:sp>
       <p:sp>
         <p:nvSpPr>
-          <p:cNvPr id="22" name="TextBox 21"/>
+          <p:cNvPr id="21" name="TextBox 20"/>
           <p:cNvSpPr txBox="1"/>
           <p:nvPr/>
         </p:nvSpPr>
@@ -11668,7 +12510,7 @@
                 <a:solidFill>
                   <a:srgbClr val="E74C3C"/>
                 </a:solidFill>
-                <a:latin typeface="Calibri"/>
+                <a:latin typeface="Georgia"/>
               </a:rPr>
               <a:t>5</a:t>
             </a:r>
@@ -11677,7 +12519,7 @@
       </p:sp>
       <p:sp>
         <p:nvSpPr>
-          <p:cNvPr id="23" name="TextBox 22"/>
+          <p:cNvPr id="22" name="TextBox 21"/>
           <p:cNvSpPr txBox="1"/>
           <p:nvPr/>
         </p:nvSpPr>
@@ -11701,9 +12543,9 @@
             <a:r>
               <a:rPr sz="1500" b="1" i="0">
                 <a:solidFill>
-                  <a:srgbClr val="2C3E50"/>
-                </a:solidFill>
-                <a:latin typeface="Calibri"/>
+                  <a:srgbClr val="1E2B26"/>
+                </a:solidFill>
+                <a:latin typeface="Segoe UI"/>
               </a:rPr>
               <a:t>AXES D'AMÉLIORATION</a:t>
             </a:r>
@@ -11712,7 +12554,7 @@
       </p:sp>
       <p:sp>
         <p:nvSpPr>
-          <p:cNvPr id="24" name="Rectangle 23"/>
+          <p:cNvPr id="23" name="Rectangle 22"/>
           <p:cNvSpPr/>
           <p:nvPr/>
         </p:nvSpPr>
@@ -11755,7 +12597,7 @@
       </p:sp>
       <p:sp>
         <p:nvSpPr>
-          <p:cNvPr id="25" name="Oval 24"/>
+          <p:cNvPr id="24" name="Oval 23"/>
           <p:cNvSpPr/>
           <p:nvPr/>
         </p:nvSpPr>
@@ -11798,7 +12640,7 @@
       </p:sp>
       <p:sp>
         <p:nvSpPr>
-          <p:cNvPr id="26" name="TextBox 25"/>
+          <p:cNvPr id="25" name="TextBox 24"/>
           <p:cNvSpPr txBox="1"/>
           <p:nvPr/>
         </p:nvSpPr>
@@ -11822,18 +12664,18 @@
             <a:r>
               <a:rPr sz="1250" b="0" i="0">
                 <a:solidFill>
-                  <a:srgbClr val="2C3E50"/>
-                </a:solidFill>
-                <a:latin typeface="Calibri"/>
-              </a:rPr>
-              <a:t>Énergie renouvelable à renforcer (actuellement 42%, objectif 50%)</a:t>
-            </a:r>
-          </a:p>
-        </p:txBody>
-      </p:sp>
-      <p:sp>
-        <p:nvSpPr>
-          <p:cNvPr id="27" name="Oval 26"/>
+                  <a:srgbClr val="1E2B26"/>
+                </a:solidFill>
+                <a:latin typeface="Segoe UI"/>
+              </a:rPr>
+              <a:t>Énergie renouvelable à renforcer (actuellement 42 %, objectif 50 %)</a:t>
+            </a:r>
+          </a:p>
+        </p:txBody>
+      </p:sp>
+      <p:sp>
+        <p:nvSpPr>
+          <p:cNvPr id="26" name="Oval 25"/>
           <p:cNvSpPr/>
           <p:nvPr/>
         </p:nvSpPr>
@@ -11876,7 +12718,7 @@
       </p:sp>
       <p:sp>
         <p:nvSpPr>
-          <p:cNvPr id="28" name="TextBox 27"/>
+          <p:cNvPr id="27" name="TextBox 26"/>
           <p:cNvSpPr txBox="1"/>
           <p:nvPr/>
         </p:nvSpPr>
@@ -11900,18 +12742,18 @@
             <a:r>
               <a:rPr sz="1250" b="0" i="0">
                 <a:solidFill>
-                  <a:srgbClr val="2C3E50"/>
-                </a:solidFill>
-                <a:latin typeface="Calibri"/>
-              </a:rPr>
-              <a:t>Déséquilibre de genre dans les effectifs (34% de femmes)</a:t>
-            </a:r>
-          </a:p>
-        </p:txBody>
-      </p:sp>
-      <p:sp>
-        <p:nvSpPr>
-          <p:cNvPr id="29" name="Oval 28"/>
+                  <a:srgbClr val="1E2B26"/>
+                </a:solidFill>
+                <a:latin typeface="Segoe UI"/>
+              </a:rPr>
+              <a:t>Déséquilibre de genre dans les effectifs (34 % de femmes)</a:t>
+            </a:r>
+          </a:p>
+        </p:txBody>
+      </p:sp>
+      <p:sp>
+        <p:nvSpPr>
+          <p:cNvPr id="28" name="Oval 27"/>
           <p:cNvSpPr/>
           <p:nvPr/>
         </p:nvSpPr>
@@ -11954,7 +12796,7 @@
       </p:sp>
       <p:sp>
         <p:nvSpPr>
-          <p:cNvPr id="30" name="TextBox 29"/>
+          <p:cNvPr id="29" name="TextBox 28"/>
           <p:cNvSpPr txBox="1"/>
           <p:nvPr/>
         </p:nvSpPr>
@@ -11978,18 +12820,18 @@
             <a:r>
               <a:rPr sz="1250" b="0" i="0">
                 <a:solidFill>
-                  <a:srgbClr val="2C3E50"/>
-                </a:solidFill>
-                <a:latin typeface="Calibri"/>
-              </a:rPr>
-              <a:t>Taux de fréquence des accidents élevé (TF 6.2)</a:t>
-            </a:r>
-          </a:p>
-        </p:txBody>
-      </p:sp>
-      <p:sp>
-        <p:nvSpPr>
-          <p:cNvPr id="31" name="Oval 30"/>
+                  <a:srgbClr val="1E2B26"/>
+                </a:solidFill>
+                <a:latin typeface="Segoe UI"/>
+              </a:rPr>
+              <a:t>Taux de fréquence des accidents élevé (TF 6,2)</a:t>
+            </a:r>
+          </a:p>
+        </p:txBody>
+      </p:sp>
+      <p:sp>
+        <p:nvSpPr>
+          <p:cNvPr id="30" name="Oval 29"/>
           <p:cNvSpPr/>
           <p:nvPr/>
         </p:nvSpPr>
@@ -12032,7 +12874,7 @@
       </p:sp>
       <p:sp>
         <p:nvSpPr>
-          <p:cNvPr id="32" name="TextBox 31"/>
+          <p:cNvPr id="31" name="TextBox 30"/>
           <p:cNvSpPr txBox="1"/>
           <p:nvPr/>
         </p:nvSpPr>
@@ -12056,9 +12898,9 @@
             <a:r>
               <a:rPr sz="1250" b="0" i="0">
                 <a:solidFill>
-                  <a:srgbClr val="2C3E50"/>
-                </a:solidFill>
-                <a:latin typeface="Calibri"/>
+                  <a:srgbClr val="1E2B26"/>
+                </a:solidFill>
+                <a:latin typeface="Segoe UI"/>
               </a:rPr>
               <a:t>Une violation de données — cybersécurité à renforcer</a:t>
             </a:r>
@@ -12067,7 +12909,7 @@
       </p:sp>
       <p:sp>
         <p:nvSpPr>
-          <p:cNvPr id="33" name="Oval 32"/>
+          <p:cNvPr id="32" name="Oval 31"/>
           <p:cNvSpPr/>
           <p:nvPr/>
         </p:nvSpPr>
@@ -12110,7 +12952,7 @@
       </p:sp>
       <p:sp>
         <p:nvSpPr>
-          <p:cNvPr id="34" name="TextBox 33"/>
+          <p:cNvPr id="33" name="TextBox 32"/>
           <p:cNvSpPr txBox="1"/>
           <p:nvPr/>
         </p:nvSpPr>
@@ -12134,9 +12976,9 @@
             <a:r>
               <a:rPr sz="1250" b="0" i="0">
                 <a:solidFill>
-                  <a:srgbClr val="2C3E50"/>
-                </a:solidFill>
-                <a:latin typeface="Calibri"/>
+                  <a:srgbClr val="1E2B26"/>
+                </a:solidFill>
+                <a:latin typeface="Segoe UI"/>
               </a:rPr>
               <a:t>Absence d'audit ESG indépendant</a:t>
             </a:r>
@@ -12145,7 +12987,7 @@
       </p:sp>
       <p:sp>
         <p:nvSpPr>
-          <p:cNvPr id="35" name="TextBox 34"/>
+          <p:cNvPr id="34" name="TextBox 33"/>
           <p:cNvSpPr txBox="1"/>
           <p:nvPr/>
         </p:nvSpPr>
@@ -12169,9 +13011,9 @@
             <a:r>
               <a:rPr sz="800" b="0" i="0">
                 <a:solidFill>
-                  <a:srgbClr val="6B7C93"/>
-                </a:solidFill>
-                <a:latin typeface="Calibri"/>
+                  <a:srgbClr val="5F6B64"/>
+                </a:solidFill>
+                <a:latin typeface="Segoe UI"/>
               </a:rPr>
               <a:t>Acme Industries   |   17 / 23</a:t>
             </a:r>
@@ -12211,7 +13053,7 @@
             <a:avLst/>
           </a:prstGeom>
           <a:solidFill>
-            <a:srgbClr val="F4F7FD"/>
+            <a:srgbClr val="F3F0E8"/>
           </a:solidFill>
           <a:ln>
             <a:noFill/>
@@ -12247,14 +13089,14 @@
         </p:nvSpPr>
         <p:spPr>
           <a:xfrm>
-            <a:off x="0" y="0"/>
-            <a:ext cx="12188952" cy="1143000"/>
+            <a:off x="457200" y="384048"/>
+            <a:ext cx="201168" cy="201168"/>
           </a:xfrm>
           <a:prstGeom prst="rect">
             <a:avLst/>
           </a:prstGeom>
           <a:solidFill>
-            <a:srgbClr val="1B3A6B"/>
+            <a:srgbClr val="1F3D33"/>
           </a:solidFill>
           <a:ln>
             <a:noFill/>
@@ -12284,20 +13126,55 @@
       </p:sp>
       <p:sp>
         <p:nvSpPr>
-          <p:cNvPr id="4" name="Rectangle 3"/>
+          <p:cNvPr id="4" name="TextBox 3"/>
+          <p:cNvSpPr txBox="1"/>
+          <p:nvPr/>
+        </p:nvSpPr>
+        <p:spPr>
+          <a:xfrm>
+            <a:off x="822960" y="237744"/>
+            <a:ext cx="10789920" cy="685800"/>
+          </a:xfrm>
+          <a:prstGeom prst="rect">
+            <a:avLst/>
+          </a:prstGeom>
+          <a:noFill/>
+        </p:spPr>
+        <p:txBody>
+          <a:bodyPr wrap="square">
+            <a:spAutoFit/>
+          </a:bodyPr>
+          <a:lstStyle/>
+          <a:p>
+            <a:pPr algn="l"/>
+            <a:r>
+              <a:rPr sz="1320" b="1" i="0">
+                <a:solidFill>
+                  <a:srgbClr val="1E2B26"/>
+                </a:solidFill>
+                <a:latin typeface="Georgia"/>
+              </a:rPr>
+              <a:t>Où se concentrent vos risques et vos leviers de valeur</a:t>
+            </a:r>
+          </a:p>
+        </p:txBody>
+      </p:sp>
+      <p:sp>
+        <p:nvSpPr>
+          <p:cNvPr id="5" name="Rectangle 4"/>
           <p:cNvSpPr/>
           <p:nvPr/>
         </p:nvSpPr>
         <p:spPr>
           <a:xfrm>
-            <a:off x="0" y="1143000"/>
-            <a:ext cx="64008" cy="5715000"/>
+            <a:off x="457200" y="1024128"/>
+            <a:ext cx="2011680" cy="18288"/>
           </a:xfrm>
           <a:prstGeom prst="rect">
             <a:avLst/>
           </a:prstGeom>
           <a:solidFill>
-            <a:srgbClr val="F39C12"/>
+            <a:srgbClr val="1E2B26"/>
           </a:solidFill>
           <a:ln>
             <a:noFill/>
@@ -12327,77 +13204,7 @@
       </p:sp>
       <p:sp>
         <p:nvSpPr>
-          <p:cNvPr id="5" name="TextBox 4"/>
-          <p:cNvSpPr txBox="1"/>
-          <p:nvPr/>
-        </p:nvSpPr>
-        <p:spPr>
-          <a:xfrm>
-            <a:off x="292608" y="128016"/>
-            <a:ext cx="10972800" cy="292608"/>
-          </a:xfrm>
-          <a:prstGeom prst="rect">
-            <a:avLst/>
-          </a:prstGeom>
-          <a:noFill/>
-        </p:spPr>
-        <p:txBody>
-          <a:bodyPr wrap="square">
-            <a:spAutoFit/>
-          </a:bodyPr>
-          <a:lstStyle/>
-          <a:p>
-            <a:pPr algn="l"/>
-            <a:r>
-              <a:rPr sz="1100" b="1" i="0">
-                <a:solidFill>
-                  <a:srgbClr val="F39C12"/>
-                </a:solidFill>
-                <a:latin typeface="Calibri"/>
-              </a:rPr>
-              <a:t>RISQUES &amp; OPPORTUNITÉS</a:t>
-            </a:r>
-          </a:p>
-        </p:txBody>
-      </p:sp>
-      <p:sp>
-        <p:nvSpPr>
-          <p:cNvPr id="6" name="TextBox 5"/>
-          <p:cNvSpPr txBox="1"/>
-          <p:nvPr/>
-        </p:nvSpPr>
-        <p:spPr>
-          <a:xfrm>
-            <a:off x="274320" y="384048"/>
-            <a:ext cx="11612880" cy="713232"/>
-          </a:xfrm>
-          <a:prstGeom prst="rect">
-            <a:avLst/>
-          </a:prstGeom>
-          <a:noFill/>
-        </p:spPr>
-        <p:txBody>
-          <a:bodyPr wrap="square">
-            <a:spAutoFit/>
-          </a:bodyPr>
-          <a:lstStyle/>
-          <a:p>
-            <a:pPr algn="l"/>
-            <a:r>
-              <a:rPr sz="1716" b="1" i="0">
-                <a:solidFill>
-                  <a:srgbClr val="FFFFFF"/>
-                </a:solidFill>
-                <a:latin typeface="Calibri"/>
-              </a:rPr>
-              <a:t>Où se concentrent vos risques et vos leviers de valeur</a:t>
-            </a:r>
-          </a:p>
-        </p:txBody>
-      </p:sp>
-      <p:sp>
-        <p:nvSpPr>
-          <p:cNvPr id="7" name="Rectangle 6"/>
+          <p:cNvPr id="6" name="Rectangle 5"/>
           <p:cNvSpPr/>
           <p:nvPr/>
         </p:nvSpPr>
@@ -12410,7 +13217,7 @@
             <a:avLst/>
           </a:prstGeom>
           <a:solidFill>
-            <a:srgbClr val="EBF2FB"/>
+            <a:srgbClr val="E6E6DC"/>
           </a:solidFill>
           <a:ln w="12700">
             <a:solidFill>
@@ -12442,7 +13249,7 @@
       </p:sp>
       <p:sp>
         <p:nvSpPr>
-          <p:cNvPr id="8" name="Oval 7"/>
+          <p:cNvPr id="7" name="Oval 6"/>
           <p:cNvSpPr/>
           <p:nvPr/>
         </p:nvSpPr>
@@ -12485,7 +13292,7 @@
       </p:sp>
       <p:sp>
         <p:nvSpPr>
-          <p:cNvPr id="9" name="TextBox 8"/>
+          <p:cNvPr id="8" name="TextBox 7"/>
           <p:cNvSpPr txBox="1"/>
           <p:nvPr/>
         </p:nvSpPr>
@@ -12511,7 +13318,7 @@
                 <a:solidFill>
                   <a:srgbClr val="FFFFFF"/>
                 </a:solidFill>
-                <a:latin typeface="Calibri"/>
+                <a:latin typeface="Georgia"/>
               </a:rPr>
               <a:t>!</a:t>
             </a:r>
@@ -12520,7 +13327,7 @@
       </p:sp>
       <p:sp>
         <p:nvSpPr>
-          <p:cNvPr id="10" name="TextBox 9"/>
+          <p:cNvPr id="9" name="TextBox 8"/>
           <p:cNvSpPr txBox="1"/>
           <p:nvPr/>
         </p:nvSpPr>
@@ -12544,9 +13351,9 @@
             <a:r>
               <a:rPr sz="1600" b="1" i="0">
                 <a:solidFill>
-                  <a:srgbClr val="2C3E50"/>
-                </a:solidFill>
-                <a:latin typeface="Calibri"/>
+                  <a:srgbClr val="1E2B26"/>
+                </a:solidFill>
+                <a:latin typeface="Segoe UI"/>
               </a:rPr>
               <a:t>RISQUES MAJEURS</a:t>
             </a:r>
@@ -12555,7 +13362,7 @@
       </p:sp>
       <p:sp>
         <p:nvSpPr>
-          <p:cNvPr id="11" name="Rectangle 10"/>
+          <p:cNvPr id="10" name="Rectangle 9"/>
           <p:cNvSpPr/>
           <p:nvPr/>
         </p:nvSpPr>
@@ -12598,7 +13405,7 @@
       </p:sp>
       <p:sp>
         <p:nvSpPr>
-          <p:cNvPr id="12" name="Rounded Rectangle 11"/>
+          <p:cNvPr id="11" name="Rounded Rectangle 10"/>
           <p:cNvSpPr/>
           <p:nvPr/>
         </p:nvSpPr>
@@ -12641,7 +13448,7 @@
       </p:sp>
       <p:sp>
         <p:nvSpPr>
-          <p:cNvPr id="13" name="TextBox 12"/>
+          <p:cNvPr id="12" name="TextBox 11"/>
           <p:cNvSpPr txBox="1"/>
           <p:nvPr/>
         </p:nvSpPr>
@@ -12667,7 +13474,7 @@
                 <a:solidFill>
                   <a:srgbClr val="FFFFFF"/>
                 </a:solidFill>
-                <a:latin typeface="Calibri"/>
+                <a:latin typeface="Segoe UI"/>
               </a:rPr>
               <a:t>Fiabilité</a:t>
             </a:r>
@@ -12676,7 +13483,7 @@
       </p:sp>
       <p:sp>
         <p:nvSpPr>
-          <p:cNvPr id="14" name="Oval 13"/>
+          <p:cNvPr id="13" name="Oval 12"/>
           <p:cNvSpPr/>
           <p:nvPr/>
         </p:nvSpPr>
@@ -12719,7 +13526,7 @@
       </p:sp>
       <p:sp>
         <p:nvSpPr>
-          <p:cNvPr id="15" name="TextBox 14"/>
+          <p:cNvPr id="14" name="TextBox 13"/>
           <p:cNvSpPr txBox="1"/>
           <p:nvPr/>
         </p:nvSpPr>
@@ -12745,7 +13552,7 @@
                 <a:solidFill>
                   <a:srgbClr val="FFFFFF"/>
                 </a:solidFill>
-                <a:latin typeface="Calibri"/>
+                <a:latin typeface="Segoe UI"/>
               </a:rPr>
               <a:t>P1</a:t>
             </a:r>
@@ -12754,7 +13561,7 @@
       </p:sp>
       <p:sp>
         <p:nvSpPr>
-          <p:cNvPr id="16" name="TextBox 15"/>
+          <p:cNvPr id="15" name="TextBox 14"/>
           <p:cNvSpPr txBox="1"/>
           <p:nvPr/>
         </p:nvSpPr>
@@ -12778,9 +13585,9 @@
             <a:r>
               <a:rPr sz="1250" b="0" i="0">
                 <a:solidFill>
-                  <a:srgbClr val="2C3E50"/>
-                </a:solidFill>
-                <a:latin typeface="Calibri"/>
+                  <a:srgbClr val="1E2B26"/>
+                </a:solidFill>
+                <a:latin typeface="Segoe UI"/>
               </a:rPr>
               <a:t>Reporting non audité : crédibilité limitée auprès des investisseurs</a:t>
             </a:r>
@@ -12789,7 +13596,7 @@
       </p:sp>
       <p:sp>
         <p:nvSpPr>
-          <p:cNvPr id="17" name="Rounded Rectangle 16"/>
+          <p:cNvPr id="16" name="Rounded Rectangle 15"/>
           <p:cNvSpPr/>
           <p:nvPr/>
         </p:nvSpPr>
@@ -12832,7 +13639,7 @@
       </p:sp>
       <p:sp>
         <p:nvSpPr>
-          <p:cNvPr id="18" name="TextBox 17"/>
+          <p:cNvPr id="17" name="TextBox 16"/>
           <p:cNvSpPr txBox="1"/>
           <p:nvPr/>
         </p:nvSpPr>
@@ -12858,7 +13665,7 @@
                 <a:solidFill>
                   <a:srgbClr val="FFFFFF"/>
                 </a:solidFill>
-                <a:latin typeface="Calibri"/>
+                <a:latin typeface="Segoe UI"/>
               </a:rPr>
               <a:t>Opérationnel</a:t>
             </a:r>
@@ -12867,7 +13674,7 @@
       </p:sp>
       <p:sp>
         <p:nvSpPr>
-          <p:cNvPr id="19" name="Oval 18"/>
+          <p:cNvPr id="18" name="Oval 17"/>
           <p:cNvSpPr/>
           <p:nvPr/>
         </p:nvSpPr>
@@ -12910,7 +13717,7 @@
       </p:sp>
       <p:sp>
         <p:nvSpPr>
-          <p:cNvPr id="20" name="TextBox 19"/>
+          <p:cNvPr id="19" name="TextBox 18"/>
           <p:cNvSpPr txBox="1"/>
           <p:nvPr/>
         </p:nvSpPr>
@@ -12936,7 +13743,7 @@
                 <a:solidFill>
                   <a:srgbClr val="FFFFFF"/>
                 </a:solidFill>
-                <a:latin typeface="Calibri"/>
+                <a:latin typeface="Segoe UI"/>
               </a:rPr>
               <a:t>P1</a:t>
             </a:r>
@@ -12945,7 +13752,7 @@
       </p:sp>
       <p:sp>
         <p:nvSpPr>
-          <p:cNvPr id="21" name="TextBox 20"/>
+          <p:cNvPr id="20" name="TextBox 19"/>
           <p:cNvSpPr txBox="1"/>
           <p:nvPr/>
         </p:nvSpPr>
@@ -12969,9 +13776,9 @@
             <a:r>
               <a:rPr sz="1250" b="0" i="0">
                 <a:solidFill>
-                  <a:srgbClr val="2C3E50"/>
-                </a:solidFill>
-                <a:latin typeface="Calibri"/>
+                  <a:srgbClr val="1E2B26"/>
+                </a:solidFill>
+                <a:latin typeface="Segoe UI"/>
               </a:rPr>
               <a:t>Sinistralité élevée : risque humain et social</a:t>
             </a:r>
@@ -12980,7 +13787,7 @@
       </p:sp>
       <p:sp>
         <p:nvSpPr>
-          <p:cNvPr id="22" name="Rounded Rectangle 21"/>
+          <p:cNvPr id="21" name="Rounded Rectangle 20"/>
           <p:cNvSpPr/>
           <p:nvPr/>
         </p:nvSpPr>
@@ -13023,7 +13830,7 @@
       </p:sp>
       <p:sp>
         <p:nvSpPr>
-          <p:cNvPr id="23" name="TextBox 22"/>
+          <p:cNvPr id="22" name="TextBox 21"/>
           <p:cNvSpPr txBox="1"/>
           <p:nvPr/>
         </p:nvSpPr>
@@ -13049,7 +13856,7 @@
                 <a:solidFill>
                   <a:srgbClr val="FFFFFF"/>
                 </a:solidFill>
-                <a:latin typeface="Calibri"/>
+                <a:latin typeface="Segoe UI"/>
               </a:rPr>
               <a:t>Transition</a:t>
             </a:r>
@@ -13058,7 +13865,7 @@
       </p:sp>
       <p:sp>
         <p:nvSpPr>
-          <p:cNvPr id="24" name="Oval 23"/>
+          <p:cNvPr id="23" name="Oval 22"/>
           <p:cNvSpPr/>
           <p:nvPr/>
         </p:nvSpPr>
@@ -13101,7 +13908,7 @@
       </p:sp>
       <p:sp>
         <p:nvSpPr>
-          <p:cNvPr id="25" name="TextBox 24"/>
+          <p:cNvPr id="24" name="TextBox 23"/>
           <p:cNvSpPr txBox="1"/>
           <p:nvPr/>
         </p:nvSpPr>
@@ -13127,7 +13934,7 @@
                 <a:solidFill>
                   <a:srgbClr val="FFFFFF"/>
                 </a:solidFill>
-                <a:latin typeface="Calibri"/>
+                <a:latin typeface="Segoe UI"/>
               </a:rPr>
               <a:t>P2</a:t>
             </a:r>
@@ -13136,7 +13943,7 @@
       </p:sp>
       <p:sp>
         <p:nvSpPr>
-          <p:cNvPr id="26" name="TextBox 25"/>
+          <p:cNvPr id="25" name="TextBox 24"/>
           <p:cNvSpPr txBox="1"/>
           <p:nvPr/>
         </p:nvSpPr>
@@ -13160,9 +13967,9 @@
             <a:r>
               <a:rPr sz="1250" b="0" i="0">
                 <a:solidFill>
-                  <a:srgbClr val="2C3E50"/>
-                </a:solidFill>
-                <a:latin typeface="Calibri"/>
+                  <a:srgbClr val="1E2B26"/>
+                </a:solidFill>
+                <a:latin typeface="Segoe UI"/>
               </a:rPr>
               <a:t>Intensité carbone élevée : marge exposée à la tarification du carbone</a:t>
             </a:r>
@@ -13171,7 +13978,7 @@
       </p:sp>
       <p:sp>
         <p:nvSpPr>
-          <p:cNvPr id="27" name="Rounded Rectangle 26"/>
+          <p:cNvPr id="26" name="Rounded Rectangle 25"/>
           <p:cNvSpPr/>
           <p:nvPr/>
         </p:nvSpPr>
@@ -13214,7 +14021,7 @@
       </p:sp>
       <p:sp>
         <p:nvSpPr>
-          <p:cNvPr id="28" name="TextBox 27"/>
+          <p:cNvPr id="27" name="TextBox 26"/>
           <p:cNvSpPr txBox="1"/>
           <p:nvPr/>
         </p:nvSpPr>
@@ -13240,7 +14047,7 @@
                 <a:solidFill>
                   <a:srgbClr val="FFFFFF"/>
                 </a:solidFill>
-                <a:latin typeface="Calibri"/>
+                <a:latin typeface="Segoe UI"/>
               </a:rPr>
               <a:t>Réglementaire</a:t>
             </a:r>
@@ -13249,7 +14056,7 @@
       </p:sp>
       <p:sp>
         <p:nvSpPr>
-          <p:cNvPr id="29" name="Oval 28"/>
+          <p:cNvPr id="28" name="Oval 27"/>
           <p:cNvSpPr/>
           <p:nvPr/>
         </p:nvSpPr>
@@ -13292,7 +14099,7 @@
       </p:sp>
       <p:sp>
         <p:nvSpPr>
-          <p:cNvPr id="30" name="TextBox 29"/>
+          <p:cNvPr id="29" name="TextBox 28"/>
           <p:cNvSpPr txBox="1"/>
           <p:nvPr/>
         </p:nvSpPr>
@@ -13318,7 +14125,7 @@
                 <a:solidFill>
                   <a:srgbClr val="FFFFFF"/>
                 </a:solidFill>
-                <a:latin typeface="Calibri"/>
+                <a:latin typeface="Segoe UI"/>
               </a:rPr>
               <a:t>P2</a:t>
             </a:r>
@@ -13327,7 +14134,7 @@
       </p:sp>
       <p:sp>
         <p:nvSpPr>
-          <p:cNvPr id="31" name="TextBox 30"/>
+          <p:cNvPr id="30" name="TextBox 29"/>
           <p:cNvSpPr txBox="1"/>
           <p:nvPr/>
         </p:nvSpPr>
@@ -13351,9 +14158,9 @@
             <a:r>
               <a:rPr sz="1250" b="0" i="0">
                 <a:solidFill>
-                  <a:srgbClr val="2C3E50"/>
-                </a:solidFill>
-                <a:latin typeface="Calibri"/>
+                  <a:srgbClr val="1E2B26"/>
+                </a:solidFill>
+                <a:latin typeface="Segoe UI"/>
               </a:rPr>
               <a:t>Parité sous la cible : risque réglementaire et d'attractivité</a:t>
             </a:r>
@@ -13362,7 +14169,7 @@
       </p:sp>
       <p:sp>
         <p:nvSpPr>
-          <p:cNvPr id="32" name="Rectangle 31"/>
+          <p:cNvPr id="31" name="Rectangle 30"/>
           <p:cNvSpPr/>
           <p:nvPr/>
         </p:nvSpPr>
@@ -13375,11 +14182,11 @@
             <a:avLst/>
           </a:prstGeom>
           <a:solidFill>
-            <a:srgbClr val="EBF2FB"/>
+            <a:srgbClr val="E6E6DC"/>
           </a:solidFill>
           <a:ln w="12700">
             <a:solidFill>
-              <a:srgbClr val="27AE60"/>
+              <a:srgbClr val="2F6B4F"/>
             </a:solidFill>
           </a:ln>
         </p:spPr>
@@ -13407,7 +14214,7 @@
       </p:sp>
       <p:sp>
         <p:nvSpPr>
-          <p:cNvPr id="33" name="Oval 32"/>
+          <p:cNvPr id="32" name="Oval 31"/>
           <p:cNvSpPr/>
           <p:nvPr/>
         </p:nvSpPr>
@@ -13420,7 +14227,7 @@
             <a:avLst/>
           </a:prstGeom>
           <a:solidFill>
-            <a:srgbClr val="27AE60"/>
+            <a:srgbClr val="2F6B4F"/>
           </a:solidFill>
           <a:ln>
             <a:noFill/>
@@ -13450,7 +14257,7 @@
       </p:sp>
       <p:sp>
         <p:nvSpPr>
-          <p:cNvPr id="34" name="TextBox 33"/>
+          <p:cNvPr id="33" name="TextBox 32"/>
           <p:cNvSpPr txBox="1"/>
           <p:nvPr/>
         </p:nvSpPr>
@@ -13476,7 +14283,7 @@
                 <a:solidFill>
                   <a:srgbClr val="FFFFFF"/>
                 </a:solidFill>
-                <a:latin typeface="Calibri"/>
+                <a:latin typeface="Georgia"/>
               </a:rPr>
               <a:t>+</a:t>
             </a:r>
@@ -13485,7 +14292,7 @@
       </p:sp>
       <p:sp>
         <p:nvSpPr>
-          <p:cNvPr id="35" name="TextBox 34"/>
+          <p:cNvPr id="34" name="TextBox 33"/>
           <p:cNvSpPr txBox="1"/>
           <p:nvPr/>
         </p:nvSpPr>
@@ -13509,9 +14316,9 @@
             <a:r>
               <a:rPr sz="1600" b="1" i="0">
                 <a:solidFill>
-                  <a:srgbClr val="2C3E50"/>
-                </a:solidFill>
-                <a:latin typeface="Calibri"/>
+                  <a:srgbClr val="1E2B26"/>
+                </a:solidFill>
+                <a:latin typeface="Segoe UI"/>
               </a:rPr>
               <a:t>OPPORTUNITÉS MAJEURES</a:t>
             </a:r>
@@ -13520,7 +14327,7 @@
       </p:sp>
       <p:sp>
         <p:nvSpPr>
-          <p:cNvPr id="36" name="Rectangle 35"/>
+          <p:cNvPr id="35" name="Rectangle 34"/>
           <p:cNvSpPr/>
           <p:nvPr/>
         </p:nvSpPr>
@@ -13533,7 +14340,7 @@
             <a:avLst/>
           </a:prstGeom>
           <a:solidFill>
-            <a:srgbClr val="27AE60"/>
+            <a:srgbClr val="2F6B4F"/>
           </a:solidFill>
           <a:ln>
             <a:noFill/>
@@ -13563,7 +14370,7 @@
       </p:sp>
       <p:sp>
         <p:nvSpPr>
-          <p:cNvPr id="37" name="Rounded Rectangle 36"/>
+          <p:cNvPr id="36" name="Rounded Rectangle 35"/>
           <p:cNvSpPr/>
           <p:nvPr/>
         </p:nvSpPr>
@@ -13576,7 +14383,7 @@
             <a:avLst/>
           </a:prstGeom>
           <a:solidFill>
-            <a:srgbClr val="27AE60"/>
+            <a:srgbClr val="2F6B4F"/>
           </a:solidFill>
           <a:ln>
             <a:noFill/>
@@ -13606,7 +14413,7 @@
       </p:sp>
       <p:sp>
         <p:nvSpPr>
-          <p:cNvPr id="38" name="TextBox 37"/>
+          <p:cNvPr id="37" name="TextBox 36"/>
           <p:cNvSpPr txBox="1"/>
           <p:nvPr/>
         </p:nvSpPr>
@@ -13632,7 +14439,7 @@
                 <a:solidFill>
                   <a:srgbClr val="FFFFFF"/>
                 </a:solidFill>
-                <a:latin typeface="Calibri"/>
+                <a:latin typeface="Segoe UI"/>
               </a:rPr>
               <a:t>Financement</a:t>
             </a:r>
@@ -13641,7 +14448,7 @@
       </p:sp>
       <p:sp>
         <p:nvSpPr>
-          <p:cNvPr id="39" name="TextBox 38"/>
+          <p:cNvPr id="38" name="TextBox 37"/>
           <p:cNvSpPr txBox="1"/>
           <p:nvPr/>
         </p:nvSpPr>
@@ -13665,9 +14472,9 @@
             <a:r>
               <a:rPr sz="1250" b="0" i="0">
                 <a:solidFill>
-                  <a:srgbClr val="2C3E50"/>
-                </a:solidFill>
-                <a:latin typeface="Calibri"/>
+                  <a:srgbClr val="1E2B26"/>
+                </a:solidFill>
+                <a:latin typeface="Segoe UI"/>
               </a:rPr>
               <a:t>Gouvernance solide : accès facilité aux financements ESG (green bonds, prêts indexés)</a:t>
             </a:r>
@@ -13676,7 +14483,7 @@
       </p:sp>
       <p:sp>
         <p:nvSpPr>
-          <p:cNvPr id="40" name="Rounded Rectangle 39"/>
+          <p:cNvPr id="39" name="Rounded Rectangle 38"/>
           <p:cNvSpPr/>
           <p:nvPr/>
         </p:nvSpPr>
@@ -13689,7 +14496,7 @@
             <a:avLst/>
           </a:prstGeom>
           <a:solidFill>
-            <a:srgbClr val="27AE60"/>
+            <a:srgbClr val="2F6B4F"/>
           </a:solidFill>
           <a:ln>
             <a:noFill/>
@@ -13719,7 +14526,7 @@
       </p:sp>
       <p:sp>
         <p:nvSpPr>
-          <p:cNvPr id="41" name="TextBox 40"/>
+          <p:cNvPr id="40" name="TextBox 39"/>
           <p:cNvSpPr txBox="1"/>
           <p:nvPr/>
         </p:nvSpPr>
@@ -13745,7 +14552,7 @@
                 <a:solidFill>
                   <a:srgbClr val="FFFFFF"/>
                 </a:solidFill>
-                <a:latin typeface="Calibri"/>
+                <a:latin typeface="Segoe UI"/>
               </a:rPr>
               <a:t>Financement</a:t>
             </a:r>
@@ -13754,7 +14561,7 @@
       </p:sp>
       <p:sp>
         <p:nvSpPr>
-          <p:cNvPr id="42" name="TextBox 41"/>
+          <p:cNvPr id="41" name="TextBox 40"/>
           <p:cNvSpPr txBox="1"/>
           <p:nvPr/>
         </p:nvSpPr>
@@ -13778,9 +14585,9 @@
             <a:r>
               <a:rPr sz="1250" b="0" i="0">
                 <a:solidFill>
-                  <a:srgbClr val="2C3E50"/>
-                </a:solidFill>
-                <a:latin typeface="Calibri"/>
+                  <a:srgbClr val="1E2B26"/>
+                </a:solidFill>
+                <a:latin typeface="Segoe UI"/>
               </a:rPr>
               <a:t>Activités alignées Taxonomie : éligibilité aux financements verts</a:t>
             </a:r>
@@ -13789,7 +14596,7 @@
       </p:sp>
       <p:sp>
         <p:nvSpPr>
-          <p:cNvPr id="43" name="Rounded Rectangle 42"/>
+          <p:cNvPr id="42" name="Rounded Rectangle 41"/>
           <p:cNvSpPr/>
           <p:nvPr/>
         </p:nvSpPr>
@@ -13802,7 +14609,7 @@
             <a:avLst/>
           </a:prstGeom>
           <a:solidFill>
-            <a:srgbClr val="27AE60"/>
+            <a:srgbClr val="2F6B4F"/>
           </a:solidFill>
           <a:ln>
             <a:noFill/>
@@ -13832,7 +14639,7 @@
       </p:sp>
       <p:sp>
         <p:nvSpPr>
-          <p:cNvPr id="44" name="TextBox 43"/>
+          <p:cNvPr id="43" name="TextBox 42"/>
           <p:cNvSpPr txBox="1"/>
           <p:nvPr/>
         </p:nvSpPr>
@@ -13858,7 +14665,7 @@
                 <a:solidFill>
                   <a:srgbClr val="FFFFFF"/>
                 </a:solidFill>
-                <a:latin typeface="Calibri"/>
+                <a:latin typeface="Segoe UI"/>
               </a:rPr>
               <a:t>Coûts</a:t>
             </a:r>
@@ -13867,7 +14674,7 @@
       </p:sp>
       <p:sp>
         <p:nvSpPr>
-          <p:cNvPr id="45" name="TextBox 44"/>
+          <p:cNvPr id="44" name="TextBox 43"/>
           <p:cNvSpPr txBox="1"/>
           <p:nvPr/>
         </p:nvSpPr>
@@ -13891,9 +14698,9 @@
             <a:r>
               <a:rPr sz="1250" b="0" i="0">
                 <a:solidFill>
-                  <a:srgbClr val="2C3E50"/>
-                </a:solidFill>
-                <a:latin typeface="Calibri"/>
+                  <a:srgbClr val="1E2B26"/>
+                </a:solidFill>
+                <a:latin typeface="Segoe UI"/>
               </a:rPr>
               <a:t>Mix renouvelable engagé : réduction des coûts énergétiques à terme</a:t>
             </a:r>
@@ -13902,7 +14709,7 @@
       </p:sp>
       <p:sp>
         <p:nvSpPr>
-          <p:cNvPr id="46" name="Rounded Rectangle 45"/>
+          <p:cNvPr id="45" name="Rounded Rectangle 44"/>
           <p:cNvSpPr/>
           <p:nvPr/>
         </p:nvSpPr>
@@ -13915,7 +14722,7 @@
             <a:avLst/>
           </a:prstGeom>
           <a:solidFill>
-            <a:srgbClr val="27AE60"/>
+            <a:srgbClr val="2F6B4F"/>
           </a:solidFill>
           <a:ln>
             <a:noFill/>
@@ -13945,7 +14752,7 @@
       </p:sp>
       <p:sp>
         <p:nvSpPr>
-          <p:cNvPr id="47" name="TextBox 46"/>
+          <p:cNvPr id="46" name="TextBox 45"/>
           <p:cNvSpPr txBox="1"/>
           <p:nvPr/>
         </p:nvSpPr>
@@ -13971,7 +14778,7 @@
                 <a:solidFill>
                   <a:srgbClr val="FFFFFF"/>
                 </a:solidFill>
-                <a:latin typeface="Calibri"/>
+                <a:latin typeface="Segoe UI"/>
               </a:rPr>
               <a:t>Talents</a:t>
             </a:r>
@@ -13980,7 +14787,7 @@
       </p:sp>
       <p:sp>
         <p:nvSpPr>
-          <p:cNvPr id="48" name="TextBox 47"/>
+          <p:cNvPr id="47" name="TextBox 46"/>
           <p:cNvSpPr txBox="1"/>
           <p:nvPr/>
         </p:nvSpPr>
@@ -14004,9 +14811,9 @@
             <a:r>
               <a:rPr sz="1250" b="0" i="0">
                 <a:solidFill>
-                  <a:srgbClr val="2C3E50"/>
-                </a:solidFill>
-                <a:latin typeface="Calibri"/>
+                  <a:srgbClr val="1E2B26"/>
+                </a:solidFill>
+                <a:latin typeface="Segoe UI"/>
               </a:rPr>
               <a:t>Politique sociale : marque employeur et rétention des talents renforcées</a:t>
             </a:r>
@@ -14015,7 +14822,7 @@
       </p:sp>
       <p:sp>
         <p:nvSpPr>
-          <p:cNvPr id="49" name="TextBox 48"/>
+          <p:cNvPr id="48" name="TextBox 47"/>
           <p:cNvSpPr txBox="1"/>
           <p:nvPr/>
         </p:nvSpPr>
@@ -14039,9 +14846,9 @@
             <a:r>
               <a:rPr sz="800" b="0" i="0">
                 <a:solidFill>
-                  <a:srgbClr val="6B7C93"/>
-                </a:solidFill>
-                <a:latin typeface="Calibri"/>
+                  <a:srgbClr val="5F6B64"/>
+                </a:solidFill>
+                <a:latin typeface="Segoe UI"/>
               </a:rPr>
               <a:t>Acme Industries   |   18 / 23</a:t>
             </a:r>
@@ -14081,7 +14888,7 @@
             <a:avLst/>
           </a:prstGeom>
           <a:solidFill>
-            <a:srgbClr val="1B3A6B"/>
+            <a:srgbClr val="1F3D33"/>
           </a:solidFill>
           <a:ln>
             <a:noFill/>
@@ -14124,7 +14931,7 @@
             <a:avLst/>
           </a:prstGeom>
           <a:solidFill>
-            <a:srgbClr val="F39C12"/>
+            <a:srgbClr val="2E5A4B"/>
           </a:solidFill>
           <a:ln>
             <a:noFill/>
@@ -14178,9 +14985,9 @@
             <a:r>
               <a:rPr sz="20000" b="1" i="0">
                 <a:solidFill>
-                  <a:srgbClr val="EBF2FB"/>
-                </a:solidFill>
-                <a:latin typeface="Calibri"/>
+                  <a:srgbClr val="E6E6DC"/>
+                </a:solidFill>
+                <a:latin typeface="Georgia"/>
               </a:rPr>
               <a:t>02</a:t>
             </a:r>
@@ -14213,9 +15020,9 @@
             <a:r>
               <a:rPr sz="4000" b="1" i="0">
                 <a:solidFill>
-                  <a:srgbClr val="FFFFFF"/>
-                </a:solidFill>
-                <a:latin typeface="Calibri"/>
+                  <a:srgbClr val="F3F0E8"/>
+                </a:solidFill>
+                <a:latin typeface="Georgia"/>
               </a:rPr>
               <a:t>PLAN D'ACTION</a:t>
             </a:r>
@@ -14237,7 +15044,7 @@
             <a:avLst/>
           </a:prstGeom>
           <a:solidFill>
-            <a:srgbClr val="F39C12"/>
+            <a:srgbClr val="2E5A4B"/>
           </a:solidFill>
           <a:ln>
             <a:noFill/>
@@ -14291,9 +15098,9 @@
             <a:r>
               <a:rPr sz="1600" b="0" i="1">
                 <a:solidFill>
-                  <a:srgbClr val="AEC6E8"/>
-                </a:solidFill>
-                <a:latin typeface="Calibri"/>
+                  <a:srgbClr val="C9D8C5"/>
+                </a:solidFill>
+                <a:latin typeface="Segoe UI"/>
               </a:rPr>
               <a:t>Quoi faire, dans quel ordre, sous quel horizon.</a:t>
             </a:r>
@@ -14326,9 +15133,9 @@
             <a:r>
               <a:rPr sz="800" b="0" i="0">
                 <a:solidFill>
-                  <a:srgbClr val="6B7C93"/>
-                </a:solidFill>
-                <a:latin typeface="Calibri"/>
+                  <a:srgbClr val="5F6B64"/>
+                </a:solidFill>
+                <a:latin typeface="Segoe UI"/>
               </a:rPr>
               <a:t>Acme Industries   |   19 / 23</a:t>
             </a:r>
@@ -14368,7 +15175,7 @@
             <a:avLst/>
           </a:prstGeom>
           <a:solidFill>
-            <a:srgbClr val="F4F7FD"/>
+            <a:srgbClr val="F3F0E8"/>
           </a:solidFill>
           <a:ln>
             <a:noFill/>
@@ -14398,7 +15205,7 @@
       </p:sp>
       <p:pic>
         <p:nvPicPr>
-          <p:cNvPr id="3" name="Picture 2" descr="image.png"/>
+          <p:cNvPr id="3" name="Picture 2" descr="image.jpg"/>
           <p:cNvPicPr>
             <a:picLocks noChangeAspect="1"/>
           </p:cNvPicPr>
@@ -14446,9 +15253,9 @@
             <a:r>
               <a:rPr sz="3200" b="1" i="0">
                 <a:solidFill>
-                  <a:srgbClr val="2C3E50"/>
-                </a:solidFill>
-                <a:latin typeface="Calibri"/>
+                  <a:srgbClr val="1E2B26"/>
+                </a:solidFill>
+                <a:latin typeface="Georgia"/>
               </a:rPr>
               <a:t>Rapport ESG 2025</a:t>
             </a:r>
@@ -14481,9 +15288,9 @@
             <a:r>
               <a:rPr sz="1500" b="0" i="0">
                 <a:solidFill>
-                  <a:srgbClr val="6B7C93"/>
-                </a:solidFill>
-                <a:latin typeface="Calibri"/>
+                  <a:srgbClr val="5F6B64"/>
+                </a:solidFill>
+                <a:latin typeface="Segoe UI"/>
               </a:rPr>
               <a:t>Acme Industries  •  Industrie manufacturière</a:t>
             </a:r>
@@ -14516,9 +15323,9 @@
             <a:r>
               <a:rPr sz="800" b="0" i="0">
                 <a:solidFill>
-                  <a:srgbClr val="6B7C93"/>
-                </a:solidFill>
-                <a:latin typeface="Calibri"/>
+                  <a:srgbClr val="5F6B64"/>
+                </a:solidFill>
+                <a:latin typeface="Segoe UI"/>
               </a:rPr>
               <a:t>Acme Industries   |   2 / 23</a:t>
             </a:r>
@@ -14558,7 +15365,7 @@
             <a:avLst/>
           </a:prstGeom>
           <a:solidFill>
-            <a:srgbClr val="F4F7FD"/>
+            <a:srgbClr val="F3F0E8"/>
           </a:solidFill>
           <a:ln>
             <a:noFill/>
@@ -14594,14 +15401,14 @@
         </p:nvSpPr>
         <p:spPr>
           <a:xfrm>
-            <a:off x="0" y="0"/>
-            <a:ext cx="12188952" cy="1143000"/>
+            <a:off x="457200" y="384048"/>
+            <a:ext cx="201168" cy="201168"/>
           </a:xfrm>
           <a:prstGeom prst="rect">
             <a:avLst/>
           </a:prstGeom>
           <a:solidFill>
-            <a:srgbClr val="1B3A6B"/>
+            <a:srgbClr val="1F3D33"/>
           </a:solidFill>
           <a:ln>
             <a:noFill/>
@@ -14631,20 +15438,55 @@
       </p:sp>
       <p:sp>
         <p:nvSpPr>
-          <p:cNvPr id="4" name="Rectangle 3"/>
+          <p:cNvPr id="4" name="TextBox 3"/>
+          <p:cNvSpPr txBox="1"/>
+          <p:nvPr/>
+        </p:nvSpPr>
+        <p:spPr>
+          <a:xfrm>
+            <a:off x="822960" y="237744"/>
+            <a:ext cx="10789920" cy="685800"/>
+          </a:xfrm>
+          <a:prstGeom prst="rect">
+            <a:avLst/>
+          </a:prstGeom>
+          <a:noFill/>
+        </p:spPr>
+        <p:txBody>
+          <a:bodyPr wrap="square">
+            <a:spAutoFit/>
+          </a:bodyPr>
+          <a:lstStyle/>
+          <a:p>
+            <a:pPr algn="l"/>
+            <a:r>
+              <a:rPr sz="1560" b="1" i="0">
+                <a:solidFill>
+                  <a:srgbClr val="1E2B26"/>
+                </a:solidFill>
+                <a:latin typeface="Georgia"/>
+              </a:rPr>
+              <a:t>Par où commencer : l'effort au regard de l'impact</a:t>
+            </a:r>
+          </a:p>
+        </p:txBody>
+      </p:sp>
+      <p:sp>
+        <p:nvSpPr>
+          <p:cNvPr id="5" name="Rectangle 4"/>
           <p:cNvSpPr/>
           <p:nvPr/>
         </p:nvSpPr>
         <p:spPr>
           <a:xfrm>
-            <a:off x="0" y="1143000"/>
-            <a:ext cx="64008" cy="5715000"/>
+            <a:off x="457200" y="1024128"/>
+            <a:ext cx="2011680" cy="18288"/>
           </a:xfrm>
           <a:prstGeom prst="rect">
             <a:avLst/>
           </a:prstGeom>
           <a:solidFill>
-            <a:srgbClr val="F39C12"/>
+            <a:srgbClr val="1E2B26"/>
           </a:solidFill>
           <a:ln>
             <a:noFill/>
@@ -14672,79 +15514,9 @@
           </a:p>
         </p:txBody>
       </p:sp>
-      <p:sp>
-        <p:nvSpPr>
-          <p:cNvPr id="5" name="TextBox 4"/>
-          <p:cNvSpPr txBox="1"/>
-          <p:nvPr/>
-        </p:nvSpPr>
-        <p:spPr>
-          <a:xfrm>
-            <a:off x="292608" y="128016"/>
-            <a:ext cx="10972800" cy="292608"/>
-          </a:xfrm>
-          <a:prstGeom prst="rect">
-            <a:avLst/>
-          </a:prstGeom>
-          <a:noFill/>
-        </p:spPr>
-        <p:txBody>
-          <a:bodyPr wrap="square">
-            <a:spAutoFit/>
-          </a:bodyPr>
-          <a:lstStyle/>
-          <a:p>
-            <a:pPr algn="l"/>
-            <a:r>
-              <a:rPr sz="1100" b="1" i="0">
-                <a:solidFill>
-                  <a:srgbClr val="F39C12"/>
-                </a:solidFill>
-                <a:latin typeface="Calibri"/>
-              </a:rPr>
-              <a:t>PRIORISATION</a:t>
-            </a:r>
-          </a:p>
-        </p:txBody>
-      </p:sp>
-      <p:sp>
-        <p:nvSpPr>
-          <p:cNvPr id="6" name="TextBox 5"/>
-          <p:cNvSpPr txBox="1"/>
-          <p:nvPr/>
-        </p:nvSpPr>
-        <p:spPr>
-          <a:xfrm>
-            <a:off x="274320" y="384048"/>
-            <a:ext cx="11612880" cy="713232"/>
-          </a:xfrm>
-          <a:prstGeom prst="rect">
-            <a:avLst/>
-          </a:prstGeom>
-          <a:noFill/>
-        </p:spPr>
-        <p:txBody>
-          <a:bodyPr wrap="square">
-            <a:spAutoFit/>
-          </a:bodyPr>
-          <a:lstStyle/>
-          <a:p>
-            <a:pPr algn="l"/>
-            <a:r>
-              <a:rPr sz="2028" b="1" i="0">
-                <a:solidFill>
-                  <a:srgbClr val="FFFFFF"/>
-                </a:solidFill>
-                <a:latin typeface="Calibri"/>
-              </a:rPr>
-              <a:t>Par où commencer : l'effort au regard de l'impact</a:t>
-            </a:r>
-          </a:p>
-        </p:txBody>
-      </p:sp>
       <p:pic>
         <p:nvPicPr>
-          <p:cNvPr id="7" name="Picture 6" descr="image.png"/>
+          <p:cNvPr id="6" name="Picture 5" descr="image.png"/>
           <p:cNvPicPr>
             <a:picLocks noChangeAspect="1"/>
           </p:cNvPicPr>
@@ -14759,7 +15531,7 @@
         <p:spPr>
           <a:xfrm>
             <a:off x="320040" y="1463040"/>
-            <a:ext cx="8412480" cy="4896447"/>
+            <a:ext cx="8412480" cy="5163522"/>
           </a:xfrm>
           <a:prstGeom prst="rect">
             <a:avLst/>
@@ -14768,7 +15540,7 @@
       </p:pic>
       <p:sp>
         <p:nvSpPr>
-          <p:cNvPr id="8" name="Rounded Rectangle 7"/>
+          <p:cNvPr id="7" name="Rounded Rectangle 6"/>
           <p:cNvSpPr/>
           <p:nvPr/>
         </p:nvSpPr>
@@ -14781,11 +15553,11 @@
             <a:avLst/>
           </a:prstGeom>
           <a:solidFill>
-            <a:srgbClr val="EBF2FB"/>
+            <a:srgbClr val="E6E6DC"/>
           </a:solidFill>
           <a:ln w="15875">
             <a:solidFill>
-              <a:srgbClr val="F39C12"/>
+              <a:srgbClr val="2E5A4B"/>
             </a:solidFill>
           </a:ln>
         </p:spPr>
@@ -14813,7 +15585,7 @@
       </p:sp>
       <p:sp>
         <p:nvSpPr>
-          <p:cNvPr id="9" name="Rectangle 8"/>
+          <p:cNvPr id="8" name="Rectangle 7"/>
           <p:cNvSpPr/>
           <p:nvPr/>
         </p:nvSpPr>
@@ -14826,7 +15598,7 @@
             <a:avLst/>
           </a:prstGeom>
           <a:solidFill>
-            <a:srgbClr val="F39C12"/>
+            <a:srgbClr val="2E5A4B"/>
           </a:solidFill>
           <a:ln>
             <a:noFill/>
@@ -14856,7 +15628,7 @@
       </p:sp>
       <p:sp>
         <p:nvSpPr>
-          <p:cNvPr id="10" name="TextBox 9"/>
+          <p:cNvPr id="9" name="TextBox 8"/>
           <p:cNvSpPr txBox="1"/>
           <p:nvPr/>
         </p:nvSpPr>
@@ -14880,9 +15652,9 @@
             <a:r>
               <a:rPr sz="1200" b="1" i="0">
                 <a:solidFill>
-                  <a:srgbClr val="F39C12"/>
-                </a:solidFill>
-                <a:latin typeface="Calibri"/>
+                  <a:srgbClr val="2E5A4B"/>
+                </a:solidFill>
+                <a:latin typeface="Segoe UI"/>
               </a:rPr>
               <a:t>LECTURE MÉTIER</a:t>
             </a:r>
@@ -14891,7 +15663,7 @@
       </p:sp>
       <p:sp>
         <p:nvSpPr>
-          <p:cNvPr id="11" name="TextBox 10"/>
+          <p:cNvPr id="10" name="TextBox 9"/>
           <p:cNvSpPr txBox="1"/>
           <p:nvPr/>
         </p:nvSpPr>
@@ -14915,9 +15687,9 @@
             <a:r>
               <a:rPr sz="1300" b="0" i="0">
                 <a:solidFill>
-                  <a:srgbClr val="2C3E50"/>
-                </a:solidFill>
-                <a:latin typeface="Calibri"/>
+                  <a:srgbClr val="1E2B26"/>
+                </a:solidFill>
+                <a:latin typeface="Segoe UI"/>
               </a:rPr>
               <a:t>Trois actions combinent fort impact et effort limité — les actions 2, 3 et 4 — et peuvent être lancées immédiatement à moyens constants. Le chantier structurant du quadrant haut-droit justifie un budget et un responsable dédiés : il porte l'essentiel du potentiel de progression du score.</a:t>
             </a:r>
@@ -14926,7 +15698,7 @@
       </p:sp>
       <p:sp>
         <p:nvSpPr>
-          <p:cNvPr id="12" name="TextBox 11"/>
+          <p:cNvPr id="11" name="TextBox 10"/>
           <p:cNvSpPr txBox="1"/>
           <p:nvPr/>
         </p:nvSpPr>
@@ -14950,9 +15722,9 @@
             <a:r>
               <a:rPr sz="800" b="0" i="0">
                 <a:solidFill>
-                  <a:srgbClr val="6B7C93"/>
-                </a:solidFill>
-                <a:latin typeface="Calibri"/>
+                  <a:srgbClr val="5F6B64"/>
+                </a:solidFill>
+                <a:latin typeface="Segoe UI"/>
               </a:rPr>
               <a:t>Acme Industries   |   20 / 23</a:t>
             </a:r>
@@ -14992,7 +15764,7 @@
             <a:avLst/>
           </a:prstGeom>
           <a:solidFill>
-            <a:srgbClr val="F4F7FD"/>
+            <a:srgbClr val="F3F0E8"/>
           </a:solidFill>
           <a:ln>
             <a:noFill/>
@@ -15028,14 +15800,14 @@
         </p:nvSpPr>
         <p:spPr>
           <a:xfrm>
-            <a:off x="0" y="0"/>
-            <a:ext cx="12188952" cy="1143000"/>
+            <a:off x="457200" y="384048"/>
+            <a:ext cx="201168" cy="201168"/>
           </a:xfrm>
           <a:prstGeom prst="rect">
             <a:avLst/>
           </a:prstGeom>
           <a:solidFill>
-            <a:srgbClr val="1B3A6B"/>
+            <a:srgbClr val="1F3D33"/>
           </a:solidFill>
           <a:ln>
             <a:noFill/>
@@ -15065,20 +15837,55 @@
       </p:sp>
       <p:sp>
         <p:nvSpPr>
-          <p:cNvPr id="4" name="Rectangle 3"/>
+          <p:cNvPr id="4" name="TextBox 3"/>
+          <p:cNvSpPr txBox="1"/>
+          <p:nvPr/>
+        </p:nvSpPr>
+        <p:spPr>
+          <a:xfrm>
+            <a:off x="822960" y="237744"/>
+            <a:ext cx="10789920" cy="685800"/>
+          </a:xfrm>
+          <a:prstGeom prst="rect">
+            <a:avLst/>
+          </a:prstGeom>
+          <a:noFill/>
+        </p:spPr>
+        <p:txBody>
+          <a:bodyPr wrap="square">
+            <a:spAutoFit/>
+          </a:bodyPr>
+          <a:lstStyle/>
+          <a:p>
+            <a:pPr algn="l"/>
+            <a:r>
+              <a:rPr sz="2000" b="1" i="0">
+                <a:solidFill>
+                  <a:srgbClr val="1E2B26"/>
+                </a:solidFill>
+                <a:latin typeface="Georgia"/>
+              </a:rPr>
+              <a:t>Recommandations Prioritaires</a:t>
+            </a:r>
+          </a:p>
+        </p:txBody>
+      </p:sp>
+      <p:sp>
+        <p:nvSpPr>
+          <p:cNvPr id="5" name="Rectangle 4"/>
           <p:cNvSpPr/>
           <p:nvPr/>
         </p:nvSpPr>
         <p:spPr>
           <a:xfrm>
-            <a:off x="0" y="1143000"/>
-            <a:ext cx="64008" cy="5715000"/>
+            <a:off x="457200" y="1024128"/>
+            <a:ext cx="2011680" cy="18288"/>
           </a:xfrm>
           <a:prstGeom prst="rect">
             <a:avLst/>
           </a:prstGeom>
           <a:solidFill>
-            <a:srgbClr val="F39C12"/>
+            <a:srgbClr val="1E2B26"/>
           </a:solidFill>
           <a:ln>
             <a:noFill/>
@@ -15108,41 +15915,6 @@
       </p:sp>
       <p:sp>
         <p:nvSpPr>
-          <p:cNvPr id="5" name="TextBox 4"/>
-          <p:cNvSpPr txBox="1"/>
-          <p:nvPr/>
-        </p:nvSpPr>
-        <p:spPr>
-          <a:xfrm>
-            <a:off x="274320" y="182880"/>
-            <a:ext cx="11612880" cy="713232"/>
-          </a:xfrm>
-          <a:prstGeom prst="rect">
-            <a:avLst/>
-          </a:prstGeom>
-          <a:noFill/>
-        </p:spPr>
-        <p:txBody>
-          <a:bodyPr wrap="square">
-            <a:spAutoFit/>
-          </a:bodyPr>
-          <a:lstStyle/>
-          <a:p>
-            <a:pPr algn="l"/>
-            <a:r>
-              <a:rPr sz="2600" b="1" i="0">
-                <a:solidFill>
-                  <a:srgbClr val="FFFFFF"/>
-                </a:solidFill>
-                <a:latin typeface="Calibri"/>
-              </a:rPr>
-              <a:t>Recommandations Prioritaires</a:t>
-            </a:r>
-          </a:p>
-        </p:txBody>
-      </p:sp>
-      <p:sp>
-        <p:nvSpPr>
           <p:cNvPr id="6" name="TextBox 5"/>
           <p:cNvSpPr txBox="1"/>
           <p:nvPr/>
@@ -15167,9 +15939,9 @@
             <a:r>
               <a:rPr sz="1300" b="0" i="0">
                 <a:solidFill>
-                  <a:srgbClr val="6B7C93"/>
-                </a:solidFill>
-                <a:latin typeface="Calibri"/>
+                  <a:srgbClr val="5F6B64"/>
+                </a:solidFill>
+                <a:latin typeface="Segoe UI"/>
               </a:rPr>
               <a:t>Plan d'action priorisé — chaque levier, son bénéfice attendu et son horizon de mise en œuvre.</a:t>
             </a:r>
@@ -15191,11 +15963,11 @@
             <a:avLst/>
           </a:prstGeom>
           <a:solidFill>
-            <a:srgbClr val="EBF2FB"/>
+            <a:srgbClr val="E6E6DC"/>
           </a:solidFill>
           <a:ln w="15875">
             <a:solidFill>
-              <a:srgbClr val="27AE60"/>
+              <a:srgbClr val="2F6B4F"/>
             </a:solidFill>
           </a:ln>
         </p:spPr>
@@ -15236,7 +16008,7 @@
             <a:avLst/>
           </a:prstGeom>
           <a:solidFill>
-            <a:srgbClr val="27AE60"/>
+            <a:srgbClr val="2F6B4F"/>
           </a:solidFill>
           <a:ln>
             <a:noFill/>
@@ -15292,7 +16064,7 @@
                 <a:solidFill>
                   <a:srgbClr val="FFFFFF"/>
                 </a:solidFill>
-                <a:latin typeface="Calibri"/>
+                <a:latin typeface="Georgia"/>
               </a:rPr>
               <a:t>1</a:t>
             </a:r>
@@ -15325,11 +16097,11 @@
             <a:r>
               <a:rPr sz="1500" b="1" i="0">
                 <a:solidFill>
-                  <a:srgbClr val="2C3E50"/>
-                </a:solidFill>
-                <a:latin typeface="Calibri"/>
-              </a:rPr>
-              <a:t>Augmenter la part d'énergie renouvelable à 50%</a:t>
+                  <a:srgbClr val="1E2B26"/>
+                </a:solidFill>
+                <a:latin typeface="Georgia"/>
+              </a:rPr>
+              <a:t>Augmenter la part d'énergie renouvelable à 50 %</a:t>
             </a:r>
           </a:p>
         </p:txBody>
@@ -15360,9 +16132,9 @@
             <a:r>
               <a:rPr sz="1100" b="0" i="0">
                 <a:solidFill>
-                  <a:srgbClr val="6B7C93"/>
-                </a:solidFill>
-                <a:latin typeface="Calibri"/>
+                  <a:srgbClr val="5F6B64"/>
+                </a:solidFill>
+                <a:latin typeface="Segoe UI"/>
               </a:rPr>
               <a:t>Réduit les émissions Scope 2 et l'exposition aux prix de l'énergie ; premier levier d'une trajectoire de réduction.  —  Direction des opérations</a:t>
             </a:r>
@@ -15384,7 +16156,7 @@
             <a:avLst/>
           </a:prstGeom>
           <a:solidFill>
-            <a:srgbClr val="27AE60"/>
+            <a:srgbClr val="2F6B4F"/>
           </a:solidFill>
           <a:ln>
             <a:noFill/>
@@ -15440,7 +16212,7 @@
                 <a:solidFill>
                   <a:srgbClr val="FFFFFF"/>
                 </a:solidFill>
-                <a:latin typeface="Calibri"/>
+                <a:latin typeface="Segoe UI"/>
               </a:rPr>
               <a:t>2027</a:t>
             </a:r>
@@ -15462,11 +16234,11 @@
             <a:avLst/>
           </a:prstGeom>
           <a:solidFill>
-            <a:srgbClr val="EBF2FB"/>
+            <a:srgbClr val="E6E6DC"/>
           </a:solidFill>
           <a:ln w="15875">
             <a:solidFill>
-              <a:srgbClr val="2E86C1"/>
+              <a:srgbClr val="3D6A8A"/>
             </a:solidFill>
           </a:ln>
         </p:spPr>
@@ -15507,7 +16279,7 @@
             <a:avLst/>
           </a:prstGeom>
           <a:solidFill>
-            <a:srgbClr val="2E86C1"/>
+            <a:srgbClr val="3D6A8A"/>
           </a:solidFill>
           <a:ln>
             <a:noFill/>
@@ -15563,7 +16335,7 @@
                 <a:solidFill>
                   <a:srgbClr val="FFFFFF"/>
                 </a:solidFill>
-                <a:latin typeface="Calibri"/>
+                <a:latin typeface="Georgia"/>
               </a:rPr>
               <a:t>2</a:t>
             </a:r>
@@ -15596,9 +16368,9 @@
             <a:r>
               <a:rPr sz="1500" b="1" i="0">
                 <a:solidFill>
-                  <a:srgbClr val="2C3E50"/>
-                </a:solidFill>
-                <a:latin typeface="Calibri"/>
+                  <a:srgbClr val="1E2B26"/>
+                </a:solidFill>
+                <a:latin typeface="Georgia"/>
               </a:rPr>
               <a:t>Définir des objectifs chiffrés de parité femme-homme</a:t>
             </a:r>
@@ -15631,9 +16403,9 @@
             <a:r>
               <a:rPr sz="1100" b="0" i="0">
                 <a:solidFill>
-                  <a:srgbClr val="6B7C93"/>
-                </a:solidFill>
-                <a:latin typeface="Calibri"/>
+                  <a:srgbClr val="5F6B64"/>
+                </a:solidFill>
+                <a:latin typeface="Segoe UI"/>
               </a:rPr>
               <a:t>Renforce la diversité des équipes et l'attractivité employeur ; améliore la fidélisation des talents.  —  Direction des ressources humaines</a:t>
             </a:r>
@@ -15655,7 +16427,7 @@
             <a:avLst/>
           </a:prstGeom>
           <a:solidFill>
-            <a:srgbClr val="2E86C1"/>
+            <a:srgbClr val="3D6A8A"/>
           </a:solidFill>
           <a:ln>
             <a:noFill/>
@@ -15711,7 +16483,7 @@
                 <a:solidFill>
                   <a:srgbClr val="FFFFFF"/>
                 </a:solidFill>
-                <a:latin typeface="Calibri"/>
+                <a:latin typeface="Segoe UI"/>
               </a:rPr>
               <a:t>2026</a:t>
             </a:r>
@@ -15733,11 +16505,11 @@
             <a:avLst/>
           </a:prstGeom>
           <a:solidFill>
-            <a:srgbClr val="EBF2FB"/>
+            <a:srgbClr val="E6E6DC"/>
           </a:solidFill>
           <a:ln w="15875">
             <a:solidFill>
-              <a:srgbClr val="8E44AD"/>
+              <a:srgbClr val="6B5B86"/>
             </a:solidFill>
           </a:ln>
         </p:spPr>
@@ -15778,7 +16550,7 @@
             <a:avLst/>
           </a:prstGeom>
           <a:solidFill>
-            <a:srgbClr val="8E44AD"/>
+            <a:srgbClr val="6B5B86"/>
           </a:solidFill>
           <a:ln>
             <a:noFill/>
@@ -15834,7 +16606,7 @@
                 <a:solidFill>
                   <a:srgbClr val="FFFFFF"/>
                 </a:solidFill>
-                <a:latin typeface="Calibri"/>
+                <a:latin typeface="Georgia"/>
               </a:rPr>
               <a:t>3</a:t>
             </a:r>
@@ -15867,9 +16639,9 @@
             <a:r>
               <a:rPr sz="1500" b="1" i="0">
                 <a:solidFill>
-                  <a:srgbClr val="2C3E50"/>
-                </a:solidFill>
-                <a:latin typeface="Calibri"/>
+                  <a:srgbClr val="1E2B26"/>
+                </a:solidFill>
+                <a:latin typeface="Georgia"/>
               </a:rPr>
               <a:t>Commander un audit ESG indépendant annuel</a:t>
             </a:r>
@@ -15902,9 +16674,9 @@
             <a:r>
               <a:rPr sz="1100" b="0" i="0">
                 <a:solidFill>
-                  <a:srgbClr val="6B7C93"/>
-                </a:solidFill>
-                <a:latin typeface="Calibri"/>
+                  <a:srgbClr val="5F6B64"/>
+                </a:solidFill>
+                <a:latin typeface="Segoe UI"/>
               </a:rPr>
               <a:t>Apporte l'assurance d'un tiers désormais requise par la CSRD ; renforce la confiance des investisseurs.  —  Direction générale</a:t>
             </a:r>
@@ -15926,7 +16698,7 @@
             <a:avLst/>
           </a:prstGeom>
           <a:solidFill>
-            <a:srgbClr val="8E44AD"/>
+            <a:srgbClr val="6B5B86"/>
           </a:solidFill>
           <a:ln>
             <a:noFill/>
@@ -15982,7 +16754,7 @@
                 <a:solidFill>
                   <a:srgbClr val="FFFFFF"/>
                 </a:solidFill>
-                <a:latin typeface="Calibri"/>
+                <a:latin typeface="Segoe UI"/>
               </a:rPr>
               <a:t>Annuel</a:t>
             </a:r>
@@ -16004,11 +16776,11 @@
             <a:avLst/>
           </a:prstGeom>
           <a:solidFill>
-            <a:srgbClr val="EBF2FB"/>
+            <a:srgbClr val="E6E6DC"/>
           </a:solidFill>
           <a:ln w="15875">
             <a:solidFill>
-              <a:srgbClr val="8E44AD"/>
+              <a:srgbClr val="6B5B86"/>
             </a:solidFill>
           </a:ln>
         </p:spPr>
@@ -16049,7 +16821,7 @@
             <a:avLst/>
           </a:prstGeom>
           <a:solidFill>
-            <a:srgbClr val="8E44AD"/>
+            <a:srgbClr val="6B5B86"/>
           </a:solidFill>
           <a:ln>
             <a:noFill/>
@@ -16105,7 +16877,7 @@
                 <a:solidFill>
                   <a:srgbClr val="FFFFFF"/>
                 </a:solidFill>
-                <a:latin typeface="Calibri"/>
+                <a:latin typeface="Georgia"/>
               </a:rPr>
               <a:t>4</a:t>
             </a:r>
@@ -16138,9 +16910,9 @@
             <a:r>
               <a:rPr sz="1500" b="1" i="0">
                 <a:solidFill>
-                  <a:srgbClr val="2C3E50"/>
-                </a:solidFill>
-                <a:latin typeface="Calibri"/>
+                  <a:srgbClr val="1E2B26"/>
+                </a:solidFill>
+                <a:latin typeface="Georgia"/>
               </a:rPr>
               <a:t>Aligner la stratégie ESG sur les ODD &amp; la TCFD</a:t>
             </a:r>
@@ -16173,9 +16945,9 @@
             <a:r>
               <a:rPr sz="1100" b="0" i="0">
                 <a:solidFill>
-                  <a:srgbClr val="6B7C93"/>
-                </a:solidFill>
-                <a:latin typeface="Calibri"/>
+                  <a:srgbClr val="5F6B64"/>
+                </a:solidFill>
+                <a:latin typeface="Segoe UI"/>
               </a:rPr>
               <a:t>Renforce l'alignement sur les cadres de référence (ODD, TCFD) et la comparabilité du reporting.  —  Direction RSE</a:t>
             </a:r>
@@ -16197,7 +16969,7 @@
             <a:avLst/>
           </a:prstGeom>
           <a:solidFill>
-            <a:srgbClr val="8E44AD"/>
+            <a:srgbClr val="6B5B86"/>
           </a:solidFill>
           <a:ln>
             <a:noFill/>
@@ -16253,7 +17025,7 @@
                 <a:solidFill>
                   <a:srgbClr val="FFFFFF"/>
                 </a:solidFill>
-                <a:latin typeface="Calibri"/>
+                <a:latin typeface="Segoe UI"/>
               </a:rPr>
               <a:t>Continu</a:t>
             </a:r>
@@ -16286,9 +17058,9 @@
             <a:r>
               <a:rPr sz="800" b="0" i="0">
                 <a:solidFill>
-                  <a:srgbClr val="6B7C93"/>
-                </a:solidFill>
-                <a:latin typeface="Calibri"/>
+                  <a:srgbClr val="5F6B64"/>
+                </a:solidFill>
+                <a:latin typeface="Segoe UI"/>
               </a:rPr>
               <a:t>Acme Industries   |   21 / 23</a:t>
             </a:r>
@@ -16328,7 +17100,7 @@
             <a:avLst/>
           </a:prstGeom>
           <a:solidFill>
-            <a:srgbClr val="F4F7FD"/>
+            <a:srgbClr val="F3F0E8"/>
           </a:solidFill>
           <a:ln>
             <a:noFill/>
@@ -16364,14 +17136,14 @@
         </p:nvSpPr>
         <p:spPr>
           <a:xfrm>
-            <a:off x="0" y="0"/>
-            <a:ext cx="12188952" cy="1143000"/>
+            <a:off x="457200" y="384048"/>
+            <a:ext cx="201168" cy="201168"/>
           </a:xfrm>
           <a:prstGeom prst="rect">
             <a:avLst/>
           </a:prstGeom>
           <a:solidFill>
-            <a:srgbClr val="1B3A6B"/>
+            <a:srgbClr val="1F3D33"/>
           </a:solidFill>
           <a:ln>
             <a:noFill/>
@@ -16401,20 +17173,55 @@
       </p:sp>
       <p:sp>
         <p:nvSpPr>
-          <p:cNvPr id="4" name="Rectangle 3"/>
+          <p:cNvPr id="4" name="TextBox 3"/>
+          <p:cNvSpPr txBox="1"/>
+          <p:nvPr/>
+        </p:nvSpPr>
+        <p:spPr>
+          <a:xfrm>
+            <a:off x="822960" y="237744"/>
+            <a:ext cx="10789920" cy="685800"/>
+          </a:xfrm>
+          <a:prstGeom prst="rect">
+            <a:avLst/>
+          </a:prstGeom>
+          <a:noFill/>
+        </p:spPr>
+        <p:txBody>
+          <a:bodyPr wrap="square">
+            <a:spAutoFit/>
+          </a:bodyPr>
+          <a:lstStyle/>
+          <a:p>
+            <a:pPr algn="l"/>
+            <a:r>
+              <a:rPr sz="1800" b="1" i="0">
+                <a:solidFill>
+                  <a:srgbClr val="1E2B26"/>
+                </a:solidFill>
+                <a:latin typeface="Georgia"/>
+              </a:rPr>
+              <a:t>Un plan d'action ESG sur 12 mois</a:t>
+            </a:r>
+          </a:p>
+        </p:txBody>
+      </p:sp>
+      <p:sp>
+        <p:nvSpPr>
+          <p:cNvPr id="5" name="Rectangle 4"/>
           <p:cNvSpPr/>
           <p:nvPr/>
         </p:nvSpPr>
         <p:spPr>
           <a:xfrm>
-            <a:off x="0" y="1143000"/>
-            <a:ext cx="64008" cy="5715000"/>
+            <a:off x="457200" y="1024128"/>
+            <a:ext cx="2011680" cy="18288"/>
           </a:xfrm>
           <a:prstGeom prst="rect">
             <a:avLst/>
           </a:prstGeom>
           <a:solidFill>
-            <a:srgbClr val="F39C12"/>
+            <a:srgbClr val="1E2B26"/>
           </a:solidFill>
           <a:ln>
             <a:noFill/>
@@ -16444,77 +17251,7 @@
       </p:sp>
       <p:sp>
         <p:nvSpPr>
-          <p:cNvPr id="5" name="TextBox 4"/>
-          <p:cNvSpPr txBox="1"/>
-          <p:nvPr/>
-        </p:nvSpPr>
-        <p:spPr>
-          <a:xfrm>
-            <a:off x="292608" y="128016"/>
-            <a:ext cx="10972800" cy="292608"/>
-          </a:xfrm>
-          <a:prstGeom prst="rect">
-            <a:avLst/>
-          </a:prstGeom>
-          <a:noFill/>
-        </p:spPr>
-        <p:txBody>
-          <a:bodyPr wrap="square">
-            <a:spAutoFit/>
-          </a:bodyPr>
-          <a:lstStyle/>
-          <a:p>
-            <a:pPr algn="l"/>
-            <a:r>
-              <a:rPr sz="1100" b="1" i="0">
-                <a:solidFill>
-                  <a:srgbClr val="F39C12"/>
-                </a:solidFill>
-                <a:latin typeface="Calibri"/>
-              </a:rPr>
-              <a:t>FEUILLE DE ROUTE 12 MOIS</a:t>
-            </a:r>
-          </a:p>
-        </p:txBody>
-      </p:sp>
-      <p:sp>
-        <p:nvSpPr>
-          <p:cNvPr id="6" name="TextBox 5"/>
-          <p:cNvSpPr txBox="1"/>
-          <p:nvPr/>
-        </p:nvSpPr>
-        <p:spPr>
-          <a:xfrm>
-            <a:off x="274320" y="384048"/>
-            <a:ext cx="11612880" cy="713232"/>
-          </a:xfrm>
-          <a:prstGeom prst="rect">
-            <a:avLst/>
-          </a:prstGeom>
-          <a:noFill/>
-        </p:spPr>
-        <p:txBody>
-          <a:bodyPr wrap="square">
-            <a:spAutoFit/>
-          </a:bodyPr>
-          <a:lstStyle/>
-          <a:p>
-            <a:pPr algn="l"/>
-            <a:r>
-              <a:rPr sz="2340" b="1" i="0">
-                <a:solidFill>
-                  <a:srgbClr val="FFFFFF"/>
-                </a:solidFill>
-                <a:latin typeface="Calibri"/>
-              </a:rPr>
-              <a:t>Un plan d'action ESG sur 12 mois</a:t>
-            </a:r>
-          </a:p>
-        </p:txBody>
-      </p:sp>
-      <p:sp>
-        <p:nvSpPr>
-          <p:cNvPr id="7" name="Rounded Rectangle 6"/>
+          <p:cNvPr id="6" name="Rounded Rectangle 5"/>
           <p:cNvSpPr/>
           <p:nvPr/>
         </p:nvSpPr>
@@ -16527,7 +17264,7 @@
             <a:avLst/>
           </a:prstGeom>
           <a:solidFill>
-            <a:srgbClr val="1B3A6B"/>
+            <a:srgbClr val="1F3D33"/>
           </a:solidFill>
           <a:ln>
             <a:noFill/>
@@ -16557,7 +17294,7 @@
       </p:sp>
       <p:sp>
         <p:nvSpPr>
-          <p:cNvPr id="8" name="TextBox 7"/>
+          <p:cNvPr id="7" name="TextBox 6"/>
           <p:cNvSpPr txBox="1"/>
           <p:nvPr/>
         </p:nvSpPr>
@@ -16581,9 +17318,9 @@
             <a:r>
               <a:rPr sz="1900" b="1" i="0">
                 <a:solidFill>
-                  <a:srgbClr val="F39C12"/>
-                </a:solidFill>
-                <a:latin typeface="Calibri"/>
+                  <a:srgbClr val="2E5A4B"/>
+                </a:solidFill>
+                <a:latin typeface="Georgia"/>
               </a:rPr>
               <a:t>0-3 mois</a:t>
             </a:r>
@@ -16592,7 +17329,7 @@
       </p:sp>
       <p:sp>
         <p:nvSpPr>
-          <p:cNvPr id="9" name="TextBox 8"/>
+          <p:cNvPr id="8" name="TextBox 7"/>
           <p:cNvSpPr txBox="1"/>
           <p:nvPr/>
         </p:nvSpPr>
@@ -16616,9 +17353,9 @@
             <a:r>
               <a:rPr sz="1100" b="0" i="0">
                 <a:solidFill>
-                  <a:srgbClr val="AEC6E8"/>
-                </a:solidFill>
-                <a:latin typeface="Calibri"/>
+                  <a:srgbClr val="C9D8C5"/>
+                </a:solidFill>
+                <a:latin typeface="Segoe UI"/>
               </a:rPr>
               <a:t>Quick wins &amp; fondations</a:t>
             </a:r>
@@ -16627,7 +17364,7 @@
       </p:sp>
       <p:sp>
         <p:nvSpPr>
-          <p:cNvPr id="10" name="Rounded Rectangle 9"/>
+          <p:cNvPr id="9" name="Rounded Rectangle 8"/>
           <p:cNvSpPr/>
           <p:nvPr/>
         </p:nvSpPr>
@@ -16640,11 +17377,11 @@
             <a:avLst/>
           </a:prstGeom>
           <a:solidFill>
-            <a:srgbClr val="EBF2FB"/>
+            <a:srgbClr val="E6E6DC"/>
           </a:solidFill>
           <a:ln w="12700">
             <a:solidFill>
-              <a:srgbClr val="8E44AD"/>
+              <a:srgbClr val="6B5B86"/>
             </a:solidFill>
           </a:ln>
         </p:spPr>
@@ -16672,7 +17409,7 @@
       </p:sp>
       <p:sp>
         <p:nvSpPr>
-          <p:cNvPr id="11" name="Rectangle 10"/>
+          <p:cNvPr id="10" name="Rectangle 9"/>
           <p:cNvSpPr/>
           <p:nvPr/>
         </p:nvSpPr>
@@ -16685,7 +17422,7 @@
             <a:avLst/>
           </a:prstGeom>
           <a:solidFill>
-            <a:srgbClr val="8E44AD"/>
+            <a:srgbClr val="6B5B86"/>
           </a:solidFill>
           <a:ln>
             <a:noFill/>
@@ -16715,7 +17452,7 @@
       </p:sp>
       <p:sp>
         <p:nvSpPr>
-          <p:cNvPr id="12" name="TextBox 11"/>
+          <p:cNvPr id="11" name="TextBox 10"/>
           <p:cNvSpPr txBox="1"/>
           <p:nvPr/>
         </p:nvSpPr>
@@ -16739,9 +17476,9 @@
             <a:r>
               <a:rPr sz="1200" b="1" i="0">
                 <a:solidFill>
-                  <a:srgbClr val="2C3E50"/>
-                </a:solidFill>
-                <a:latin typeface="Calibri"/>
+                  <a:srgbClr val="1E2B26"/>
+                </a:solidFill>
+                <a:latin typeface="Segoe UI"/>
               </a:rPr>
               <a:t>Commander un audit ESG indépendant annuel</a:t>
             </a:r>
@@ -16750,7 +17487,7 @@
       </p:sp>
       <p:sp>
         <p:nvSpPr>
-          <p:cNvPr id="13" name="Rounded Rectangle 12"/>
+          <p:cNvPr id="12" name="Rounded Rectangle 11"/>
           <p:cNvSpPr/>
           <p:nvPr/>
         </p:nvSpPr>
@@ -16763,7 +17500,7 @@
             <a:avLst/>
           </a:prstGeom>
           <a:solidFill>
-            <a:srgbClr val="F39C12"/>
+            <a:srgbClr val="2E5A4B"/>
           </a:solidFill>
           <a:ln>
             <a:noFill/>
@@ -16793,7 +17530,7 @@
       </p:sp>
       <p:sp>
         <p:nvSpPr>
-          <p:cNvPr id="14" name="TextBox 13"/>
+          <p:cNvPr id="13" name="TextBox 12"/>
           <p:cNvSpPr txBox="1"/>
           <p:nvPr/>
         </p:nvSpPr>
@@ -16817,9 +17554,9 @@
             <a:r>
               <a:rPr sz="850" b="1" i="0">
                 <a:solidFill>
-                  <a:srgbClr val="1B3A6B"/>
-                </a:solidFill>
-                <a:latin typeface="Calibri"/>
+                  <a:srgbClr val="1F3D33"/>
+                </a:solidFill>
+                <a:latin typeface="Segoe UI"/>
               </a:rPr>
               <a:t>QUICK WIN</a:t>
             </a:r>
@@ -16828,7 +17565,7 @@
       </p:sp>
       <p:sp>
         <p:nvSpPr>
-          <p:cNvPr id="15" name="Rounded Rectangle 14"/>
+          <p:cNvPr id="14" name="Rounded Rectangle 13"/>
           <p:cNvSpPr/>
           <p:nvPr/>
         </p:nvSpPr>
@@ -16841,7 +17578,7 @@
             <a:avLst/>
           </a:prstGeom>
           <a:solidFill>
-            <a:srgbClr val="1B3A6B"/>
+            <a:srgbClr val="1F3D33"/>
           </a:solidFill>
           <a:ln>
             <a:noFill/>
@@ -16871,7 +17608,7 @@
       </p:sp>
       <p:sp>
         <p:nvSpPr>
-          <p:cNvPr id="16" name="TextBox 15"/>
+          <p:cNvPr id="15" name="TextBox 14"/>
           <p:cNvSpPr txBox="1"/>
           <p:nvPr/>
         </p:nvSpPr>
@@ -16895,9 +17632,9 @@
             <a:r>
               <a:rPr sz="1900" b="1" i="0">
                 <a:solidFill>
-                  <a:srgbClr val="F39C12"/>
-                </a:solidFill>
-                <a:latin typeface="Calibri"/>
+                  <a:srgbClr val="2E5A4B"/>
+                </a:solidFill>
+                <a:latin typeface="Georgia"/>
               </a:rPr>
               <a:t>3-6 mois</a:t>
             </a:r>
@@ -16906,7 +17643,7 @@
       </p:sp>
       <p:sp>
         <p:nvSpPr>
-          <p:cNvPr id="17" name="TextBox 16"/>
+          <p:cNvPr id="16" name="TextBox 15"/>
           <p:cNvSpPr txBox="1"/>
           <p:nvPr/>
         </p:nvSpPr>
@@ -16930,9 +17667,9 @@
             <a:r>
               <a:rPr sz="1100" b="0" i="0">
                 <a:solidFill>
-                  <a:srgbClr val="AEC6E8"/>
-                </a:solidFill>
-                <a:latin typeface="Calibri"/>
+                  <a:srgbClr val="C9D8C5"/>
+                </a:solidFill>
+                <a:latin typeface="Segoe UI"/>
               </a:rPr>
               <a:t>Structuration</a:t>
             </a:r>
@@ -16941,7 +17678,7 @@
       </p:sp>
       <p:sp>
         <p:nvSpPr>
-          <p:cNvPr id="18" name="Rounded Rectangle 17"/>
+          <p:cNvPr id="17" name="Rounded Rectangle 16"/>
           <p:cNvSpPr/>
           <p:nvPr/>
         </p:nvSpPr>
@@ -16954,11 +17691,11 @@
             <a:avLst/>
           </a:prstGeom>
           <a:solidFill>
-            <a:srgbClr val="EBF2FB"/>
+            <a:srgbClr val="E6E6DC"/>
           </a:solidFill>
           <a:ln w="12700">
             <a:solidFill>
-              <a:srgbClr val="2E86C1"/>
+              <a:srgbClr val="3D6A8A"/>
             </a:solidFill>
           </a:ln>
         </p:spPr>
@@ -16986,7 +17723,7 @@
       </p:sp>
       <p:sp>
         <p:nvSpPr>
-          <p:cNvPr id="19" name="Rectangle 18"/>
+          <p:cNvPr id="18" name="Rectangle 17"/>
           <p:cNvSpPr/>
           <p:nvPr/>
         </p:nvSpPr>
@@ -16999,7 +17736,7 @@
             <a:avLst/>
           </a:prstGeom>
           <a:solidFill>
-            <a:srgbClr val="2E86C1"/>
+            <a:srgbClr val="3D6A8A"/>
           </a:solidFill>
           <a:ln>
             <a:noFill/>
@@ -17029,7 +17766,7 @@
       </p:sp>
       <p:sp>
         <p:nvSpPr>
-          <p:cNvPr id="20" name="TextBox 19"/>
+          <p:cNvPr id="19" name="TextBox 18"/>
           <p:cNvSpPr txBox="1"/>
           <p:nvPr/>
         </p:nvSpPr>
@@ -17053,9 +17790,9 @@
             <a:r>
               <a:rPr sz="1200" b="1" i="0">
                 <a:solidFill>
-                  <a:srgbClr val="2C3E50"/>
-                </a:solidFill>
-                <a:latin typeface="Calibri"/>
+                  <a:srgbClr val="1E2B26"/>
+                </a:solidFill>
+                <a:latin typeface="Segoe UI"/>
               </a:rPr>
               <a:t>Définir des objectifs chiffrés de parité femme-homme</a:t>
             </a:r>
@@ -17064,7 +17801,7 @@
       </p:sp>
       <p:sp>
         <p:nvSpPr>
-          <p:cNvPr id="21" name="Rounded Rectangle 20"/>
+          <p:cNvPr id="20" name="Rounded Rectangle 19"/>
           <p:cNvSpPr/>
           <p:nvPr/>
         </p:nvSpPr>
@@ -17077,7 +17814,7 @@
             <a:avLst/>
           </a:prstGeom>
           <a:solidFill>
-            <a:srgbClr val="F39C12"/>
+            <a:srgbClr val="2E5A4B"/>
           </a:solidFill>
           <a:ln>
             <a:noFill/>
@@ -17107,7 +17844,7 @@
       </p:sp>
       <p:sp>
         <p:nvSpPr>
-          <p:cNvPr id="22" name="TextBox 21"/>
+          <p:cNvPr id="21" name="TextBox 20"/>
           <p:cNvSpPr txBox="1"/>
           <p:nvPr/>
         </p:nvSpPr>
@@ -17131,9 +17868,9 @@
             <a:r>
               <a:rPr sz="850" b="1" i="0">
                 <a:solidFill>
-                  <a:srgbClr val="1B3A6B"/>
-                </a:solidFill>
-                <a:latin typeface="Calibri"/>
+                  <a:srgbClr val="1F3D33"/>
+                </a:solidFill>
+                <a:latin typeface="Segoe UI"/>
               </a:rPr>
               <a:t>QUICK WIN</a:t>
             </a:r>
@@ -17142,7 +17879,7 @@
       </p:sp>
       <p:sp>
         <p:nvSpPr>
-          <p:cNvPr id="23" name="Rounded Rectangle 22"/>
+          <p:cNvPr id="22" name="Rounded Rectangle 21"/>
           <p:cNvSpPr/>
           <p:nvPr/>
         </p:nvSpPr>
@@ -17155,11 +17892,11 @@
             <a:avLst/>
           </a:prstGeom>
           <a:solidFill>
-            <a:srgbClr val="EBF2FB"/>
+            <a:srgbClr val="E6E6DC"/>
           </a:solidFill>
           <a:ln w="12700">
             <a:solidFill>
-              <a:srgbClr val="8E44AD"/>
+              <a:srgbClr val="6B5B86"/>
             </a:solidFill>
           </a:ln>
         </p:spPr>
@@ -17187,7 +17924,7 @@
       </p:sp>
       <p:sp>
         <p:nvSpPr>
-          <p:cNvPr id="24" name="Rectangle 23"/>
+          <p:cNvPr id="23" name="Rectangle 22"/>
           <p:cNvSpPr/>
           <p:nvPr/>
         </p:nvSpPr>
@@ -17200,7 +17937,7 @@
             <a:avLst/>
           </a:prstGeom>
           <a:solidFill>
-            <a:srgbClr val="8E44AD"/>
+            <a:srgbClr val="6B5B86"/>
           </a:solidFill>
           <a:ln>
             <a:noFill/>
@@ -17230,7 +17967,7 @@
       </p:sp>
       <p:sp>
         <p:nvSpPr>
-          <p:cNvPr id="25" name="TextBox 24"/>
+          <p:cNvPr id="24" name="TextBox 23"/>
           <p:cNvSpPr txBox="1"/>
           <p:nvPr/>
         </p:nvSpPr>
@@ -17254,9 +17991,9 @@
             <a:r>
               <a:rPr sz="1200" b="1" i="0">
                 <a:solidFill>
-                  <a:srgbClr val="2C3E50"/>
-                </a:solidFill>
-                <a:latin typeface="Calibri"/>
+                  <a:srgbClr val="1E2B26"/>
+                </a:solidFill>
+                <a:latin typeface="Segoe UI"/>
               </a:rPr>
               <a:t>Aligner la stratégie ESG sur les ODD &amp; la TCFD</a:t>
             </a:r>
@@ -17265,7 +18002,7 @@
       </p:sp>
       <p:sp>
         <p:nvSpPr>
-          <p:cNvPr id="26" name="Rounded Rectangle 25"/>
+          <p:cNvPr id="25" name="Rounded Rectangle 24"/>
           <p:cNvSpPr/>
           <p:nvPr/>
         </p:nvSpPr>
@@ -17278,7 +18015,7 @@
             <a:avLst/>
           </a:prstGeom>
           <a:solidFill>
-            <a:srgbClr val="1B3A6B"/>
+            <a:srgbClr val="1F3D33"/>
           </a:solidFill>
           <a:ln>
             <a:noFill/>
@@ -17308,7 +18045,7 @@
       </p:sp>
       <p:sp>
         <p:nvSpPr>
-          <p:cNvPr id="27" name="TextBox 26"/>
+          <p:cNvPr id="26" name="TextBox 25"/>
           <p:cNvSpPr txBox="1"/>
           <p:nvPr/>
         </p:nvSpPr>
@@ -17332,9 +18069,9 @@
             <a:r>
               <a:rPr sz="1900" b="1" i="0">
                 <a:solidFill>
-                  <a:srgbClr val="F39C12"/>
-                </a:solidFill>
-                <a:latin typeface="Calibri"/>
+                  <a:srgbClr val="2E5A4B"/>
+                </a:solidFill>
+                <a:latin typeface="Georgia"/>
               </a:rPr>
               <a:t>6-12 mois</a:t>
             </a:r>
@@ -17343,7 +18080,7 @@
       </p:sp>
       <p:sp>
         <p:nvSpPr>
-          <p:cNvPr id="28" name="TextBox 27"/>
+          <p:cNvPr id="27" name="TextBox 26"/>
           <p:cNvSpPr txBox="1"/>
           <p:nvPr/>
         </p:nvSpPr>
@@ -17367,9 +18104,9 @@
             <a:r>
               <a:rPr sz="1100" b="0" i="0">
                 <a:solidFill>
-                  <a:srgbClr val="AEC6E8"/>
-                </a:solidFill>
-                <a:latin typeface="Calibri"/>
+                  <a:srgbClr val="C9D8C5"/>
+                </a:solidFill>
+                <a:latin typeface="Segoe UI"/>
               </a:rPr>
               <a:t>Deploiement</a:t>
             </a:r>
@@ -17378,7 +18115,7 @@
       </p:sp>
       <p:sp>
         <p:nvSpPr>
-          <p:cNvPr id="29" name="Rounded Rectangle 28"/>
+          <p:cNvPr id="28" name="Rounded Rectangle 27"/>
           <p:cNvSpPr/>
           <p:nvPr/>
         </p:nvSpPr>
@@ -17391,11 +18128,11 @@
             <a:avLst/>
           </a:prstGeom>
           <a:solidFill>
-            <a:srgbClr val="EBF2FB"/>
+            <a:srgbClr val="E6E6DC"/>
           </a:solidFill>
           <a:ln w="12700">
             <a:solidFill>
-              <a:srgbClr val="27AE60"/>
+              <a:srgbClr val="2F6B4F"/>
             </a:solidFill>
           </a:ln>
         </p:spPr>
@@ -17423,7 +18160,7 @@
       </p:sp>
       <p:sp>
         <p:nvSpPr>
-          <p:cNvPr id="30" name="Rectangle 29"/>
+          <p:cNvPr id="29" name="Rectangle 28"/>
           <p:cNvSpPr/>
           <p:nvPr/>
         </p:nvSpPr>
@@ -17436,7 +18173,7 @@
             <a:avLst/>
           </a:prstGeom>
           <a:solidFill>
-            <a:srgbClr val="27AE60"/>
+            <a:srgbClr val="2F6B4F"/>
           </a:solidFill>
           <a:ln>
             <a:noFill/>
@@ -17466,7 +18203,7 @@
       </p:sp>
       <p:sp>
         <p:nvSpPr>
-          <p:cNvPr id="31" name="TextBox 30"/>
+          <p:cNvPr id="30" name="TextBox 29"/>
           <p:cNvSpPr txBox="1"/>
           <p:nvPr/>
         </p:nvSpPr>
@@ -17490,18 +18227,18 @@
             <a:r>
               <a:rPr sz="1200" b="1" i="0">
                 <a:solidFill>
-                  <a:srgbClr val="2C3E50"/>
-                </a:solidFill>
-                <a:latin typeface="Calibri"/>
-              </a:rPr>
-              <a:t>Augmenter la part d'énergie renouvelable à 50%</a:t>
-            </a:r>
-          </a:p>
-        </p:txBody>
-      </p:sp>
-      <p:sp>
-        <p:nvSpPr>
-          <p:cNvPr id="32" name="TextBox 31"/>
+                  <a:srgbClr val="1E2B26"/>
+                </a:solidFill>
+                <a:latin typeface="Segoe UI"/>
+              </a:rPr>
+              <a:t>Augmenter la part d'énergie renouvelable à 50 %</a:t>
+            </a:r>
+          </a:p>
+        </p:txBody>
+      </p:sp>
+      <p:sp>
+        <p:nvSpPr>
+          <p:cNvPr id="31" name="TextBox 30"/>
           <p:cNvSpPr txBox="1"/>
           <p:nvPr/>
         </p:nvSpPr>
@@ -17525,9 +18262,9 @@
             <a:r>
               <a:rPr sz="800" b="0" i="0">
                 <a:solidFill>
-                  <a:srgbClr val="6B7C93"/>
-                </a:solidFill>
-                <a:latin typeface="Calibri"/>
+                  <a:srgbClr val="5F6B64"/>
+                </a:solidFill>
+                <a:latin typeface="Segoe UI"/>
               </a:rPr>
               <a:t>Acme Industries   |   22 / 23</a:t>
             </a:r>
@@ -17567,7 +18304,7 @@
             <a:avLst/>
           </a:prstGeom>
           <a:solidFill>
-            <a:srgbClr val="1B3A6B"/>
+            <a:srgbClr val="1F3D33"/>
           </a:solidFill>
           <a:ln>
             <a:noFill/>
@@ -17610,7 +18347,7 @@
             <a:avLst/>
           </a:prstGeom>
           <a:solidFill>
-            <a:srgbClr val="F39C12"/>
+            <a:srgbClr val="2E5A4B"/>
           </a:solidFill>
           <a:ln>
             <a:noFill/>
@@ -17664,9 +18401,9 @@
             <a:r>
               <a:rPr sz="3000" b="1" i="0">
                 <a:solidFill>
-                  <a:srgbClr val="FFFFFF"/>
-                </a:solidFill>
-                <a:latin typeface="Calibri"/>
+                  <a:srgbClr val="F3F0E8"/>
+                </a:solidFill>
+                <a:latin typeface="Georgia"/>
               </a:rPr>
               <a:t>Conclusion &amp; Engagements</a:t>
             </a:r>
@@ -17688,7 +18425,7 @@
             <a:avLst/>
           </a:prstGeom>
           <a:solidFill>
-            <a:srgbClr val="F39C12"/>
+            <a:srgbClr val="2E5A4B"/>
           </a:solidFill>
           <a:ln>
             <a:noFill/>
@@ -17742,9 +18479,9 @@
             <a:r>
               <a:rPr sz="2000" b="1" i="0">
                 <a:solidFill>
-                  <a:srgbClr val="FFFFFF"/>
-                </a:solidFill>
-                <a:latin typeface="Calibri"/>
+                  <a:srgbClr val="F3F0E8"/>
+                </a:solidFill>
+                <a:latin typeface="Georgia"/>
               </a:rPr>
               <a:t>Acme Industries affiche un profil ESG solide (66/100, A), porté par la gouvernance (75/100) ; le social (55/100) concentre le potentiel de progression.</a:t>
             </a:r>
@@ -17777,9 +18514,9 @@
             <a:r>
               <a:rPr sz="1300" b="1" i="0">
                 <a:solidFill>
-                  <a:srgbClr val="F39C12"/>
-                </a:solidFill>
-                <a:latin typeface="Calibri"/>
+                  <a:srgbClr val="2E5A4B"/>
+                </a:solidFill>
+                <a:latin typeface="Segoe UI"/>
               </a:rPr>
               <a:t>NOS ENGAGEMENTS PRIORITAIRES</a:t>
             </a:r>
@@ -17812,9 +18549,9 @@
             <a:r>
               <a:rPr sz="3000" b="1" i="0">
                 <a:solidFill>
-                  <a:srgbClr val="F39C12"/>
-                </a:solidFill>
-                <a:latin typeface="Calibri"/>
+                  <a:srgbClr val="2E5A4B"/>
+                </a:solidFill>
+                <a:latin typeface="Georgia"/>
               </a:rPr>
               <a:t>01</a:t>
             </a:r>
@@ -17847,11 +18584,11 @@
             <a:r>
               <a:rPr sz="1600" b="1" i="0">
                 <a:solidFill>
-                  <a:srgbClr val="FFFFFF"/>
-                </a:solidFill>
-                <a:latin typeface="Calibri"/>
-              </a:rPr>
-              <a:t>Augmenter la part d'énergie renouvelable à 50%</a:t>
+                  <a:srgbClr val="F3F0E8"/>
+                </a:solidFill>
+                <a:latin typeface="Segoe UI"/>
+              </a:rPr>
+              <a:t>Augmenter la part d'énergie renouvelable à 50 %</a:t>
             </a:r>
           </a:p>
         </p:txBody>
@@ -17882,9 +18619,9 @@
             <a:r>
               <a:rPr sz="1300" b="1" i="0">
                 <a:solidFill>
-                  <a:srgbClr val="AEC6E8"/>
-                </a:solidFill>
-                <a:latin typeface="Calibri"/>
+                  <a:srgbClr val="C9D8C5"/>
+                </a:solidFill>
+                <a:latin typeface="Segoe UI"/>
               </a:rPr>
               <a:t>2027</a:t>
             </a:r>
@@ -17960,9 +18697,9 @@
             <a:r>
               <a:rPr sz="3000" b="1" i="0">
                 <a:solidFill>
-                  <a:srgbClr val="F39C12"/>
-                </a:solidFill>
-                <a:latin typeface="Calibri"/>
+                  <a:srgbClr val="2E5A4B"/>
+                </a:solidFill>
+                <a:latin typeface="Georgia"/>
               </a:rPr>
               <a:t>02</a:t>
             </a:r>
@@ -17995,9 +18732,9 @@
             <a:r>
               <a:rPr sz="1600" b="1" i="0">
                 <a:solidFill>
-                  <a:srgbClr val="FFFFFF"/>
-                </a:solidFill>
-                <a:latin typeface="Calibri"/>
+                  <a:srgbClr val="F3F0E8"/>
+                </a:solidFill>
+                <a:latin typeface="Segoe UI"/>
               </a:rPr>
               <a:t>Définir des objectifs chiffrés de parité femme-homme</a:t>
             </a:r>
@@ -18030,9 +18767,9 @@
             <a:r>
               <a:rPr sz="1300" b="1" i="0">
                 <a:solidFill>
-                  <a:srgbClr val="AEC6E8"/>
-                </a:solidFill>
-                <a:latin typeface="Calibri"/>
+                  <a:srgbClr val="C9D8C5"/>
+                </a:solidFill>
+                <a:latin typeface="Segoe UI"/>
               </a:rPr>
               <a:t>2026</a:t>
             </a:r>
@@ -18108,9 +18845,9 @@
             <a:r>
               <a:rPr sz="3000" b="1" i="0">
                 <a:solidFill>
-                  <a:srgbClr val="F39C12"/>
-                </a:solidFill>
-                <a:latin typeface="Calibri"/>
+                  <a:srgbClr val="2E5A4B"/>
+                </a:solidFill>
+                <a:latin typeface="Georgia"/>
               </a:rPr>
               <a:t>03</a:t>
             </a:r>
@@ -18143,9 +18880,9 @@
             <a:r>
               <a:rPr sz="1600" b="1" i="0">
                 <a:solidFill>
-                  <a:srgbClr val="FFFFFF"/>
-                </a:solidFill>
-                <a:latin typeface="Calibri"/>
+                  <a:srgbClr val="F3F0E8"/>
+                </a:solidFill>
+                <a:latin typeface="Segoe UI"/>
               </a:rPr>
               <a:t>Commander un audit ESG indépendant annuel</a:t>
             </a:r>
@@ -18178,9 +18915,9 @@
             <a:r>
               <a:rPr sz="1300" b="1" i="0">
                 <a:solidFill>
-                  <a:srgbClr val="AEC6E8"/>
-                </a:solidFill>
-                <a:latin typeface="Calibri"/>
+                  <a:srgbClr val="C9D8C5"/>
+                </a:solidFill>
+                <a:latin typeface="Segoe UI"/>
               </a:rPr>
               <a:t>Annuel</a:t>
             </a:r>
@@ -18213,9 +18950,9 @@
             <a:r>
               <a:rPr sz="900" b="0" i="1">
                 <a:solidFill>
-                  <a:srgbClr val="AEC6E8"/>
-                </a:solidFill>
-                <a:latin typeface="Calibri"/>
+                  <a:srgbClr val="C9D8C5"/>
+                </a:solidFill>
+                <a:latin typeface="Segoe UI"/>
               </a:rPr>
               <a:t>© 2025 Acme Industries — Document confidentiel</a:t>
             </a:r>
@@ -18248,9 +18985,9 @@
             <a:r>
               <a:rPr sz="800" b="0" i="0">
                 <a:solidFill>
-                  <a:srgbClr val="6B7C93"/>
-                </a:solidFill>
-                <a:latin typeface="Calibri"/>
+                  <a:srgbClr val="5F6B64"/>
+                </a:solidFill>
+                <a:latin typeface="Segoe UI"/>
               </a:rPr>
               <a:t>Acme Industries   |   23 / 23</a:t>
             </a:r>
@@ -18290,7 +19027,7 @@
             <a:avLst/>
           </a:prstGeom>
           <a:solidFill>
-            <a:srgbClr val="1B3A6B"/>
+            <a:srgbClr val="1F3D33"/>
           </a:solidFill>
           <a:ln>
             <a:noFill/>
@@ -18333,7 +19070,7 @@
             <a:avLst/>
           </a:prstGeom>
           <a:solidFill>
-            <a:srgbClr val="F39C12"/>
+            <a:srgbClr val="2E5A4B"/>
           </a:solidFill>
           <a:ln>
             <a:noFill/>
@@ -18387,9 +19124,9 @@
             <a:r>
               <a:rPr sz="1300" b="1" i="0">
                 <a:solidFill>
-                  <a:srgbClr val="F39C12"/>
-                </a:solidFill>
-                <a:latin typeface="Calibri"/>
+                  <a:srgbClr val="2E5A4B"/>
+                </a:solidFill>
+                <a:latin typeface="Segoe UI"/>
               </a:rPr>
               <a:t>LE MOT DE LA DIRECTION</a:t>
             </a:r>
@@ -18422,9 +19159,9 @@
             <a:r>
               <a:rPr sz="16000" b="1" i="0">
                 <a:solidFill>
-                  <a:srgbClr val="EBF2FB"/>
-                </a:solidFill>
-                <a:latin typeface="Calibri"/>
+                  <a:srgbClr val="E6E6DC"/>
+                </a:solidFill>
+                <a:latin typeface="Georgia"/>
               </a:rPr>
               <a:t>“</a:t>
             </a:r>
@@ -18457,9 +19194,9 @@
             <a:r>
               <a:rPr sz="2400" b="0" i="1">
                 <a:solidFill>
-                  <a:srgbClr val="FFFFFF"/>
-                </a:solidFill>
-                <a:latin typeface="Calibri"/>
+                  <a:srgbClr val="F3F0E8"/>
+                </a:solidFill>
+                <a:latin typeface="Georgia"/>
               </a:rPr>
               <a:t>« La performance durable est au cœur de notre stratégie industrielle : chaque euro investi doit créer de la valeur pour nos clients et pour la planète. »</a:t>
             </a:r>
@@ -18481,7 +19218,7 @@
             <a:avLst/>
           </a:prstGeom>
           <a:solidFill>
-            <a:srgbClr val="F39C12"/>
+            <a:srgbClr val="2E5A4B"/>
           </a:solidFill>
           <a:ln>
             <a:noFill/>
@@ -18535,9 +19272,9 @@
             <a:r>
               <a:rPr sz="1400" b="1" i="0">
                 <a:solidFill>
-                  <a:srgbClr val="AEC6E8"/>
-                </a:solidFill>
-                <a:latin typeface="Calibri"/>
+                  <a:srgbClr val="C9D8C5"/>
+                </a:solidFill>
+                <a:latin typeface="Segoe UI"/>
               </a:rPr>
               <a:t>J. Martin — Directrice Générale</a:t>
             </a:r>
@@ -18570,9 +19307,9 @@
             <a:r>
               <a:rPr sz="800" b="0" i="0">
                 <a:solidFill>
-                  <a:srgbClr val="6B7C93"/>
-                </a:solidFill>
-                <a:latin typeface="Calibri"/>
+                  <a:srgbClr val="5F6B64"/>
+                </a:solidFill>
+                <a:latin typeface="Segoe UI"/>
               </a:rPr>
               <a:t>Acme Industries   |   3 / 23</a:t>
             </a:r>
@@ -18612,7 +19349,7 @@
             <a:avLst/>
           </a:prstGeom>
           <a:solidFill>
-            <a:srgbClr val="F4F7FD"/>
+            <a:srgbClr val="F3F0E8"/>
           </a:solidFill>
           <a:ln>
             <a:noFill/>
@@ -18655,7 +19392,7 @@
             <a:avLst/>
           </a:prstGeom>
           <a:solidFill>
-            <a:srgbClr val="F39C12"/>
+            <a:srgbClr val="2E5A4B"/>
           </a:solidFill>
           <a:ln>
             <a:noFill/>
@@ -18709,9 +19446,9 @@
             <a:r>
               <a:rPr sz="3600" b="1" i="0">
                 <a:solidFill>
-                  <a:srgbClr val="2C3E50"/>
-                </a:solidFill>
-                <a:latin typeface="Calibri"/>
+                  <a:srgbClr val="1E2B26"/>
+                </a:solidFill>
+                <a:latin typeface="Georgia"/>
               </a:rPr>
               <a:t>SOMMAIRE</a:t>
             </a:r>
@@ -18733,7 +19470,7 @@
             <a:avLst/>
           </a:prstGeom>
           <a:solidFill>
-            <a:srgbClr val="F39C12"/>
+            <a:srgbClr val="2E5A4B"/>
           </a:solidFill>
           <a:ln>
             <a:noFill/>
@@ -18776,7 +19513,7 @@
             <a:avLst/>
           </a:prstGeom>
           <a:solidFill>
-            <a:srgbClr val="EBF2FB"/>
+            <a:srgbClr val="E6E6DC"/>
           </a:solidFill>
           <a:ln>
             <a:noFill/>
@@ -18830,9 +19567,9 @@
             <a:r>
               <a:rPr sz="4400" b="1" i="0">
                 <a:solidFill>
-                  <a:srgbClr val="F39C12"/>
-                </a:solidFill>
-                <a:latin typeface="Calibri"/>
+                  <a:srgbClr val="2E5A4B"/>
+                </a:solidFill>
+                <a:latin typeface="Georgia"/>
               </a:rPr>
               <a:t>01</a:t>
             </a:r>
@@ -18865,9 +19602,9 @@
             <a:r>
               <a:rPr sz="1500" b="1" i="0">
                 <a:solidFill>
-                  <a:srgbClr val="2C3E50"/>
-                </a:solidFill>
-                <a:latin typeface="Calibri"/>
+                  <a:srgbClr val="1E2B26"/>
+                </a:solidFill>
+                <a:latin typeface="Segoe UI"/>
               </a:rPr>
               <a:t>SITUATION</a:t>
             </a:r>
@@ -18889,7 +19626,7 @@
             <a:avLst/>
           </a:prstGeom>
           <a:solidFill>
-            <a:srgbClr val="F39C12"/>
+            <a:srgbClr val="2E5A4B"/>
           </a:solidFill>
           <a:ln>
             <a:noFill/>
@@ -18943,9 +19680,9 @@
             <a:r>
               <a:rPr sz="1200" b="0" i="0">
                 <a:solidFill>
-                  <a:srgbClr val="2C3E50"/>
-                </a:solidFill>
-                <a:latin typeface="Calibri"/>
+                  <a:srgbClr val="1E2B26"/>
+                </a:solidFill>
+                <a:latin typeface="Segoe UI"/>
               </a:rPr>
               <a:t>—  Synthèse Exécutive</a:t>
             </a:r>
@@ -18978,9 +19715,9 @@
             <a:r>
               <a:rPr sz="1200" b="0" i="0">
                 <a:solidFill>
-                  <a:srgbClr val="2C3E50"/>
-                </a:solidFill>
-                <a:latin typeface="Calibri"/>
+                  <a:srgbClr val="1E2B26"/>
+                </a:solidFill>
+                <a:latin typeface="Segoe UI"/>
               </a:rPr>
               <a:t>—  Pilier Environnemental</a:t>
             </a:r>
@@ -19013,9 +19750,9 @@
             <a:r>
               <a:rPr sz="1200" b="0" i="0">
                 <a:solidFill>
-                  <a:srgbClr val="2C3E50"/>
-                </a:solidFill>
-                <a:latin typeface="Calibri"/>
+                  <a:srgbClr val="1E2B26"/>
+                </a:solidFill>
+                <a:latin typeface="Segoe UI"/>
               </a:rPr>
               <a:t>—  Pilier Social</a:t>
             </a:r>
@@ -19048,9 +19785,9 @@
             <a:r>
               <a:rPr sz="1200" b="0" i="0">
                 <a:solidFill>
-                  <a:srgbClr val="2C3E50"/>
-                </a:solidFill>
-                <a:latin typeface="Calibri"/>
+                  <a:srgbClr val="1E2B26"/>
+                </a:solidFill>
+                <a:latin typeface="Segoe UI"/>
               </a:rPr>
               <a:t>—  Pilier Gouvernance</a:t>
             </a:r>
@@ -19072,7 +19809,7 @@
             <a:avLst/>
           </a:prstGeom>
           <a:solidFill>
-            <a:srgbClr val="EBF2FB"/>
+            <a:srgbClr val="E6E6DC"/>
           </a:solidFill>
           <a:ln>
             <a:noFill/>
@@ -19126,9 +19863,9 @@
             <a:r>
               <a:rPr sz="4400" b="1" i="0">
                 <a:solidFill>
-                  <a:srgbClr val="F39C12"/>
-                </a:solidFill>
-                <a:latin typeface="Calibri"/>
+                  <a:srgbClr val="2E5A4B"/>
+                </a:solidFill>
+                <a:latin typeface="Georgia"/>
               </a:rPr>
               <a:t>02</a:t>
             </a:r>
@@ -19161,9 +19898,9 @@
             <a:r>
               <a:rPr sz="1500" b="1" i="0">
                 <a:solidFill>
-                  <a:srgbClr val="2C3E50"/>
-                </a:solidFill>
-                <a:latin typeface="Calibri"/>
+                  <a:srgbClr val="1E2B26"/>
+                </a:solidFill>
+                <a:latin typeface="Segoe UI"/>
               </a:rPr>
               <a:t>DIAGNOSTIC</a:t>
             </a:r>
@@ -19185,7 +19922,7 @@
             <a:avLst/>
           </a:prstGeom>
           <a:solidFill>
-            <a:srgbClr val="F39C12"/>
+            <a:srgbClr val="2E5A4B"/>
           </a:solidFill>
           <a:ln>
             <a:noFill/>
@@ -19239,9 +19976,9 @@
             <a:r>
               <a:rPr sz="1200" b="0" i="0">
                 <a:solidFill>
-                  <a:srgbClr val="2C3E50"/>
-                </a:solidFill>
-                <a:latin typeface="Calibri"/>
+                  <a:srgbClr val="1E2B26"/>
+                </a:solidFill>
+                <a:latin typeface="Segoe UI"/>
               </a:rPr>
               <a:t>—  Positionnement</a:t>
             </a:r>
@@ -19274,9 +20011,9 @@
             <a:r>
               <a:rPr sz="1200" b="0" i="0">
                 <a:solidFill>
-                  <a:srgbClr val="2C3E50"/>
-                </a:solidFill>
-                <a:latin typeface="Calibri"/>
+                  <a:srgbClr val="1E2B26"/>
+                </a:solidFill>
+                <a:latin typeface="Segoe UI"/>
               </a:rPr>
               <a:t>—  Risques &amp; Opportunités</a:t>
             </a:r>
@@ -19309,9 +20046,9 @@
             <a:r>
               <a:rPr sz="1200" b="0" i="0">
                 <a:solidFill>
-                  <a:srgbClr val="2C3E50"/>
-                </a:solidFill>
-                <a:latin typeface="Calibri"/>
+                  <a:srgbClr val="1E2B26"/>
+                </a:solidFill>
+                <a:latin typeface="Segoe UI"/>
               </a:rPr>
               <a:t>—  Analyse Stratégique ESG</a:t>
             </a:r>
@@ -19333,7 +20070,7 @@
             <a:avLst/>
           </a:prstGeom>
           <a:solidFill>
-            <a:srgbClr val="EBF2FB"/>
+            <a:srgbClr val="E6E6DC"/>
           </a:solidFill>
           <a:ln>
             <a:noFill/>
@@ -19387,9 +20124,9 @@
             <a:r>
               <a:rPr sz="4400" b="1" i="0">
                 <a:solidFill>
-                  <a:srgbClr val="F39C12"/>
-                </a:solidFill>
-                <a:latin typeface="Calibri"/>
+                  <a:srgbClr val="2E5A4B"/>
+                </a:solidFill>
+                <a:latin typeface="Georgia"/>
               </a:rPr>
               <a:t>03</a:t>
             </a:r>
@@ -19422,9 +20159,9 @@
             <a:r>
               <a:rPr sz="1500" b="1" i="0">
                 <a:solidFill>
-                  <a:srgbClr val="2C3E50"/>
-                </a:solidFill>
-                <a:latin typeface="Calibri"/>
+                  <a:srgbClr val="1E2B26"/>
+                </a:solidFill>
+                <a:latin typeface="Segoe UI"/>
               </a:rPr>
               <a:t>PLAN D'ACTION</a:t>
             </a:r>
@@ -19446,7 +20183,7 @@
             <a:avLst/>
           </a:prstGeom>
           <a:solidFill>
-            <a:srgbClr val="F39C12"/>
+            <a:srgbClr val="2E5A4B"/>
           </a:solidFill>
           <a:ln>
             <a:noFill/>
@@ -19500,9 +20237,9 @@
             <a:r>
               <a:rPr sz="1200" b="0" i="0">
                 <a:solidFill>
-                  <a:srgbClr val="2C3E50"/>
-                </a:solidFill>
-                <a:latin typeface="Calibri"/>
+                  <a:srgbClr val="1E2B26"/>
+                </a:solidFill>
+                <a:latin typeface="Segoe UI"/>
               </a:rPr>
               <a:t>—  Recommandations Prioritaires</a:t>
             </a:r>
@@ -19535,9 +20272,9 @@
             <a:r>
               <a:rPr sz="1200" b="0" i="0">
                 <a:solidFill>
-                  <a:srgbClr val="2C3E50"/>
-                </a:solidFill>
-                <a:latin typeface="Calibri"/>
+                  <a:srgbClr val="1E2B26"/>
+                </a:solidFill>
+                <a:latin typeface="Segoe UI"/>
               </a:rPr>
               <a:t>—  Un plan d'action ESG sur 12 mois</a:t>
             </a:r>
@@ -19570,9 +20307,9 @@
             <a:r>
               <a:rPr sz="1200" b="0" i="0">
                 <a:solidFill>
-                  <a:srgbClr val="2C3E50"/>
-                </a:solidFill>
-                <a:latin typeface="Calibri"/>
+                  <a:srgbClr val="1E2B26"/>
+                </a:solidFill>
+                <a:latin typeface="Segoe UI"/>
               </a:rPr>
               <a:t>—  Conclusion &amp; Engagements</a:t>
             </a:r>
@@ -19605,9 +20342,9 @@
             <a:r>
               <a:rPr sz="800" b="0" i="0">
                 <a:solidFill>
-                  <a:srgbClr val="6B7C93"/>
-                </a:solidFill>
-                <a:latin typeface="Calibri"/>
+                  <a:srgbClr val="5F6B64"/>
+                </a:solidFill>
+                <a:latin typeface="Segoe UI"/>
               </a:rPr>
               <a:t>Acme Industries   |   4 / 23</a:t>
             </a:r>
@@ -19647,7 +20384,7 @@
             <a:avLst/>
           </a:prstGeom>
           <a:solidFill>
-            <a:srgbClr val="F4F7FD"/>
+            <a:srgbClr val="F3F0E8"/>
           </a:solidFill>
           <a:ln>
             <a:noFill/>
@@ -19690,7 +20427,7 @@
             <a:avLst/>
           </a:prstGeom>
           <a:solidFill>
-            <a:srgbClr val="1B3A6B"/>
+            <a:srgbClr val="1F3D33"/>
           </a:solidFill>
           <a:ln>
             <a:noFill/>
@@ -19733,7 +20470,7 @@
             <a:avLst/>
           </a:prstGeom>
           <a:solidFill>
-            <a:srgbClr val="F39C12"/>
+            <a:srgbClr val="2E5A4B"/>
           </a:solidFill>
           <a:ln>
             <a:noFill/>
@@ -19787,9 +20524,9 @@
             <a:r>
               <a:rPr sz="1300" b="1" i="0">
                 <a:solidFill>
-                  <a:srgbClr val="F39C12"/>
-                </a:solidFill>
-                <a:latin typeface="Calibri"/>
+                  <a:srgbClr val="2E5A4B"/>
+                </a:solidFill>
+                <a:latin typeface="Segoe UI"/>
               </a:rPr>
               <a:t>SYNTHÈSE ESG 2025</a:t>
             </a:r>
@@ -19824,7 +20561,7 @@
                 <a:solidFill>
                   <a:srgbClr val="FFFFFF"/>
                 </a:solidFill>
-                <a:latin typeface="Calibri"/>
+                <a:latin typeface="Georgia"/>
               </a:rPr>
               <a:t>66</a:t>
             </a:r>
@@ -19857,9 +20594,9 @@
             <a:r>
               <a:rPr sz="2200" b="0" i="0">
                 <a:solidFill>
-                  <a:srgbClr val="AEC6E8"/>
-                </a:solidFill>
-                <a:latin typeface="Calibri"/>
+                  <a:srgbClr val="C9D8C5"/>
+                </a:solidFill>
+                <a:latin typeface="Segoe UI"/>
               </a:rPr>
               <a:t>/ 100</a:t>
             </a:r>
@@ -19881,7 +20618,7 @@
             <a:avLst/>
           </a:prstGeom>
           <a:solidFill>
-            <a:srgbClr val="F39C12"/>
+            <a:srgbClr val="2E5A4B"/>
           </a:solidFill>
           <a:ln>
             <a:noFill/>
@@ -19935,9 +20672,9 @@
             <a:r>
               <a:rPr sz="3000" b="1" i="0">
                 <a:solidFill>
-                  <a:srgbClr val="1B3A6B"/>
-                </a:solidFill>
-                <a:latin typeface="Calibri"/>
+                  <a:srgbClr val="1F3D33"/>
+                </a:solidFill>
+                <a:latin typeface="Georgia"/>
               </a:rPr>
               <a:t>A</a:t>
             </a:r>
@@ -19970,9 +20707,9 @@
             <a:r>
               <a:rPr sz="1200" b="1" i="0">
                 <a:solidFill>
-                  <a:srgbClr val="AEC6E8"/>
-                </a:solidFill>
-                <a:latin typeface="Calibri"/>
+                  <a:srgbClr val="C9D8C5"/>
+                </a:solidFill>
+                <a:latin typeface="Segoe UI"/>
               </a:rPr>
               <a:t>SCORE ESG GLOBAL</a:t>
             </a:r>
@@ -20007,7 +20744,7 @@
                 <a:solidFill>
                   <a:srgbClr val="4CAF50"/>
                 </a:solidFill>
-                <a:latin typeface="Calibri"/>
+                <a:latin typeface="Segoe UI"/>
               </a:rPr>
               <a:t>+10 pts  vs 2024</a:t>
             </a:r>
@@ -20040,9 +20777,9 @@
             <a:r>
               <a:rPr sz="3400" b="1" i="0">
                 <a:solidFill>
-                  <a:srgbClr val="2C3E50"/>
-                </a:solidFill>
-                <a:latin typeface="Calibri"/>
+                  <a:srgbClr val="1E2B26"/>
+                </a:solidFill>
+                <a:latin typeface="Georgia"/>
               </a:rPr>
               <a:t>Synthèse Exécutive</a:t>
             </a:r>
@@ -20064,7 +20801,7 @@
             <a:avLst/>
           </a:prstGeom>
           <a:solidFill>
-            <a:srgbClr val="F39C12"/>
+            <a:srgbClr val="2E5A4B"/>
           </a:solidFill>
           <a:ln>
             <a:noFill/>
@@ -20118,9 +20855,9 @@
             <a:r>
               <a:rPr sz="1600" b="0" i="0">
                 <a:solidFill>
-                  <a:srgbClr val="2C3E50"/>
-                </a:solidFill>
-                <a:latin typeface="Calibri"/>
+                  <a:srgbClr val="1E2B26"/>
+                </a:solidFill>
+                <a:latin typeface="Segoe UI"/>
               </a:rPr>
               <a:t>Acme Industries affiche un profil ESG solide (66/100, A), porté par la gouvernance (75/100) ; le social (55/100) concentre le potentiel de progression.</a:t>
             </a:r>
@@ -20153,9 +20890,9 @@
             <a:r>
               <a:rPr sz="1200" b="1" i="0">
                 <a:solidFill>
-                  <a:srgbClr val="6B7C93"/>
-                </a:solidFill>
-                <a:latin typeface="Calibri"/>
+                  <a:srgbClr val="5F6B64"/>
+                </a:solidFill>
+                <a:latin typeface="Segoe UI"/>
               </a:rPr>
               <a:t>PERFORMANCE PAR PILIER</a:t>
             </a:r>
@@ -20188,9 +20925,9 @@
             <a:r>
               <a:rPr sz="1250" b="1" i="0">
                 <a:solidFill>
-                  <a:srgbClr val="2C3E50"/>
-                </a:solidFill>
-                <a:latin typeface="Calibri"/>
+                  <a:srgbClr val="1E2B26"/>
+                </a:solidFill>
+                <a:latin typeface="Segoe UI"/>
               </a:rPr>
               <a:t>Environnement</a:t>
             </a:r>
@@ -20223,9 +20960,9 @@
             <a:r>
               <a:rPr sz="1300" b="1" i="0">
                 <a:solidFill>
-                  <a:srgbClr val="27AE60"/>
-                </a:solidFill>
-                <a:latin typeface="Calibri"/>
+                  <a:srgbClr val="2F6B4F"/>
+                </a:solidFill>
+                <a:latin typeface="Georgia"/>
               </a:rPr>
               <a:t>70</a:t>
             </a:r>
@@ -20290,7 +21027,7 @@
             <a:avLst/>
           </a:prstGeom>
           <a:solidFill>
-            <a:srgbClr val="27AE60"/>
+            <a:srgbClr val="2F6B4F"/>
           </a:solidFill>
           <a:ln>
             <a:noFill/>
@@ -20344,9 +21081,9 @@
             <a:r>
               <a:rPr sz="1250" b="1" i="0">
                 <a:solidFill>
-                  <a:srgbClr val="2C3E50"/>
-                </a:solidFill>
-                <a:latin typeface="Calibri"/>
+                  <a:srgbClr val="1E2B26"/>
+                </a:solidFill>
+                <a:latin typeface="Segoe UI"/>
               </a:rPr>
               <a:t>Social</a:t>
             </a:r>
@@ -20379,9 +21116,9 @@
             <a:r>
               <a:rPr sz="1300" b="1" i="0">
                 <a:solidFill>
-                  <a:srgbClr val="2E86C1"/>
-                </a:solidFill>
-                <a:latin typeface="Calibri"/>
+                  <a:srgbClr val="3D6A8A"/>
+                </a:solidFill>
+                <a:latin typeface="Georgia"/>
               </a:rPr>
               <a:t>55</a:t>
             </a:r>
@@ -20446,7 +21183,7 @@
             <a:avLst/>
           </a:prstGeom>
           <a:solidFill>
-            <a:srgbClr val="2E86C1"/>
+            <a:srgbClr val="3D6A8A"/>
           </a:solidFill>
           <a:ln>
             <a:noFill/>
@@ -20500,9 +21237,9 @@
             <a:r>
               <a:rPr sz="1250" b="1" i="0">
                 <a:solidFill>
-                  <a:srgbClr val="2C3E50"/>
-                </a:solidFill>
-                <a:latin typeface="Calibri"/>
+                  <a:srgbClr val="1E2B26"/>
+                </a:solidFill>
+                <a:latin typeface="Segoe UI"/>
               </a:rPr>
               <a:t>Gouvernance</a:t>
             </a:r>
@@ -20535,9 +21272,9 @@
             <a:r>
               <a:rPr sz="1300" b="1" i="0">
                 <a:solidFill>
-                  <a:srgbClr val="8E44AD"/>
-                </a:solidFill>
-                <a:latin typeface="Calibri"/>
+                  <a:srgbClr val="6B5B86"/>
+                </a:solidFill>
+                <a:latin typeface="Georgia"/>
               </a:rPr>
               <a:t>75</a:t>
             </a:r>
@@ -20602,7 +21339,7 @@
             <a:avLst/>
           </a:prstGeom>
           <a:solidFill>
-            <a:srgbClr val="8E44AD"/>
+            <a:srgbClr val="6B5B86"/>
           </a:solidFill>
           <a:ln>
             <a:noFill/>
@@ -20656,9 +21393,9 @@
             <a:r>
               <a:rPr sz="800" b="0" i="0">
                 <a:solidFill>
-                  <a:srgbClr val="6B7C93"/>
-                </a:solidFill>
-                <a:latin typeface="Calibri"/>
+                  <a:srgbClr val="5F6B64"/>
+                </a:solidFill>
+                <a:latin typeface="Segoe UI"/>
               </a:rPr>
               <a:t>Acme Industries   |   5 / 23</a:t>
             </a:r>
@@ -20698,7 +21435,7 @@
             <a:avLst/>
           </a:prstGeom>
           <a:solidFill>
-            <a:srgbClr val="F4F7FD"/>
+            <a:srgbClr val="F3F0E8"/>
           </a:solidFill>
           <a:ln>
             <a:noFill/>
@@ -20741,7 +21478,7 @@
             <a:avLst/>
           </a:prstGeom>
           <a:solidFill>
-            <a:srgbClr val="F39C12"/>
+            <a:srgbClr val="2E5A4B"/>
           </a:solidFill>
           <a:ln>
             <a:noFill/>
@@ -20795,9 +21532,9 @@
             <a:r>
               <a:rPr sz="1400" b="1" i="0">
                 <a:solidFill>
-                  <a:srgbClr val="F39C12"/>
-                </a:solidFill>
-                <a:latin typeface="Calibri"/>
+                  <a:srgbClr val="2E5A4B"/>
+                </a:solidFill>
+                <a:latin typeface="Segoe UI"/>
               </a:rPr>
               <a:t>L'ANALYSE DU CONSULTANT</a:t>
             </a:r>
@@ -20819,7 +21556,7 @@
             <a:avLst/>
           </a:prstGeom>
           <a:solidFill>
-            <a:srgbClr val="F39C12"/>
+            <a:srgbClr val="2E5A4B"/>
           </a:solidFill>
           <a:ln>
             <a:noFill/>
@@ -20873,9 +21610,9 @@
             <a:r>
               <a:rPr sz="1900" b="0" i="1">
                 <a:solidFill>
-                  <a:srgbClr val="2C3E50"/>
-                </a:solidFill>
-                <a:latin typeface="Calibri"/>
+                  <a:srgbClr val="1E2B26"/>
+                </a:solidFill>
+                <a:latin typeface="Georgia"/>
               </a:rPr>
               <a:t>La priorité 2026 est la fiabilisation du reporting énergie avant l'audit de certification prévu au troisième trimestre.</a:t>
             </a:r>
@@ -20908,9 +21645,9 @@
             <a:r>
               <a:rPr sz="1200" b="1" i="0">
                 <a:solidFill>
-                  <a:srgbClr val="6B7C93"/>
-                </a:solidFill>
-                <a:latin typeface="Calibri"/>
+                  <a:srgbClr val="5F6B64"/>
+                </a:solidFill>
+                <a:latin typeface="Segoe UI"/>
               </a:rPr>
               <a:t>J. Martin</a:t>
             </a:r>
@@ -20943,9 +21680,9 @@
             <a:r>
               <a:rPr sz="800" b="0" i="0">
                 <a:solidFill>
-                  <a:srgbClr val="6B7C93"/>
-                </a:solidFill>
-                <a:latin typeface="Calibri"/>
+                  <a:srgbClr val="5F6B64"/>
+                </a:solidFill>
+                <a:latin typeface="Segoe UI"/>
               </a:rPr>
               <a:t>Acme Industries   |   6 / 23</a:t>
             </a:r>
@@ -20985,7 +21722,7 @@
             <a:avLst/>
           </a:prstGeom>
           <a:solidFill>
-            <a:srgbClr val="1B3A6B"/>
+            <a:srgbClr val="1F3D33"/>
           </a:solidFill>
           <a:ln>
             <a:noFill/>
@@ -21028,7 +21765,7 @@
             <a:avLst/>
           </a:prstGeom>
           <a:solidFill>
-            <a:srgbClr val="F39C12"/>
+            <a:srgbClr val="2E5A4B"/>
           </a:solidFill>
           <a:ln>
             <a:noFill/>
@@ -21082,9 +21819,9 @@
             <a:r>
               <a:rPr sz="20000" b="1" i="0">
                 <a:solidFill>
-                  <a:srgbClr val="EBF2FB"/>
-                </a:solidFill>
-                <a:latin typeface="Calibri"/>
+                  <a:srgbClr val="E6E6DC"/>
+                </a:solidFill>
+                <a:latin typeface="Georgia"/>
               </a:rPr>
               <a:t>01</a:t>
             </a:r>
@@ -21117,9 +21854,9 @@
             <a:r>
               <a:rPr sz="4000" b="1" i="0">
                 <a:solidFill>
-                  <a:srgbClr val="FFFFFF"/>
-                </a:solidFill>
-                <a:latin typeface="Calibri"/>
+                  <a:srgbClr val="F3F0E8"/>
+                </a:solidFill>
+                <a:latin typeface="Georgia"/>
               </a:rPr>
               <a:t>DIAGNOSTIC</a:t>
             </a:r>
@@ -21141,7 +21878,7 @@
             <a:avLst/>
           </a:prstGeom>
           <a:solidFill>
-            <a:srgbClr val="F39C12"/>
+            <a:srgbClr val="2E5A4B"/>
           </a:solidFill>
           <a:ln>
             <a:noFill/>
@@ -21195,9 +21932,9 @@
             <a:r>
               <a:rPr sz="1600" b="0" i="1">
                 <a:solidFill>
-                  <a:srgbClr val="AEC6E8"/>
-                </a:solidFill>
-                <a:latin typeface="Calibri"/>
+                  <a:srgbClr val="C9D8C5"/>
+                </a:solidFill>
+                <a:latin typeface="Segoe UI"/>
               </a:rPr>
               <a:t>Où vous situez-vous, et face à qui ?</a:t>
             </a:r>
@@ -21230,9 +21967,9 @@
             <a:r>
               <a:rPr sz="800" b="0" i="0">
                 <a:solidFill>
-                  <a:srgbClr val="6B7C93"/>
-                </a:solidFill>
-                <a:latin typeface="Calibri"/>
+                  <a:srgbClr val="5F6B64"/>
+                </a:solidFill>
+                <a:latin typeface="Segoe UI"/>
               </a:rPr>
               <a:t>Acme Industries   |   7 / 23</a:t>
             </a:r>
@@ -21272,7 +22009,7 @@
             <a:avLst/>
           </a:prstGeom>
           <a:solidFill>
-            <a:srgbClr val="F4F7FD"/>
+            <a:srgbClr val="F3F0E8"/>
           </a:solidFill>
           <a:ln>
             <a:noFill/>
@@ -21308,14 +22045,14 @@
         </p:nvSpPr>
         <p:spPr>
           <a:xfrm>
-            <a:off x="0" y="0"/>
-            <a:ext cx="12188952" cy="1143000"/>
+            <a:off x="457200" y="384048"/>
+            <a:ext cx="201168" cy="201168"/>
           </a:xfrm>
           <a:prstGeom prst="rect">
             <a:avLst/>
           </a:prstGeom>
           <a:solidFill>
-            <a:srgbClr val="1B3A6B"/>
+            <a:srgbClr val="1F3D33"/>
           </a:solidFill>
           <a:ln>
             <a:noFill/>
@@ -21345,20 +22082,55 @@
       </p:sp>
       <p:sp>
         <p:nvSpPr>
-          <p:cNvPr id="4" name="Rectangle 3"/>
+          <p:cNvPr id="4" name="TextBox 3"/>
+          <p:cNvSpPr txBox="1"/>
+          <p:nvPr/>
+        </p:nvSpPr>
+        <p:spPr>
+          <a:xfrm>
+            <a:off x="822960" y="237744"/>
+            <a:ext cx="10789920" cy="685800"/>
+          </a:xfrm>
+          <a:prstGeom prst="rect">
+            <a:avLst/>
+          </a:prstGeom>
+          <a:noFill/>
+        </p:spPr>
+        <p:txBody>
+          <a:bodyPr wrap="square">
+            <a:spAutoFit/>
+          </a:bodyPr>
+          <a:lstStyle/>
+          <a:p>
+            <a:pPr algn="l"/>
+            <a:r>
+              <a:rPr sz="1320" b="1" i="0">
+                <a:solidFill>
+                  <a:srgbClr val="1E2B26"/>
+                </a:solidFill>
+                <a:latin typeface="Georgia"/>
+              </a:rPr>
+              <a:t>La gouvernance est le point fort d'Acme Industries, le social sa priorité</a:t>
+            </a:r>
+          </a:p>
+        </p:txBody>
+      </p:sp>
+      <p:sp>
+        <p:nvSpPr>
+          <p:cNvPr id="5" name="Rectangle 4"/>
           <p:cNvSpPr/>
           <p:nvPr/>
         </p:nvSpPr>
         <p:spPr>
           <a:xfrm>
-            <a:off x="0" y="1143000"/>
-            <a:ext cx="64008" cy="5715000"/>
+            <a:off x="457200" y="1024128"/>
+            <a:ext cx="2011680" cy="18288"/>
           </a:xfrm>
           <a:prstGeom prst="rect">
             <a:avLst/>
           </a:prstGeom>
           <a:solidFill>
-            <a:srgbClr val="F39C12"/>
+            <a:srgbClr val="1E2B26"/>
           </a:solidFill>
           <a:ln>
             <a:noFill/>
@@ -21386,79 +22158,9 @@
           </a:p>
         </p:txBody>
       </p:sp>
-      <p:sp>
-        <p:nvSpPr>
-          <p:cNvPr id="5" name="TextBox 4"/>
-          <p:cNvSpPr txBox="1"/>
-          <p:nvPr/>
-        </p:nvSpPr>
-        <p:spPr>
-          <a:xfrm>
-            <a:off x="292608" y="128016"/>
-            <a:ext cx="10972800" cy="292608"/>
-          </a:xfrm>
-          <a:prstGeom prst="rect">
-            <a:avLst/>
-          </a:prstGeom>
-          <a:noFill/>
-        </p:spPr>
-        <p:txBody>
-          <a:bodyPr wrap="square">
-            <a:spAutoFit/>
-          </a:bodyPr>
-          <a:lstStyle/>
-          <a:p>
-            <a:pPr algn="l"/>
-            <a:r>
-              <a:rPr sz="1100" b="1" i="0">
-                <a:solidFill>
-                  <a:srgbClr val="F39C12"/>
-                </a:solidFill>
-                <a:latin typeface="Calibri"/>
-              </a:rPr>
-              <a:t>POSITIONNEMENT</a:t>
-            </a:r>
-          </a:p>
-        </p:txBody>
-      </p:sp>
-      <p:sp>
-        <p:nvSpPr>
-          <p:cNvPr id="6" name="TextBox 5"/>
-          <p:cNvSpPr txBox="1"/>
-          <p:nvPr/>
-        </p:nvSpPr>
-        <p:spPr>
-          <a:xfrm>
-            <a:off x="274320" y="384048"/>
-            <a:ext cx="11612880" cy="713232"/>
-          </a:xfrm>
-          <a:prstGeom prst="rect">
-            <a:avLst/>
-          </a:prstGeom>
-          <a:noFill/>
-        </p:spPr>
-        <p:txBody>
-          <a:bodyPr wrap="square">
-            <a:spAutoFit/>
-          </a:bodyPr>
-          <a:lstStyle/>
-          <a:p>
-            <a:pPr algn="l"/>
-            <a:r>
-              <a:rPr sz="1716" b="1" i="0">
-                <a:solidFill>
-                  <a:srgbClr val="FFFFFF"/>
-                </a:solidFill>
-                <a:latin typeface="Calibri"/>
-              </a:rPr>
-              <a:t>La gouvernance est le point fort d'Acme Industries, le social sa priorité</a:t>
-            </a:r>
-          </a:p>
-        </p:txBody>
-      </p:sp>
       <p:pic>
         <p:nvPicPr>
-          <p:cNvPr id="7" name="Picture 6" descr="image.png"/>
+          <p:cNvPr id="6" name="Picture 5" descr="image.png"/>
           <p:cNvPicPr>
             <a:picLocks noChangeAspect="1"/>
           </p:cNvPicPr>
@@ -21473,7 +22175,7 @@
         <p:spPr>
           <a:xfrm>
             <a:off x="320040" y="1554480"/>
-            <a:ext cx="6858000" cy="4213575"/>
+            <a:ext cx="6858000" cy="4205907"/>
           </a:xfrm>
           <a:prstGeom prst="rect">
             <a:avLst/>
@@ -21482,7 +22184,7 @@
       </p:pic>
       <p:sp>
         <p:nvSpPr>
-          <p:cNvPr id="8" name="Rounded Rectangle 7"/>
+          <p:cNvPr id="7" name="Rounded Rectangle 6"/>
           <p:cNvSpPr/>
           <p:nvPr/>
         </p:nvSpPr>
@@ -21495,11 +22197,11 @@
             <a:avLst/>
           </a:prstGeom>
           <a:solidFill>
-            <a:srgbClr val="EBF2FB"/>
+            <a:srgbClr val="E6E6DC"/>
           </a:solidFill>
           <a:ln w="15875">
             <a:solidFill>
-              <a:srgbClr val="F39C12"/>
+              <a:srgbClr val="2E5A4B"/>
             </a:solidFill>
           </a:ln>
         </p:spPr>
@@ -21527,7 +22229,7 @@
       </p:sp>
       <p:sp>
         <p:nvSpPr>
-          <p:cNvPr id="9" name="Rectangle 8"/>
+          <p:cNvPr id="8" name="Rectangle 7"/>
           <p:cNvSpPr/>
           <p:nvPr/>
         </p:nvSpPr>
@@ -21540,7 +22242,7 @@
             <a:avLst/>
           </a:prstGeom>
           <a:solidFill>
-            <a:srgbClr val="F39C12"/>
+            <a:srgbClr val="2E5A4B"/>
           </a:solidFill>
           <a:ln>
             <a:noFill/>
@@ -21570,7 +22272,7 @@
       </p:sp>
       <p:sp>
         <p:nvSpPr>
-          <p:cNvPr id="10" name="TextBox 9"/>
+          <p:cNvPr id="9" name="TextBox 8"/>
           <p:cNvSpPr txBox="1"/>
           <p:nvPr/>
         </p:nvSpPr>
@@ -21594,9 +22296,9 @@
             <a:r>
               <a:rPr sz="1200" b="1" i="0">
                 <a:solidFill>
-                  <a:srgbClr val="F39C12"/>
-                </a:solidFill>
-                <a:latin typeface="Calibri"/>
+                  <a:srgbClr val="2E5A4B"/>
+                </a:solidFill>
+                <a:latin typeface="Segoe UI"/>
               </a:rPr>
               <a:t>LECTURE MÉTIER</a:t>
             </a:r>
@@ -21605,7 +22307,7 @@
       </p:sp>
       <p:sp>
         <p:nvSpPr>
-          <p:cNvPr id="11" name="TextBox 10"/>
+          <p:cNvPr id="10" name="TextBox 9"/>
           <p:cNvSpPr txBox="1"/>
           <p:nvPr/>
         </p:nvSpPr>
@@ -21629,9 +22331,9 @@
             <a:r>
               <a:rPr sz="1400" b="0" i="0">
                 <a:solidFill>
-                  <a:srgbClr val="2C3E50"/>
-                </a:solidFill>
-                <a:latin typeface="Calibri"/>
+                  <a:srgbClr val="1E2B26"/>
+                </a:solidFill>
+                <a:latin typeface="Segoe UI"/>
               </a:rPr>
               <a:t>20 points séparent votre pilier le plus solide du plus fragile — l'écart interne à réduire en priorité.</a:t>
             </a:r>
@@ -21640,7 +22342,7 @@
       </p:sp>
       <p:sp>
         <p:nvSpPr>
-          <p:cNvPr id="12" name="TextBox 11"/>
+          <p:cNvPr id="11" name="TextBox 10"/>
           <p:cNvSpPr txBox="1"/>
           <p:nvPr/>
         </p:nvSpPr>
@@ -21664,9 +22366,9 @@
             <a:r>
               <a:rPr sz="1200" b="1" i="0">
                 <a:solidFill>
-                  <a:srgbClr val="6B7C93"/>
-                </a:solidFill>
-                <a:latin typeface="Calibri"/>
+                  <a:srgbClr val="5F6B64"/>
+                </a:solidFill>
+                <a:latin typeface="Segoe UI"/>
               </a:rPr>
               <a:t>MATURITÉ ESG</a:t>
             </a:r>
@@ -21675,7 +22377,7 @@
       </p:sp>
       <p:sp>
         <p:nvSpPr>
-          <p:cNvPr id="13" name="Rounded Rectangle 12"/>
+          <p:cNvPr id="12" name="Rounded Rectangle 11"/>
           <p:cNvSpPr/>
           <p:nvPr/>
         </p:nvSpPr>
@@ -21688,11 +22390,11 @@
             <a:avLst/>
           </a:prstGeom>
           <a:solidFill>
-            <a:srgbClr val="EBF2FB"/>
+            <a:srgbClr val="E6E6DC"/>
           </a:solidFill>
           <a:ln w="12700">
             <a:solidFill>
-              <a:srgbClr val="F39C12"/>
+              <a:srgbClr val="2E5A4B"/>
             </a:solidFill>
           </a:ln>
         </p:spPr>
@@ -21720,7 +22422,7 @@
       </p:sp>
       <p:sp>
         <p:nvSpPr>
-          <p:cNvPr id="14" name="TextBox 13"/>
+          <p:cNvPr id="13" name="TextBox 12"/>
           <p:cNvSpPr txBox="1"/>
           <p:nvPr/>
         </p:nvSpPr>
@@ -21744,9 +22446,9 @@
             <a:r>
               <a:rPr sz="1400" b="1" i="0">
                 <a:solidFill>
-                  <a:srgbClr val="6B7C93"/>
-                </a:solidFill>
-                <a:latin typeface="Calibri"/>
+                  <a:srgbClr val="5F6B64"/>
+                </a:solidFill>
+                <a:latin typeface="Georgia"/>
               </a:rPr>
               <a:t>1</a:t>
             </a:r>
@@ -21755,7 +22457,7 @@
       </p:sp>
       <p:sp>
         <p:nvSpPr>
-          <p:cNvPr id="15" name="Rounded Rectangle 14"/>
+          <p:cNvPr id="14" name="Rounded Rectangle 13"/>
           <p:cNvSpPr/>
           <p:nvPr/>
         </p:nvSpPr>
@@ -21768,11 +22470,11 @@
             <a:avLst/>
           </a:prstGeom>
           <a:solidFill>
-            <a:srgbClr val="EBF2FB"/>
+            <a:srgbClr val="E6E6DC"/>
           </a:solidFill>
           <a:ln w="12700">
             <a:solidFill>
-              <a:srgbClr val="F39C12"/>
+              <a:srgbClr val="2E5A4B"/>
             </a:solidFill>
           </a:ln>
         </p:spPr>
@@ -21800,7 +22502,7 @@
       </p:sp>
       <p:sp>
         <p:nvSpPr>
-          <p:cNvPr id="16" name="TextBox 15"/>
+          <p:cNvPr id="15" name="TextBox 14"/>
           <p:cNvSpPr txBox="1"/>
           <p:nvPr/>
         </p:nvSpPr>
@@ -21824,9 +22526,9 @@
             <a:r>
               <a:rPr sz="1400" b="1" i="0">
                 <a:solidFill>
-                  <a:srgbClr val="6B7C93"/>
-                </a:solidFill>
-                <a:latin typeface="Calibri"/>
+                  <a:srgbClr val="5F6B64"/>
+                </a:solidFill>
+                <a:latin typeface="Georgia"/>
               </a:rPr>
               <a:t>2</a:t>
             </a:r>
@@ -21835,7 +22537,7 @@
       </p:sp>
       <p:sp>
         <p:nvSpPr>
-          <p:cNvPr id="17" name="Rounded Rectangle 16"/>
+          <p:cNvPr id="16" name="Rounded Rectangle 15"/>
           <p:cNvSpPr/>
           <p:nvPr/>
         </p:nvSpPr>
@@ -21848,11 +22550,11 @@
             <a:avLst/>
           </a:prstGeom>
           <a:solidFill>
-            <a:srgbClr val="F39C12"/>
+            <a:srgbClr val="2E5A4B"/>
           </a:solidFill>
           <a:ln w="12700">
             <a:solidFill>
-              <a:srgbClr val="F39C12"/>
+              <a:srgbClr val="2E5A4B"/>
             </a:solidFill>
           </a:ln>
         </p:spPr>
@@ -21880,7 +22582,7 @@
       </p:sp>
       <p:sp>
         <p:nvSpPr>
-          <p:cNvPr id="18" name="TextBox 17"/>
+          <p:cNvPr id="17" name="TextBox 16"/>
           <p:cNvSpPr txBox="1"/>
           <p:nvPr/>
         </p:nvSpPr>
@@ -21904,9 +22606,9 @@
             <a:r>
               <a:rPr sz="1400" b="1" i="0">
                 <a:solidFill>
-                  <a:srgbClr val="1B3A6B"/>
-                </a:solidFill>
-                <a:latin typeface="Calibri"/>
+                  <a:srgbClr val="1F3D33"/>
+                </a:solidFill>
+                <a:latin typeface="Georgia"/>
               </a:rPr>
               <a:t>3</a:t>
             </a:r>
@@ -21915,7 +22617,7 @@
       </p:sp>
       <p:sp>
         <p:nvSpPr>
-          <p:cNvPr id="19" name="Rounded Rectangle 18"/>
+          <p:cNvPr id="18" name="Rounded Rectangle 17"/>
           <p:cNvSpPr/>
           <p:nvPr/>
         </p:nvSpPr>
@@ -21928,11 +22630,11 @@
             <a:avLst/>
           </a:prstGeom>
           <a:solidFill>
-            <a:srgbClr val="EBF2FB"/>
+            <a:srgbClr val="E6E6DC"/>
           </a:solidFill>
           <a:ln w="12700">
             <a:solidFill>
-              <a:srgbClr val="F39C12"/>
+              <a:srgbClr val="2E5A4B"/>
             </a:solidFill>
           </a:ln>
         </p:spPr>
@@ -21960,7 +22662,7 @@
       </p:sp>
       <p:sp>
         <p:nvSpPr>
-          <p:cNvPr id="20" name="TextBox 19"/>
+          <p:cNvPr id="19" name="TextBox 18"/>
           <p:cNvSpPr txBox="1"/>
           <p:nvPr/>
         </p:nvSpPr>
@@ -21984,9 +22686,9 @@
             <a:r>
               <a:rPr sz="1400" b="1" i="0">
                 <a:solidFill>
-                  <a:srgbClr val="6B7C93"/>
-                </a:solidFill>
-                <a:latin typeface="Calibri"/>
+                  <a:srgbClr val="5F6B64"/>
+                </a:solidFill>
+                <a:latin typeface="Georgia"/>
               </a:rPr>
               <a:t>4</a:t>
             </a:r>
@@ -21995,7 +22697,7 @@
       </p:sp>
       <p:sp>
         <p:nvSpPr>
-          <p:cNvPr id="21" name="Rounded Rectangle 20"/>
+          <p:cNvPr id="20" name="Rounded Rectangle 19"/>
           <p:cNvSpPr/>
           <p:nvPr/>
         </p:nvSpPr>
@@ -22008,11 +22710,11 @@
             <a:avLst/>
           </a:prstGeom>
           <a:solidFill>
-            <a:srgbClr val="EBF2FB"/>
+            <a:srgbClr val="E6E6DC"/>
           </a:solidFill>
           <a:ln w="12700">
             <a:solidFill>
-              <a:srgbClr val="F39C12"/>
+              <a:srgbClr val="2E5A4B"/>
             </a:solidFill>
           </a:ln>
         </p:spPr>
@@ -22040,7 +22742,7 @@
       </p:sp>
       <p:sp>
         <p:nvSpPr>
-          <p:cNvPr id="22" name="TextBox 21"/>
+          <p:cNvPr id="21" name="TextBox 20"/>
           <p:cNvSpPr txBox="1"/>
           <p:nvPr/>
         </p:nvSpPr>
@@ -22064,9 +22766,9 @@
             <a:r>
               <a:rPr sz="1400" b="1" i="0">
                 <a:solidFill>
-                  <a:srgbClr val="6B7C93"/>
-                </a:solidFill>
-                <a:latin typeface="Calibri"/>
+                  <a:srgbClr val="5F6B64"/>
+                </a:solidFill>
+                <a:latin typeface="Georgia"/>
               </a:rPr>
               <a:t>5</a:t>
             </a:r>
@@ -22075,7 +22777,7 @@
       </p:sp>
       <p:sp>
         <p:nvSpPr>
-          <p:cNvPr id="23" name="TextBox 22"/>
+          <p:cNvPr id="22" name="TextBox 21"/>
           <p:cNvSpPr txBox="1"/>
           <p:nvPr/>
         </p:nvSpPr>
@@ -22099,9 +22801,9 @@
             <a:r>
               <a:rPr sz="1600" b="1" i="0">
                 <a:solidFill>
-                  <a:srgbClr val="F39C12"/>
-                </a:solidFill>
-                <a:latin typeface="Calibri"/>
+                  <a:srgbClr val="2E5A4B"/>
+                </a:solidFill>
+                <a:latin typeface="Georgia"/>
               </a:rPr>
               <a:t>Structurée</a:t>
             </a:r>
@@ -22110,7 +22812,7 @@
       </p:sp>
       <p:sp>
         <p:nvSpPr>
-          <p:cNvPr id="24" name="TextBox 23"/>
+          <p:cNvPr id="23" name="TextBox 22"/>
           <p:cNvSpPr txBox="1"/>
           <p:nvPr/>
         </p:nvSpPr>
@@ -22134,9 +22836,9 @@
             <a:r>
               <a:rPr sz="1250" b="0" i="0">
                 <a:solidFill>
-                  <a:srgbClr val="2C3E50"/>
-                </a:solidFill>
-                <a:latin typeface="Calibri"/>
+                  <a:srgbClr val="1E2B26"/>
+                </a:solidFill>
+                <a:latin typeface="Segoe UI"/>
               </a:rPr>
               <a:t>Pour franchir le cap suivant : faire auditer le reporting.</a:t>
             </a:r>
@@ -22145,7 +22847,7 @@
       </p:sp>
       <p:sp>
         <p:nvSpPr>
-          <p:cNvPr id="25" name="TextBox 24"/>
+          <p:cNvPr id="24" name="TextBox 23"/>
           <p:cNvSpPr txBox="1"/>
           <p:nvPr/>
         </p:nvSpPr>
@@ -22169,9 +22871,9 @@
             <a:r>
               <a:rPr sz="800" b="0" i="0">
                 <a:solidFill>
-                  <a:srgbClr val="6B7C93"/>
-                </a:solidFill>
-                <a:latin typeface="Calibri"/>
+                  <a:srgbClr val="5F6B64"/>
+                </a:solidFill>
+                <a:latin typeface="Segoe UI"/>
               </a:rPr>
               <a:t>Acme Industries   |   8 / 23</a:t>
             </a:r>
@@ -22211,7 +22913,7 @@
             <a:avLst/>
           </a:prstGeom>
           <a:solidFill>
-            <a:srgbClr val="F4F7FD"/>
+            <a:srgbClr val="F3F0E8"/>
           </a:solidFill>
           <a:ln>
             <a:noFill/>
@@ -22247,14 +22949,14 @@
         </p:nvSpPr>
         <p:spPr>
           <a:xfrm>
-            <a:off x="0" y="0"/>
-            <a:ext cx="12188952" cy="1143000"/>
+            <a:off x="457200" y="384048"/>
+            <a:ext cx="201168" cy="201168"/>
           </a:xfrm>
           <a:prstGeom prst="rect">
             <a:avLst/>
           </a:prstGeom>
           <a:solidFill>
-            <a:srgbClr val="1B3A6B"/>
+            <a:srgbClr val="1F3D33"/>
           </a:solidFill>
           <a:ln>
             <a:noFill/>
@@ -22284,20 +22986,55 @@
       </p:sp>
       <p:sp>
         <p:nvSpPr>
-          <p:cNvPr id="4" name="Rectangle 3"/>
+          <p:cNvPr id="4" name="TextBox 3"/>
+          <p:cNvSpPr txBox="1"/>
+          <p:nvPr/>
+        </p:nvSpPr>
+        <p:spPr>
+          <a:xfrm>
+            <a:off x="822960" y="237744"/>
+            <a:ext cx="10789920" cy="685800"/>
+          </a:xfrm>
+          <a:prstGeom prst="rect">
+            <a:avLst/>
+          </a:prstGeom>
+          <a:noFill/>
+        </p:spPr>
+        <p:txBody>
+          <a:bodyPr wrap="square">
+            <a:spAutoFit/>
+          </a:bodyPr>
+          <a:lstStyle/>
+          <a:p>
+            <a:pPr algn="l"/>
+            <a:r>
+              <a:rPr sz="1560" b="1" i="0">
+                <a:solidFill>
+                  <a:srgbClr val="1E2B26"/>
+                </a:solidFill>
+                <a:latin typeface="Georgia"/>
+              </a:rPr>
+              <a:t>Une trajectoire ESG mesurée exercice après exercice</a:t>
+            </a:r>
+          </a:p>
+        </p:txBody>
+      </p:sp>
+      <p:sp>
+        <p:nvSpPr>
+          <p:cNvPr id="5" name="Rectangle 4"/>
           <p:cNvSpPr/>
           <p:nvPr/>
         </p:nvSpPr>
         <p:spPr>
           <a:xfrm>
-            <a:off x="0" y="1143000"/>
-            <a:ext cx="64008" cy="5715000"/>
+            <a:off x="457200" y="1024128"/>
+            <a:ext cx="2011680" cy="18288"/>
           </a:xfrm>
           <a:prstGeom prst="rect">
             <a:avLst/>
           </a:prstGeom>
           <a:solidFill>
-            <a:srgbClr val="F39C12"/>
+            <a:srgbClr val="1E2B26"/>
           </a:solidFill>
           <a:ln>
             <a:noFill/>
@@ -22325,79 +23062,9 @@
           </a:p>
         </p:txBody>
       </p:sp>
-      <p:sp>
-        <p:nvSpPr>
-          <p:cNvPr id="5" name="TextBox 4"/>
-          <p:cNvSpPr txBox="1"/>
-          <p:nvPr/>
-        </p:nvSpPr>
-        <p:spPr>
-          <a:xfrm>
-            <a:off x="292608" y="128016"/>
-            <a:ext cx="10972800" cy="292608"/>
-          </a:xfrm>
-          <a:prstGeom prst="rect">
-            <a:avLst/>
-          </a:prstGeom>
-          <a:noFill/>
-        </p:spPr>
-        <p:txBody>
-          <a:bodyPr wrap="square">
-            <a:spAutoFit/>
-          </a:bodyPr>
-          <a:lstStyle/>
-          <a:p>
-            <a:pPr algn="l"/>
-            <a:r>
-              <a:rPr sz="1100" b="1" i="0">
-                <a:solidFill>
-                  <a:srgbClr val="F39C12"/>
-                </a:solidFill>
-                <a:latin typeface="Calibri"/>
-              </a:rPr>
-              <a:t>TRAJECTOIRE</a:t>
-            </a:r>
-          </a:p>
-        </p:txBody>
-      </p:sp>
-      <p:sp>
-        <p:nvSpPr>
-          <p:cNvPr id="6" name="TextBox 5"/>
-          <p:cNvSpPr txBox="1"/>
-          <p:nvPr/>
-        </p:nvSpPr>
-        <p:spPr>
-          <a:xfrm>
-            <a:off x="274320" y="384048"/>
-            <a:ext cx="11612880" cy="713232"/>
-          </a:xfrm>
-          <a:prstGeom prst="rect">
-            <a:avLst/>
-          </a:prstGeom>
-          <a:noFill/>
-        </p:spPr>
-        <p:txBody>
-          <a:bodyPr wrap="square">
-            <a:spAutoFit/>
-          </a:bodyPr>
-          <a:lstStyle/>
-          <a:p>
-            <a:pPr algn="l"/>
-            <a:r>
-              <a:rPr sz="2028" b="1" i="0">
-                <a:solidFill>
-                  <a:srgbClr val="FFFFFF"/>
-                </a:solidFill>
-                <a:latin typeface="Calibri"/>
-              </a:rPr>
-              <a:t>Une trajectoire ESG mesurée exercice après exercice</a:t>
-            </a:r>
-          </a:p>
-        </p:txBody>
-      </p:sp>
       <p:pic>
         <p:nvPicPr>
-          <p:cNvPr id="7" name="Picture 6" descr="image.png"/>
+          <p:cNvPr id="6" name="Picture 5" descr="image.png"/>
           <p:cNvPicPr>
             <a:picLocks noChangeAspect="1"/>
           </p:cNvPicPr>
@@ -22412,7 +23079,7 @@
         <p:spPr>
           <a:xfrm>
             <a:off x="1188720" y="1463040"/>
-            <a:ext cx="9784080" cy="5208916"/>
+            <a:ext cx="9784080" cy="5294605"/>
           </a:xfrm>
           <a:prstGeom prst="rect">
             <a:avLst/>
@@ -22421,7 +23088,7 @@
       </p:pic>
       <p:sp>
         <p:nvSpPr>
-          <p:cNvPr id="8" name="TextBox 7"/>
+          <p:cNvPr id="7" name="TextBox 6"/>
           <p:cNvSpPr txBox="1"/>
           <p:nvPr/>
         </p:nvSpPr>
@@ -22445,9 +23112,9 @@
             <a:r>
               <a:rPr sz="1000" b="0" i="1">
                 <a:solidFill>
-                  <a:srgbClr val="6B7C93"/>
-                </a:solidFill>
-                <a:latin typeface="Calibri"/>
+                  <a:srgbClr val="5F6B64"/>
+                </a:solidFill>
+                <a:latin typeface="Segoe UI"/>
               </a:rPr>
               <a:t>Évolution pluriannuelle du score ESG (global et par pilier)</a:t>
             </a:r>
@@ -22456,7 +23123,7 @@
       </p:sp>
       <p:sp>
         <p:nvSpPr>
-          <p:cNvPr id="9" name="TextBox 8"/>
+          <p:cNvPr id="8" name="TextBox 7"/>
           <p:cNvSpPr txBox="1"/>
           <p:nvPr/>
         </p:nvSpPr>
@@ -22480,9 +23147,9 @@
             <a:r>
               <a:rPr sz="800" b="0" i="0">
                 <a:solidFill>
-                  <a:srgbClr val="6B7C93"/>
-                </a:solidFill>
-                <a:latin typeface="Calibri"/>
+                  <a:srgbClr val="5F6B64"/>
+                </a:solidFill>
+                <a:latin typeface="Segoe UI"/>
               </a:rPr>
               <a:t>Acme Industries   |   9 / 23</a:t>
             </a:r>
@@ -22815,4 +23482,324 @@
   </a:objectDefaults>
   <a:extraClrSchemeLst/>
 </a:theme>
+</file>
+
+<file path=ppt/theme/theme2.xml><?xml version="1.0" encoding="utf-8"?>
+<a:theme xmlns:a="http://schemas.openxmlformats.org/drawingml/2006/main" name="Office Theme">
+  <a:themeElements>
+    <a:clrScheme name="Office">
+      <a:dk1>
+        <a:sysClr val="windowText" lastClr="000000"/>
+      </a:dk1>
+      <a:lt1>
+        <a:sysClr val="window" lastClr="FFFFFF"/>
+      </a:lt1>
+      <a:dk2>
+        <a:srgbClr val="1F497D"/>
+      </a:dk2>
+      <a:lt2>
+        <a:srgbClr val="EEECE1"/>
+      </a:lt2>
+      <a:accent1>
+        <a:srgbClr val="4F81BD"/>
+      </a:accent1>
+      <a:accent2>
+        <a:srgbClr val="C0504D"/>
+      </a:accent2>
+      <a:accent3>
+        <a:srgbClr val="9BBB59"/>
+      </a:accent3>
+      <a:accent4>
+        <a:srgbClr val="8064A2"/>
+      </a:accent4>
+      <a:accent5>
+        <a:srgbClr val="4BACC6"/>
+      </a:accent5>
+      <a:accent6>
+        <a:srgbClr val="F79646"/>
+      </a:accent6>
+      <a:hlink>
+        <a:srgbClr val="0000FF"/>
+      </a:hlink>
+      <a:folHlink>
+        <a:srgbClr val="800080"/>
+      </a:folHlink>
+    </a:clrScheme>
+    <a:fontScheme name="Office">
+      <a:majorFont>
+        <a:latin typeface="Calibri"/>
+        <a:ea typeface=""/>
+        <a:cs typeface=""/>
+        <a:font script="Jpan" typeface="ＭＳ Ｐゴシック"/>
+        <a:font script="Hang" typeface="맑은 고딕"/>
+        <a:font script="Hans" typeface="宋体"/>
+        <a:font script="Hant" typeface="新細明體"/>
+        <a:font script="Arab" typeface="Times New Roman"/>
+        <a:font script="Hebr" typeface="Times New Roman"/>
+        <a:font script="Thai" typeface="Angsana New"/>
+        <a:font script="Ethi" typeface="Nyala"/>
+        <a:font script="Beng" typeface="Vrinda"/>
+        <a:font script="Gujr" typeface="Shruti"/>
+        <a:font script="Khmr" typeface="MoolBoran"/>
+        <a:font script="Knda" typeface="Tunga"/>
+        <a:font script="Guru" typeface="Raavi"/>
+        <a:font script="Cans" typeface="Euphemia"/>
+        <a:font script="Cher" typeface="Plantagenet Cherokee"/>
+        <a:font script="Yiii" typeface="Microsoft Yi Baiti"/>
+        <a:font script="Tibt" typeface="Microsoft Himalaya"/>
+        <a:font script="Thaa" typeface="MV Boli"/>
+        <a:font script="Deva" typeface="Mangal"/>
+        <a:font script="Telu" typeface="Gautami"/>
+        <a:font script="Taml" typeface="Latha"/>
+        <a:font script="Syrc" typeface="Estrangelo Edessa"/>
+        <a:font script="Orya" typeface="Kalinga"/>
+        <a:font script="Mlym" typeface="Kartika"/>
+        <a:font script="Laoo" typeface="DokChampa"/>
+        <a:font script="Sinh" typeface="Iskoola Pota"/>
+        <a:font script="Mong" typeface="Mongolian Baiti"/>
+        <a:font script="Viet" typeface="Times New Roman"/>
+        <a:font script="Uigh" typeface="Microsoft Uighur"/>
+        <a:font script="Geor" typeface="Sylfaen"/>
+      </a:majorFont>
+      <a:minorFont>
+        <a:latin typeface="Calibri"/>
+        <a:ea typeface=""/>
+        <a:cs typeface=""/>
+        <a:font script="Jpan" typeface="ＭＳ Ｐゴシック"/>
+        <a:font script="Hang" typeface="맑은 고딕"/>
+        <a:font script="Hans" typeface="宋体"/>
+        <a:font script="Hant" typeface="新細明體"/>
+        <a:font script="Arab" typeface="Arial"/>
+        <a:font script="Hebr" typeface="Arial"/>
+        <a:font script="Thai" typeface="Cordia New"/>
+        <a:font script="Ethi" typeface="Nyala"/>
+        <a:font script="Beng" typeface="Vrinda"/>
+        <a:font script="Gujr" typeface="Shruti"/>
+        <a:font script="Khmr" typeface="DaunPenh"/>
+        <a:font script="Knda" typeface="Tunga"/>
+        <a:font script="Guru" typeface="Raavi"/>
+        <a:font script="Cans" typeface="Euphemia"/>
+        <a:font script="Cher" typeface="Plantagenet Cherokee"/>
+        <a:font script="Yiii" typeface="Microsoft Yi Baiti"/>
+        <a:font script="Tibt" typeface="Microsoft Himalaya"/>
+        <a:font script="Thaa" typeface="MV Boli"/>
+        <a:font script="Deva" typeface="Mangal"/>
+        <a:font script="Telu" typeface="Gautami"/>
+        <a:font script="Taml" typeface="Latha"/>
+        <a:font script="Syrc" typeface="Estrangelo Edessa"/>
+        <a:font script="Orya" typeface="Kalinga"/>
+        <a:font script="Mlym" typeface="Kartika"/>
+        <a:font script="Laoo" typeface="DokChampa"/>
+        <a:font script="Sinh" typeface="Iskoola Pota"/>
+        <a:font script="Mong" typeface="Mongolian Baiti"/>
+        <a:font script="Viet" typeface="Arial"/>
+        <a:font script="Uigh" typeface="Microsoft Uighur"/>
+        <a:font script="Geor" typeface="Sylfaen"/>
+      </a:minorFont>
+    </a:fontScheme>
+    <a:fmtScheme name="Office">
+      <a:fillStyleLst>
+        <a:solidFill>
+          <a:schemeClr val="phClr"/>
+        </a:solidFill>
+        <a:gradFill rotWithShape="1">
+          <a:gsLst>
+            <a:gs pos="0">
+              <a:schemeClr val="phClr">
+                <a:tint val="50000"/>
+                <a:satMod val="300000"/>
+              </a:schemeClr>
+            </a:gs>
+            <a:gs pos="35000">
+              <a:schemeClr val="phClr">
+                <a:tint val="37000"/>
+                <a:satMod val="300000"/>
+              </a:schemeClr>
+            </a:gs>
+            <a:gs pos="100000">
+              <a:schemeClr val="phClr">
+                <a:tint val="15000"/>
+                <a:satMod val="350000"/>
+              </a:schemeClr>
+            </a:gs>
+          </a:gsLst>
+          <a:lin ang="16200000" scaled="1"/>
+        </a:gradFill>
+        <a:gradFill rotWithShape="1">
+          <a:gsLst>
+            <a:gs pos="0">
+              <a:schemeClr val="phClr">
+                <a:tint val="100000"/>
+                <a:shade val="100000"/>
+                <a:satMod val="130000"/>
+              </a:schemeClr>
+            </a:gs>
+            <a:gs pos="100000">
+              <a:schemeClr val="phClr">
+                <a:tint val="50000"/>
+                <a:shade val="100000"/>
+                <a:satMod val="350000"/>
+              </a:schemeClr>
+            </a:gs>
+          </a:gsLst>
+          <a:lin ang="16200000" scaled="0"/>
+        </a:gradFill>
+      </a:fillStyleLst>
+      <a:lnStyleLst>
+        <a:ln w="9525" cap="flat" cmpd="sng" algn="ctr">
+          <a:solidFill>
+            <a:schemeClr val="phClr">
+              <a:shade val="95000"/>
+              <a:satMod val="105000"/>
+            </a:schemeClr>
+          </a:solidFill>
+          <a:prstDash val="solid"/>
+        </a:ln>
+        <a:ln w="25400" cap="flat" cmpd="sng" algn="ctr">
+          <a:solidFill>
+            <a:schemeClr val="phClr"/>
+          </a:solidFill>
+          <a:prstDash val="solid"/>
+        </a:ln>
+        <a:ln w="38100" cap="flat" cmpd="sng" algn="ctr">
+          <a:solidFill>
+            <a:schemeClr val="phClr"/>
+          </a:solidFill>
+          <a:prstDash val="solid"/>
+        </a:ln>
+      </a:lnStyleLst>
+      <a:effectStyleLst>
+        <a:effectStyle>
+          <a:effectLst>
+            <a:outerShdw blurRad="40000" dist="20000" dir="5400000" rotWithShape="0">
+              <a:srgbClr val="000000">
+                <a:alpha val="38000"/>
+              </a:srgbClr>
+            </a:outerShdw>
+          </a:effectLst>
+        </a:effectStyle>
+        <a:effectStyle>
+          <a:effectLst>
+            <a:outerShdw blurRad="40000" dist="23000" dir="5400000" rotWithShape="0">
+              <a:srgbClr val="000000">
+                <a:alpha val="35000"/>
+              </a:srgbClr>
+            </a:outerShdw>
+          </a:effectLst>
+        </a:effectStyle>
+        <a:effectStyle>
+          <a:effectLst>
+            <a:outerShdw blurRad="40000" dist="23000" dir="5400000" rotWithShape="0">
+              <a:srgbClr val="000000">
+                <a:alpha val="35000"/>
+              </a:srgbClr>
+            </a:outerShdw>
+          </a:effectLst>
+          <a:scene3d>
+            <a:camera prst="orthographicFront">
+              <a:rot lat="0" lon="0" rev="0"/>
+            </a:camera>
+            <a:lightRig rig="threePt" dir="t">
+              <a:rot lat="0" lon="0" rev="1200000"/>
+            </a:lightRig>
+          </a:scene3d>
+          <a:sp3d>
+            <a:bevelT w="63500" h="25400"/>
+          </a:sp3d>
+        </a:effectStyle>
+      </a:effectStyleLst>
+      <a:bgFillStyleLst>
+        <a:solidFill>
+          <a:schemeClr val="phClr"/>
+        </a:solidFill>
+        <a:gradFill rotWithShape="1">
+          <a:gsLst>
+            <a:gs pos="0">
+              <a:schemeClr val="phClr">
+                <a:tint val="40000"/>
+                <a:satMod val="350000"/>
+              </a:schemeClr>
+            </a:gs>
+            <a:gs pos="40000">
+              <a:schemeClr val="phClr">
+                <a:tint val="45000"/>
+                <a:shade val="99000"/>
+                <a:satMod val="350000"/>
+              </a:schemeClr>
+            </a:gs>
+            <a:gs pos="100000">
+              <a:schemeClr val="phClr">
+                <a:shade val="20000"/>
+                <a:satMod val="255000"/>
+              </a:schemeClr>
+            </a:gs>
+          </a:gsLst>
+          <a:path path="circle">
+            <a:fillToRect l="50000" t="-80000" r="50000" b="180000"/>
+          </a:path>
+        </a:gradFill>
+        <a:gradFill rotWithShape="1">
+          <a:gsLst>
+            <a:gs pos="0">
+              <a:schemeClr val="phClr">
+                <a:tint val="80000"/>
+                <a:satMod val="300000"/>
+              </a:schemeClr>
+            </a:gs>
+            <a:gs pos="100000">
+              <a:schemeClr val="phClr">
+                <a:shade val="30000"/>
+                <a:satMod val="200000"/>
+              </a:schemeClr>
+            </a:gs>
+          </a:gsLst>
+          <a:path path="circle">
+            <a:fillToRect l="50000" t="50000" r="50000" b="50000"/>
+          </a:path>
+        </a:gradFill>
+      </a:bgFillStyleLst>
+    </a:fmtScheme>
+  </a:themeElements>
+  <a:objectDefaults>
+    <a:spDef>
+      <a:spPr/>
+      <a:bodyPr/>
+      <a:lstStyle/>
+      <a:style>
+        <a:lnRef idx="1">
+          <a:schemeClr val="accent1"/>
+        </a:lnRef>
+        <a:fillRef idx="3">
+          <a:schemeClr val="accent1"/>
+        </a:fillRef>
+        <a:effectRef idx="2">
+          <a:schemeClr val="accent1"/>
+        </a:effectRef>
+        <a:fontRef idx="minor">
+          <a:schemeClr val="lt1"/>
+        </a:fontRef>
+      </a:style>
+    </a:spDef>
+    <a:lnDef>
+      <a:spPr/>
+      <a:bodyPr/>
+      <a:lstStyle/>
+      <a:style>
+        <a:lnRef idx="2">
+          <a:schemeClr val="accent1"/>
+        </a:lnRef>
+        <a:fillRef idx="0">
+          <a:schemeClr val="accent1"/>
+        </a:fillRef>
+        <a:effectRef idx="1">
+          <a:schemeClr val="accent1"/>
+        </a:effectRef>
+        <a:fontRef idx="minor">
+          <a:schemeClr val="tx1"/>
+        </a:fontRef>
+      </a:style>
+    </a:lnDef>
+  </a:objectDefaults>
+  <a:extraClrSchemeLst/>
+</a:theme>
 </file>
--- a/examples/Presentation.pptx
+++ b/examples/Presentation.pptx
@@ -606,7 +606,7 @@
           <a:lstStyle/>
           <a:p>
             <a:r>
-              <a:t>Avec 70/100, le pilier environnemental se situe 4 points au-dessus du score global (66/100). Rapportées au chiffre d'affaires, les émissions représentent 171 t CO2e par million d'euros, une intensité satisfaisante pour le secteur selon la grille du diagnostic. La part d'énergie renouvelable atteint 42 %, un niveau satisfaisant selon la grille de lecture du diagnostic. 63 % des déchets sont valorisés, ce que la grille du diagnostic classe comme solide.</a:t>
+              <a:t>Avec 70/100, le pilier environnemental est aligné sur le score global. Rapportées au chiffre d'affaires, les émissions représentent 171 t CO2e par million d'euros, une intensité satisfaisante selon la grille interne du diagnostic, différenciée par famille de secteurs. La part d'énergie renouvelable atteint 42 %, un niveau satisfaisant selon la grille de lecture du diagnostic. 63 % des déchets sont valorisés, ce que la grille du diagnostic classe comme solide.</a:t>
             </a:r>
           </a:p>
           <a:p/>
@@ -694,7 +694,7 @@
           <a:lstStyle/>
           <a:p>
             <a:r>
-              <a:t>Avec 55/100, le pilier social se situe 11 points en dessous du score global (66/100). Les femmes représentent 34 % de l'effectif, une situation satisfaisante selon la grille de lecture retenue. Chaque salarié a suivi en moyenne 22 h de formation sur l'exercice, un effort satisfaisant au regard de la grille du diagnostic. Le taux de fréquence des accidents s'établit à 6,2, un résultat fragile selon la grille de lecture retenue. Le taux de rotation du personnel est de 11 %, un niveau satisfaisant selon la grille du diagnostic.</a:t>
+              <a:t>Avec 65/100, le pilier social se situe 4 points en dessous du score global (70/100). Les femmes représentent 34 % de l'effectif, une situation satisfaisante selon la grille de lecture retenue. Chaque salarié a suivi en moyenne 22 h de formation sur l'exercice, un effort satisfaisant au regard de la grille du diagnostic. Le taux de fréquence des accidents s'établit à 6,2 (moyenne nationale publiée par l'Assurance Maladie pour 2024 : 16,0), un résultat solide selon la grille de lecture retenue. Le taux de rotation du personnel est de 11 %, un niveau satisfaisant selon la grille du diagnostic.</a:t>
             </a:r>
           </a:p>
           <a:p/>
@@ -776,7 +776,7 @@
           <a:lstStyle/>
           <a:p>
             <a:r>
-              <a:t>Avec 75/100, le pilier de gouvernance se situe 9 points au-dessus du score global (66/100). Les administrateurs indépendants représentent 45 % du conseil, une proportion satisfaisante selon la grille du diagnostic. Les femmes occupent 44 % des sièges du conseil, une représentation exemplaire selon la grille de lecture retenue.</a:t>
+              <a:t>Avec 75/100, le pilier de gouvernance se situe 6 points au-dessus du score global (70/100). Les administrateurs indépendants représentent 45 % du conseil, une proportion satisfaisante selon la grille du diagnostic. Les femmes occupent 44 % des sièges du conseil, une représentation exemplaire selon la grille de lecture retenue.</a:t>
             </a:r>
           </a:p>
           <a:p/>
@@ -858,7 +858,7 @@
           <a:lstStyle/>
           <a:p>
             <a:r>
-              <a:t>Ce chapitre met en regard les résultats et leurs causes. Il identifie 5 forces et 5 axes de progrès, examine la couverture de 7 exigences de reporting (dont 2 encore ouvertes) et hiérarchise 4 risques majeurs (dont 2 de priorité 1).</a:t>
+              <a:t>Ce chapitre met en regard les résultats et leurs causes. Il identifie 5 forces et 4 axes de progrès, examine la couverture de 6 exigences de reporting (dont 1 encore ouverte) et hiérarchise 4 risques majeurs (dont 1 de priorité 1).</a:t>
             </a:r>
           </a:p>
           <a:p/>
@@ -870,7 +870,7 @@
           <a:p/>
           <a:p>
             <a:r>
-              <a:t>Le tableau ci-dessous examine 7 exigences de reporting du référentiel CSRD / ESRS : 4 sont couvertes par les données de l'exercice, 2 restent ouvertes ou partiellement couvertes. Chaque ligne indique la référence concernée et ce qui manque pour la couvrir.</a:t>
+              <a:t>Le tableau ci-dessous examine 6 exigences de reporting du référentiel CSRD / ESRS : 4 sont couvertes par les données de l'exercice, 1 reste ouverte ou partiellement couverte. Chaque ligne indique la référence concernée et ce qui manque pour la couvrir.</a:t>
             </a:r>
           </a:p>
         </p:txBody>
@@ -940,7 +940,7 @@
           <a:lstStyle/>
           <a:p>
             <a:r>
-              <a:t>L'analyse retient 4 risques majeurs. Leur priorité combine l'impact estimé et la probabilité d'occurrence : 2 sont classés en priorité 1 et appellent une action dans les douze prochains mois.</a:t>
+              <a:t>L'analyse retient 4 risques majeurs. Leur priorité combine l'impact estimé et la probabilité d'occurrence : 1 est classé en priorité 1 et appelle une action dans les douze prochains mois.</a:t>
             </a:r>
           </a:p>
         </p:txBody>
@@ -4434,7 +4434,7 @@
                 </a:solidFill>
                 <a:latin typeface="Georgia"/>
               </a:rPr>
-              <a:t>66</a:t>
+              <a:t>70</a:t>
             </a:r>
           </a:p>
         </p:txBody>
@@ -5660,7 +5660,7 @@
                 </a:solidFill>
                 <a:latin typeface="Segoe UI"/>
               </a:rPr>
-              <a:t>Indépendance du conseil (AFEP-MEDEF, appliquer ou expliquer)</a:t>
+              <a:t>Publication des indicateurs Taxonomie UE</a:t>
             </a:r>
           </a:p>
         </p:txBody>
@@ -5695,7 +5695,7 @@
                 </a:solidFill>
                 <a:latin typeface="Segoe UI"/>
               </a:rPr>
-              <a:t>AFEP-MEDEF</a:t>
+              <a:t>Règlement (UE) 2020/852</a:t>
             </a:r>
           </a:p>
         </p:txBody>
@@ -5709,189 +5709,6 @@
         <p:spPr>
           <a:xfrm>
             <a:off x="7178040" y="3941064"/>
-            <a:ext cx="1600200" cy="365760"/>
-          </a:xfrm>
-          <a:prstGeom prst="roundRect">
-            <a:avLst/>
-          </a:prstGeom>
-          <a:solidFill>
-            <a:srgbClr val="D97706"/>
-          </a:solidFill>
-          <a:ln>
-            <a:noFill/>
-          </a:ln>
-        </p:spPr>
-        <p:style>
-          <a:lnRef idx="1">
-            <a:schemeClr val="accent1"/>
-          </a:lnRef>
-          <a:fillRef idx="3">
-            <a:schemeClr val="accent1"/>
-          </a:fillRef>
-          <a:effectRef idx="2">
-            <a:schemeClr val="accent1"/>
-          </a:effectRef>
-          <a:fontRef idx="minor">
-            <a:schemeClr val="lt1"/>
-          </a:fontRef>
-        </p:style>
-        <p:txBody>
-          <a:bodyPr rtlCol="0" anchor="ctr"/>
-          <a:lstStyle/>
-          <a:p>
-            <a:pPr algn="ctr"/>
-          </a:p>
-        </p:txBody>
-      </p:sp>
-      <p:sp>
-        <p:nvSpPr>
-          <p:cNvPr id="32" name="TextBox 31"/>
-          <p:cNvSpPr txBox="1"/>
-          <p:nvPr/>
-        </p:nvSpPr>
-        <p:spPr>
-          <a:xfrm>
-            <a:off x="7178040" y="3995928"/>
-            <a:ext cx="1600200" cy="274320"/>
-          </a:xfrm>
-          <a:prstGeom prst="rect">
-            <a:avLst/>
-          </a:prstGeom>
-          <a:noFill/>
-        </p:spPr>
-        <p:txBody>
-          <a:bodyPr wrap="square">
-            <a:spAutoFit/>
-          </a:bodyPr>
-          <a:lstStyle/>
-          <a:p>
-            <a:pPr algn="ctr"/>
-            <a:r>
-              <a:rPr sz="1050" b="1" i="0">
-                <a:solidFill>
-                  <a:srgbClr val="FFFFFF"/>
-                </a:solidFill>
-                <a:latin typeface="Segoe UI"/>
-              </a:rPr>
-              <a:t>Sous le seuil</a:t>
-            </a:r>
-          </a:p>
-        </p:txBody>
-      </p:sp>
-      <p:sp>
-        <p:nvSpPr>
-          <p:cNvPr id="33" name="TextBox 32"/>
-          <p:cNvSpPr txBox="1"/>
-          <p:nvPr/>
-        </p:nvSpPr>
-        <p:spPr>
-          <a:xfrm>
-            <a:off x="8961120" y="3877056"/>
-            <a:ext cx="2926080" cy="530352"/>
-          </a:xfrm>
-          <a:prstGeom prst="rect">
-            <a:avLst/>
-          </a:prstGeom>
-          <a:noFill/>
-        </p:spPr>
-        <p:txBody>
-          <a:bodyPr wrap="square">
-            <a:spAutoFit/>
-          </a:bodyPr>
-          <a:lstStyle/>
-          <a:p>
-            <a:pPr algn="l"/>
-            <a:r>
-              <a:rPr sz="1000" b="0" i="0">
-                <a:solidFill>
-                  <a:srgbClr val="1E2B26"/>
-                </a:solidFill>
-                <a:latin typeface="Segoe UI"/>
-              </a:rPr>
-              <a:t>45 % d'administrateurs indépendants</a:t>
-            </a:r>
-          </a:p>
-        </p:txBody>
-      </p:sp>
-      <p:sp>
-        <p:nvSpPr>
-          <p:cNvPr id="34" name="TextBox 33"/>
-          <p:cNvSpPr txBox="1"/>
-          <p:nvPr/>
-        </p:nvSpPr>
-        <p:spPr>
-          <a:xfrm>
-            <a:off x="457200" y="4498848"/>
-            <a:ext cx="4846320" cy="502920"/>
-          </a:xfrm>
-          <a:prstGeom prst="rect">
-            <a:avLst/>
-          </a:prstGeom>
-          <a:noFill/>
-        </p:spPr>
-        <p:txBody>
-          <a:bodyPr wrap="square">
-            <a:spAutoFit/>
-          </a:bodyPr>
-          <a:lstStyle/>
-          <a:p>
-            <a:pPr algn="l"/>
-            <a:r>
-              <a:rPr sz="1250" b="1" i="0">
-                <a:solidFill>
-                  <a:srgbClr val="1E2B26"/>
-                </a:solidFill>
-                <a:latin typeface="Segoe UI"/>
-              </a:rPr>
-              <a:t>Publication des indicateurs Taxonomie UE</a:t>
-            </a:r>
-          </a:p>
-        </p:txBody>
-      </p:sp>
-      <p:sp>
-        <p:nvSpPr>
-          <p:cNvPr id="35" name="TextBox 34"/>
-          <p:cNvSpPr txBox="1"/>
-          <p:nvPr/>
-        </p:nvSpPr>
-        <p:spPr>
-          <a:xfrm>
-            <a:off x="5349240" y="4581144"/>
-            <a:ext cx="1737360" cy="365760"/>
-          </a:xfrm>
-          <a:prstGeom prst="rect">
-            <a:avLst/>
-          </a:prstGeom>
-          <a:noFill/>
-        </p:spPr>
-        <p:txBody>
-          <a:bodyPr wrap="square">
-            <a:spAutoFit/>
-          </a:bodyPr>
-          <a:lstStyle/>
-          <a:p>
-            <a:pPr algn="l"/>
-            <a:r>
-              <a:rPr sz="1000" b="0" i="0">
-                <a:solidFill>
-                  <a:srgbClr val="5F6B64"/>
-                </a:solidFill>
-                <a:latin typeface="Segoe UI"/>
-              </a:rPr>
-              <a:t>Règlement (UE) 2020/852</a:t>
-            </a:r>
-          </a:p>
-        </p:txBody>
-      </p:sp>
-      <p:sp>
-        <p:nvSpPr>
-          <p:cNvPr id="36" name="Rounded Rectangle 35"/>
-          <p:cNvSpPr/>
-          <p:nvPr/>
-        </p:nvSpPr>
-        <p:spPr>
-          <a:xfrm>
-            <a:off x="7178040" y="4562856"/>
             <a:ext cx="1600200" cy="365760"/>
           </a:xfrm>
           <a:prstGeom prst="roundRect">
@@ -5928,13 +5745,13 @@
       </p:sp>
       <p:sp>
         <p:nvSpPr>
-          <p:cNvPr id="37" name="TextBox 36"/>
-          <p:cNvSpPr txBox="1"/>
-          <p:nvPr/>
-        </p:nvSpPr>
-        <p:spPr>
-          <a:xfrm>
-            <a:off x="7178040" y="4617720"/>
+          <p:cNvPr id="32" name="TextBox 31"/>
+          <p:cNvSpPr txBox="1"/>
+          <p:nvPr/>
+        </p:nvSpPr>
+        <p:spPr>
+          <a:xfrm>
+            <a:off x="7178040" y="3995928"/>
             <a:ext cx="1600200" cy="274320"/>
           </a:xfrm>
           <a:prstGeom prst="rect">
@@ -5963,13 +5780,13 @@
       </p:sp>
       <p:sp>
         <p:nvSpPr>
-          <p:cNvPr id="38" name="TextBox 37"/>
-          <p:cNvSpPr txBox="1"/>
-          <p:nvPr/>
-        </p:nvSpPr>
-        <p:spPr>
-          <a:xfrm>
-            <a:off x="8961120" y="4498848"/>
+          <p:cNvPr id="33" name="TextBox 32"/>
+          <p:cNvSpPr txBox="1"/>
+          <p:nvPr/>
+        </p:nvSpPr>
+        <p:spPr>
+          <a:xfrm>
+            <a:off x="8961120" y="3877056"/>
             <a:ext cx="2926080" cy="530352"/>
           </a:xfrm>
           <a:prstGeom prst="rect">
@@ -5998,126 +5815,83 @@
       </p:sp>
       <p:sp>
         <p:nvSpPr>
-          <p:cNvPr id="39" name="Rectangle 38"/>
+          <p:cNvPr id="34" name="TextBox 33"/>
+          <p:cNvSpPr txBox="1"/>
+          <p:nvPr/>
+        </p:nvSpPr>
+        <p:spPr>
+          <a:xfrm>
+            <a:off x="457200" y="4498848"/>
+            <a:ext cx="4846320" cy="502920"/>
+          </a:xfrm>
+          <a:prstGeom prst="rect">
+            <a:avLst/>
+          </a:prstGeom>
+          <a:noFill/>
+        </p:spPr>
+        <p:txBody>
+          <a:bodyPr wrap="square">
+            <a:spAutoFit/>
+          </a:bodyPr>
+          <a:lstStyle/>
+          <a:p>
+            <a:pPr algn="l"/>
+            <a:r>
+              <a:rPr sz="1250" b="1" i="0">
+                <a:solidFill>
+                  <a:srgbClr val="1E2B26"/>
+                </a:solidFill>
+                <a:latin typeface="Segoe UI"/>
+              </a:rPr>
+              <a:t>Objectifs climatiques chiffrés</a:t>
+            </a:r>
+          </a:p>
+        </p:txBody>
+      </p:sp>
+      <p:sp>
+        <p:nvSpPr>
+          <p:cNvPr id="35" name="TextBox 34"/>
+          <p:cNvSpPr txBox="1"/>
+          <p:nvPr/>
+        </p:nvSpPr>
+        <p:spPr>
+          <a:xfrm>
+            <a:off x="5349240" y="4581144"/>
+            <a:ext cx="1737360" cy="365760"/>
+          </a:xfrm>
+          <a:prstGeom prst="rect">
+            <a:avLst/>
+          </a:prstGeom>
+          <a:noFill/>
+        </p:spPr>
+        <p:txBody>
+          <a:bodyPr wrap="square">
+            <a:spAutoFit/>
+          </a:bodyPr>
+          <a:lstStyle/>
+          <a:p>
+            <a:pPr algn="l"/>
+            <a:r>
+              <a:rPr sz="1000" b="0" i="0">
+                <a:solidFill>
+                  <a:srgbClr val="5F6B64"/>
+                </a:solidFill>
+                <a:latin typeface="Segoe UI"/>
+              </a:rPr>
+              <a:t>ESRS E1-4</a:t>
+            </a:r>
+          </a:p>
+        </p:txBody>
+      </p:sp>
+      <p:sp>
+        <p:nvSpPr>
+          <p:cNvPr id="36" name="Rounded Rectangle 35"/>
           <p:cNvSpPr/>
           <p:nvPr/>
         </p:nvSpPr>
         <p:spPr>
           <a:xfrm>
-            <a:off x="274320" y="5056632"/>
-            <a:ext cx="11640312" cy="621792"/>
-          </a:xfrm>
-          <a:prstGeom prst="rect">
-            <a:avLst/>
-          </a:prstGeom>
-          <a:solidFill>
-            <a:srgbClr val="E6E6DC"/>
-          </a:solidFill>
-          <a:ln>
-            <a:noFill/>
-          </a:ln>
-        </p:spPr>
-        <p:style>
-          <a:lnRef idx="1">
-            <a:schemeClr val="accent1"/>
-          </a:lnRef>
-          <a:fillRef idx="3">
-            <a:schemeClr val="accent1"/>
-          </a:fillRef>
-          <a:effectRef idx="2">
-            <a:schemeClr val="accent1"/>
-          </a:effectRef>
-          <a:fontRef idx="minor">
-            <a:schemeClr val="lt1"/>
-          </a:fontRef>
-        </p:style>
-        <p:txBody>
-          <a:bodyPr rtlCol="0" anchor="ctr"/>
-          <a:lstStyle/>
-          <a:p>
-            <a:pPr algn="ctr"/>
-          </a:p>
-        </p:txBody>
-      </p:sp>
-      <p:sp>
-        <p:nvSpPr>
-          <p:cNvPr id="40" name="TextBox 39"/>
-          <p:cNvSpPr txBox="1"/>
-          <p:nvPr/>
-        </p:nvSpPr>
-        <p:spPr>
-          <a:xfrm>
-            <a:off x="457200" y="5120640"/>
-            <a:ext cx="4846320" cy="502920"/>
-          </a:xfrm>
-          <a:prstGeom prst="rect">
-            <a:avLst/>
-          </a:prstGeom>
-          <a:noFill/>
-        </p:spPr>
-        <p:txBody>
-          <a:bodyPr wrap="square">
-            <a:spAutoFit/>
-          </a:bodyPr>
-          <a:lstStyle/>
-          <a:p>
-            <a:pPr algn="l"/>
-            <a:r>
-              <a:rPr sz="1250" b="1" i="0">
-                <a:solidFill>
-                  <a:srgbClr val="1E2B26"/>
-                </a:solidFill>
-                <a:latin typeface="Segoe UI"/>
-              </a:rPr>
-              <a:t>Objectifs climatiques chiffrés</a:t>
-            </a:r>
-          </a:p>
-        </p:txBody>
-      </p:sp>
-      <p:sp>
-        <p:nvSpPr>
-          <p:cNvPr id="41" name="TextBox 40"/>
-          <p:cNvSpPr txBox="1"/>
-          <p:nvPr/>
-        </p:nvSpPr>
-        <p:spPr>
-          <a:xfrm>
-            <a:off x="5349240" y="5202936"/>
-            <a:ext cx="1737360" cy="365760"/>
-          </a:xfrm>
-          <a:prstGeom prst="rect">
-            <a:avLst/>
-          </a:prstGeom>
-          <a:noFill/>
-        </p:spPr>
-        <p:txBody>
-          <a:bodyPr wrap="square">
-            <a:spAutoFit/>
-          </a:bodyPr>
-          <a:lstStyle/>
-          <a:p>
-            <a:pPr algn="l"/>
-            <a:r>
-              <a:rPr sz="1000" b="0" i="0">
-                <a:solidFill>
-                  <a:srgbClr val="5F6B64"/>
-                </a:solidFill>
-                <a:latin typeface="Segoe UI"/>
-              </a:rPr>
-              <a:t>ESRS E1-4</a:t>
-            </a:r>
-          </a:p>
-        </p:txBody>
-      </p:sp>
-      <p:sp>
-        <p:nvSpPr>
-          <p:cNvPr id="42" name="Rounded Rectangle 41"/>
-          <p:cNvSpPr/>
-          <p:nvPr/>
-        </p:nvSpPr>
-        <p:spPr>
-          <a:xfrm>
-            <a:off x="7178040" y="5184648"/>
+            <a:off x="7178040" y="4562856"/>
             <a:ext cx="1600200" cy="365760"/>
           </a:xfrm>
           <a:prstGeom prst="roundRect">
@@ -6154,13 +5928,13 @@
       </p:sp>
       <p:sp>
         <p:nvSpPr>
-          <p:cNvPr id="43" name="TextBox 42"/>
-          <p:cNvSpPr txBox="1"/>
-          <p:nvPr/>
-        </p:nvSpPr>
-        <p:spPr>
-          <a:xfrm>
-            <a:off x="7178040" y="5239512"/>
+          <p:cNvPr id="37" name="TextBox 36"/>
+          <p:cNvSpPr txBox="1"/>
+          <p:nvPr/>
+        </p:nvSpPr>
+        <p:spPr>
+          <a:xfrm>
+            <a:off x="7178040" y="4617720"/>
             <a:ext cx="1600200" cy="274320"/>
           </a:xfrm>
           <a:prstGeom prst="rect">
@@ -6189,13 +5963,13 @@
       </p:sp>
       <p:sp>
         <p:nvSpPr>
-          <p:cNvPr id="44" name="TextBox 43"/>
-          <p:cNvSpPr txBox="1"/>
-          <p:nvPr/>
-        </p:nvSpPr>
-        <p:spPr>
-          <a:xfrm>
-            <a:off x="8961120" y="5120640"/>
+          <p:cNvPr id="38" name="TextBox 37"/>
+          <p:cNvSpPr txBox="1"/>
+          <p:nvPr/>
+        </p:nvSpPr>
+        <p:spPr>
+          <a:xfrm>
+            <a:off x="8961120" y="4498848"/>
             <a:ext cx="2926080" cy="530352"/>
           </a:xfrm>
           <a:prstGeom prst="rect">
@@ -6224,7 +5998,7 @@
       </p:sp>
       <p:sp>
         <p:nvSpPr>
-          <p:cNvPr id="45" name="TextBox 44"/>
+          <p:cNvPr id="39" name="TextBox 38"/>
           <p:cNvSpPr txBox="1"/>
           <p:nvPr/>
         </p:nvSpPr>
@@ -8149,7 +7923,7 @@
                 </a:solidFill>
                 <a:latin typeface="Georgia"/>
               </a:rPr>
-              <a:t>La sécurité au travail (TF 6,2), priorité à traiter</a:t>
+              <a:t>La parité femmes-hommes (34 %), levier à activer</a:t>
             </a:r>
           </a:p>
         </p:txBody>
@@ -8208,7 +7982,7 @@
                 </a:solidFill>
                 <a:latin typeface="Georgia"/>
               </a:rPr>
-              <a:t>55</a:t>
+              <a:t>65</a:t>
             </a:r>
           </a:p>
         </p:txBody>
@@ -9379,7 +9153,7 @@
                 </a:solidFill>
                 <a:latin typeface="Segoe UI"/>
               </a:rPr>
-              <a:t>Performance sociale en construction : parité et sécurité au travail appellent des objectifs chiffrés pour fidéliser les talents.</a:t>
+              <a:t>Socle social solide ; la diversité et la formation sont les leviers pour transformer la conformité en avantage compétitif.</a:t>
             </a:r>
           </a:p>
         </p:txBody>
@@ -11841,7 +11615,7 @@
                 </a:solidFill>
                 <a:latin typeface="Georgia"/>
               </a:rPr>
-              <a:t>5 forces établies, 5 leviers de progression</a:t>
+              <a:t>5 forces établies, 4 leviers de progression</a:t>
             </a:r>
           </a:p>
         </p:txBody>
@@ -12512,7 +12286,7 @@
                 </a:solidFill>
                 <a:latin typeface="Georgia"/>
               </a:rPr>
-              <a:t>5</a:t>
+              <a:t>4</a:t>
             </a:r>
           </a:p>
         </p:txBody>
@@ -12824,7 +12598,7 @@
                 </a:solidFill>
                 <a:latin typeface="Segoe UI"/>
               </a:rPr>
-              <a:t>Taux de fréquence des accidents élevé (TF 6,2)</a:t>
+              <a:t>Une violation de données — cybersécurité à renforcer</a:t>
             </a:r>
           </a:p>
         </p:txBody>
@@ -12902,84 +12676,6 @@
                 </a:solidFill>
                 <a:latin typeface="Segoe UI"/>
               </a:rPr>
-              <a:t>Une violation de données — cybersécurité à renforcer</a:t>
-            </a:r>
-          </a:p>
-        </p:txBody>
-      </p:sp>
-      <p:sp>
-        <p:nvSpPr>
-          <p:cNvPr id="32" name="Oval 31"/>
-          <p:cNvSpPr/>
-          <p:nvPr/>
-        </p:nvSpPr>
-        <p:spPr>
-          <a:xfrm>
-            <a:off x="6537960" y="5623560"/>
-            <a:ext cx="146304" cy="146304"/>
-          </a:xfrm>
-          <a:prstGeom prst="ellipse">
-            <a:avLst/>
-          </a:prstGeom>
-          <a:solidFill>
-            <a:srgbClr val="E74C3C"/>
-          </a:solidFill>
-          <a:ln>
-            <a:noFill/>
-          </a:ln>
-        </p:spPr>
-        <p:style>
-          <a:lnRef idx="1">
-            <a:schemeClr val="accent1"/>
-          </a:lnRef>
-          <a:fillRef idx="3">
-            <a:schemeClr val="accent1"/>
-          </a:fillRef>
-          <a:effectRef idx="2">
-            <a:schemeClr val="accent1"/>
-          </a:effectRef>
-          <a:fontRef idx="minor">
-            <a:schemeClr val="lt1"/>
-          </a:fontRef>
-        </p:style>
-        <p:txBody>
-          <a:bodyPr rtlCol="0" anchor="ctr"/>
-          <a:lstStyle/>
-          <a:p>
-            <a:pPr algn="ctr"/>
-          </a:p>
-        </p:txBody>
-      </p:sp>
-      <p:sp>
-        <p:nvSpPr>
-          <p:cNvPr id="33" name="TextBox 32"/>
-          <p:cNvSpPr txBox="1"/>
-          <p:nvPr/>
-        </p:nvSpPr>
-        <p:spPr>
-          <a:xfrm>
-            <a:off x="6867144" y="5550408"/>
-            <a:ext cx="4800600" cy="658368"/>
-          </a:xfrm>
-          <a:prstGeom prst="rect">
-            <a:avLst/>
-          </a:prstGeom>
-          <a:noFill/>
-        </p:spPr>
-        <p:txBody>
-          <a:bodyPr wrap="square">
-            <a:spAutoFit/>
-          </a:bodyPr>
-          <a:lstStyle/>
-          <a:p>
-            <a:pPr algn="l"/>
-            <a:r>
-              <a:rPr sz="1250" b="0" i="0">
-                <a:solidFill>
-                  <a:srgbClr val="1E2B26"/>
-                </a:solidFill>
-                <a:latin typeface="Segoe UI"/>
-              </a:rPr>
               <a:t>Absence d'audit ESG indépendant</a:t>
             </a:r>
           </a:p>
@@ -12987,7 +12683,7 @@
       </p:sp>
       <p:sp>
         <p:nvSpPr>
-          <p:cNvPr id="34" name="TextBox 33"/>
+          <p:cNvPr id="32" name="TextBox 31"/>
           <p:cNvSpPr txBox="1"/>
           <p:nvPr/>
         </p:nvSpPr>
@@ -13603,7 +13299,7 @@
         <p:spPr>
           <a:xfrm>
             <a:off x="548640" y="3429000"/>
-            <a:ext cx="1463040" cy="274320"/>
+            <a:ext cx="1261872" cy="274320"/>
           </a:xfrm>
           <a:prstGeom prst="roundRect">
             <a:avLst/>
@@ -13646,7 +13342,7 @@
         <p:spPr>
           <a:xfrm>
             <a:off x="548640" y="3447288"/>
-            <a:ext cx="1463040" cy="237744"/>
+            <a:ext cx="1261872" cy="237744"/>
           </a:xfrm>
           <a:prstGeom prst="rect">
             <a:avLst/>
@@ -13667,7 +13363,7 @@
                 </a:solidFill>
                 <a:latin typeface="Segoe UI"/>
               </a:rPr>
-              <a:t>Opérationnel</a:t>
+              <a:t>Transition</a:t>
             </a:r>
           </a:p>
         </p:txBody>
@@ -13684,6 +13380,119 @@
             <a:ext cx="384048" cy="274320"/>
           </a:xfrm>
           <a:prstGeom prst="ellipse">
+            <a:avLst/>
+          </a:prstGeom>
+          <a:solidFill>
+            <a:srgbClr val="D97706"/>
+          </a:solidFill>
+          <a:ln>
+            <a:noFill/>
+          </a:ln>
+        </p:spPr>
+        <p:style>
+          <a:lnRef idx="1">
+            <a:schemeClr val="accent1"/>
+          </a:lnRef>
+          <a:fillRef idx="3">
+            <a:schemeClr val="accent1"/>
+          </a:fillRef>
+          <a:effectRef idx="2">
+            <a:schemeClr val="accent1"/>
+          </a:effectRef>
+          <a:fontRef idx="minor">
+            <a:schemeClr val="lt1"/>
+          </a:fontRef>
+        </p:style>
+        <p:txBody>
+          <a:bodyPr rtlCol="0" anchor="ctr"/>
+          <a:lstStyle/>
+          <a:p>
+            <a:pPr algn="ctr"/>
+          </a:p>
+        </p:txBody>
+      </p:sp>
+      <p:sp>
+        <p:nvSpPr>
+          <p:cNvPr id="19" name="TextBox 18"/>
+          <p:cNvSpPr txBox="1"/>
+          <p:nvPr/>
+        </p:nvSpPr>
+        <p:spPr>
+          <a:xfrm>
+            <a:off x="5257800" y="3456432"/>
+            <a:ext cx="384048" cy="219456"/>
+          </a:xfrm>
+          <a:prstGeom prst="rect">
+            <a:avLst/>
+          </a:prstGeom>
+          <a:noFill/>
+        </p:spPr>
+        <p:txBody>
+          <a:bodyPr wrap="square">
+            <a:spAutoFit/>
+          </a:bodyPr>
+          <a:lstStyle/>
+          <a:p>
+            <a:pPr algn="ctr"/>
+            <a:r>
+              <a:rPr sz="950" b="1" i="0">
+                <a:solidFill>
+                  <a:srgbClr val="FFFFFF"/>
+                </a:solidFill>
+                <a:latin typeface="Segoe UI"/>
+              </a:rPr>
+              <a:t>P2</a:t>
+            </a:r>
+          </a:p>
+        </p:txBody>
+      </p:sp>
+      <p:sp>
+        <p:nvSpPr>
+          <p:cNvPr id="20" name="TextBox 19"/>
+          <p:cNvSpPr txBox="1"/>
+          <p:nvPr/>
+        </p:nvSpPr>
+        <p:spPr>
+          <a:xfrm>
+            <a:off x="548640" y="3776472"/>
+            <a:ext cx="5120640" cy="548640"/>
+          </a:xfrm>
+          <a:prstGeom prst="rect">
+            <a:avLst/>
+          </a:prstGeom>
+          <a:noFill/>
+        </p:spPr>
+        <p:txBody>
+          <a:bodyPr wrap="square">
+            <a:spAutoFit/>
+          </a:bodyPr>
+          <a:lstStyle/>
+          <a:p>
+            <a:pPr algn="l"/>
+            <a:r>
+              <a:rPr sz="1250" b="0" i="0">
+                <a:solidFill>
+                  <a:srgbClr val="1E2B26"/>
+                </a:solidFill>
+                <a:latin typeface="Segoe UI"/>
+              </a:rPr>
+              <a:t>Intensité carbone élevée : marge exposée à la tarification du carbone</a:t>
+            </a:r>
+          </a:p>
+        </p:txBody>
+      </p:sp>
+      <p:sp>
+        <p:nvSpPr>
+          <p:cNvPr id="21" name="Rounded Rectangle 20"/>
+          <p:cNvSpPr/>
+          <p:nvPr/>
+        </p:nvSpPr>
+        <p:spPr>
+          <a:xfrm>
+            <a:off x="548640" y="4389120"/>
+            <a:ext cx="1563624" cy="274320"/>
+          </a:xfrm>
+          <a:prstGeom prst="roundRect">
             <a:avLst/>
           </a:prstGeom>
           <a:solidFill>
@@ -13717,13 +13526,91 @@
       </p:sp>
       <p:sp>
         <p:nvSpPr>
-          <p:cNvPr id="19" name="TextBox 18"/>
-          <p:cNvSpPr txBox="1"/>
-          <p:nvPr/>
-        </p:nvSpPr>
-        <p:spPr>
-          <a:xfrm>
-            <a:off x="5257800" y="3456432"/>
+          <p:cNvPr id="22" name="TextBox 21"/>
+          <p:cNvSpPr txBox="1"/>
+          <p:nvPr/>
+        </p:nvSpPr>
+        <p:spPr>
+          <a:xfrm>
+            <a:off x="548640" y="4407408"/>
+            <a:ext cx="1563624" cy="237744"/>
+          </a:xfrm>
+          <a:prstGeom prst="rect">
+            <a:avLst/>
+          </a:prstGeom>
+          <a:noFill/>
+        </p:spPr>
+        <p:txBody>
+          <a:bodyPr wrap="square">
+            <a:spAutoFit/>
+          </a:bodyPr>
+          <a:lstStyle/>
+          <a:p>
+            <a:pPr algn="ctr"/>
+            <a:r>
+              <a:rPr sz="950" b="1" i="0">
+                <a:solidFill>
+                  <a:srgbClr val="FFFFFF"/>
+                </a:solidFill>
+                <a:latin typeface="Segoe UI"/>
+              </a:rPr>
+              <a:t>Réglementaire</a:t>
+            </a:r>
+          </a:p>
+        </p:txBody>
+      </p:sp>
+      <p:sp>
+        <p:nvSpPr>
+          <p:cNvPr id="23" name="Oval 22"/>
+          <p:cNvSpPr/>
+          <p:nvPr/>
+        </p:nvSpPr>
+        <p:spPr>
+          <a:xfrm>
+            <a:off x="5257800" y="4389120"/>
+            <a:ext cx="384048" cy="274320"/>
+          </a:xfrm>
+          <a:prstGeom prst="ellipse">
+            <a:avLst/>
+          </a:prstGeom>
+          <a:solidFill>
+            <a:srgbClr val="D97706"/>
+          </a:solidFill>
+          <a:ln>
+            <a:noFill/>
+          </a:ln>
+        </p:spPr>
+        <p:style>
+          <a:lnRef idx="1">
+            <a:schemeClr val="accent1"/>
+          </a:lnRef>
+          <a:fillRef idx="3">
+            <a:schemeClr val="accent1"/>
+          </a:fillRef>
+          <a:effectRef idx="2">
+            <a:schemeClr val="accent1"/>
+          </a:effectRef>
+          <a:fontRef idx="minor">
+            <a:schemeClr val="lt1"/>
+          </a:fontRef>
+        </p:style>
+        <p:txBody>
+          <a:bodyPr rtlCol="0" anchor="ctr"/>
+          <a:lstStyle/>
+          <a:p>
+            <a:pPr algn="ctr"/>
+          </a:p>
+        </p:txBody>
+      </p:sp>
+      <p:sp>
+        <p:nvSpPr>
+          <p:cNvPr id="24" name="TextBox 23"/>
+          <p:cNvSpPr txBox="1"/>
+          <p:nvPr/>
+        </p:nvSpPr>
+        <p:spPr>
+          <a:xfrm>
+            <a:off x="5257800" y="4416552"/>
             <a:ext cx="384048" cy="219456"/>
           </a:xfrm>
           <a:prstGeom prst="rect">
@@ -13745,20 +13632,20 @@
                 </a:solidFill>
                 <a:latin typeface="Segoe UI"/>
               </a:rPr>
-              <a:t>P1</a:t>
-            </a:r>
-          </a:p>
-        </p:txBody>
-      </p:sp>
-      <p:sp>
-        <p:nvSpPr>
-          <p:cNvPr id="20" name="TextBox 19"/>
-          <p:cNvSpPr txBox="1"/>
-          <p:nvPr/>
-        </p:nvSpPr>
-        <p:spPr>
-          <a:xfrm>
-            <a:off x="548640" y="3776472"/>
+              <a:t>P2</a:t>
+            </a:r>
+          </a:p>
+        </p:txBody>
+      </p:sp>
+      <p:sp>
+        <p:nvSpPr>
+          <p:cNvPr id="25" name="TextBox 24"/>
+          <p:cNvSpPr txBox="1"/>
+          <p:nvPr/>
+        </p:nvSpPr>
+        <p:spPr>
+          <a:xfrm>
+            <a:off x="548640" y="4736592"/>
             <a:ext cx="5120640" cy="548640"/>
           </a:xfrm>
           <a:prstGeom prst="rect">
@@ -13780,20 +13667,20 @@
                 </a:solidFill>
                 <a:latin typeface="Segoe UI"/>
               </a:rPr>
-              <a:t>Sinistralité élevée : risque humain et social</a:t>
-            </a:r>
-          </a:p>
-        </p:txBody>
-      </p:sp>
-      <p:sp>
-        <p:nvSpPr>
-          <p:cNvPr id="21" name="Rounded Rectangle 20"/>
+              <a:t>Parité sous la cible : risque réglementaire et d'attractivité</a:t>
+            </a:r>
+          </a:p>
+        </p:txBody>
+      </p:sp>
+      <p:sp>
+        <p:nvSpPr>
+          <p:cNvPr id="26" name="Rounded Rectangle 25"/>
           <p:cNvSpPr/>
           <p:nvPr/>
         </p:nvSpPr>
         <p:spPr>
           <a:xfrm>
-            <a:off x="548640" y="4389120"/>
+            <a:off x="548640" y="5349240"/>
             <a:ext cx="1261872" cy="274320"/>
           </a:xfrm>
           <a:prstGeom prst="roundRect">
@@ -13830,13 +13717,13 @@
       </p:sp>
       <p:sp>
         <p:nvSpPr>
-          <p:cNvPr id="22" name="TextBox 21"/>
-          <p:cNvSpPr txBox="1"/>
-          <p:nvPr/>
-        </p:nvSpPr>
-        <p:spPr>
-          <a:xfrm>
-            <a:off x="548640" y="4407408"/>
+          <p:cNvPr id="27" name="TextBox 26"/>
+          <p:cNvSpPr txBox="1"/>
+          <p:nvPr/>
+        </p:nvSpPr>
+        <p:spPr>
+          <a:xfrm>
+            <a:off x="548640" y="5367528"/>
             <a:ext cx="1261872" cy="237744"/>
           </a:xfrm>
           <a:prstGeom prst="rect">
@@ -13858,20 +13745,20 @@
                 </a:solidFill>
                 <a:latin typeface="Segoe UI"/>
               </a:rPr>
-              <a:t>Transition</a:t>
-            </a:r>
-          </a:p>
-        </p:txBody>
-      </p:sp>
-      <p:sp>
-        <p:nvSpPr>
-          <p:cNvPr id="23" name="Oval 22"/>
+              <a:t>Réputation</a:t>
+            </a:r>
+          </a:p>
+        </p:txBody>
+      </p:sp>
+      <p:sp>
+        <p:nvSpPr>
+          <p:cNvPr id="28" name="Oval 27"/>
           <p:cNvSpPr/>
           <p:nvPr/>
         </p:nvSpPr>
         <p:spPr>
           <a:xfrm>
-            <a:off x="5257800" y="4389120"/>
+            <a:off x="5257800" y="5349240"/>
             <a:ext cx="384048" cy="274320"/>
           </a:xfrm>
           <a:prstGeom prst="ellipse">
@@ -13908,197 +13795,6 @@
       </p:sp>
       <p:sp>
         <p:nvSpPr>
-          <p:cNvPr id="24" name="TextBox 23"/>
-          <p:cNvSpPr txBox="1"/>
-          <p:nvPr/>
-        </p:nvSpPr>
-        <p:spPr>
-          <a:xfrm>
-            <a:off x="5257800" y="4416552"/>
-            <a:ext cx="384048" cy="219456"/>
-          </a:xfrm>
-          <a:prstGeom prst="rect">
-            <a:avLst/>
-          </a:prstGeom>
-          <a:noFill/>
-        </p:spPr>
-        <p:txBody>
-          <a:bodyPr wrap="square">
-            <a:spAutoFit/>
-          </a:bodyPr>
-          <a:lstStyle/>
-          <a:p>
-            <a:pPr algn="ctr"/>
-            <a:r>
-              <a:rPr sz="950" b="1" i="0">
-                <a:solidFill>
-                  <a:srgbClr val="FFFFFF"/>
-                </a:solidFill>
-                <a:latin typeface="Segoe UI"/>
-              </a:rPr>
-              <a:t>P2</a:t>
-            </a:r>
-          </a:p>
-        </p:txBody>
-      </p:sp>
-      <p:sp>
-        <p:nvSpPr>
-          <p:cNvPr id="25" name="TextBox 24"/>
-          <p:cNvSpPr txBox="1"/>
-          <p:nvPr/>
-        </p:nvSpPr>
-        <p:spPr>
-          <a:xfrm>
-            <a:off x="548640" y="4736592"/>
-            <a:ext cx="5120640" cy="548640"/>
-          </a:xfrm>
-          <a:prstGeom prst="rect">
-            <a:avLst/>
-          </a:prstGeom>
-          <a:noFill/>
-        </p:spPr>
-        <p:txBody>
-          <a:bodyPr wrap="square">
-            <a:spAutoFit/>
-          </a:bodyPr>
-          <a:lstStyle/>
-          <a:p>
-            <a:pPr algn="l"/>
-            <a:r>
-              <a:rPr sz="1250" b="0" i="0">
-                <a:solidFill>
-                  <a:srgbClr val="1E2B26"/>
-                </a:solidFill>
-                <a:latin typeface="Segoe UI"/>
-              </a:rPr>
-              <a:t>Intensité carbone élevée : marge exposée à la tarification du carbone</a:t>
-            </a:r>
-          </a:p>
-        </p:txBody>
-      </p:sp>
-      <p:sp>
-        <p:nvSpPr>
-          <p:cNvPr id="26" name="Rounded Rectangle 25"/>
-          <p:cNvSpPr/>
-          <p:nvPr/>
-        </p:nvSpPr>
-        <p:spPr>
-          <a:xfrm>
-            <a:off x="548640" y="5349240"/>
-            <a:ext cx="1563624" cy="274320"/>
-          </a:xfrm>
-          <a:prstGeom prst="roundRect">
-            <a:avLst/>
-          </a:prstGeom>
-          <a:solidFill>
-            <a:srgbClr val="E74C3C"/>
-          </a:solidFill>
-          <a:ln>
-            <a:noFill/>
-          </a:ln>
-        </p:spPr>
-        <p:style>
-          <a:lnRef idx="1">
-            <a:schemeClr val="accent1"/>
-          </a:lnRef>
-          <a:fillRef idx="3">
-            <a:schemeClr val="accent1"/>
-          </a:fillRef>
-          <a:effectRef idx="2">
-            <a:schemeClr val="accent1"/>
-          </a:effectRef>
-          <a:fontRef idx="minor">
-            <a:schemeClr val="lt1"/>
-          </a:fontRef>
-        </p:style>
-        <p:txBody>
-          <a:bodyPr rtlCol="0" anchor="ctr"/>
-          <a:lstStyle/>
-          <a:p>
-            <a:pPr algn="ctr"/>
-          </a:p>
-        </p:txBody>
-      </p:sp>
-      <p:sp>
-        <p:nvSpPr>
-          <p:cNvPr id="27" name="TextBox 26"/>
-          <p:cNvSpPr txBox="1"/>
-          <p:nvPr/>
-        </p:nvSpPr>
-        <p:spPr>
-          <a:xfrm>
-            <a:off x="548640" y="5367528"/>
-            <a:ext cx="1563624" cy="237744"/>
-          </a:xfrm>
-          <a:prstGeom prst="rect">
-            <a:avLst/>
-          </a:prstGeom>
-          <a:noFill/>
-        </p:spPr>
-        <p:txBody>
-          <a:bodyPr wrap="square">
-            <a:spAutoFit/>
-          </a:bodyPr>
-          <a:lstStyle/>
-          <a:p>
-            <a:pPr algn="ctr"/>
-            <a:r>
-              <a:rPr sz="950" b="1" i="0">
-                <a:solidFill>
-                  <a:srgbClr val="FFFFFF"/>
-                </a:solidFill>
-                <a:latin typeface="Segoe UI"/>
-              </a:rPr>
-              <a:t>Réglementaire</a:t>
-            </a:r>
-          </a:p>
-        </p:txBody>
-      </p:sp>
-      <p:sp>
-        <p:nvSpPr>
-          <p:cNvPr id="28" name="Oval 27"/>
-          <p:cNvSpPr/>
-          <p:nvPr/>
-        </p:nvSpPr>
-        <p:spPr>
-          <a:xfrm>
-            <a:off x="5257800" y="5349240"/>
-            <a:ext cx="384048" cy="274320"/>
-          </a:xfrm>
-          <a:prstGeom prst="ellipse">
-            <a:avLst/>
-          </a:prstGeom>
-          <a:solidFill>
-            <a:srgbClr val="D97706"/>
-          </a:solidFill>
-          <a:ln>
-            <a:noFill/>
-          </a:ln>
-        </p:spPr>
-        <p:style>
-          <a:lnRef idx="1">
-            <a:schemeClr val="accent1"/>
-          </a:lnRef>
-          <a:fillRef idx="3">
-            <a:schemeClr val="accent1"/>
-          </a:fillRef>
-          <a:effectRef idx="2">
-            <a:schemeClr val="accent1"/>
-          </a:effectRef>
-          <a:fontRef idx="minor">
-            <a:schemeClr val="lt1"/>
-          </a:fontRef>
-        </p:style>
-        <p:txBody>
-          <a:bodyPr rtlCol="0" anchor="ctr"/>
-          <a:lstStyle/>
-          <a:p>
-            <a:pPr algn="ctr"/>
-          </a:p>
-        </p:txBody>
-      </p:sp>
-      <p:sp>
-        <p:nvSpPr>
           <p:cNvPr id="29" name="TextBox 28"/>
           <p:cNvSpPr txBox="1"/>
           <p:nvPr/>
@@ -14162,7 +13858,7 @@
                 </a:solidFill>
                 <a:latin typeface="Segoe UI"/>
               </a:rPr>
-              <a:t>Parité sous la cible : risque réglementaire et d'attractivité</a:t>
+              <a:t>Incident cyber déclaré : risque réputationnel et RGPD</a:t>
             </a:r>
           </a:p>
         </p:txBody>
@@ -18483,7 +18179,7 @@
                 </a:solidFill>
                 <a:latin typeface="Georgia"/>
               </a:rPr>
-              <a:t>Acme Industries affiche un profil ESG solide (66/100, A), porté par la gouvernance (75/100) ; le social (55/100) concentre le potentiel de progression.</a:t>
+              <a:t>Acme Industries affiche un profil ESG solide (70/100, A), porté par la gouvernance (75/100) ; le social (65/100) concentre le potentiel de progression.</a:t>
             </a:r>
           </a:p>
         </p:txBody>
@@ -20563,7 +20259,7 @@
                 </a:solidFill>
                 <a:latin typeface="Georgia"/>
               </a:rPr>
-              <a:t>66</a:t>
+              <a:t>70</a:t>
             </a:r>
           </a:p>
         </p:txBody>
@@ -20746,7 +20442,7 @@
                 </a:solidFill>
                 <a:latin typeface="Segoe UI"/>
               </a:rPr>
-              <a:t>+10 pts  vs 2024</a:t>
+              <a:t>+14 pts  vs 2024</a:t>
             </a:r>
           </a:p>
         </p:txBody>
@@ -20859,7 +20555,7 @@
                 </a:solidFill>
                 <a:latin typeface="Segoe UI"/>
               </a:rPr>
-              <a:t>Acme Industries affiche un profil ESG solide (66/100, A), porté par la gouvernance (75/100) ; le social (55/100) concentre le potentiel de progression.</a:t>
+              <a:t>Acme Industries affiche un profil ESG solide (70/100, A), porté par la gouvernance (75/100) ; le social (65/100) concentre le potentiel de progression.</a:t>
             </a:r>
           </a:p>
         </p:txBody>
@@ -21120,7 +20816,7 @@
                 </a:solidFill>
                 <a:latin typeface="Georgia"/>
               </a:rPr>
-              <a:t>55</a:t>
+              <a:t>65</a:t>
             </a:r>
           </a:p>
         </p:txBody>
@@ -21177,7 +20873,7 @@
         <p:spPr>
           <a:xfrm>
             <a:off x="4754880" y="4873752"/>
-            <a:ext cx="1709928" cy="155448"/>
+            <a:ext cx="2020824" cy="155448"/>
           </a:xfrm>
           <a:prstGeom prst="roundRect">
             <a:avLst/>
@@ -22335,7 +22031,7 @@
                 </a:solidFill>
                 <a:latin typeface="Segoe UI"/>
               </a:rPr>
-              <a:t>20 points séparent votre pilier le plus solide du plus fragile — l'écart interne à réduire en priorité.</a:t>
+              <a:t>10 points séparent votre pilier le plus solide du plus fragile — l'écart interne à réduire en priorité.</a:t>
             </a:r>
           </a:p>
         </p:txBody>

--- a/examples/Presentation.pptx
+++ b/examples/Presentation.pptx
@@ -939,7 +939,7 @@
           <a:lstStyle/>
           <a:p>
             <a:r>
-              <a:t>Le dossier d'Acme Industries fait ressortir 2 enjeux et un point d'appui. Les fragilités se concentrent sur le pilier de gouvernance : l'intégrité et la sécurité de l'information et le pilotage de la démarche. C'est là que le plan d'action doit porter en premier.</a:t>
+              <a:t>Le dossier d'Acme Industries fait ressortir 2 enjeux et un point d'appui. Les enjeux repérés relèvent surtout du pilier de gouvernance : l'intégrité et la sécurité de l'information et le pilotage de la démarche. C'est là que le plan d'action doit porter en premier.</a:t>
             </a:r>
           </a:p>
           <a:p/>
@@ -16826,7 +16826,7 @@
                 </a:solidFill>
                 <a:latin typeface="Segoe UI"/>
               </a:rPr>
-              <a:t>Intensité carbone élevée : marge exposée à la tarification du carbone</a:t>
+              <a:t>Dépendance énergie fossile : exposition à la hausse des prix</a:t>
             </a:r>
           </a:p>
         </p:txBody>

--- a/examples/Presentation.pptx
+++ b/examples/Presentation.pptx
@@ -15322,7 +15322,7 @@
                 </a:solidFill>
                 <a:latin typeface="Segoe UI"/>
               </a:rPr>
-              <a:t>Comité de durabilité opérationnel au niveau du CA</a:t>
+              <a:t>Comité de durabilité en place au niveau du CA</a:t>
             </a:r>
           </a:p>
         </p:txBody>

--- a/examples/Presentation.pptx
+++ b/examples/Presentation.pptx
@@ -1615,7 +1615,7 @@
           <a:p/>
           <a:p>
             <a:r>
-              <a:t>Le tableau ci-dessous examine 6 exigences de reporting du référentiel CSRD / ESRS : 4 sont couvertes par les données de l'exercice, 1 reste ouverte ou partiellement couverte. Chaque ligne indique la référence concernée et ce qui manque pour la couvrir.</a:t>
+              <a:t>Le tableau ci-dessous examine 6 exigences de reporting du référentiel CSRD / ESRS : 5 sont couvertes par les données de l'exercice, 1 reste ouverte ou partiellement couverte. Chaque ligne indique la référence concernée et ce qui manque pour la couvrir.</a:t>
             </a:r>
           </a:p>
         </p:txBody>
@@ -6703,7 +6703,7 @@
             <a:avLst/>
           </a:prstGeom>
           <a:solidFill>
-            <a:srgbClr val="7F8C8D"/>
+            <a:srgbClr val="37474F"/>
           </a:solidFill>
           <a:ln>
             <a:noFill/>
@@ -6761,7 +6761,7 @@
                 </a:solidFill>
                 <a:latin typeface="Segoe UI"/>
               </a:rPr>
-              <a:t>Non couvert par ce reporting</a:t>
+              <a:t>Publié</a:t>
             </a:r>
           </a:p>
         </p:txBody>
@@ -6796,7 +6796,7 @@
                 </a:solidFill>
                 <a:latin typeface="Segoe UI"/>
               </a:rPr>
-              <a:t>Cibles climatiques non documentées dans ce reporting</a:t>
+              <a:t>Cible déclarée : −42 % entre 2025 et 2030 (scopes 1 et 2)</a:t>
             </a:r>
           </a:p>
         </p:txBody>

--- a/examples/Presentation.pptx
+++ b/examples/Presentation.pptx
@@ -1033,13 +1033,13 @@
           <a:p/>
           <a:p>
             <a:r>
-              <a:t>La consommation d'énergie atteint 21 500 MWh, soit 67,2 MWh par salarié. La consommation d'eau de l'exercice est de 120 000 m3. Restent à documenter : le volume de déchets et les initiatives en faveur de la biodiversité. Leur collecte, au prochain exercice, fiabilisera la lecture de ce pilier.</a:t>
+              <a:t>La consommation d'énergie atteint 21 500 MWh, soit 67,2 MWh par salarié. La consommation d'eau de l'exercice est de 120 000 m3. Restent à documenter : le volume de déchets et les initiatives en faveur de la biodiversité. Leur collecte, au prochain exercice, fiabilisera la lecture de ce pilier. L'entreprise s'est fixé, à horizon 2030, les cibles suivantes : part d'énergie renouvelable : 60 % (42 % sur l'exercice, soit 18 points à gagner d'ici 2030).</a:t>
             </a:r>
           </a:p>
           <a:p/>
           <a:p>
             <a:r>
-              <a:t>Le plan d'action retient un levier pour ce pilier : augmenter la part d'énergie renouvelable à 50 % (objectif : 50 % d'énergie renouvelable dans le mix ; échéance : 2027).</a:t>
+              <a:t>Le plan d'action retient un levier pour ce pilier : atteindre la cible de 60 % d'énergie renouvelable fixée pour 2030 (objectif : cible de l'entreprise : 60 % en 2030 ; échéance : 2027).</a:t>
             </a:r>
           </a:p>
           <a:p/>
@@ -1245,7 +1245,7 @@
           <a:p/>
           <a:p>
             <a:r>
-              <a:t>L'effectif s'établit à 320 collaborateurs sur l'exercice. Restent à documenter : le nombre d'accidents du travail, l'investissement communautaire, la part d'achats locaux, la satisfaction client et l'emploi de personnes en situation de handicap. Leur collecte, au prochain exercice, fiabilisera la lecture de ce pilier.</a:t>
+              <a:t>L'effectif s'établit à 320 collaborateurs sur l'exercice. Restent à documenter : le nombre d'accidents du travail, l'investissement communautaire, la part d'achats locaux, la satisfaction client et l'emploi de personnes en situation de handicap. Leur collecte, au prochain exercice, fiabilisera la lecture de ce pilier. L'entreprise s'est fixé, à horizon 2030, les cibles suivantes : heures de formation par salarié : 30 h (22 h sur l'exercice, soit 8 h à gagner d'ici 2030).</a:t>
             </a:r>
           </a:p>
           <a:p/>
@@ -15792,7 +15792,7 @@
                 </a:solidFill>
                 <a:latin typeface="Segoe UI"/>
               </a:rPr>
-              <a:t>Énergie renouvelable à renforcer (actuellement 42 %, objectif 50 %)</a:t>
+              <a:t>Énergie renouvelable à renforcer (actuellement 42 %, cible de l'entreprise : 60 % en 2030)</a:t>
             </a:r>
           </a:p>
         </p:txBody>
@@ -18957,7 +18957,7 @@
                 </a:solidFill>
                 <a:latin typeface="Georgia"/>
               </a:rPr>
-              <a:t>Augmenter la part d'énergie renouvelable à 50 %</a:t>
+              <a:t>Atteindre la cible de 60 % d'énergie renouvelable fixée pour 2030</a:t>
             </a:r>
           </a:p>
         </p:txBody>
@@ -21087,7 +21087,7 @@
                 </a:solidFill>
                 <a:latin typeface="Segoe UI"/>
               </a:rPr>
-              <a:t>Augmenter la part d'énergie renouvelable à 50 %</a:t>
+              <a:t>Atteindre la cible de 60 % d'énergie renouvelable fixée pour 2030</a:t>
             </a:r>
           </a:p>
         </p:txBody>
@@ -22079,7 +22079,7 @@
                 </a:solidFill>
                 <a:latin typeface="Segoe UI"/>
               </a:rPr>
-              <a:t>Augmenter la part d'énergie renouvelable à 50 %</a:t>
+              <a:t>Atteindre la cible de 60 % d'énergie renouvelable fixée pour 2030</a:t>
             </a:r>
           </a:p>
         </p:txBody>

--- a/examples/Presentation.pptx
+++ b/examples/Presentation.pptx
@@ -1604,6 +1604,12 @@
           <a:p>
             <a:r>
               <a:t>Ce chapitre met en regard les résultats et leurs causes. Il identifie 5 forces et 4 axes de progrès, examine la couverture de 6 exigences de reporting (dont 1 encore ouverte) et hiérarchise 4 risques majeurs (dont 1 de priorité 1).</a:t>
+            </a:r>
+          </a:p>
+          <a:p/>
+          <a:p>
+            <a:r>
+              <a:t>Par rapport à l'exercice 2024, 17 indicateurs sont comparables : 7 en progrès, 1 en recul, 5 stables, 4 sans sens de lecture défini. Principales évolutions : les incidents de cybersécurité de 0 à 1 (+1) ; le taux de fréquence des accidents de 8,1 à 6,2 (-1,9) ; les heures de formation de 18 h à 22 h (+4 h) ; la part d'énergie renouvelable de 35 % à 42 % (+7 pts).</a:t>
             </a:r>
           </a:p>
           <a:p/>
@@ -6796,7 +6802,7 @@
                 </a:solidFill>
                 <a:latin typeface="Segoe UI"/>
               </a:rPr>
-              <a:t>Cible déclarée : −42 % entre 2025 et 2030 (scopes 1 et 2)</a:t>
+              <a:t>Cible déclarée : -42 % entre 2025 et 2030 (scopes 1 et 2)</a:t>
             </a:r>
           </a:p>
         </p:txBody>
@@ -24237,7 +24243,7 @@
                 </a:solidFill>
                 <a:latin typeface="Segoe UI"/>
               </a:rPr>
-              <a:t>+14 pts  vs 2024</a:t>
+              <a:t>+6 pts  vs 2024</a:t>
             </a:r>
           </a:p>
         </p:txBody>

--- a/examples/Presentation.pptx
+++ b/examples/Presentation.pptx
@@ -8544,7 +8544,7 @@
                 </a:solidFill>
                 <a:latin typeface="Segoe UI"/>
               </a:rPr>
-              <a:t>Performance environnementale solide ; l'intensité carbone reste le principal levier de création de valeur durable.</a:t>
+              <a:t>Performance environnementale solide ; les indicateurs les moins bien placés sur la grille sont les prochains leviers.</a:t>
             </a:r>
           </a:p>
         </p:txBody>
@@ -10853,7 +10853,7 @@
                 </a:solidFill>
                 <a:latin typeface="Segoe UI"/>
               </a:rPr>
-              <a:t>Socle social solide ; la diversité et la formation sont les leviers pour transformer la conformité en avantage compétitif.</a:t>
+              <a:t>Socle social solide ; les indicateurs les moins bien placés sur la grille sont les leviers pour transformer la conformité en avantage.</a:t>
             </a:r>
           </a:p>
         </p:txBody>
@@ -13006,7 +13006,7 @@
                 </a:solidFill>
                 <a:latin typeface="Segoe UI"/>
               </a:rPr>
-              <a:t>Gouvernance exemplaire : indépendance, audit et supervision ESG inspirent confiance aux investisseurs.</a:t>
+              <a:t>Gouvernance de premier plan sur la grille du diagnostic : un gage de confiance pour les investisseurs.</a:t>
             </a:r>
           </a:p>
         </p:txBody>
